--- a/presentation/PatentMind_簡報.pptx
+++ b/presentation/PatentMind_簡報.pptx
@@ -26,6 +26,8 @@
     <p:sldId id="274" r:id="rId25"/>
     <p:sldId id="275" r:id="rId26"/>
     <p:sldId id="276" r:id="rId27"/>
+    <p:sldId id="277" r:id="rId28"/>
+    <p:sldId id="278" r:id="rId29"/>
   </p:sldIdLst>
   <p:sldSz cx="12191695" cy="6858000" type="screen4x3"/>
   <p:notesSz cx="6858000" cy="9144000"/>
@@ -8108,7 +8110,7 @@
                 <a:ea typeface="Microsoft JhengHei"/>
                 <a:cs typeface="Microsoft JhengHei"/>
               </a:rPr>
-              <a:t>兩個平台,各司其職</a:t>
+              <a:t>兩個平台,實機落地</a:t>
             </a:r>
           </a:p>
         </p:txBody>
@@ -8339,7 +8341,7 @@
                 <a:ea typeface="Microsoft JhengHei"/>
                 <a:cs typeface="Microsoft JhengHei"/>
               </a:rPr>
-              <a:t>POC 用 FastAPI 模擬「厚 Gateway」:8010</a:t>
+              <a:t>實機:digiRunner OSS(dgrv4):18080,前線代理我們的厚 Gateway :8010</a:t>
             </a:r>
           </a:p>
         </p:txBody>
@@ -8430,7 +8432,7 @@
                 <a:ea typeface="Microsoft JhengHei"/>
                 <a:cs typeface="Microsoft JhengHei"/>
               </a:rPr>
-              <a:t>Auth / case ACL、限流配額、遮罩、快取、編排、稽核</a:t>
+              <a:t>12 條路由經 AC API 全自動註冊(零手動點擊)</a:t>
             </a:r>
           </a:p>
         </p:txBody>
@@ -8443,7 +8445,7 @@
         </p:nvSpPr>
         <p:spPr>
           <a:xfrm>
-            <a:off x="1188720" y="3530727"/>
+            <a:off x="1188720" y="3299269"/>
             <a:ext cx="118872" cy="118872"/>
           </a:xfrm>
           <a:prstGeom prst="rect">
@@ -8487,7 +8489,7 @@
         </p:nvSpPr>
         <p:spPr>
           <a:xfrm>
-            <a:off x="1481328" y="3453003"/>
+            <a:off x="1481328" y="3221545"/>
             <a:ext cx="4645152" cy="731520"/>
           </a:xfrm>
           <a:prstGeom prst="rect">
@@ -8521,7 +8523,7 @@
                 <a:ea typeface="Microsoft JhengHei"/>
                 <a:cs typeface="Microsoft JhengHei"/>
               </a:rPr>
-              <a:t>把資安與業務治理集中在「一處」管</a:t>
+              <a:t>SPA → digiRunner(/dgrc)→ Gateway 全鏈路煙霧測試 7/7 通過</a:t>
             </a:r>
           </a:p>
         </p:txBody>
@@ -8612,7 +8614,7 @@
                 <a:ea typeface="Microsoft JhengHei"/>
                 <a:cs typeface="Microsoft JhengHei"/>
               </a:rPr>
-              <a:t>對應決策 Q1 · Q12 · Q18 · Q10 · Q9 · Q13</a:t>
+              <a:t>上游身分標頭(X-User-Id)信任鏈已驗證;偽造標頭被 401 拒絕</a:t>
             </a:r>
           </a:p>
         </p:txBody>
@@ -8625,8 +8627,8 @@
         </p:nvSpPr>
         <p:spPr>
           <a:xfrm>
-            <a:off x="6492240" y="2057400"/>
-            <a:ext cx="64008" cy="1828800"/>
+            <a:off x="1188720" y="4444555"/>
+            <a:ext cx="118872" cy="118872"/>
           </a:xfrm>
           <a:prstGeom prst="rect">
             <a:avLst/>
@@ -8669,91 +8671,33 @@
         </p:nvSpPr>
         <p:spPr>
           <a:xfrm>
-            <a:off x="6766559" y="2011680"/>
-            <a:ext cx="4846320" cy="457200"/>
-          </a:xfrm>
-          <a:prstGeom prst="rect">
-            <a:avLst/>
-          </a:prstGeom>
-          <a:noFill/>
-        </p:spPr>
-        <p:txBody>
-          <a:bodyPr wrap="square" anchor="t" lIns="0" rIns="0" tIns="0" bIns="0">
-            <a:spAutoFit/>
-          </a:bodyPr>
-          <a:lstStyle/>
-          <a:p>
-            <a:pPr algn="l">
-              <a:lnSpc>
-                <a:spcPct val="112000"/>
-              </a:lnSpc>
-              <a:spcBef>
-                <a:spcPts val="0"/>
-              </a:spcBef>
-              <a:spcAft>
-                <a:spcPts val="600"/>
-              </a:spcAft>
-            </a:pPr>
-            <a:r>
-              <a:rPr sz="2000" b="1">
-                <a:solidFill>
-                  <a:srgbClr val="1E3A8A"/>
-                </a:solidFill>
-                <a:latin typeface="Microsoft JhengHei"/>
-                <a:ea typeface="Microsoft JhengHei"/>
-                <a:cs typeface="Microsoft JhengHei"/>
-              </a:rPr>
-              <a:t>Dify</a:t>
-            </a:r>
-            <a:r>
-              <a:rPr sz="1400" b="0">
-                <a:solidFill>
-                  <a:srgbClr val="5A6B8C"/>
-                </a:solidFill>
-                <a:latin typeface="Microsoft JhengHei"/>
-                <a:ea typeface="Microsoft JhengHei"/>
-                <a:cs typeface="Microsoft JhengHei"/>
-              </a:rPr>
-              <a:t>　= AI workflow 層</a:t>
-            </a:r>
-          </a:p>
-        </p:txBody>
-      </p:sp>
-      <p:sp>
-        <p:nvSpPr>
-          <p:cNvPr id="19" name="TextBox 18"/>
-          <p:cNvSpPr txBox="1"/>
-          <p:nvPr/>
-        </p:nvSpPr>
-        <p:spPr>
-          <a:xfrm>
-            <a:off x="6766559" y="2487168"/>
-            <a:ext cx="4846320" cy="365760"/>
-          </a:xfrm>
-          <a:prstGeom prst="rect">
-            <a:avLst/>
-          </a:prstGeom>
-          <a:noFill/>
-        </p:spPr>
-        <p:txBody>
-          <a:bodyPr wrap="square" anchor="t" lIns="0" rIns="0" tIns="0" bIns="0">
-            <a:spAutoFit/>
-          </a:bodyPr>
-          <a:lstStyle/>
-          <a:p>
-            <a:pPr algn="l">
-              <a:lnSpc>
-                <a:spcPct val="112000"/>
-              </a:lnSpc>
-              <a:spcBef>
-                <a:spcPts val="0"/>
-              </a:spcBef>
-              <a:spcAft>
-                <a:spcPts val="600"/>
-              </a:spcAft>
-            </a:pPr>
-            <a:r>
-              <a:rPr sz="1300" b="0">
+            <a:off x="1481328" y="4366831"/>
+            <a:ext cx="4645152" cy="731520"/>
+          </a:xfrm>
+          <a:prstGeom prst="rect">
+            <a:avLst/>
+          </a:prstGeom>
+          <a:noFill/>
+        </p:spPr>
+        <p:txBody>
+          <a:bodyPr wrap="square" anchor="t" lIns="0" rIns="0" tIns="0" bIns="0">
+            <a:spAutoFit/>
+          </a:bodyPr>
+          <a:lstStyle/>
+          <a:p>
+            <a:pPr algn="l">
+              <a:lnSpc>
+                <a:spcPct val="110000"/>
+              </a:lnSpc>
+              <a:spcBef>
+                <a:spcPts val="0"/>
+              </a:spcBef>
+              <a:spcAft>
+                <a:spcPts val="0"/>
+              </a:spcAft>
+            </a:pPr>
+            <a:r>
+              <a:rPr sz="1350" b="0">
                 <a:solidFill>
                   <a:srgbClr val="1A2236"/>
                 </a:solidFill>
@@ -8761,21 +8705,21 @@
                 <a:ea typeface="Microsoft JhengHei"/>
                 <a:cs typeface="Microsoft JhengHei"/>
               </a:rPr>
-              <a:t>POC 用 FastAPI 模擬「純推論」:8011</a:t>
-            </a:r>
-          </a:p>
-        </p:txBody>
-      </p:sp>
-      <p:sp>
-        <p:nvSpPr>
-          <p:cNvPr id="20" name="Rectangle 19"/>
+              <a:t>Gateway 仍守 Auth / ACL / 遮罩 / 快取 / 稽核(Q1·Q12·Q18·Q10·Q9·Q13)</a:t>
+            </a:r>
+          </a:p>
+        </p:txBody>
+      </p:sp>
+      <p:sp>
+        <p:nvSpPr>
+          <p:cNvPr id="19" name="Rectangle 18"/>
           <p:cNvSpPr/>
           <p:nvPr/>
         </p:nvSpPr>
         <p:spPr>
           <a:xfrm>
-            <a:off x="6766559" y="2958084"/>
-            <a:ext cx="118872" cy="118872"/>
+            <a:off x="6492240" y="2057400"/>
+            <a:ext cx="64008" cy="1828800"/>
           </a:xfrm>
           <a:prstGeom prst="rect">
             <a:avLst/>
@@ -8812,39 +8756,97 @@
       </p:sp>
       <p:sp>
         <p:nvSpPr>
+          <p:cNvPr id="20" name="TextBox 19"/>
+          <p:cNvSpPr txBox="1"/>
+          <p:nvPr/>
+        </p:nvSpPr>
+        <p:spPr>
+          <a:xfrm>
+            <a:off x="6766559" y="2011680"/>
+            <a:ext cx="4846320" cy="457200"/>
+          </a:xfrm>
+          <a:prstGeom prst="rect">
+            <a:avLst/>
+          </a:prstGeom>
+          <a:noFill/>
+        </p:spPr>
+        <p:txBody>
+          <a:bodyPr wrap="square" anchor="t" lIns="0" rIns="0" tIns="0" bIns="0">
+            <a:spAutoFit/>
+          </a:bodyPr>
+          <a:lstStyle/>
+          <a:p>
+            <a:pPr algn="l">
+              <a:lnSpc>
+                <a:spcPct val="112000"/>
+              </a:lnSpc>
+              <a:spcBef>
+                <a:spcPts val="0"/>
+              </a:spcBef>
+              <a:spcAft>
+                <a:spcPts val="600"/>
+              </a:spcAft>
+            </a:pPr>
+            <a:r>
+              <a:rPr sz="2000" b="1">
+                <a:solidFill>
+                  <a:srgbClr val="1E3A8A"/>
+                </a:solidFill>
+                <a:latin typeface="Microsoft JhengHei"/>
+                <a:ea typeface="Microsoft JhengHei"/>
+                <a:cs typeface="Microsoft JhengHei"/>
+              </a:rPr>
+              <a:t>Dify</a:t>
+            </a:r>
+            <a:r>
+              <a:rPr sz="1400" b="0">
+                <a:solidFill>
+                  <a:srgbClr val="5A6B8C"/>
+                </a:solidFill>
+                <a:latin typeface="Microsoft JhengHei"/>
+                <a:ea typeface="Microsoft JhengHei"/>
+                <a:cs typeface="Microsoft JhengHei"/>
+              </a:rPr>
+              <a:t>　= AI workflow 層</a:t>
+            </a:r>
+          </a:p>
+        </p:txBody>
+      </p:sp>
+      <p:sp>
+        <p:nvSpPr>
           <p:cNvPr id="21" name="TextBox 20"/>
           <p:cNvSpPr txBox="1"/>
           <p:nvPr/>
         </p:nvSpPr>
         <p:spPr>
           <a:xfrm>
-            <a:off x="7059168" y="2880360"/>
-            <a:ext cx="4553712" cy="731520"/>
-          </a:xfrm>
-          <a:prstGeom prst="rect">
-            <a:avLst/>
-          </a:prstGeom>
-          <a:noFill/>
-        </p:spPr>
-        <p:txBody>
-          <a:bodyPr wrap="square" anchor="t" lIns="0" rIns="0" tIns="0" bIns="0">
-            <a:spAutoFit/>
-          </a:bodyPr>
-          <a:lstStyle/>
-          <a:p>
-            <a:pPr algn="l">
-              <a:lnSpc>
-                <a:spcPct val="110000"/>
-              </a:lnSpc>
-              <a:spcBef>
-                <a:spcPts val="0"/>
-              </a:spcBef>
-              <a:spcAft>
-                <a:spcPts val="0"/>
-              </a:spcAft>
-            </a:pPr>
-            <a:r>
-              <a:rPr sz="1350" b="0">
+            <a:off x="6766559" y="2487168"/>
+            <a:ext cx="4846320" cy="365760"/>
+          </a:xfrm>
+          <a:prstGeom prst="rect">
+            <a:avLst/>
+          </a:prstGeom>
+          <a:noFill/>
+        </p:spPr>
+        <p:txBody>
+          <a:bodyPr wrap="square" anchor="t" lIns="0" rIns="0" tIns="0" bIns="0">
+            <a:spAutoFit/>
+          </a:bodyPr>
+          <a:lstStyle/>
+          <a:p>
+            <a:pPr algn="l">
+              <a:lnSpc>
+                <a:spcPct val="112000"/>
+              </a:lnSpc>
+              <a:spcBef>
+                <a:spcPts val="0"/>
+              </a:spcBef>
+              <a:spcAft>
+                <a:spcPts val="600"/>
+              </a:spcAft>
+            </a:pPr>
+            <a:r>
+              <a:rPr sz="1300" b="0">
                 <a:solidFill>
                   <a:srgbClr val="1A2236"/>
                 </a:solidFill>
@@ -8852,7 +8854,7 @@
                 <a:ea typeface="Microsoft JhengHei"/>
                 <a:cs typeface="Microsoft JhengHei"/>
               </a:rPr>
-              <a:t>每個 AI 工具包成 single-step endpoint</a:t>
+              <a:t>實機:Dify CE :8088,workflow 接本機 Ollama qwen2.5:7b</a:t>
             </a:r>
           </a:p>
         </p:txBody>
@@ -8865,7 +8867,7 @@
         </p:nvSpPr>
         <p:spPr>
           <a:xfrm>
-            <a:off x="6766559" y="3530727"/>
+            <a:off x="6766559" y="2958084"/>
             <a:ext cx="118872" cy="118872"/>
           </a:xfrm>
           <a:prstGeom prst="rect">
@@ -8909,7 +8911,7 @@
         </p:nvSpPr>
         <p:spPr>
           <a:xfrm>
-            <a:off x="7059168" y="3453003"/>
+            <a:off x="7059168" y="2880360"/>
             <a:ext cx="4553712" cy="731520"/>
           </a:xfrm>
           <a:prstGeom prst="rect">
@@ -8943,7 +8945,7 @@
                 <a:ea typeface="Microsoft JhengHei"/>
                 <a:cs typeface="Microsoft JhengHei"/>
               </a:rPr>
-              <a:t>parse_oa / retrieve / draft / verify / deadline</a:t>
+              <a:t>parse_oa / draft 走 patentmind-analyze-oa workflow(LLM_MODE=dify)</a:t>
             </a:r>
           </a:p>
         </p:txBody>
@@ -8956,7 +8958,7 @@
         </p:nvSpPr>
         <p:spPr>
           <a:xfrm>
-            <a:off x="6766559" y="4103370"/>
+            <a:off x="6766559" y="3762184"/>
             <a:ext cx="118872" cy="118872"/>
           </a:xfrm>
           <a:prstGeom prst="rect">
@@ -9000,7 +9002,7 @@
         </p:nvSpPr>
         <p:spPr>
           <a:xfrm>
-            <a:off x="7059168" y="4025646"/>
+            <a:off x="7059168" y="3684460"/>
             <a:ext cx="4553712" cy="731520"/>
           </a:xfrm>
           <a:prstGeom prst="rect">
@@ -9034,14 +9036,196 @@
                 <a:ea typeface="Microsoft JhengHei"/>
                 <a:cs typeface="Microsoft JhengHei"/>
               </a:rPr>
-              <a:t>未來換成 Dify HTTP node,介面已對齊</a:t>
+              <a:t>Workflow DSL 由 prompts/*.yaml 自動生成 — 單一事實來源</a:t>
+            </a:r>
+          </a:p>
+        </p:txBody>
+      </p:sp>
+      <p:sp>
+        <p:nvSpPr>
+          <p:cNvPr id="26" name="Rectangle 25"/>
+          <p:cNvSpPr/>
+          <p:nvPr/>
+        </p:nvSpPr>
+        <p:spPr>
+          <a:xfrm>
+            <a:off x="6766559" y="4334827"/>
+            <a:ext cx="118872" cy="118872"/>
+          </a:xfrm>
+          <a:prstGeom prst="rect">
+            <a:avLst/>
+          </a:prstGeom>
+          <a:solidFill>
+            <a:srgbClr val="F5B020"/>
+          </a:solidFill>
+          <a:ln>
+            <a:noFill/>
+          </a:ln>
+          <a:effectLst/>
+        </p:spPr>
+        <p:style>
+          <a:lnRef idx="1">
+            <a:schemeClr val="accent1"/>
+          </a:lnRef>
+          <a:fillRef idx="3">
+            <a:schemeClr val="accent1"/>
+          </a:fillRef>
+          <a:effectRef idx="2">
+            <a:schemeClr val="accent1"/>
+          </a:effectRef>
+          <a:fontRef idx="minor">
+            <a:schemeClr val="lt1"/>
+          </a:fontRef>
+        </p:style>
+        <p:txBody>
+          <a:bodyPr rtlCol="0" anchor="ctr"/>
+          <a:lstStyle/>
+          <a:p>
+            <a:pPr algn="ctr"/>
+          </a:p>
+        </p:txBody>
+      </p:sp>
+      <p:sp>
+        <p:nvSpPr>
+          <p:cNvPr id="27" name="TextBox 26"/>
+          <p:cNvSpPr txBox="1"/>
+          <p:nvPr/>
+        </p:nvSpPr>
+        <p:spPr>
+          <a:xfrm>
+            <a:off x="7059168" y="4257103"/>
+            <a:ext cx="4553712" cy="731520"/>
+          </a:xfrm>
+          <a:prstGeom prst="rect">
+            <a:avLst/>
+          </a:prstGeom>
+          <a:noFill/>
+        </p:spPr>
+        <p:txBody>
+          <a:bodyPr wrap="square" anchor="t" lIns="0" rIns="0" tIns="0" bIns="0">
+            <a:spAutoFit/>
+          </a:bodyPr>
+          <a:lstStyle/>
+          <a:p>
+            <a:pPr algn="l">
+              <a:lnSpc>
+                <a:spcPct val="110000"/>
+              </a:lnSpc>
+              <a:spcBef>
+                <a:spcPts val="0"/>
+              </a:spcBef>
+              <a:spcAft>
+                <a:spcPts val="0"/>
+              </a:spcAft>
+            </a:pPr>
+            <a:r>
+              <a:rPr sz="1350" b="0">
+                <a:solidFill>
+                  <a:srgbClr val="1A2236"/>
+                </a:solidFill>
+                <a:latin typeface="Microsoft JhengHei"/>
+                <a:ea typeface="Microsoft JhengHei"/>
+                <a:cs typeface="Microsoft JhengHei"/>
+              </a:rPr>
+              <a:t>citation verifier 留在本地程式(Q14 硬牆,防幻覺不可繞過)</a:t>
+            </a:r>
+          </a:p>
+        </p:txBody>
+      </p:sp>
+      <p:sp>
+        <p:nvSpPr>
+          <p:cNvPr id="28" name="Rectangle 27"/>
+          <p:cNvSpPr/>
+          <p:nvPr/>
+        </p:nvSpPr>
+        <p:spPr>
+          <a:xfrm>
+            <a:off x="6766559" y="4907470"/>
+            <a:ext cx="118872" cy="118872"/>
+          </a:xfrm>
+          <a:prstGeom prst="rect">
+            <a:avLst/>
+          </a:prstGeom>
+          <a:solidFill>
+            <a:srgbClr val="F5B020"/>
+          </a:solidFill>
+          <a:ln>
+            <a:noFill/>
+          </a:ln>
+          <a:effectLst/>
+        </p:spPr>
+        <p:style>
+          <a:lnRef idx="1">
+            <a:schemeClr val="accent1"/>
+          </a:lnRef>
+          <a:fillRef idx="3">
+            <a:schemeClr val="accent1"/>
+          </a:fillRef>
+          <a:effectRef idx="2">
+            <a:schemeClr val="accent1"/>
+          </a:effectRef>
+          <a:fontRef idx="minor">
+            <a:schemeClr val="lt1"/>
+          </a:fontRef>
+        </p:style>
+        <p:txBody>
+          <a:bodyPr rtlCol="0" anchor="ctr"/>
+          <a:lstStyle/>
+          <a:p>
+            <a:pPr algn="ctr"/>
+          </a:p>
+        </p:txBody>
+      </p:sp>
+      <p:sp>
+        <p:nvSpPr>
+          <p:cNvPr id="29" name="TextBox 28"/>
+          <p:cNvSpPr txBox="1"/>
+          <p:nvPr/>
+        </p:nvSpPr>
+        <p:spPr>
+          <a:xfrm>
+            <a:off x="7059168" y="4829746"/>
+            <a:ext cx="4553712" cy="731520"/>
+          </a:xfrm>
+          <a:prstGeom prst="rect">
+            <a:avLst/>
+          </a:prstGeom>
+          <a:noFill/>
+        </p:spPr>
+        <p:txBody>
+          <a:bodyPr wrap="square" anchor="t" lIns="0" rIns="0" tIns="0" bIns="0">
+            <a:spAutoFit/>
+          </a:bodyPr>
+          <a:lstStyle/>
+          <a:p>
+            <a:pPr algn="l">
+              <a:lnSpc>
+                <a:spcPct val="110000"/>
+              </a:lnSpc>
+              <a:spcBef>
+                <a:spcPts val="0"/>
+              </a:spcBef>
+              <a:spcAft>
+                <a:spcPts val="0"/>
+              </a:spcAft>
+            </a:pPr>
+            <a:r>
+              <a:rPr sz="1350" b="0">
+                <a:solidFill>
+                  <a:srgbClr val="1A2236"/>
+                </a:solidFill>
+                <a:latin typeface="Microsoft JhengHei"/>
+                <a:ea typeface="Microsoft JhengHei"/>
+                <a:cs typeface="Microsoft JhengHei"/>
+              </a:rPr>
+              <a:t>Dify 斷線自動降級 + 前端醒目警示;機密案件不出機器(Q15)</a:t>
             </a:r>
           </a:p>
         </p:txBody>
       </p:sp>
       <p:cxnSp>
         <p:nvCxnSpPr>
-          <p:cNvPr id="26" name="Connector 25"/>
+          <p:cNvPr id="30" name="Connector 29"/>
           <p:cNvCxnSpPr/>
           <p:nvPr/>
         </p:nvCxnSpPr>
@@ -9076,7 +9260,7 @@
       </p:cxnSp>
       <p:sp>
         <p:nvSpPr>
-          <p:cNvPr id="27" name="TextBox 26"/>
+          <p:cNvPr id="31" name="TextBox 30"/>
           <p:cNvSpPr txBox="1"/>
           <p:nvPr/>
         </p:nvSpPr>
@@ -9204,7 +9388,7 @@
       </p:sp>
       <p:sp>
         <p:nvSpPr>
-          <p:cNvPr id="28" name="TextBox 27"/>
+          <p:cNvPr id="32" name="TextBox 31"/>
           <p:cNvSpPr txBox="1"/>
           <p:nvPr/>
         </p:nvSpPr>
@@ -9251,7 +9435,7 @@
       </p:sp>
       <p:sp>
         <p:nvSpPr>
-          <p:cNvPr id="29" name="TextBox 28"/>
+          <p:cNvPr id="33" name="TextBox 32"/>
           <p:cNvSpPr txBox="1"/>
           <p:nvPr/>
         </p:nvSpPr>
@@ -9329,7 +9513,7 @@
             <a:avLst/>
           </a:prstGeom>
           <a:solidFill>
-            <a:srgbClr val="1E3A8A"/>
+            <a:srgbClr val="FFFFFF"/>
           </a:solidFill>
           <a:ln>
             <a:noFill/>
@@ -9366,8 +9550,8 @@
         </p:nvSpPr>
         <p:spPr>
           <a:xfrm>
-            <a:off x="0" y="0"/>
-            <a:ext cx="146304" cy="6858000"/>
+            <a:off x="822960" y="658368"/>
+            <a:ext cx="146304" cy="146304"/>
           </a:xfrm>
           <a:prstGeom prst="rect">
             <a:avLst/>
@@ -9410,16 +9594,16 @@
         </p:nvSpPr>
         <p:spPr>
           <a:xfrm>
-            <a:off x="640080" y="1097280"/>
-            <a:ext cx="5486400" cy="3840480"/>
-          </a:xfrm>
-          <a:prstGeom prst="rect">
-            <a:avLst/>
-          </a:prstGeom>
-          <a:noFill/>
-        </p:spPr>
-        <p:txBody>
-          <a:bodyPr wrap="square" anchor="ctr" lIns="0" rIns="0" tIns="0" bIns="0">
+            <a:off x="1078992" y="566928"/>
+            <a:ext cx="8229600" cy="365760"/>
+          </a:xfrm>
+          <a:prstGeom prst="rect">
+            <a:avLst/>
+          </a:prstGeom>
+          <a:noFill/>
+        </p:spPr>
+        <p:txBody>
+          <a:bodyPr wrap="square" anchor="t" lIns="0" rIns="0" tIns="0" bIns="0">
             <a:spAutoFit/>
           </a:bodyPr>
           <a:lstStyle/>
@@ -9436,15 +9620,26 @@
               </a:spcAft>
             </a:pPr>
             <a:r>
-              <a:rPr sz="30000" b="1">
-                <a:solidFill>
-                  <a:srgbClr val="2A499A"/>
-                </a:solidFill>
-                <a:latin typeface="Microsoft JhengHei"/>
-                <a:ea typeface="Microsoft JhengHei"/>
-                <a:cs typeface="Microsoft JhengHei"/>
-              </a:rPr>
-              <a:t>6</a:t>
+              <a:rPr sz="1400" b="1">
+                <a:solidFill>
+                  <a:srgbClr val="F5B020"/>
+                </a:solidFill>
+                <a:latin typeface="Microsoft JhengHei"/>
+                <a:ea typeface="Microsoft JhengHei"/>
+                <a:cs typeface="Microsoft JhengHei"/>
+              </a:rPr>
+              <a:t>05 </a:t>
+            </a:r>
+            <a:r>
+              <a:rPr sz="1400" b="0">
+                <a:solidFill>
+                  <a:srgbClr val="5A6B8C"/>
+                </a:solidFill>
+                <a:latin typeface="Microsoft JhengHei"/>
+                <a:ea typeface="Microsoft JhengHei"/>
+                <a:cs typeface="Microsoft JhengHei"/>
+              </a:rPr>
+              <a:t>· Dify 與 digiRunner · 實機證明</a:t>
             </a:r>
           </a:p>
         </p:txBody>
@@ -9457,16 +9652,16 @@
         </p:nvSpPr>
         <p:spPr>
           <a:xfrm>
-            <a:off x="5486400" y="2606040"/>
-            <a:ext cx="6126480" cy="1097280"/>
-          </a:xfrm>
-          <a:prstGeom prst="rect">
-            <a:avLst/>
-          </a:prstGeom>
-          <a:noFill/>
-        </p:spPr>
-        <p:txBody>
-          <a:bodyPr wrap="square" anchor="b" lIns="0" rIns="0" tIns="0" bIns="0">
+            <a:off x="804672" y="914400"/>
+            <a:ext cx="10515600" cy="914400"/>
+          </a:xfrm>
+          <a:prstGeom prst="rect">
+            <a:avLst/>
+          </a:prstGeom>
+          <a:noFill/>
+        </p:spPr>
+        <p:txBody>
+          <a:bodyPr wrap="square" anchor="t" lIns="0" rIns="0" tIns="0" bIns="0">
             <a:spAutoFit/>
           </a:bodyPr>
           <a:lstStyle/>
@@ -9483,83 +9678,36 @@
               </a:spcAft>
             </a:pPr>
             <a:r>
-              <a:rPr sz="4400" b="1">
-                <a:solidFill>
-                  <a:srgbClr val="FFFFFF"/>
-                </a:solidFill>
-                <a:latin typeface="Microsoft JhengHei"/>
-                <a:ea typeface="Microsoft JhengHei"/>
-                <a:cs typeface="Microsoft JhengHei"/>
-              </a:rPr>
-              <a:t>未來展望 · 收穫與心得</a:t>
-            </a:r>
-          </a:p>
-        </p:txBody>
-      </p:sp>
-      <p:sp>
-        <p:nvSpPr>
-          <p:cNvPr id="6" name="TextBox 5"/>
-          <p:cNvSpPr txBox="1"/>
-          <p:nvPr/>
-        </p:nvSpPr>
-        <p:spPr>
-          <a:xfrm>
-            <a:off x="5532120" y="3794760"/>
-            <a:ext cx="6126480" cy="548640"/>
-          </a:xfrm>
-          <a:prstGeom prst="rect">
-            <a:avLst/>
-          </a:prstGeom>
-          <a:noFill/>
-        </p:spPr>
-        <p:txBody>
-          <a:bodyPr wrap="square" anchor="t" lIns="0" rIns="0" tIns="0" bIns="0">
-            <a:spAutoFit/>
-          </a:bodyPr>
-          <a:lstStyle/>
-          <a:p>
-            <a:pPr algn="l">
-              <a:lnSpc>
-                <a:spcPct val="112000"/>
-              </a:lnSpc>
-              <a:spcBef>
-                <a:spcPts val="0"/>
-              </a:spcBef>
-              <a:spcAft>
-                <a:spcPts val="600"/>
-              </a:spcAft>
-            </a:pPr>
-            <a:r>
-              <a:rPr sz="1700" b="1">
-                <a:solidFill>
-                  <a:srgbClr val="F5B020"/>
-                </a:solidFill>
-                <a:latin typeface="Microsoft JhengHei"/>
-                <a:ea typeface="Microsoft JhengHei"/>
-                <a:cs typeface="Microsoft JhengHei"/>
-              </a:rPr>
-              <a:t>Roadmap &amp; takeaways</a:t>
+              <a:rPr sz="3300" b="1">
+                <a:solidFill>
+                  <a:srgbClr val="1E3A8A"/>
+                </a:solidFill>
+                <a:latin typeface="Microsoft JhengHei"/>
+                <a:ea typeface="Microsoft JhengHei"/>
+                <a:cs typeface="Microsoft JhengHei"/>
+              </a:rPr>
+              <a:t>實機證明 ①｜真模型分析結果(qwen2.5:7b via Dify)</a:t>
             </a:r>
           </a:p>
         </p:txBody>
       </p:sp>
       <p:cxnSp>
         <p:nvCxnSpPr>
-          <p:cNvPr id="7" name="Connector 6"/>
+          <p:cNvPr id="6" name="Connector 5"/>
           <p:cNvCxnSpPr/>
           <p:nvPr/>
         </p:nvCxnSpPr>
         <p:spPr>
           <a:xfrm>
-            <a:off x="5541264" y="3657600"/>
-            <a:ext cx="2743199" cy="0"/>
+            <a:off x="822960" y="1755648"/>
+            <a:ext cx="10561320" cy="0"/>
           </a:xfrm>
           <a:prstGeom prst="bentConnector3">
             <a:avLst/>
           </a:prstGeom>
-          <a:ln w="17780">
+          <a:ln w="15240">
             <a:solidFill>
-              <a:srgbClr val="3B559E"/>
+              <a:srgbClr val="D7DDEA"/>
             </a:solidFill>
           </a:ln>
         </p:spPr>
@@ -9578,6 +9726,727 @@
           </a:fontRef>
         </p:style>
       </p:cxnSp>
+      <p:pic>
+        <p:nvPicPr>
+          <p:cNvPr id="7" name="Picture 6" descr="real_05_result_real_qwen.png"/>
+          <p:cNvPicPr>
+            <a:picLocks noChangeAspect="1"/>
+          </p:cNvPicPr>
+          <p:nvPr/>
+        </p:nvPicPr>
+        <p:blipFill>
+          <a:blip r:embed="rId2"/>
+          <a:stretch>
+            <a:fillRect/>
+          </a:stretch>
+        </p:blipFill>
+        <p:spPr>
+          <a:xfrm>
+            <a:off x="822960" y="2148840"/>
+            <a:ext cx="5925312" cy="3703320"/>
+          </a:xfrm>
+          <a:prstGeom prst="rect">
+            <a:avLst/>
+          </a:prstGeom>
+          <a:effectLst>
+            <a:outerShdw blurRad="90000" dist="38100" dir="5400000" rotWithShape="0">
+              <a:srgbClr val="1A2236">
+                <a:alpha val="26000"/>
+              </a:srgbClr>
+            </a:outerShdw>
+          </a:effectLst>
+        </p:spPr>
+      </p:pic>
+      <p:sp>
+        <p:nvSpPr>
+          <p:cNvPr id="8" name="Oval 7"/>
+          <p:cNvSpPr/>
+          <p:nvPr/>
+        </p:nvSpPr>
+        <p:spPr>
+          <a:xfrm>
+            <a:off x="7251192" y="2286000"/>
+            <a:ext cx="310896" cy="310896"/>
+          </a:xfrm>
+          <a:prstGeom prst="ellipse">
+            <a:avLst/>
+          </a:prstGeom>
+          <a:solidFill>
+            <a:srgbClr val="F5B020"/>
+          </a:solidFill>
+          <a:ln>
+            <a:noFill/>
+          </a:ln>
+          <a:effectLst/>
+        </p:spPr>
+        <p:style>
+          <a:lnRef idx="1">
+            <a:schemeClr val="accent1"/>
+          </a:lnRef>
+          <a:fillRef idx="3">
+            <a:schemeClr val="accent1"/>
+          </a:fillRef>
+          <a:effectRef idx="2">
+            <a:schemeClr val="accent1"/>
+          </a:effectRef>
+          <a:fontRef idx="minor">
+            <a:schemeClr val="lt1"/>
+          </a:fontRef>
+        </p:style>
+        <p:txBody>
+          <a:bodyPr rtlCol="0" anchor="ctr" tIns="0" bIns="0"/>
+          <a:lstStyle/>
+          <a:p>
+            <a:pPr algn="ctr"/>
+            <a:r>
+              <a:rPr sz="1400" b="1">
+                <a:solidFill>
+                  <a:srgbClr val="FFFFFF"/>
+                </a:solidFill>
+                <a:latin typeface="Microsoft JhengHei"/>
+                <a:ea typeface="Microsoft JhengHei"/>
+                <a:cs typeface="Microsoft JhengHei"/>
+              </a:rPr>
+              <a:t>1</a:t>
+            </a:r>
+          </a:p>
+        </p:txBody>
+      </p:sp>
+      <p:sp>
+        <p:nvSpPr>
+          <p:cNvPr id="9" name="TextBox 8"/>
+          <p:cNvSpPr txBox="1"/>
+          <p:nvPr/>
+        </p:nvSpPr>
+        <p:spPr>
+          <a:xfrm>
+            <a:off x="7708392" y="2249424"/>
+            <a:ext cx="3843223" cy="365760"/>
+          </a:xfrm>
+          <a:prstGeom prst="rect">
+            <a:avLst/>
+          </a:prstGeom>
+          <a:noFill/>
+        </p:spPr>
+        <p:txBody>
+          <a:bodyPr wrap="square" anchor="t" lIns="0" rIns="0" tIns="0" bIns="0">
+            <a:spAutoFit/>
+          </a:bodyPr>
+          <a:lstStyle/>
+          <a:p>
+            <a:pPr algn="l">
+              <a:lnSpc>
+                <a:spcPct val="112000"/>
+              </a:lnSpc>
+              <a:spcBef>
+                <a:spcPts val="0"/>
+              </a:spcBef>
+              <a:spcAft>
+                <a:spcPts val="600"/>
+              </a:spcAft>
+            </a:pPr>
+            <a:r>
+              <a:rPr sz="1550" b="1">
+                <a:solidFill>
+                  <a:srgbClr val="1E3A8A"/>
+                </a:solidFill>
+                <a:latin typeface="Microsoft JhengHei"/>
+                <a:ea typeface="Microsoft JhengHei"/>
+                <a:cs typeface="Microsoft JhengHei"/>
+              </a:rPr>
+              <a:t>全鏈路 28 秒</a:t>
+            </a:r>
+          </a:p>
+        </p:txBody>
+      </p:sp>
+      <p:sp>
+        <p:nvSpPr>
+          <p:cNvPr id="10" name="TextBox 9"/>
+          <p:cNvSpPr txBox="1"/>
+          <p:nvPr/>
+        </p:nvSpPr>
+        <p:spPr>
+          <a:xfrm>
+            <a:off x="7708392" y="2587752"/>
+            <a:ext cx="3843223" cy="731520"/>
+          </a:xfrm>
+          <a:prstGeom prst="rect">
+            <a:avLst/>
+          </a:prstGeom>
+          <a:noFill/>
+        </p:spPr>
+        <p:txBody>
+          <a:bodyPr wrap="square" anchor="t" lIns="0" rIns="0" tIns="0" bIns="0">
+            <a:spAutoFit/>
+          </a:bodyPr>
+          <a:lstStyle/>
+          <a:p>
+            <a:pPr algn="l">
+              <a:lnSpc>
+                <a:spcPct val="116000"/>
+              </a:lnSpc>
+              <a:spcBef>
+                <a:spcPts val="0"/>
+              </a:spcBef>
+              <a:spcAft>
+                <a:spcPts val="600"/>
+              </a:spcAft>
+            </a:pPr>
+            <a:r>
+              <a:rPr sz="1250" b="0">
+                <a:solidFill>
+                  <a:srgbClr val="5A6B8C"/>
+                </a:solidFill>
+                <a:latin typeface="Microsoft JhengHei"/>
+                <a:ea typeface="Microsoft JhengHei"/>
+                <a:cs typeface="Microsoft JhengHei"/>
+              </a:rPr>
+              <a:t>SPA → digiRunner :18080 → Gateway → AI Engine → Dify :8088 → Ollama,無一 mock。</a:t>
+            </a:r>
+          </a:p>
+        </p:txBody>
+      </p:sp>
+      <p:sp>
+        <p:nvSpPr>
+          <p:cNvPr id="11" name="Oval 10"/>
+          <p:cNvSpPr/>
+          <p:nvPr/>
+        </p:nvSpPr>
+        <p:spPr>
+          <a:xfrm>
+            <a:off x="7251192" y="3218688"/>
+            <a:ext cx="310896" cy="310896"/>
+          </a:xfrm>
+          <a:prstGeom prst="ellipse">
+            <a:avLst/>
+          </a:prstGeom>
+          <a:solidFill>
+            <a:srgbClr val="F5B020"/>
+          </a:solidFill>
+          <a:ln>
+            <a:noFill/>
+          </a:ln>
+          <a:effectLst/>
+        </p:spPr>
+        <p:style>
+          <a:lnRef idx="1">
+            <a:schemeClr val="accent1"/>
+          </a:lnRef>
+          <a:fillRef idx="3">
+            <a:schemeClr val="accent1"/>
+          </a:fillRef>
+          <a:effectRef idx="2">
+            <a:schemeClr val="accent1"/>
+          </a:effectRef>
+          <a:fontRef idx="minor">
+            <a:schemeClr val="lt1"/>
+          </a:fontRef>
+        </p:style>
+        <p:txBody>
+          <a:bodyPr rtlCol="0" anchor="ctr" tIns="0" bIns="0"/>
+          <a:lstStyle/>
+          <a:p>
+            <a:pPr algn="ctr"/>
+            <a:r>
+              <a:rPr sz="1400" b="1">
+                <a:solidFill>
+                  <a:srgbClr val="FFFFFF"/>
+                </a:solidFill>
+                <a:latin typeface="Microsoft JhengHei"/>
+                <a:ea typeface="Microsoft JhengHei"/>
+                <a:cs typeface="Microsoft JhengHei"/>
+              </a:rPr>
+              <a:t>2</a:t>
+            </a:r>
+          </a:p>
+        </p:txBody>
+      </p:sp>
+      <p:sp>
+        <p:nvSpPr>
+          <p:cNvPr id="12" name="TextBox 11"/>
+          <p:cNvSpPr txBox="1"/>
+          <p:nvPr/>
+        </p:nvSpPr>
+        <p:spPr>
+          <a:xfrm>
+            <a:off x="7708392" y="3182112"/>
+            <a:ext cx="3843223" cy="365760"/>
+          </a:xfrm>
+          <a:prstGeom prst="rect">
+            <a:avLst/>
+          </a:prstGeom>
+          <a:noFill/>
+        </p:spPr>
+        <p:txBody>
+          <a:bodyPr wrap="square" anchor="t" lIns="0" rIns="0" tIns="0" bIns="0">
+            <a:spAutoFit/>
+          </a:bodyPr>
+          <a:lstStyle/>
+          <a:p>
+            <a:pPr algn="l">
+              <a:lnSpc>
+                <a:spcPct val="112000"/>
+              </a:lnSpc>
+              <a:spcBef>
+                <a:spcPts val="0"/>
+              </a:spcBef>
+              <a:spcAft>
+                <a:spcPts val="600"/>
+              </a:spcAft>
+            </a:pPr>
+            <a:r>
+              <a:rPr sz="1550" b="1">
+                <a:solidFill>
+                  <a:srgbClr val="1E3A8A"/>
+                </a:solidFill>
+                <a:latin typeface="Microsoft JhengHei"/>
+                <a:ea typeface="Microsoft JhengHei"/>
+                <a:cs typeface="Microsoft JhengHei"/>
+              </a:rPr>
+              <a:t>TW OA 正確解析</a:t>
+            </a:r>
+          </a:p>
+        </p:txBody>
+      </p:sp>
+      <p:sp>
+        <p:nvSpPr>
+          <p:cNvPr id="13" name="TextBox 12"/>
+          <p:cNvSpPr txBox="1"/>
+          <p:nvPr/>
+        </p:nvSpPr>
+        <p:spPr>
+          <a:xfrm>
+            <a:off x="7708392" y="3520440"/>
+            <a:ext cx="3843223" cy="731520"/>
+          </a:xfrm>
+          <a:prstGeom prst="rect">
+            <a:avLst/>
+          </a:prstGeom>
+          <a:noFill/>
+        </p:spPr>
+        <p:txBody>
+          <a:bodyPr wrap="square" anchor="t" lIns="0" rIns="0" tIns="0" bIns="0">
+            <a:spAutoFit/>
+          </a:bodyPr>
+          <a:lstStyle/>
+          <a:p>
+            <a:pPr algn="l">
+              <a:lnSpc>
+                <a:spcPct val="116000"/>
+              </a:lnSpc>
+              <a:spcBef>
+                <a:spcPts val="0"/>
+              </a:spcBef>
+              <a:spcAft>
+                <a:spcPts val="600"/>
+              </a:spcAft>
+            </a:pPr>
+            <a:r>
+              <a:rPr sz="1250" b="0">
+                <a:solidFill>
+                  <a:srgbClr val="5A6B8C"/>
+                </a:solidFill>
+                <a:latin typeface="Microsoft JhengHei"/>
+                <a:ea typeface="Microsoft JhengHei"/>
+                <a:cs typeface="Microsoft JhengHei"/>
+              </a:rPr>
+              <a:t>請求項 9「該第一電動車」缺先行詞 → §26-2 antecedent_basis,真模型分類正確。</a:t>
+            </a:r>
+          </a:p>
+        </p:txBody>
+      </p:sp>
+      <p:sp>
+        <p:nvSpPr>
+          <p:cNvPr id="14" name="Oval 13"/>
+          <p:cNvSpPr/>
+          <p:nvPr/>
+        </p:nvSpPr>
+        <p:spPr>
+          <a:xfrm>
+            <a:off x="7251192" y="4151376"/>
+            <a:ext cx="310896" cy="310896"/>
+          </a:xfrm>
+          <a:prstGeom prst="ellipse">
+            <a:avLst/>
+          </a:prstGeom>
+          <a:solidFill>
+            <a:srgbClr val="F5B020"/>
+          </a:solidFill>
+          <a:ln>
+            <a:noFill/>
+          </a:ln>
+          <a:effectLst/>
+        </p:spPr>
+        <p:style>
+          <a:lnRef idx="1">
+            <a:schemeClr val="accent1"/>
+          </a:lnRef>
+          <a:fillRef idx="3">
+            <a:schemeClr val="accent1"/>
+          </a:fillRef>
+          <a:effectRef idx="2">
+            <a:schemeClr val="accent1"/>
+          </a:effectRef>
+          <a:fontRef idx="minor">
+            <a:schemeClr val="lt1"/>
+          </a:fontRef>
+        </p:style>
+        <p:txBody>
+          <a:bodyPr rtlCol="0" anchor="ctr" tIns="0" bIns="0"/>
+          <a:lstStyle/>
+          <a:p>
+            <a:pPr algn="ctr"/>
+            <a:r>
+              <a:rPr sz="1400" b="1">
+                <a:solidFill>
+                  <a:srgbClr val="FFFFFF"/>
+                </a:solidFill>
+                <a:latin typeface="Microsoft JhengHei"/>
+                <a:ea typeface="Microsoft JhengHei"/>
+                <a:cs typeface="Microsoft JhengHei"/>
+              </a:rPr>
+              <a:t>3</a:t>
+            </a:r>
+          </a:p>
+        </p:txBody>
+      </p:sp>
+      <p:sp>
+        <p:nvSpPr>
+          <p:cNvPr id="15" name="TextBox 14"/>
+          <p:cNvSpPr txBox="1"/>
+          <p:nvPr/>
+        </p:nvSpPr>
+        <p:spPr>
+          <a:xfrm>
+            <a:off x="7708392" y="4114800"/>
+            <a:ext cx="3843223" cy="365760"/>
+          </a:xfrm>
+          <a:prstGeom prst="rect">
+            <a:avLst/>
+          </a:prstGeom>
+          <a:noFill/>
+        </p:spPr>
+        <p:txBody>
+          <a:bodyPr wrap="square" anchor="t" lIns="0" rIns="0" tIns="0" bIns="0">
+            <a:spAutoFit/>
+          </a:bodyPr>
+          <a:lstStyle/>
+          <a:p>
+            <a:pPr algn="l">
+              <a:lnSpc>
+                <a:spcPct val="112000"/>
+              </a:lnSpc>
+              <a:spcBef>
+                <a:spcPts val="0"/>
+              </a:spcBef>
+              <a:spcAft>
+                <a:spcPts val="600"/>
+              </a:spcAft>
+            </a:pPr>
+            <a:r>
+              <a:rPr sz="1550" b="1">
+                <a:solidFill>
+                  <a:srgbClr val="1E3A8A"/>
+                </a:solidFill>
+                <a:latin typeface="Microsoft JhengHei"/>
+                <a:ea typeface="Microsoft JhengHei"/>
+                <a:cs typeface="Microsoft JhengHei"/>
+              </a:rPr>
+              <a:t>引證驗證硬牆</a:t>
+            </a:r>
+          </a:p>
+        </p:txBody>
+      </p:sp>
+      <p:sp>
+        <p:nvSpPr>
+          <p:cNvPr id="16" name="TextBox 15"/>
+          <p:cNvSpPr txBox="1"/>
+          <p:nvPr/>
+        </p:nvSpPr>
+        <p:spPr>
+          <a:xfrm>
+            <a:off x="7708392" y="4453128"/>
+            <a:ext cx="3843223" cy="731520"/>
+          </a:xfrm>
+          <a:prstGeom prst="rect">
+            <a:avLst/>
+          </a:prstGeom>
+          <a:noFill/>
+        </p:spPr>
+        <p:txBody>
+          <a:bodyPr wrap="square" anchor="t" lIns="0" rIns="0" tIns="0" bIns="0">
+            <a:spAutoFit/>
+          </a:bodyPr>
+          <a:lstStyle/>
+          <a:p>
+            <a:pPr algn="l">
+              <a:lnSpc>
+                <a:spcPct val="116000"/>
+              </a:lnSpc>
+              <a:spcBef>
+                <a:spcPts val="0"/>
+              </a:spcBef>
+              <a:spcAft>
+                <a:spcPts val="600"/>
+              </a:spcAft>
+            </a:pPr>
+            <a:r>
+              <a:rPr sz="1250" b="0">
+                <a:solidFill>
+                  <a:srgbClr val="5A6B8C"/>
+                </a:solidFill>
+                <a:latin typeface="Microsoft JhengHei"/>
+                <a:ea typeface="Microsoft JhengHei"/>
+                <a:cs typeface="Microsoft JhengHei"/>
+              </a:rPr>
+              <a:t>真模型也想捏造引用 — verifier 即時剝除並在畫面標示(Q14)。</a:t>
+            </a:r>
+          </a:p>
+        </p:txBody>
+      </p:sp>
+      <p:sp>
+        <p:nvSpPr>
+          <p:cNvPr id="17" name="Oval 16"/>
+          <p:cNvSpPr/>
+          <p:nvPr/>
+        </p:nvSpPr>
+        <p:spPr>
+          <a:xfrm>
+            <a:off x="7251192" y="5084064"/>
+            <a:ext cx="310896" cy="310896"/>
+          </a:xfrm>
+          <a:prstGeom prst="ellipse">
+            <a:avLst/>
+          </a:prstGeom>
+          <a:solidFill>
+            <a:srgbClr val="F5B020"/>
+          </a:solidFill>
+          <a:ln>
+            <a:noFill/>
+          </a:ln>
+          <a:effectLst/>
+        </p:spPr>
+        <p:style>
+          <a:lnRef idx="1">
+            <a:schemeClr val="accent1"/>
+          </a:lnRef>
+          <a:fillRef idx="3">
+            <a:schemeClr val="accent1"/>
+          </a:fillRef>
+          <a:effectRef idx="2">
+            <a:schemeClr val="accent1"/>
+          </a:effectRef>
+          <a:fontRef idx="minor">
+            <a:schemeClr val="lt1"/>
+          </a:fontRef>
+        </p:style>
+        <p:txBody>
+          <a:bodyPr rtlCol="0" anchor="ctr" tIns="0" bIns="0"/>
+          <a:lstStyle/>
+          <a:p>
+            <a:pPr algn="ctr"/>
+            <a:r>
+              <a:rPr sz="1400" b="1">
+                <a:solidFill>
+                  <a:srgbClr val="FFFFFF"/>
+                </a:solidFill>
+                <a:latin typeface="Microsoft JhengHei"/>
+                <a:ea typeface="Microsoft JhengHei"/>
+                <a:cs typeface="Microsoft JhengHei"/>
+              </a:rPr>
+              <a:t>4</a:t>
+            </a:r>
+          </a:p>
+        </p:txBody>
+      </p:sp>
+      <p:sp>
+        <p:nvSpPr>
+          <p:cNvPr id="18" name="TextBox 17"/>
+          <p:cNvSpPr txBox="1"/>
+          <p:nvPr/>
+        </p:nvSpPr>
+        <p:spPr>
+          <a:xfrm>
+            <a:off x="7708392" y="5047488"/>
+            <a:ext cx="3843223" cy="365760"/>
+          </a:xfrm>
+          <a:prstGeom prst="rect">
+            <a:avLst/>
+          </a:prstGeom>
+          <a:noFill/>
+        </p:spPr>
+        <p:txBody>
+          <a:bodyPr wrap="square" anchor="t" lIns="0" rIns="0" tIns="0" bIns="0">
+            <a:spAutoFit/>
+          </a:bodyPr>
+          <a:lstStyle/>
+          <a:p>
+            <a:pPr algn="l">
+              <a:lnSpc>
+                <a:spcPct val="112000"/>
+              </a:lnSpc>
+              <a:spcBef>
+                <a:spcPts val="0"/>
+              </a:spcBef>
+              <a:spcAft>
+                <a:spcPts val="600"/>
+              </a:spcAft>
+            </a:pPr>
+            <a:r>
+              <a:rPr sz="1550" b="1">
+                <a:solidFill>
+                  <a:srgbClr val="1E3A8A"/>
+                </a:solidFill>
+                <a:latin typeface="Microsoft JhengHei"/>
+                <a:ea typeface="Microsoft JhengHei"/>
+                <a:cs typeface="Microsoft JhengHei"/>
+              </a:rPr>
+              <a:t>繁中申復書草稿</a:t>
+            </a:r>
+          </a:p>
+        </p:txBody>
+      </p:sp>
+      <p:sp>
+        <p:nvSpPr>
+          <p:cNvPr id="19" name="TextBox 18"/>
+          <p:cNvSpPr txBox="1"/>
+          <p:nvPr/>
+        </p:nvSpPr>
+        <p:spPr>
+          <a:xfrm>
+            <a:off x="7708392" y="5385816"/>
+            <a:ext cx="3843223" cy="731520"/>
+          </a:xfrm>
+          <a:prstGeom prst="rect">
+            <a:avLst/>
+          </a:prstGeom>
+          <a:noFill/>
+        </p:spPr>
+        <p:txBody>
+          <a:bodyPr wrap="square" anchor="t" lIns="0" rIns="0" tIns="0" bIns="0">
+            <a:spAutoFit/>
+          </a:bodyPr>
+          <a:lstStyle/>
+          <a:p>
+            <a:pPr algn="l">
+              <a:lnSpc>
+                <a:spcPct val="116000"/>
+              </a:lnSpc>
+              <a:spcBef>
+                <a:spcPts val="0"/>
+              </a:spcBef>
+              <a:spcAft>
+                <a:spcPts val="600"/>
+              </a:spcAft>
+            </a:pPr>
+            <a:r>
+              <a:rPr sz="1250" b="0">
+                <a:solidFill>
+                  <a:srgbClr val="5A6B8C"/>
+                </a:solidFill>
+                <a:latin typeface="Microsoft JhengHei"/>
+                <a:ea typeface="Microsoft JhengHei"/>
+                <a:cs typeface="Microsoft JhengHei"/>
+              </a:rPr>
+              <a:t>qwen2.5:7b 產出 TIPO 格式申復書,逐句簽核後才可匯出(Q16)。</a:t>
+            </a:r>
+          </a:p>
+        </p:txBody>
+      </p:sp>
+      <p:sp>
+        <p:nvSpPr>
+          <p:cNvPr id="20" name="TextBox 19"/>
+          <p:cNvSpPr txBox="1"/>
+          <p:nvPr/>
+        </p:nvSpPr>
+        <p:spPr>
+          <a:xfrm>
+            <a:off x="822960" y="6455664"/>
+            <a:ext cx="8229600" cy="274320"/>
+          </a:xfrm>
+          <a:prstGeom prst="rect">
+            <a:avLst/>
+          </a:prstGeom>
+          <a:noFill/>
+        </p:spPr>
+        <p:txBody>
+          <a:bodyPr wrap="square" anchor="t" lIns="0" rIns="0" tIns="0" bIns="0">
+            <a:spAutoFit/>
+          </a:bodyPr>
+          <a:lstStyle/>
+          <a:p>
+            <a:pPr algn="l">
+              <a:lnSpc>
+                <a:spcPct val="112000"/>
+              </a:lnSpc>
+              <a:spcBef>
+                <a:spcPts val="0"/>
+              </a:spcBef>
+              <a:spcAft>
+                <a:spcPts val="600"/>
+              </a:spcAft>
+            </a:pPr>
+            <a:r>
+              <a:rPr sz="1000" b="0">
+                <a:solidFill>
+                  <a:srgbClr val="8A97B2"/>
+                </a:solidFill>
+                <a:latin typeface="Microsoft JhengHei"/>
+                <a:ea typeface="Microsoft JhengHei"/>
+                <a:cs typeface="Microsoft JhengHei"/>
+              </a:rPr>
+              <a:t>PatentMind AI　·　NCCU GDGoC × Computex 2026</a:t>
+            </a:r>
+          </a:p>
+        </p:txBody>
+      </p:sp>
+      <p:sp>
+        <p:nvSpPr>
+          <p:cNvPr id="21" name="TextBox 20"/>
+          <p:cNvSpPr txBox="1"/>
+          <p:nvPr/>
+        </p:nvSpPr>
+        <p:spPr>
+          <a:xfrm>
+            <a:off x="10637215" y="6455664"/>
+            <a:ext cx="731520" cy="274320"/>
+          </a:xfrm>
+          <a:prstGeom prst="rect">
+            <a:avLst/>
+          </a:prstGeom>
+          <a:noFill/>
+        </p:spPr>
+        <p:txBody>
+          <a:bodyPr wrap="square" anchor="t" lIns="0" rIns="0" tIns="0" bIns="0">
+            <a:spAutoFit/>
+          </a:bodyPr>
+          <a:lstStyle/>
+          <a:p>
+            <a:pPr algn="r">
+              <a:lnSpc>
+                <a:spcPct val="112000"/>
+              </a:lnSpc>
+              <a:spcBef>
+                <a:spcPts val="0"/>
+              </a:spcBef>
+              <a:spcAft>
+                <a:spcPts val="600"/>
+              </a:spcAft>
+            </a:pPr>
+            <a:r>
+              <a:rPr sz="1000" b="0">
+                <a:solidFill>
+                  <a:srgbClr val="8A97B2"/>
+                </a:solidFill>
+                <a:latin typeface="Microsoft JhengHei"/>
+                <a:ea typeface="Microsoft JhengHei"/>
+                <a:cs typeface="Microsoft JhengHei"/>
+              </a:rPr>
+              <a:t>11</a:t>
+            </a:r>
+          </a:p>
+        </p:txBody>
+      </p:sp>
     </p:spTree>
   </p:cSld>
   <p:clrMapOvr>
@@ -9726,7 +10595,7 @@
                 <a:ea typeface="Microsoft JhengHei"/>
                 <a:cs typeface="Microsoft JhengHei"/>
               </a:rPr>
-              <a:t>06 </a:t>
+              <a:t>05 </a:t>
             </a:r>
             <a:r>
               <a:rPr sz="1400" b="0">
@@ -9737,7 +10606,7 @@
                 <a:ea typeface="Microsoft JhengHei"/>
                 <a:cs typeface="Microsoft JhengHei"/>
               </a:rPr>
-              <a:t>· 未來展望 · 收穫與心得</a:t>
+              <a:t>· Dify 與 digiRunner · 實機證明</a:t>
             </a:r>
           </a:p>
         </p:txBody>
@@ -9784,7 +10653,7 @@
                 <a:ea typeface="Microsoft JhengHei"/>
                 <a:cs typeface="Microsoft JhengHei"/>
               </a:rPr>
-              <a:t>上線整備與反思</a:t>
+              <a:t>實機證明 ②｜稽核鏈與服務狀態</a:t>
             </a:r>
           </a:p>
         </p:txBody>
@@ -9824,112 +10693,49 @@
           </a:fontRef>
         </p:style>
       </p:cxnSp>
-      <p:sp>
-        <p:nvSpPr>
-          <p:cNvPr id="7" name="TextBox 6"/>
-          <p:cNvSpPr txBox="1"/>
-          <p:nvPr/>
-        </p:nvSpPr>
-        <p:spPr>
-          <a:xfrm>
-            <a:off x="8259775" y="182880"/>
-            <a:ext cx="3840480" cy="2377440"/>
-          </a:xfrm>
-          <a:prstGeom prst="rect">
-            <a:avLst/>
-          </a:prstGeom>
-          <a:noFill/>
-        </p:spPr>
-        <p:txBody>
-          <a:bodyPr wrap="square" anchor="t" lIns="0" rIns="0" tIns="0" bIns="0">
-            <a:spAutoFit/>
-          </a:bodyPr>
-          <a:lstStyle/>
-          <a:p>
-            <a:pPr algn="r">
-              <a:lnSpc>
-                <a:spcPct val="112000"/>
-              </a:lnSpc>
-              <a:spcBef>
-                <a:spcPts val="0"/>
-              </a:spcBef>
-              <a:spcAft>
-                <a:spcPts val="600"/>
-              </a:spcAft>
-            </a:pPr>
-            <a:r>
-              <a:rPr sz="15000" b="1">
-                <a:solidFill>
-                  <a:srgbClr val="EEF1F8"/>
-                </a:solidFill>
-                <a:latin typeface="Microsoft JhengHei"/>
-                <a:ea typeface="Microsoft JhengHei"/>
-                <a:cs typeface="Microsoft JhengHei"/>
-              </a:rPr>
-              <a:t>06</a:t>
-            </a:r>
-          </a:p>
-        </p:txBody>
-      </p:sp>
-      <p:sp>
-        <p:nvSpPr>
-          <p:cNvPr id="8" name="TextBox 7"/>
-          <p:cNvSpPr txBox="1"/>
-          <p:nvPr/>
-        </p:nvSpPr>
-        <p:spPr>
-          <a:xfrm>
-            <a:off x="914400" y="2011680"/>
-            <a:ext cx="5120640" cy="365760"/>
-          </a:xfrm>
-          <a:prstGeom prst="rect">
-            <a:avLst/>
-          </a:prstGeom>
-          <a:noFill/>
-        </p:spPr>
-        <p:txBody>
-          <a:bodyPr wrap="square" anchor="t" lIns="0" rIns="0" tIns="0" bIns="0">
-            <a:spAutoFit/>
-          </a:bodyPr>
-          <a:lstStyle/>
-          <a:p>
-            <a:pPr algn="l">
-              <a:lnSpc>
-                <a:spcPct val="112000"/>
-              </a:lnSpc>
-              <a:spcBef>
-                <a:spcPts val="0"/>
-              </a:spcBef>
-              <a:spcAft>
-                <a:spcPts val="600"/>
-              </a:spcAft>
-            </a:pPr>
-            <a:r>
-              <a:rPr sz="1700" b="1">
-                <a:solidFill>
-                  <a:srgbClr val="1E3A8A"/>
-                </a:solidFill>
-                <a:latin typeface="Microsoft JhengHei"/>
-                <a:ea typeface="Microsoft JhengHei"/>
-                <a:cs typeface="Microsoft JhengHei"/>
-              </a:rPr>
-              <a:t>未來展望(P0 上線整備)</a:t>
-            </a:r>
-          </a:p>
-        </p:txBody>
-      </p:sp>
-      <p:sp>
-        <p:nvSpPr>
-          <p:cNvPr id="9" name="Rectangle 8"/>
+      <p:pic>
+        <p:nvPicPr>
+          <p:cNvPr id="7" name="Picture 6" descr="real_08_chain_verified.png"/>
+          <p:cNvPicPr>
+            <a:picLocks noChangeAspect="1"/>
+          </p:cNvPicPr>
+          <p:nvPr/>
+        </p:nvPicPr>
+        <p:blipFill>
+          <a:blip r:embed="rId2"/>
+          <a:stretch>
+            <a:fillRect/>
+          </a:stretch>
+        </p:blipFill>
+        <p:spPr>
+          <a:xfrm>
+            <a:off x="822960" y="2148840"/>
+            <a:ext cx="5925312" cy="3703320"/>
+          </a:xfrm>
+          <a:prstGeom prst="rect">
+            <a:avLst/>
+          </a:prstGeom>
+          <a:effectLst>
+            <a:outerShdw blurRad="90000" dist="38100" dir="5400000" rotWithShape="0">
+              <a:srgbClr val="1A2236">
+                <a:alpha val="26000"/>
+              </a:srgbClr>
+            </a:outerShdw>
+          </a:effectLst>
+        </p:spPr>
+      </p:pic>
+      <p:sp>
+        <p:nvSpPr>
+          <p:cNvPr id="8" name="Oval 7"/>
           <p:cNvSpPr/>
           <p:nvPr/>
         </p:nvSpPr>
         <p:spPr>
           <a:xfrm>
-            <a:off x="914400" y="2500884"/>
-            <a:ext cx="118872" cy="118872"/>
-          </a:xfrm>
-          <a:prstGeom prst="rect">
+            <a:off x="7251192" y="2286000"/>
+            <a:ext cx="310896" cy="310896"/>
+          </a:xfrm>
+          <a:prstGeom prst="ellipse">
             <a:avLst/>
           </a:prstGeom>
           <a:solidFill>
@@ -9955,10 +10761,68 @@
           </a:fontRef>
         </p:style>
         <p:txBody>
-          <a:bodyPr rtlCol="0" anchor="ctr"/>
+          <a:bodyPr rtlCol="0" anchor="ctr" tIns="0" bIns="0"/>
           <a:lstStyle/>
           <a:p>
             <a:pPr algn="ctr"/>
+            <a:r>
+              <a:rPr sz="1400" b="1">
+                <a:solidFill>
+                  <a:srgbClr val="FFFFFF"/>
+                </a:solidFill>
+                <a:latin typeface="Microsoft JhengHei"/>
+                <a:ea typeface="Microsoft JhengHei"/>
+                <a:cs typeface="Microsoft JhengHei"/>
+              </a:rPr>
+              <a:t>1</a:t>
+            </a:r>
+          </a:p>
+        </p:txBody>
+      </p:sp>
+      <p:sp>
+        <p:nvSpPr>
+          <p:cNvPr id="9" name="TextBox 8"/>
+          <p:cNvSpPr txBox="1"/>
+          <p:nvPr/>
+        </p:nvSpPr>
+        <p:spPr>
+          <a:xfrm>
+            <a:off x="7708392" y="2249424"/>
+            <a:ext cx="3843223" cy="365760"/>
+          </a:xfrm>
+          <a:prstGeom prst="rect">
+            <a:avLst/>
+          </a:prstGeom>
+          <a:noFill/>
+        </p:spPr>
+        <p:txBody>
+          <a:bodyPr wrap="square" anchor="t" lIns="0" rIns="0" tIns="0" bIns="0">
+            <a:spAutoFit/>
+          </a:bodyPr>
+          <a:lstStyle/>
+          <a:p>
+            <a:pPr algn="l">
+              <a:lnSpc>
+                <a:spcPct val="112000"/>
+              </a:lnSpc>
+              <a:spcBef>
+                <a:spcPts val="0"/>
+              </a:spcBef>
+              <a:spcAft>
+                <a:spcPts val="600"/>
+              </a:spcAft>
+            </a:pPr>
+            <a:r>
+              <a:rPr sz="1550" b="1">
+                <a:solidFill>
+                  <a:srgbClr val="1E3A8A"/>
+                </a:solidFill>
+                <a:latin typeface="Microsoft JhengHei"/>
+                <a:ea typeface="Microsoft JhengHei"/>
+                <a:cs typeface="Microsoft JhengHei"/>
+              </a:rPr>
+              <a:t>模型欄寫入 dify/qwen2.5:7b</a:t>
+            </a:r>
           </a:p>
         </p:txBody>
       </p:sp>
@@ -9970,57 +10834,57 @@
         </p:nvSpPr>
         <p:spPr>
           <a:xfrm>
-            <a:off x="1207008" y="2423160"/>
-            <a:ext cx="4828031" cy="731520"/>
-          </a:xfrm>
-          <a:prstGeom prst="rect">
-            <a:avLst/>
-          </a:prstGeom>
-          <a:noFill/>
-        </p:spPr>
-        <p:txBody>
-          <a:bodyPr wrap="square" anchor="t" lIns="0" rIns="0" tIns="0" bIns="0">
-            <a:spAutoFit/>
-          </a:bodyPr>
-          <a:lstStyle/>
-          <a:p>
-            <a:pPr algn="l">
-              <a:lnSpc>
-                <a:spcPct val="110000"/>
-              </a:lnSpc>
-              <a:spcBef>
-                <a:spcPts val="0"/>
-              </a:spcBef>
-              <a:spcAft>
-                <a:spcPts val="0"/>
-              </a:spcAft>
-            </a:pPr>
-            <a:r>
-              <a:rPr sz="1350" b="0">
-                <a:solidFill>
-                  <a:srgbClr val="1A2236"/>
-                </a:solidFill>
-                <a:latin typeface="Microsoft JhengHei"/>
-                <a:ea typeface="Microsoft JhengHei"/>
-                <a:cs typeface="Microsoft JhengHei"/>
-              </a:rPr>
-              <a:t>接真實 Anthropic / OpenAI;機密案件走地端 Llama</a:t>
-            </a:r>
-          </a:p>
-        </p:txBody>
-      </p:sp>
-      <p:sp>
-        <p:nvSpPr>
-          <p:cNvPr id="11" name="Rectangle 10"/>
+            <a:off x="7708392" y="2587752"/>
+            <a:ext cx="3843223" cy="731520"/>
+          </a:xfrm>
+          <a:prstGeom prst="rect">
+            <a:avLst/>
+          </a:prstGeom>
+          <a:noFill/>
+        </p:spPr>
+        <p:txBody>
+          <a:bodyPr wrap="square" anchor="t" lIns="0" rIns="0" tIns="0" bIns="0">
+            <a:spAutoFit/>
+          </a:bodyPr>
+          <a:lstStyle/>
+          <a:p>
+            <a:pPr algn="l">
+              <a:lnSpc>
+                <a:spcPct val="116000"/>
+              </a:lnSpc>
+              <a:spcBef>
+                <a:spcPts val="0"/>
+              </a:spcBef>
+              <a:spcAft>
+                <a:spcPts val="600"/>
+              </a:spcAft>
+            </a:pPr>
+            <a:r>
+              <a:rPr sz="1250" b="0">
+                <a:solidFill>
+                  <a:srgbClr val="5A6B8C"/>
+                </a:solidFill>
+                <a:latin typeface="Microsoft JhengHei"/>
+                <a:ea typeface="Microsoft JhengHei"/>
+                <a:cs typeface="Microsoft JhengHei"/>
+              </a:rPr>
+              <a:t>每筆分析的稽核列記錄實際模型 — 可究責、可回溯(Q13)。</a:t>
+            </a:r>
+          </a:p>
+        </p:txBody>
+      </p:sp>
+      <p:sp>
+        <p:nvSpPr>
+          <p:cNvPr id="11" name="Oval 10"/>
           <p:cNvSpPr/>
           <p:nvPr/>
         </p:nvSpPr>
         <p:spPr>
           <a:xfrm>
-            <a:off x="914400" y="3082671"/>
-            <a:ext cx="118872" cy="118872"/>
-          </a:xfrm>
-          <a:prstGeom prst="rect">
+            <a:off x="7251192" y="3218688"/>
+            <a:ext cx="310896" cy="310896"/>
+          </a:xfrm>
+          <a:prstGeom prst="ellipse">
             <a:avLst/>
           </a:prstGeom>
           <a:solidFill>
@@ -10046,10 +10910,21 @@
           </a:fontRef>
         </p:style>
         <p:txBody>
-          <a:bodyPr rtlCol="0" anchor="ctr"/>
+          <a:bodyPr rtlCol="0" anchor="ctr" tIns="0" bIns="0"/>
           <a:lstStyle/>
           <a:p>
             <a:pPr algn="ctr"/>
+            <a:r>
+              <a:rPr sz="1400" b="1">
+                <a:solidFill>
+                  <a:srgbClr val="FFFFFF"/>
+                </a:solidFill>
+                <a:latin typeface="Microsoft JhengHei"/>
+                <a:ea typeface="Microsoft JhengHei"/>
+                <a:cs typeface="Microsoft JhengHei"/>
+              </a:rPr>
+              <a:t>2</a:t>
+            </a:r>
           </a:p>
         </p:txBody>
       </p:sp>
@@ -10061,57 +10936,104 @@
         </p:nvSpPr>
         <p:spPr>
           <a:xfrm>
-            <a:off x="1207008" y="3004947"/>
-            <a:ext cx="4828031" cy="731520"/>
-          </a:xfrm>
-          <a:prstGeom prst="rect">
-            <a:avLst/>
-          </a:prstGeom>
-          <a:noFill/>
-        </p:spPr>
-        <p:txBody>
-          <a:bodyPr wrap="square" anchor="t" lIns="0" rIns="0" tIns="0" bIns="0">
-            <a:spAutoFit/>
-          </a:bodyPr>
-          <a:lstStyle/>
-          <a:p>
-            <a:pPr algn="l">
-              <a:lnSpc>
-                <a:spcPct val="110000"/>
-              </a:lnSpc>
-              <a:spcBef>
-                <a:spcPts val="0"/>
-              </a:spcBef>
-              <a:spcAft>
-                <a:spcPts val="0"/>
-              </a:spcAft>
-            </a:pPr>
-            <a:r>
-              <a:rPr sz="1350" b="0">
-                <a:solidFill>
-                  <a:srgbClr val="1A2236"/>
-                </a:solidFill>
-                <a:latin typeface="Microsoft JhengHei"/>
-                <a:ea typeface="Microsoft JhengHei"/>
-                <a:cs typeface="Microsoft JhengHei"/>
-              </a:rPr>
-              <a:t>SQLite → Postgres + S3 Object Lock(WORM)封存</a:t>
-            </a:r>
-          </a:p>
-        </p:txBody>
-      </p:sp>
-      <p:sp>
-        <p:nvSpPr>
-          <p:cNvPr id="13" name="Rectangle 12"/>
+            <a:off x="7708392" y="3182112"/>
+            <a:ext cx="3843223" cy="365760"/>
+          </a:xfrm>
+          <a:prstGeom prst="rect">
+            <a:avLst/>
+          </a:prstGeom>
+          <a:noFill/>
+        </p:spPr>
+        <p:txBody>
+          <a:bodyPr wrap="square" anchor="t" lIns="0" rIns="0" tIns="0" bIns="0">
+            <a:spAutoFit/>
+          </a:bodyPr>
+          <a:lstStyle/>
+          <a:p>
+            <a:pPr algn="l">
+              <a:lnSpc>
+                <a:spcPct val="112000"/>
+              </a:lnSpc>
+              <a:spcBef>
+                <a:spcPts val="0"/>
+              </a:spcBef>
+              <a:spcAft>
+                <a:spcPts val="600"/>
+              </a:spcAft>
+            </a:pPr>
+            <a:r>
+              <a:rPr sz="1550" b="1">
+                <a:solidFill>
+                  <a:srgbClr val="1E3A8A"/>
+                </a:solidFill>
+                <a:latin typeface="Microsoft JhengHei"/>
+                <a:ea typeface="Microsoft JhengHei"/>
+                <a:cs typeface="Microsoft JhengHei"/>
+              </a:rPr>
+              <a:t>Hash chain 全數驗證</a:t>
+            </a:r>
+          </a:p>
+        </p:txBody>
+      </p:sp>
+      <p:sp>
+        <p:nvSpPr>
+          <p:cNvPr id="13" name="TextBox 12"/>
+          <p:cNvSpPr txBox="1"/>
+          <p:nvPr/>
+        </p:nvSpPr>
+        <p:spPr>
+          <a:xfrm>
+            <a:off x="7708392" y="3520440"/>
+            <a:ext cx="3843223" cy="731520"/>
+          </a:xfrm>
+          <a:prstGeom prst="rect">
+            <a:avLst/>
+          </a:prstGeom>
+          <a:noFill/>
+        </p:spPr>
+        <p:txBody>
+          <a:bodyPr wrap="square" anchor="t" lIns="0" rIns="0" tIns="0" bIns="0">
+            <a:spAutoFit/>
+          </a:bodyPr>
+          <a:lstStyle/>
+          <a:p>
+            <a:pPr algn="l">
+              <a:lnSpc>
+                <a:spcPct val="116000"/>
+              </a:lnSpc>
+              <a:spcBef>
+                <a:spcPts val="0"/>
+              </a:spcBef>
+              <a:spcAft>
+                <a:spcPts val="600"/>
+              </a:spcAft>
+            </a:pPr>
+            <a:r>
+              <a:rPr sz="1250" b="0">
+                <a:solidFill>
+                  <a:srgbClr val="5A6B8C"/>
+                </a:solidFill>
+                <a:latin typeface="Microsoft JhengHei"/>
+                <a:ea typeface="Microsoft JhengHei"/>
+                <a:cs typeface="Microsoft JhengHei"/>
+              </a:rPr>
+              <a:t>29 筆紀錄 0 不一致;append-only + 觸發器阻擋竄改。</a:t>
+            </a:r>
+          </a:p>
+        </p:txBody>
+      </p:sp>
+      <p:sp>
+        <p:nvSpPr>
+          <p:cNvPr id="14" name="Oval 13"/>
           <p:cNvSpPr/>
           <p:nvPr/>
         </p:nvSpPr>
         <p:spPr>
           <a:xfrm>
-            <a:off x="914400" y="3664458"/>
-            <a:ext cx="118872" cy="118872"/>
-          </a:xfrm>
-          <a:prstGeom prst="rect">
+            <a:off x="7251192" y="4151376"/>
+            <a:ext cx="310896" cy="310896"/>
+          </a:xfrm>
+          <a:prstGeom prst="ellipse">
             <a:avLst/>
           </a:prstGeom>
           <a:solidFill>
@@ -10137,72 +11059,130 @@
           </a:fontRef>
         </p:style>
         <p:txBody>
-          <a:bodyPr rtlCol="0" anchor="ctr"/>
+          <a:bodyPr rtlCol="0" anchor="ctr" tIns="0" bIns="0"/>
           <a:lstStyle/>
           <a:p>
             <a:pPr algn="ctr"/>
-          </a:p>
-        </p:txBody>
-      </p:sp>
-      <p:sp>
-        <p:nvSpPr>
-          <p:cNvPr id="14" name="TextBox 13"/>
-          <p:cNvSpPr txBox="1"/>
-          <p:nvPr/>
-        </p:nvSpPr>
-        <p:spPr>
-          <a:xfrm>
-            <a:off x="1207008" y="3586734"/>
-            <a:ext cx="4828031" cy="731520"/>
-          </a:xfrm>
-          <a:prstGeom prst="rect">
-            <a:avLst/>
-          </a:prstGeom>
-          <a:noFill/>
-        </p:spPr>
-        <p:txBody>
-          <a:bodyPr wrap="square" anchor="t" lIns="0" rIns="0" tIns="0" bIns="0">
-            <a:spAutoFit/>
-          </a:bodyPr>
-          <a:lstStyle/>
-          <a:p>
-            <a:pPr algn="l">
-              <a:lnSpc>
-                <a:spcPct val="110000"/>
-              </a:lnSpc>
-              <a:spcBef>
-                <a:spcPts val="0"/>
-              </a:spcBef>
-              <a:spcAft>
-                <a:spcPts val="0"/>
-              </a:spcAft>
-            </a:pPr>
-            <a:r>
-              <a:rPr sz="1350" b="0">
-                <a:solidFill>
-                  <a:srgbClr val="1A2236"/>
-                </a:solidFill>
-                <a:latin typeface="Microsoft JhengHei"/>
-                <a:ea typeface="Microsoft JhengHei"/>
-                <a:cs typeface="Microsoft JhengHei"/>
-              </a:rPr>
-              <a:t>記憶體快取 → Redis;numpy → Qdrant 向量庫</a:t>
-            </a:r>
-          </a:p>
-        </p:txBody>
-      </p:sp>
-      <p:sp>
-        <p:nvSpPr>
-          <p:cNvPr id="15" name="Rectangle 14"/>
+            <a:r>
+              <a:rPr sz="1400" b="1">
+                <a:solidFill>
+                  <a:srgbClr val="FFFFFF"/>
+                </a:solidFill>
+                <a:latin typeface="Microsoft JhengHei"/>
+                <a:ea typeface="Microsoft JhengHei"/>
+                <a:cs typeface="Microsoft JhengHei"/>
+              </a:rPr>
+              <a:t>3</a:t>
+            </a:r>
+          </a:p>
+        </p:txBody>
+      </p:sp>
+      <p:sp>
+        <p:nvSpPr>
+          <p:cNvPr id="15" name="TextBox 14"/>
+          <p:cNvSpPr txBox="1"/>
+          <p:nvPr/>
+        </p:nvSpPr>
+        <p:spPr>
+          <a:xfrm>
+            <a:off x="7708392" y="4114800"/>
+            <a:ext cx="3843223" cy="365760"/>
+          </a:xfrm>
+          <a:prstGeom prst="rect">
+            <a:avLst/>
+          </a:prstGeom>
+          <a:noFill/>
+        </p:spPr>
+        <p:txBody>
+          <a:bodyPr wrap="square" anchor="t" lIns="0" rIns="0" tIns="0" bIns="0">
+            <a:spAutoFit/>
+          </a:bodyPr>
+          <a:lstStyle/>
+          <a:p>
+            <a:pPr algn="l">
+              <a:lnSpc>
+                <a:spcPct val="112000"/>
+              </a:lnSpc>
+              <a:spcBef>
+                <a:spcPts val="0"/>
+              </a:spcBef>
+              <a:spcAft>
+                <a:spcPts val="600"/>
+              </a:spcAft>
+            </a:pPr>
+            <a:r>
+              <a:rPr sz="1550" b="1">
+                <a:solidFill>
+                  <a:srgbClr val="1E3A8A"/>
+                </a:solidFill>
+                <a:latin typeface="Microsoft JhengHei"/>
+                <a:ea typeface="Microsoft JhengHei"/>
+                <a:cs typeface="Microsoft JhengHei"/>
+              </a:rPr>
+              <a:t>遮罩規則留痕</a:t>
+            </a:r>
+          </a:p>
+        </p:txBody>
+      </p:sp>
+      <p:sp>
+        <p:nvSpPr>
+          <p:cNvPr id="16" name="TextBox 15"/>
+          <p:cNvSpPr txBox="1"/>
+          <p:nvPr/>
+        </p:nvSpPr>
+        <p:spPr>
+          <a:xfrm>
+            <a:off x="7708392" y="4453128"/>
+            <a:ext cx="3843223" cy="731520"/>
+          </a:xfrm>
+          <a:prstGeom prst="rect">
+            <a:avLst/>
+          </a:prstGeom>
+          <a:noFill/>
+        </p:spPr>
+        <p:txBody>
+          <a:bodyPr wrap="square" anchor="t" lIns="0" rIns="0" tIns="0" bIns="0">
+            <a:spAutoFit/>
+          </a:bodyPr>
+          <a:lstStyle/>
+          <a:p>
+            <a:pPr algn="l">
+              <a:lnSpc>
+                <a:spcPct val="116000"/>
+              </a:lnSpc>
+              <a:spcBef>
+                <a:spcPts val="0"/>
+              </a:spcBef>
+              <a:spcAft>
+                <a:spcPts val="600"/>
+              </a:spcAft>
+            </a:pPr>
+            <a:r>
+              <a:rPr sz="1250" b="0">
+                <a:solidFill>
+                  <a:srgbClr val="5A6B8C"/>
+                </a:solidFill>
+                <a:latin typeface="Microsoft JhengHei"/>
+                <a:ea typeface="Microsoft JhengHei"/>
+                <a:cs typeface="Microsoft JhengHei"/>
+              </a:rPr>
+              <a:t>phone_tw_landline 等命中規則寫入稽核,證明遮罩真的有跑(Q10)。</a:t>
+            </a:r>
+          </a:p>
+        </p:txBody>
+      </p:sp>
+      <p:sp>
+        <p:nvSpPr>
+          <p:cNvPr id="17" name="Oval 16"/>
           <p:cNvSpPr/>
           <p:nvPr/>
         </p:nvSpPr>
         <p:spPr>
           <a:xfrm>
-            <a:off x="914400" y="4246245"/>
-            <a:ext cx="118872" cy="118872"/>
-          </a:xfrm>
-          <a:prstGeom prst="rect">
+            <a:off x="7251192" y="5084064"/>
+            <a:ext cx="310896" cy="310896"/>
+          </a:xfrm>
+          <a:prstGeom prst="ellipse">
             <a:avLst/>
           </a:prstGeom>
           <a:solidFill>
@@ -10228,101 +11208,21 @@
           </a:fontRef>
         </p:style>
         <p:txBody>
-          <a:bodyPr rtlCol="0" anchor="ctr"/>
+          <a:bodyPr rtlCol="0" anchor="ctr" tIns="0" bIns="0"/>
           <a:lstStyle/>
           <a:p>
             <a:pPr algn="ctr"/>
-          </a:p>
-        </p:txBody>
-      </p:sp>
-      <p:sp>
-        <p:nvSpPr>
-          <p:cNvPr id="16" name="TextBox 15"/>
-          <p:cNvSpPr txBox="1"/>
-          <p:nvPr/>
-        </p:nvSpPr>
-        <p:spPr>
-          <a:xfrm>
-            <a:off x="1207008" y="4168521"/>
-            <a:ext cx="4828031" cy="731520"/>
-          </a:xfrm>
-          <a:prstGeom prst="rect">
-            <a:avLst/>
-          </a:prstGeom>
-          <a:noFill/>
-        </p:spPr>
-        <p:txBody>
-          <a:bodyPr wrap="square" anchor="t" lIns="0" rIns="0" tIns="0" bIns="0">
-            <a:spAutoFit/>
-          </a:bodyPr>
-          <a:lstStyle/>
-          <a:p>
-            <a:pPr algn="l">
-              <a:lnSpc>
-                <a:spcPct val="110000"/>
-              </a:lnSpc>
-              <a:spcBef>
-                <a:spcPts val="0"/>
-              </a:spcBef>
-              <a:spcAft>
-                <a:spcPts val="0"/>
-              </a:spcAft>
-            </a:pPr>
-            <a:r>
-              <a:rPr sz="1350" b="0">
-                <a:solidFill>
-                  <a:srgbClr val="1A2236"/>
-                </a:solidFill>
-                <a:latin typeface="Microsoft JhengHei"/>
-                <a:ea typeface="Microsoft JhengHei"/>
-                <a:cs typeface="Microsoft JhengHei"/>
-              </a:rPr>
-              <a:t>PDF / DOCX 上傳 + Vision 讀圖;OIDC / SAML SSO</a:t>
-            </a:r>
-          </a:p>
-        </p:txBody>
-      </p:sp>
-      <p:sp>
-        <p:nvSpPr>
-          <p:cNvPr id="17" name="Rectangle 16"/>
-          <p:cNvSpPr/>
-          <p:nvPr/>
-        </p:nvSpPr>
-        <p:spPr>
-          <a:xfrm>
-            <a:off x="914400" y="4828032"/>
-            <a:ext cx="118872" cy="118872"/>
-          </a:xfrm>
-          <a:prstGeom prst="rect">
-            <a:avLst/>
-          </a:prstGeom>
-          <a:solidFill>
-            <a:srgbClr val="F5B020"/>
-          </a:solidFill>
-          <a:ln>
-            <a:noFill/>
-          </a:ln>
-          <a:effectLst/>
-        </p:spPr>
-        <p:style>
-          <a:lnRef idx="1">
-            <a:schemeClr val="accent1"/>
-          </a:lnRef>
-          <a:fillRef idx="3">
-            <a:schemeClr val="accent1"/>
-          </a:fillRef>
-          <a:effectRef idx="2">
-            <a:schemeClr val="accent1"/>
-          </a:effectRef>
-          <a:fontRef idx="minor">
-            <a:schemeClr val="lt1"/>
-          </a:fontRef>
-        </p:style>
-        <p:txBody>
-          <a:bodyPr rtlCol="0" anchor="ctr"/>
-          <a:lstStyle/>
-          <a:p>
-            <a:pPr algn="ctr"/>
+            <a:r>
+              <a:rPr sz="1400" b="1">
+                <a:solidFill>
+                  <a:srgbClr val="FFFFFF"/>
+                </a:solidFill>
+                <a:latin typeface="Microsoft JhengHei"/>
+                <a:ea typeface="Microsoft JhengHei"/>
+                <a:cs typeface="Microsoft JhengHei"/>
+              </a:rPr>
+              <a:t>4</a:t>
+            </a:r>
           </a:p>
         </p:txBody>
       </p:sp>
@@ -10334,41 +11234,41 @@
         </p:nvSpPr>
         <p:spPr>
           <a:xfrm>
-            <a:off x="1207008" y="4750308"/>
-            <a:ext cx="4828031" cy="731520"/>
-          </a:xfrm>
-          <a:prstGeom prst="rect">
-            <a:avLst/>
-          </a:prstGeom>
-          <a:noFill/>
-        </p:spPr>
-        <p:txBody>
-          <a:bodyPr wrap="square" anchor="t" lIns="0" rIns="0" tIns="0" bIns="0">
-            <a:spAutoFit/>
-          </a:bodyPr>
-          <a:lstStyle/>
-          <a:p>
-            <a:pPr algn="l">
-              <a:lnSpc>
-                <a:spcPct val="110000"/>
-              </a:lnSpc>
-              <a:spcBef>
-                <a:spcPts val="0"/>
-              </a:spcBef>
-              <a:spcAft>
-                <a:spcPts val="0"/>
-              </a:spcAft>
-            </a:pPr>
-            <a:r>
-              <a:rPr sz="1350" b="0">
-                <a:solidFill>
-                  <a:srgbClr val="1A2236"/>
-                </a:solidFill>
-                <a:latin typeface="Microsoft JhengHei"/>
-                <a:ea typeface="Microsoft JhengHei"/>
-                <a:cs typeface="Microsoft JhengHei"/>
-              </a:rPr>
-              <a:t>Prometheus + Grafana 可觀測性與 AI 品質評測</a:t>
+            <a:off x="7708392" y="5047488"/>
+            <a:ext cx="3843223" cy="365760"/>
+          </a:xfrm>
+          <a:prstGeom prst="rect">
+            <a:avLst/>
+          </a:prstGeom>
+          <a:noFill/>
+        </p:spPr>
+        <p:txBody>
+          <a:bodyPr wrap="square" anchor="t" lIns="0" rIns="0" tIns="0" bIns="0">
+            <a:spAutoFit/>
+          </a:bodyPr>
+          <a:lstStyle/>
+          <a:p>
+            <a:pPr algn="l">
+              <a:lnSpc>
+                <a:spcPct val="112000"/>
+              </a:lnSpc>
+              <a:spcBef>
+                <a:spcPts val="0"/>
+              </a:spcBef>
+              <a:spcAft>
+                <a:spcPts val="600"/>
+              </a:spcAft>
+            </a:pPr>
+            <a:r>
+              <a:rPr sz="1550" b="1">
+                <a:solidFill>
+                  <a:srgbClr val="1E3A8A"/>
+                </a:solidFill>
+                <a:latin typeface="Microsoft JhengHei"/>
+                <a:ea typeface="Microsoft JhengHei"/>
+                <a:cs typeface="Microsoft JhengHei"/>
+              </a:rPr>
+              <a:t>四燈服務狀態</a:t>
             </a:r>
           </a:p>
         </p:txBody>
@@ -10381,23 +11281,23 @@
         </p:nvSpPr>
         <p:spPr>
           <a:xfrm>
-            <a:off x="6400800" y="2011680"/>
-            <a:ext cx="4937760" cy="365760"/>
-          </a:xfrm>
-          <a:prstGeom prst="rect">
-            <a:avLst/>
-          </a:prstGeom>
-          <a:noFill/>
-        </p:spPr>
-        <p:txBody>
-          <a:bodyPr wrap="square" anchor="t" lIns="0" rIns="0" tIns="0" bIns="0">
-            <a:spAutoFit/>
-          </a:bodyPr>
-          <a:lstStyle/>
-          <a:p>
-            <a:pPr algn="l">
-              <a:lnSpc>
-                <a:spcPct val="112000"/>
+            <a:off x="7708392" y="5385816"/>
+            <a:ext cx="3843223" cy="731520"/>
+          </a:xfrm>
+          <a:prstGeom prst="rect">
+            <a:avLst/>
+          </a:prstGeom>
+          <a:noFill/>
+        </p:spPr>
+        <p:txBody>
+          <a:bodyPr wrap="square" anchor="t" lIns="0" rIns="0" tIns="0" bIns="0">
+            <a:spAutoFit/>
+          </a:bodyPr>
+          <a:lstStyle/>
+          <a:p>
+            <a:pPr algn="l">
+              <a:lnSpc>
+                <a:spcPct val="116000"/>
               </a:lnSpc>
               <a:spcBef>
                 <a:spcPts val="0"/>
@@ -10407,386 +11307,22 @@
               </a:spcAft>
             </a:pPr>
             <a:r>
-              <a:rPr sz="1700" b="1">
-                <a:solidFill>
-                  <a:srgbClr val="1E3A8A"/>
-                </a:solidFill>
-                <a:latin typeface="Microsoft JhengHei"/>
-                <a:ea typeface="Microsoft JhengHei"/>
-                <a:cs typeface="Microsoft JhengHei"/>
-              </a:rPr>
-              <a:t>收穫與心得</a:t>
-            </a:r>
-          </a:p>
-        </p:txBody>
-      </p:sp>
-      <p:sp>
-        <p:nvSpPr>
-          <p:cNvPr id="20" name="Rectangle 19"/>
-          <p:cNvSpPr/>
-          <p:nvPr/>
-        </p:nvSpPr>
-        <p:spPr>
-          <a:xfrm>
-            <a:off x="6400800" y="2500884"/>
-            <a:ext cx="118872" cy="118872"/>
-          </a:xfrm>
-          <a:prstGeom prst="rect">
-            <a:avLst/>
-          </a:prstGeom>
-          <a:solidFill>
-            <a:srgbClr val="F5B020"/>
-          </a:solidFill>
-          <a:ln>
-            <a:noFill/>
-          </a:ln>
-          <a:effectLst/>
-        </p:spPr>
-        <p:style>
-          <a:lnRef idx="1">
-            <a:schemeClr val="accent1"/>
-          </a:lnRef>
-          <a:fillRef idx="3">
-            <a:schemeClr val="accent1"/>
-          </a:fillRef>
-          <a:effectRef idx="2">
-            <a:schemeClr val="accent1"/>
-          </a:effectRef>
-          <a:fontRef idx="minor">
-            <a:schemeClr val="lt1"/>
-          </a:fontRef>
-        </p:style>
-        <p:txBody>
-          <a:bodyPr rtlCol="0" anchor="ctr"/>
-          <a:lstStyle/>
-          <a:p>
-            <a:pPr algn="ctr"/>
-          </a:p>
-        </p:txBody>
-      </p:sp>
-      <p:sp>
-        <p:nvSpPr>
-          <p:cNvPr id="21" name="TextBox 20"/>
-          <p:cNvSpPr txBox="1"/>
-          <p:nvPr/>
-        </p:nvSpPr>
-        <p:spPr>
-          <a:xfrm>
-            <a:off x="6693408" y="2423160"/>
-            <a:ext cx="4645152" cy="731520"/>
-          </a:xfrm>
-          <a:prstGeom prst="rect">
-            <a:avLst/>
-          </a:prstGeom>
-          <a:noFill/>
-        </p:spPr>
-        <p:txBody>
-          <a:bodyPr wrap="square" anchor="t" lIns="0" rIns="0" tIns="0" bIns="0">
-            <a:spAutoFit/>
-          </a:bodyPr>
-          <a:lstStyle/>
-          <a:p>
-            <a:pPr algn="l">
-              <a:lnSpc>
-                <a:spcPct val="110000"/>
-              </a:lnSpc>
-              <a:spcBef>
-                <a:spcPts val="0"/>
-              </a:spcBef>
-              <a:spcAft>
-                <a:spcPts val="0"/>
-              </a:spcAft>
-            </a:pPr>
-            <a:r>
-              <a:rPr sz="1350" b="0">
-                <a:solidFill>
-                  <a:srgbClr val="1A2236"/>
-                </a:solidFill>
-                <a:latin typeface="Microsoft JhengHei"/>
-                <a:ea typeface="Microsoft JhengHei"/>
-                <a:cs typeface="Microsoft JhengHei"/>
-              </a:rPr>
-              <a:t>把 20 項架構決策變成「測試守得住的不變式」,而非口頭規範</a:t>
-            </a:r>
-          </a:p>
-        </p:txBody>
-      </p:sp>
-      <p:sp>
-        <p:nvSpPr>
-          <p:cNvPr id="22" name="Rectangle 21"/>
-          <p:cNvSpPr/>
-          <p:nvPr/>
-        </p:nvSpPr>
-        <p:spPr>
-          <a:xfrm>
-            <a:off x="6400800" y="3082671"/>
-            <a:ext cx="118872" cy="118872"/>
-          </a:xfrm>
-          <a:prstGeom prst="rect">
-            <a:avLst/>
-          </a:prstGeom>
-          <a:solidFill>
-            <a:srgbClr val="F5B020"/>
-          </a:solidFill>
-          <a:ln>
-            <a:noFill/>
-          </a:ln>
-          <a:effectLst/>
-        </p:spPr>
-        <p:style>
-          <a:lnRef idx="1">
-            <a:schemeClr val="accent1"/>
-          </a:lnRef>
-          <a:fillRef idx="3">
-            <a:schemeClr val="accent1"/>
-          </a:fillRef>
-          <a:effectRef idx="2">
-            <a:schemeClr val="accent1"/>
-          </a:effectRef>
-          <a:fontRef idx="minor">
-            <a:schemeClr val="lt1"/>
-          </a:fontRef>
-        </p:style>
-        <p:txBody>
-          <a:bodyPr rtlCol="0" anchor="ctr"/>
-          <a:lstStyle/>
-          <a:p>
-            <a:pPr algn="ctr"/>
-          </a:p>
-        </p:txBody>
-      </p:sp>
-      <p:sp>
-        <p:nvSpPr>
-          <p:cNvPr id="23" name="TextBox 22"/>
-          <p:cNvSpPr txBox="1"/>
-          <p:nvPr/>
-        </p:nvSpPr>
-        <p:spPr>
-          <a:xfrm>
-            <a:off x="6693408" y="3004947"/>
-            <a:ext cx="4645152" cy="731520"/>
-          </a:xfrm>
-          <a:prstGeom prst="rect">
-            <a:avLst/>
-          </a:prstGeom>
-          <a:noFill/>
-        </p:spPr>
-        <p:txBody>
-          <a:bodyPr wrap="square" anchor="t" lIns="0" rIns="0" tIns="0" bIns="0">
-            <a:spAutoFit/>
-          </a:bodyPr>
-          <a:lstStyle/>
-          <a:p>
-            <a:pPr algn="l">
-              <a:lnSpc>
-                <a:spcPct val="110000"/>
-              </a:lnSpc>
-              <a:spcBef>
-                <a:spcPts val="0"/>
-              </a:spcBef>
-              <a:spcAft>
-                <a:spcPts val="0"/>
-              </a:spcAft>
-            </a:pPr>
-            <a:r>
-              <a:rPr sz="1350" b="0">
-                <a:solidFill>
-                  <a:srgbClr val="1A2236"/>
-                </a:solidFill>
-                <a:latin typeface="Microsoft JhengHei"/>
-                <a:ea typeface="Microsoft JhengHei"/>
-                <a:cs typeface="Microsoft JhengHei"/>
-              </a:rPr>
-              <a:t>安全與信任不是功能,是預設不可關閉的閘道 — 這就是護城河</a:t>
-            </a:r>
-          </a:p>
-        </p:txBody>
-      </p:sp>
-      <p:sp>
-        <p:nvSpPr>
-          <p:cNvPr id="24" name="Rectangle 23"/>
-          <p:cNvSpPr/>
-          <p:nvPr/>
-        </p:nvSpPr>
-        <p:spPr>
-          <a:xfrm>
-            <a:off x="6400800" y="3664458"/>
-            <a:ext cx="118872" cy="118872"/>
-          </a:xfrm>
-          <a:prstGeom prst="rect">
-            <a:avLst/>
-          </a:prstGeom>
-          <a:solidFill>
-            <a:srgbClr val="F5B020"/>
-          </a:solidFill>
-          <a:ln>
-            <a:noFill/>
-          </a:ln>
-          <a:effectLst/>
-        </p:spPr>
-        <p:style>
-          <a:lnRef idx="1">
-            <a:schemeClr val="accent1"/>
-          </a:lnRef>
-          <a:fillRef idx="3">
-            <a:schemeClr val="accent1"/>
-          </a:fillRef>
-          <a:effectRef idx="2">
-            <a:schemeClr val="accent1"/>
-          </a:effectRef>
-          <a:fontRef idx="minor">
-            <a:schemeClr val="lt1"/>
-          </a:fontRef>
-        </p:style>
-        <p:txBody>
-          <a:bodyPr rtlCol="0" anchor="ctr"/>
-          <a:lstStyle/>
-          <a:p>
-            <a:pPr algn="ctr"/>
-          </a:p>
-        </p:txBody>
-      </p:sp>
-      <p:sp>
-        <p:nvSpPr>
-          <p:cNvPr id="25" name="TextBox 24"/>
-          <p:cNvSpPr txBox="1"/>
-          <p:nvPr/>
-        </p:nvSpPr>
-        <p:spPr>
-          <a:xfrm>
-            <a:off x="6693408" y="3586734"/>
-            <a:ext cx="4645152" cy="731520"/>
-          </a:xfrm>
-          <a:prstGeom prst="rect">
-            <a:avLst/>
-          </a:prstGeom>
-          <a:noFill/>
-        </p:spPr>
-        <p:txBody>
-          <a:bodyPr wrap="square" anchor="t" lIns="0" rIns="0" tIns="0" bIns="0">
-            <a:spAutoFit/>
-          </a:bodyPr>
-          <a:lstStyle/>
-          <a:p>
-            <a:pPr algn="l">
-              <a:lnSpc>
-                <a:spcPct val="110000"/>
-              </a:lnSpc>
-              <a:spcBef>
-                <a:spcPts val="0"/>
-              </a:spcBef>
-              <a:spcAft>
-                <a:spcPts val="0"/>
-              </a:spcAft>
-            </a:pPr>
-            <a:r>
-              <a:rPr sz="1350" b="0">
-                <a:solidFill>
-                  <a:srgbClr val="1A2236"/>
-                </a:solidFill>
-                <a:latin typeface="Microsoft JhengHei"/>
-                <a:ea typeface="Microsoft JhengHei"/>
-                <a:cs typeface="Microsoft JhengHei"/>
-              </a:rPr>
-              <a:t>受規範領域導入 AI,瓶頸在「可稽核 + 可究責」,不在模型本身</a:t>
-            </a:r>
-          </a:p>
-        </p:txBody>
-      </p:sp>
-      <p:sp>
-        <p:nvSpPr>
-          <p:cNvPr id="26" name="Rectangle 25"/>
-          <p:cNvSpPr/>
-          <p:nvPr/>
-        </p:nvSpPr>
-        <p:spPr>
-          <a:xfrm>
-            <a:off x="6400800" y="4246245"/>
-            <a:ext cx="118872" cy="118872"/>
-          </a:xfrm>
-          <a:prstGeom prst="rect">
-            <a:avLst/>
-          </a:prstGeom>
-          <a:solidFill>
-            <a:srgbClr val="F5B020"/>
-          </a:solidFill>
-          <a:ln>
-            <a:noFill/>
-          </a:ln>
-          <a:effectLst/>
-        </p:spPr>
-        <p:style>
-          <a:lnRef idx="1">
-            <a:schemeClr val="accent1"/>
-          </a:lnRef>
-          <a:fillRef idx="3">
-            <a:schemeClr val="accent1"/>
-          </a:fillRef>
-          <a:effectRef idx="2">
-            <a:schemeClr val="accent1"/>
-          </a:effectRef>
-          <a:fontRef idx="minor">
-            <a:schemeClr val="lt1"/>
-          </a:fontRef>
-        </p:style>
-        <p:txBody>
-          <a:bodyPr rtlCol="0" anchor="ctr"/>
-          <a:lstStyle/>
-          <a:p>
-            <a:pPr algn="ctr"/>
-          </a:p>
-        </p:txBody>
-      </p:sp>
-      <p:sp>
-        <p:nvSpPr>
-          <p:cNvPr id="27" name="TextBox 26"/>
-          <p:cNvSpPr txBox="1"/>
-          <p:nvPr/>
-        </p:nvSpPr>
-        <p:spPr>
-          <a:xfrm>
-            <a:off x="6693408" y="4168521"/>
-            <a:ext cx="4645152" cy="731520"/>
-          </a:xfrm>
-          <a:prstGeom prst="rect">
-            <a:avLst/>
-          </a:prstGeom>
-          <a:noFill/>
-        </p:spPr>
-        <p:txBody>
-          <a:bodyPr wrap="square" anchor="t" lIns="0" rIns="0" tIns="0" bIns="0">
-            <a:spAutoFit/>
-          </a:bodyPr>
-          <a:lstStyle/>
-          <a:p>
-            <a:pPr algn="l">
-              <a:lnSpc>
-                <a:spcPct val="110000"/>
-              </a:lnSpc>
-              <a:spcBef>
-                <a:spcPts val="0"/>
-              </a:spcBef>
-              <a:spcAft>
-                <a:spcPts val="0"/>
-              </a:spcAft>
-            </a:pPr>
-            <a:r>
-              <a:rPr sz="1350" b="0">
-                <a:solidFill>
-                  <a:srgbClr val="1A2236"/>
-                </a:solidFill>
-                <a:latin typeface="Microsoft JhengHei"/>
-                <a:ea typeface="Microsoft JhengHei"/>
-                <a:cs typeface="Microsoft JhengHei"/>
-              </a:rPr>
-              <a:t>Mock-first 讓 demo 可重現,又能 env 一鍵換成 production 元件</a:t>
-            </a:r>
-          </a:p>
-        </p:txBody>
-      </p:sp>
-      <p:sp>
-        <p:nvSpPr>
-          <p:cNvPr id="28" name="TextBox 27"/>
+              <a:rPr sz="1250" b="0">
+                <a:solidFill>
+                  <a:srgbClr val="5A6B8C"/>
+                </a:solidFill>
+                <a:latin typeface="Microsoft JhengHei"/>
+                <a:ea typeface="Microsoft JhengHei"/>
+                <a:cs typeface="Microsoft JhengHei"/>
+              </a:rPr>
+              <a:t>頁尾 Gateway / AI Engine / digiRunner / Dify 即時健康燈號全綠。</a:t>
+            </a:r>
+          </a:p>
+        </p:txBody>
+      </p:sp>
+      <p:sp>
+        <p:nvSpPr>
+          <p:cNvPr id="20" name="TextBox 19"/>
           <p:cNvSpPr txBox="1"/>
           <p:nvPr/>
         </p:nvSpPr>
@@ -10833,7 +11369,7 @@
       </p:sp>
       <p:sp>
         <p:nvSpPr>
-          <p:cNvPr id="29" name="TextBox 28"/>
+          <p:cNvPr id="21" name="TextBox 20"/>
           <p:cNvSpPr txBox="1"/>
           <p:nvPr/>
         </p:nvSpPr>
@@ -10873,7 +11409,7 @@
                 <a:ea typeface="Microsoft JhengHei"/>
                 <a:cs typeface="Microsoft JhengHei"/>
               </a:rPr>
-              <a:t>11</a:t>
+              <a:t>12</a:t>
             </a:r>
           </a:p>
         </p:txBody>
@@ -11026,7 +11562,7 @@
                 <a:ea typeface="Microsoft JhengHei"/>
                 <a:cs typeface="Microsoft JhengHei"/>
               </a:rPr>
-              <a:t>7</a:t>
+              <a:t>6</a:t>
             </a:r>
           </a:p>
         </p:txBody>
@@ -11073,7 +11609,7 @@
                 <a:ea typeface="Microsoft JhengHei"/>
                 <a:cs typeface="Microsoft JhengHei"/>
               </a:rPr>
-              <a:t>Demo</a:t>
+              <a:t>未來展望 · 收穫與心得</a:t>
             </a:r>
           </a:p>
         </p:txBody>
@@ -11120,7 +11656,7 @@
                 <a:ea typeface="Microsoft JhengHei"/>
                 <a:cs typeface="Microsoft JhengHei"/>
               </a:rPr>
-              <a:t>Live walkthrough</a:t>
+              <a:t>Roadmap &amp; takeaways</a:t>
             </a:r>
           </a:p>
         </p:txBody>
@@ -12635,7 +13171,7 @@
                 <a:ea typeface="Microsoft JhengHei"/>
                 <a:cs typeface="Microsoft JhengHei"/>
               </a:rPr>
-              <a:t>07 </a:t>
+              <a:t>06 </a:t>
             </a:r>
             <a:r>
               <a:rPr sz="1400" b="0">
@@ -12646,7 +13182,7 @@
                 <a:ea typeface="Microsoft JhengHei"/>
                 <a:cs typeface="Microsoft JhengHei"/>
               </a:rPr>
-              <a:t>· Demo</a:t>
+              <a:t>· 未來展望 · 收穫與心得</a:t>
             </a:r>
           </a:p>
         </p:txBody>
@@ -12693,7 +13229,7 @@
                 <a:ea typeface="Microsoft JhengHei"/>
                 <a:cs typeface="Microsoft JhengHei"/>
               </a:rPr>
-              <a:t>現場操作流程</a:t>
+              <a:t>上線整備與反思</a:t>
             </a:r>
           </a:p>
         </p:txBody>
@@ -12775,7 +13311,7 @@
                 <a:ea typeface="Microsoft JhengHei"/>
                 <a:cs typeface="Microsoft JhengHei"/>
               </a:rPr>
-              <a:t>07</a:t>
+              <a:t>06</a:t>
             </a:r>
           </a:p>
         </p:txBody>
@@ -12788,8 +13324,8 @@
         </p:nvSpPr>
         <p:spPr>
           <a:xfrm>
-            <a:off x="914400" y="2057400"/>
-            <a:ext cx="502920" cy="457200"/>
+            <a:off x="914400" y="2011680"/>
+            <a:ext cx="5120640" cy="365760"/>
           </a:xfrm>
           <a:prstGeom prst="rect">
             <a:avLst/>
@@ -12814,29 +13350,484 @@
               </a:spcAft>
             </a:pPr>
             <a:r>
-              <a:rPr sz="2000" b="1">
-                <a:solidFill>
-                  <a:srgbClr val="F5B020"/>
-                </a:solidFill>
-                <a:latin typeface="Microsoft JhengHei"/>
-                <a:ea typeface="Microsoft JhengHei"/>
-                <a:cs typeface="Microsoft JhengHei"/>
-              </a:rPr>
-              <a:t>01</a:t>
-            </a:r>
-          </a:p>
-        </p:txBody>
-      </p:sp>
-      <p:sp>
-        <p:nvSpPr>
-          <p:cNvPr id="9" name="TextBox 8"/>
-          <p:cNvSpPr txBox="1"/>
-          <p:nvPr/>
-        </p:nvSpPr>
-        <p:spPr>
-          <a:xfrm>
-            <a:off x="1481328" y="2039112"/>
-            <a:ext cx="4572000" cy="365760"/>
+              <a:rPr sz="1700" b="1">
+                <a:solidFill>
+                  <a:srgbClr val="1E3A8A"/>
+                </a:solidFill>
+                <a:latin typeface="Microsoft JhengHei"/>
+                <a:ea typeface="Microsoft JhengHei"/>
+                <a:cs typeface="Microsoft JhengHei"/>
+              </a:rPr>
+              <a:t>未來展望(P0 上線整備)</a:t>
+            </a:r>
+          </a:p>
+        </p:txBody>
+      </p:sp>
+      <p:sp>
+        <p:nvSpPr>
+          <p:cNvPr id="9" name="Rectangle 8"/>
+          <p:cNvSpPr/>
+          <p:nvPr/>
+        </p:nvSpPr>
+        <p:spPr>
+          <a:xfrm>
+            <a:off x="914400" y="2500884"/>
+            <a:ext cx="118872" cy="118872"/>
+          </a:xfrm>
+          <a:prstGeom prst="rect">
+            <a:avLst/>
+          </a:prstGeom>
+          <a:solidFill>
+            <a:srgbClr val="F5B020"/>
+          </a:solidFill>
+          <a:ln>
+            <a:noFill/>
+          </a:ln>
+          <a:effectLst/>
+        </p:spPr>
+        <p:style>
+          <a:lnRef idx="1">
+            <a:schemeClr val="accent1"/>
+          </a:lnRef>
+          <a:fillRef idx="3">
+            <a:schemeClr val="accent1"/>
+          </a:fillRef>
+          <a:effectRef idx="2">
+            <a:schemeClr val="accent1"/>
+          </a:effectRef>
+          <a:fontRef idx="minor">
+            <a:schemeClr val="lt1"/>
+          </a:fontRef>
+        </p:style>
+        <p:txBody>
+          <a:bodyPr rtlCol="0" anchor="ctr"/>
+          <a:lstStyle/>
+          <a:p>
+            <a:pPr algn="ctr"/>
+          </a:p>
+        </p:txBody>
+      </p:sp>
+      <p:sp>
+        <p:nvSpPr>
+          <p:cNvPr id="10" name="TextBox 9"/>
+          <p:cNvSpPr txBox="1"/>
+          <p:nvPr/>
+        </p:nvSpPr>
+        <p:spPr>
+          <a:xfrm>
+            <a:off x="1207008" y="2423160"/>
+            <a:ext cx="4828031" cy="731520"/>
+          </a:xfrm>
+          <a:prstGeom prst="rect">
+            <a:avLst/>
+          </a:prstGeom>
+          <a:noFill/>
+        </p:spPr>
+        <p:txBody>
+          <a:bodyPr wrap="square" anchor="t" lIns="0" rIns="0" tIns="0" bIns="0">
+            <a:spAutoFit/>
+          </a:bodyPr>
+          <a:lstStyle/>
+          <a:p>
+            <a:pPr algn="l">
+              <a:lnSpc>
+                <a:spcPct val="110000"/>
+              </a:lnSpc>
+              <a:spcBef>
+                <a:spcPts val="0"/>
+              </a:spcBef>
+              <a:spcAft>
+                <a:spcPts val="0"/>
+              </a:spcAft>
+            </a:pPr>
+            <a:r>
+              <a:rPr sz="1350" b="0">
+                <a:solidFill>
+                  <a:srgbClr val="1A2236"/>
+                </a:solidFill>
+                <a:latin typeface="Microsoft JhengHei"/>
+                <a:ea typeface="Microsoft JhengHei"/>
+                <a:cs typeface="Microsoft JhengHei"/>
+              </a:rPr>
+              <a:t>✔ 已落地:Redis 快取、Qdrant 向量庫、PDF/DOCX 上傳</a:t>
+            </a:r>
+          </a:p>
+        </p:txBody>
+      </p:sp>
+      <p:sp>
+        <p:nvSpPr>
+          <p:cNvPr id="11" name="Rectangle 10"/>
+          <p:cNvSpPr/>
+          <p:nvPr/>
+        </p:nvSpPr>
+        <p:spPr>
+          <a:xfrm>
+            <a:off x="914400" y="3082671"/>
+            <a:ext cx="118872" cy="118872"/>
+          </a:xfrm>
+          <a:prstGeom prst="rect">
+            <a:avLst/>
+          </a:prstGeom>
+          <a:solidFill>
+            <a:srgbClr val="F5B020"/>
+          </a:solidFill>
+          <a:ln>
+            <a:noFill/>
+          </a:ln>
+          <a:effectLst/>
+        </p:spPr>
+        <p:style>
+          <a:lnRef idx="1">
+            <a:schemeClr val="accent1"/>
+          </a:lnRef>
+          <a:fillRef idx="3">
+            <a:schemeClr val="accent1"/>
+          </a:fillRef>
+          <a:effectRef idx="2">
+            <a:schemeClr val="accent1"/>
+          </a:effectRef>
+          <a:fontRef idx="minor">
+            <a:schemeClr val="lt1"/>
+          </a:fontRef>
+        </p:style>
+        <p:txBody>
+          <a:bodyPr rtlCol="0" anchor="ctr"/>
+          <a:lstStyle/>
+          <a:p>
+            <a:pPr algn="ctr"/>
+          </a:p>
+        </p:txBody>
+      </p:sp>
+      <p:sp>
+        <p:nvSpPr>
+          <p:cNvPr id="12" name="TextBox 11"/>
+          <p:cNvSpPr txBox="1"/>
+          <p:nvPr/>
+        </p:nvSpPr>
+        <p:spPr>
+          <a:xfrm>
+            <a:off x="1207008" y="3004947"/>
+            <a:ext cx="4828031" cy="731520"/>
+          </a:xfrm>
+          <a:prstGeom prst="rect">
+            <a:avLst/>
+          </a:prstGeom>
+          <a:noFill/>
+        </p:spPr>
+        <p:txBody>
+          <a:bodyPr wrap="square" anchor="t" lIns="0" rIns="0" tIns="0" bIns="0">
+            <a:spAutoFit/>
+          </a:bodyPr>
+          <a:lstStyle/>
+          <a:p>
+            <a:pPr algn="l">
+              <a:lnSpc>
+                <a:spcPct val="110000"/>
+              </a:lnSpc>
+              <a:spcBef>
+                <a:spcPts val="0"/>
+              </a:spcBef>
+              <a:spcAft>
+                <a:spcPts val="0"/>
+              </a:spcAft>
+            </a:pPr>
+            <a:r>
+              <a:rPr sz="1350" b="0">
+                <a:solidFill>
+                  <a:srgbClr val="1A2236"/>
+                </a:solidFill>
+                <a:latin typeface="Microsoft JhengHei"/>
+                <a:ea typeface="Microsoft JhengHei"/>
+                <a:cs typeface="Microsoft JhengHei"/>
+              </a:rPr>
+              <a:t>✔ 已落地:OIDC/SAML 介接層、WORM 稽核封存、digiRunner+Dify 實機</a:t>
+            </a:r>
+          </a:p>
+        </p:txBody>
+      </p:sp>
+      <p:sp>
+        <p:nvSpPr>
+          <p:cNvPr id="13" name="Rectangle 12"/>
+          <p:cNvSpPr/>
+          <p:nvPr/>
+        </p:nvSpPr>
+        <p:spPr>
+          <a:xfrm>
+            <a:off x="914400" y="3664458"/>
+            <a:ext cx="118872" cy="118872"/>
+          </a:xfrm>
+          <a:prstGeom prst="rect">
+            <a:avLst/>
+          </a:prstGeom>
+          <a:solidFill>
+            <a:srgbClr val="F5B020"/>
+          </a:solidFill>
+          <a:ln>
+            <a:noFill/>
+          </a:ln>
+          <a:effectLst/>
+        </p:spPr>
+        <p:style>
+          <a:lnRef idx="1">
+            <a:schemeClr val="accent1"/>
+          </a:lnRef>
+          <a:fillRef idx="3">
+            <a:schemeClr val="accent1"/>
+          </a:fillRef>
+          <a:effectRef idx="2">
+            <a:schemeClr val="accent1"/>
+          </a:effectRef>
+          <a:fontRef idx="minor">
+            <a:schemeClr val="lt1"/>
+          </a:fontRef>
+        </p:style>
+        <p:txBody>
+          <a:bodyPr rtlCol="0" anchor="ctr"/>
+          <a:lstStyle/>
+          <a:p>
+            <a:pPr algn="ctr"/>
+          </a:p>
+        </p:txBody>
+      </p:sp>
+      <p:sp>
+        <p:nvSpPr>
+          <p:cNvPr id="14" name="TextBox 13"/>
+          <p:cNvSpPr txBox="1"/>
+          <p:nvPr/>
+        </p:nvSpPr>
+        <p:spPr>
+          <a:xfrm>
+            <a:off x="1207008" y="3586734"/>
+            <a:ext cx="4828031" cy="731520"/>
+          </a:xfrm>
+          <a:prstGeom prst="rect">
+            <a:avLst/>
+          </a:prstGeom>
+          <a:noFill/>
+        </p:spPr>
+        <p:txBody>
+          <a:bodyPr wrap="square" anchor="t" lIns="0" rIns="0" tIns="0" bIns="0">
+            <a:spAutoFit/>
+          </a:bodyPr>
+          <a:lstStyle/>
+          <a:p>
+            <a:pPr algn="l">
+              <a:lnSpc>
+                <a:spcPct val="110000"/>
+              </a:lnSpc>
+              <a:spcBef>
+                <a:spcPts val="0"/>
+              </a:spcBef>
+              <a:spcAft>
+                <a:spcPts val="0"/>
+              </a:spcAft>
+            </a:pPr>
+            <a:r>
+              <a:rPr sz="1350" b="0">
+                <a:solidFill>
+                  <a:srgbClr val="1A2236"/>
+                </a:solidFill>
+                <a:latin typeface="Microsoft JhengHei"/>
+                <a:ea typeface="Microsoft JhengHei"/>
+                <a:cs typeface="Microsoft JhengHei"/>
+              </a:rPr>
+              <a:t>接真實 Anthropic API(架構已就緒,等 key);Vision 讀圖擴大</a:t>
+            </a:r>
+          </a:p>
+        </p:txBody>
+      </p:sp>
+      <p:sp>
+        <p:nvSpPr>
+          <p:cNvPr id="15" name="Rectangle 14"/>
+          <p:cNvSpPr/>
+          <p:nvPr/>
+        </p:nvSpPr>
+        <p:spPr>
+          <a:xfrm>
+            <a:off x="914400" y="4246245"/>
+            <a:ext cx="118872" cy="118872"/>
+          </a:xfrm>
+          <a:prstGeom prst="rect">
+            <a:avLst/>
+          </a:prstGeom>
+          <a:solidFill>
+            <a:srgbClr val="F5B020"/>
+          </a:solidFill>
+          <a:ln>
+            <a:noFill/>
+          </a:ln>
+          <a:effectLst/>
+        </p:spPr>
+        <p:style>
+          <a:lnRef idx="1">
+            <a:schemeClr val="accent1"/>
+          </a:lnRef>
+          <a:fillRef idx="3">
+            <a:schemeClr val="accent1"/>
+          </a:fillRef>
+          <a:effectRef idx="2">
+            <a:schemeClr val="accent1"/>
+          </a:effectRef>
+          <a:fontRef idx="minor">
+            <a:schemeClr val="lt1"/>
+          </a:fontRef>
+        </p:style>
+        <p:txBody>
+          <a:bodyPr rtlCol="0" anchor="ctr"/>
+          <a:lstStyle/>
+          <a:p>
+            <a:pPr algn="ctr"/>
+          </a:p>
+        </p:txBody>
+      </p:sp>
+      <p:sp>
+        <p:nvSpPr>
+          <p:cNvPr id="16" name="TextBox 15"/>
+          <p:cNvSpPr txBox="1"/>
+          <p:nvPr/>
+        </p:nvSpPr>
+        <p:spPr>
+          <a:xfrm>
+            <a:off x="1207008" y="4168521"/>
+            <a:ext cx="4828031" cy="731520"/>
+          </a:xfrm>
+          <a:prstGeom prst="rect">
+            <a:avLst/>
+          </a:prstGeom>
+          <a:noFill/>
+        </p:spPr>
+        <p:txBody>
+          <a:bodyPr wrap="square" anchor="t" lIns="0" rIns="0" tIns="0" bIns="0">
+            <a:spAutoFit/>
+          </a:bodyPr>
+          <a:lstStyle/>
+          <a:p>
+            <a:pPr algn="l">
+              <a:lnSpc>
+                <a:spcPct val="110000"/>
+              </a:lnSpc>
+              <a:spcBef>
+                <a:spcPts val="0"/>
+              </a:spcBef>
+              <a:spcAft>
+                <a:spcPts val="0"/>
+              </a:spcAft>
+            </a:pPr>
+            <a:r>
+              <a:rPr sz="1350" b="0">
+                <a:solidFill>
+                  <a:srgbClr val="1A2236"/>
+                </a:solidFill>
+                <a:latin typeface="Microsoft JhengHei"/>
+                <a:ea typeface="Microsoft JhengHei"/>
+                <a:cs typeface="Microsoft JhengHei"/>
+              </a:rPr>
+              <a:t>Postgres 稽核主存 + S3 Object Lock;Grafana 儀表板</a:t>
+            </a:r>
+          </a:p>
+        </p:txBody>
+      </p:sp>
+      <p:sp>
+        <p:nvSpPr>
+          <p:cNvPr id="17" name="Rectangle 16"/>
+          <p:cNvSpPr/>
+          <p:nvPr/>
+        </p:nvSpPr>
+        <p:spPr>
+          <a:xfrm>
+            <a:off x="914400" y="4828032"/>
+            <a:ext cx="118872" cy="118872"/>
+          </a:xfrm>
+          <a:prstGeom prst="rect">
+            <a:avLst/>
+          </a:prstGeom>
+          <a:solidFill>
+            <a:srgbClr val="F5B020"/>
+          </a:solidFill>
+          <a:ln>
+            <a:noFill/>
+          </a:ln>
+          <a:effectLst/>
+        </p:spPr>
+        <p:style>
+          <a:lnRef idx="1">
+            <a:schemeClr val="accent1"/>
+          </a:lnRef>
+          <a:fillRef idx="3">
+            <a:schemeClr val="accent1"/>
+          </a:fillRef>
+          <a:effectRef idx="2">
+            <a:schemeClr val="accent1"/>
+          </a:effectRef>
+          <a:fontRef idx="minor">
+            <a:schemeClr val="lt1"/>
+          </a:fontRef>
+        </p:style>
+        <p:txBody>
+          <a:bodyPr rtlCol="0" anchor="ctr"/>
+          <a:lstStyle/>
+          <a:p>
+            <a:pPr algn="ctr"/>
+          </a:p>
+        </p:txBody>
+      </p:sp>
+      <p:sp>
+        <p:nvSpPr>
+          <p:cNvPr id="18" name="TextBox 17"/>
+          <p:cNvSpPr txBox="1"/>
+          <p:nvPr/>
+        </p:nvSpPr>
+        <p:spPr>
+          <a:xfrm>
+            <a:off x="1207008" y="4750308"/>
+            <a:ext cx="4828031" cy="731520"/>
+          </a:xfrm>
+          <a:prstGeom prst="rect">
+            <a:avLst/>
+          </a:prstGeom>
+          <a:noFill/>
+        </p:spPr>
+        <p:txBody>
+          <a:bodyPr wrap="square" anchor="t" lIns="0" rIns="0" tIns="0" bIns="0">
+            <a:spAutoFit/>
+          </a:bodyPr>
+          <a:lstStyle/>
+          <a:p>
+            <a:pPr algn="l">
+              <a:lnSpc>
+                <a:spcPct val="110000"/>
+              </a:lnSpc>
+              <a:spcBef>
+                <a:spcPts val="0"/>
+              </a:spcBef>
+              <a:spcAft>
+                <a:spcPts val="0"/>
+              </a:spcAft>
+            </a:pPr>
+            <a:r>
+              <a:rPr sz="1350" b="0">
+                <a:solidFill>
+                  <a:srgbClr val="1A2236"/>
+                </a:solidFill>
+                <a:latin typeface="Microsoft JhengHei"/>
+                <a:ea typeface="Microsoft JhengHei"/>
+                <a:cs typeface="Microsoft JhengHei"/>
+              </a:rPr>
+              <a:t>律師抽樣評分的 AI 品質評測週期(30+50 案基線已建)</a:t>
+            </a:r>
+          </a:p>
+        </p:txBody>
+      </p:sp>
+      <p:sp>
+        <p:nvSpPr>
+          <p:cNvPr id="19" name="TextBox 18"/>
+          <p:cNvSpPr txBox="1"/>
+          <p:nvPr/>
+        </p:nvSpPr>
+        <p:spPr>
+          <a:xfrm>
+            <a:off x="6400800" y="2011680"/>
+            <a:ext cx="4937760" cy="365760"/>
           </a:xfrm>
           <a:prstGeom prst="rect">
             <a:avLst/>
@@ -12861,7 +13852,98 @@
               </a:spcAft>
             </a:pPr>
             <a:r>
-              <a:rPr sz="1450" b="1">
+              <a:rPr sz="1700" b="1">
+                <a:solidFill>
+                  <a:srgbClr val="1E3A8A"/>
+                </a:solidFill>
+                <a:latin typeface="Microsoft JhengHei"/>
+                <a:ea typeface="Microsoft JhengHei"/>
+                <a:cs typeface="Microsoft JhengHei"/>
+              </a:rPr>
+              <a:t>收穫與心得</a:t>
+            </a:r>
+          </a:p>
+        </p:txBody>
+      </p:sp>
+      <p:sp>
+        <p:nvSpPr>
+          <p:cNvPr id="20" name="Rectangle 19"/>
+          <p:cNvSpPr/>
+          <p:nvPr/>
+        </p:nvSpPr>
+        <p:spPr>
+          <a:xfrm>
+            <a:off x="6400800" y="2500884"/>
+            <a:ext cx="118872" cy="118872"/>
+          </a:xfrm>
+          <a:prstGeom prst="rect">
+            <a:avLst/>
+          </a:prstGeom>
+          <a:solidFill>
+            <a:srgbClr val="F5B020"/>
+          </a:solidFill>
+          <a:ln>
+            <a:noFill/>
+          </a:ln>
+          <a:effectLst/>
+        </p:spPr>
+        <p:style>
+          <a:lnRef idx="1">
+            <a:schemeClr val="accent1"/>
+          </a:lnRef>
+          <a:fillRef idx="3">
+            <a:schemeClr val="accent1"/>
+          </a:fillRef>
+          <a:effectRef idx="2">
+            <a:schemeClr val="accent1"/>
+          </a:effectRef>
+          <a:fontRef idx="minor">
+            <a:schemeClr val="lt1"/>
+          </a:fontRef>
+        </p:style>
+        <p:txBody>
+          <a:bodyPr rtlCol="0" anchor="ctr"/>
+          <a:lstStyle/>
+          <a:p>
+            <a:pPr algn="ctr"/>
+          </a:p>
+        </p:txBody>
+      </p:sp>
+      <p:sp>
+        <p:nvSpPr>
+          <p:cNvPr id="21" name="TextBox 20"/>
+          <p:cNvSpPr txBox="1"/>
+          <p:nvPr/>
+        </p:nvSpPr>
+        <p:spPr>
+          <a:xfrm>
+            <a:off x="6693408" y="2423160"/>
+            <a:ext cx="4645152" cy="731520"/>
+          </a:xfrm>
+          <a:prstGeom prst="rect">
+            <a:avLst/>
+          </a:prstGeom>
+          <a:noFill/>
+        </p:spPr>
+        <p:txBody>
+          <a:bodyPr wrap="square" anchor="t" lIns="0" rIns="0" tIns="0" bIns="0">
+            <a:spAutoFit/>
+          </a:bodyPr>
+          <a:lstStyle/>
+          <a:p>
+            <a:pPr algn="l">
+              <a:lnSpc>
+                <a:spcPct val="110000"/>
+              </a:lnSpc>
+              <a:spcBef>
+                <a:spcPts val="0"/>
+              </a:spcBef>
+              <a:spcAft>
+                <a:spcPts val="0"/>
+              </a:spcAft>
+            </a:pPr>
+            <a:r>
+              <a:rPr sz="1350" b="0">
                 <a:solidFill>
                   <a:srgbClr val="1A2236"/>
                 </a:solidFill>
@@ -12869,151 +13951,90 @@
                 <a:ea typeface="Microsoft JhengHei"/>
                 <a:cs typeface="Microsoft JhengHei"/>
               </a:rPr>
-              <a:t>以 Alice(律師)登入</a:t>
-            </a:r>
-            <a:r>
-              <a:rPr sz="1100" b="1">
-                <a:solidFill>
-                  <a:srgbClr val="F5B020"/>
-                </a:solidFill>
-                <a:latin typeface="Microsoft JhengHei"/>
-                <a:ea typeface="Microsoft JhengHei"/>
-                <a:cs typeface="Microsoft JhengHei"/>
-              </a:rPr>
-              <a:t>　Q12</a:t>
-            </a:r>
-          </a:p>
-        </p:txBody>
-      </p:sp>
-      <p:sp>
-        <p:nvSpPr>
-          <p:cNvPr id="10" name="TextBox 9"/>
-          <p:cNvSpPr txBox="1"/>
-          <p:nvPr/>
-        </p:nvSpPr>
-        <p:spPr>
-          <a:xfrm>
-            <a:off x="1481328" y="2404872"/>
-            <a:ext cx="4572000" cy="365760"/>
-          </a:xfrm>
-          <a:prstGeom prst="rect">
-            <a:avLst/>
-          </a:prstGeom>
-          <a:noFill/>
-        </p:spPr>
-        <p:txBody>
-          <a:bodyPr wrap="square" anchor="t" lIns="0" rIns="0" tIns="0" bIns="0">
-            <a:spAutoFit/>
-          </a:bodyPr>
-          <a:lstStyle/>
-          <a:p>
-            <a:pPr algn="l">
-              <a:lnSpc>
-                <a:spcPct val="112000"/>
-              </a:lnSpc>
-              <a:spcBef>
-                <a:spcPts val="0"/>
-              </a:spcBef>
-              <a:spcAft>
-                <a:spcPts val="600"/>
-              </a:spcAft>
-            </a:pPr>
-            <a:r>
-              <a:rPr sz="1200" b="0">
-                <a:solidFill>
-                  <a:srgbClr val="5A6B8C"/>
-                </a:solidFill>
-                <a:latin typeface="Microsoft JhengHei"/>
-                <a:ea typeface="Microsoft JhengHei"/>
-                <a:cs typeface="Microsoft JhengHei"/>
-              </a:rPr>
-              <a:t>分析 CASE-2025-001</a:t>
-            </a:r>
-          </a:p>
-        </p:txBody>
-      </p:sp>
-      <p:sp>
-        <p:nvSpPr>
-          <p:cNvPr id="11" name="TextBox 10"/>
-          <p:cNvSpPr txBox="1"/>
-          <p:nvPr/>
-        </p:nvSpPr>
-        <p:spPr>
-          <a:xfrm>
-            <a:off x="914400" y="2990088"/>
-            <a:ext cx="502920" cy="457200"/>
-          </a:xfrm>
-          <a:prstGeom prst="rect">
-            <a:avLst/>
-          </a:prstGeom>
-          <a:noFill/>
-        </p:spPr>
-        <p:txBody>
-          <a:bodyPr wrap="square" anchor="t" lIns="0" rIns="0" tIns="0" bIns="0">
-            <a:spAutoFit/>
-          </a:bodyPr>
-          <a:lstStyle/>
-          <a:p>
-            <a:pPr algn="l">
-              <a:lnSpc>
-                <a:spcPct val="112000"/>
-              </a:lnSpc>
-              <a:spcBef>
-                <a:spcPts val="0"/>
-              </a:spcBef>
-              <a:spcAft>
-                <a:spcPts val="600"/>
-              </a:spcAft>
-            </a:pPr>
-            <a:r>
-              <a:rPr sz="2000" b="1">
-                <a:solidFill>
-                  <a:srgbClr val="F5B020"/>
-                </a:solidFill>
-                <a:latin typeface="Microsoft JhengHei"/>
-                <a:ea typeface="Microsoft JhengHei"/>
-                <a:cs typeface="Microsoft JhengHei"/>
-              </a:rPr>
-              <a:t>02</a:t>
-            </a:r>
-          </a:p>
-        </p:txBody>
-      </p:sp>
-      <p:sp>
-        <p:nvSpPr>
-          <p:cNvPr id="12" name="TextBox 11"/>
-          <p:cNvSpPr txBox="1"/>
-          <p:nvPr/>
-        </p:nvSpPr>
-        <p:spPr>
-          <a:xfrm>
-            <a:off x="1481328" y="2971800"/>
-            <a:ext cx="4572000" cy="365760"/>
-          </a:xfrm>
-          <a:prstGeom prst="rect">
-            <a:avLst/>
-          </a:prstGeom>
-          <a:noFill/>
-        </p:spPr>
-        <p:txBody>
-          <a:bodyPr wrap="square" anchor="t" lIns="0" rIns="0" tIns="0" bIns="0">
-            <a:spAutoFit/>
-          </a:bodyPr>
-          <a:lstStyle/>
-          <a:p>
-            <a:pPr algn="l">
-              <a:lnSpc>
-                <a:spcPct val="112000"/>
-              </a:lnSpc>
-              <a:spcBef>
-                <a:spcPts val="0"/>
-              </a:spcBef>
-              <a:spcAft>
-                <a:spcPts val="600"/>
-              </a:spcAft>
-            </a:pPr>
-            <a:r>
-              <a:rPr sz="1450" b="1">
+              <a:t>把 20 項架構決策變成「測試守得住的不變式」,而非口頭規範</a:t>
+            </a:r>
+          </a:p>
+        </p:txBody>
+      </p:sp>
+      <p:sp>
+        <p:nvSpPr>
+          <p:cNvPr id="22" name="Rectangle 21"/>
+          <p:cNvSpPr/>
+          <p:nvPr/>
+        </p:nvSpPr>
+        <p:spPr>
+          <a:xfrm>
+            <a:off x="6400800" y="3082671"/>
+            <a:ext cx="118872" cy="118872"/>
+          </a:xfrm>
+          <a:prstGeom prst="rect">
+            <a:avLst/>
+          </a:prstGeom>
+          <a:solidFill>
+            <a:srgbClr val="F5B020"/>
+          </a:solidFill>
+          <a:ln>
+            <a:noFill/>
+          </a:ln>
+          <a:effectLst/>
+        </p:spPr>
+        <p:style>
+          <a:lnRef idx="1">
+            <a:schemeClr val="accent1"/>
+          </a:lnRef>
+          <a:fillRef idx="3">
+            <a:schemeClr val="accent1"/>
+          </a:fillRef>
+          <a:effectRef idx="2">
+            <a:schemeClr val="accent1"/>
+          </a:effectRef>
+          <a:fontRef idx="minor">
+            <a:schemeClr val="lt1"/>
+          </a:fontRef>
+        </p:style>
+        <p:txBody>
+          <a:bodyPr rtlCol="0" anchor="ctr"/>
+          <a:lstStyle/>
+          <a:p>
+            <a:pPr algn="ctr"/>
+          </a:p>
+        </p:txBody>
+      </p:sp>
+      <p:sp>
+        <p:nvSpPr>
+          <p:cNvPr id="23" name="TextBox 22"/>
+          <p:cNvSpPr txBox="1"/>
+          <p:nvPr/>
+        </p:nvSpPr>
+        <p:spPr>
+          <a:xfrm>
+            <a:off x="6693408" y="3004947"/>
+            <a:ext cx="4645152" cy="731520"/>
+          </a:xfrm>
+          <a:prstGeom prst="rect">
+            <a:avLst/>
+          </a:prstGeom>
+          <a:noFill/>
+        </p:spPr>
+        <p:txBody>
+          <a:bodyPr wrap="square" anchor="t" lIns="0" rIns="0" tIns="0" bIns="0">
+            <a:spAutoFit/>
+          </a:bodyPr>
+          <a:lstStyle/>
+          <a:p>
+            <a:pPr algn="l">
+              <a:lnSpc>
+                <a:spcPct val="110000"/>
+              </a:lnSpc>
+              <a:spcBef>
+                <a:spcPts val="0"/>
+              </a:spcBef>
+              <a:spcAft>
+                <a:spcPts val="0"/>
+              </a:spcAft>
+            </a:pPr>
+            <a:r>
+              <a:rPr sz="1350" b="0">
                 <a:solidFill>
                   <a:srgbClr val="1A2236"/>
                 </a:solidFill>
@@ -13021,151 +14042,90 @@
                 <a:ea typeface="Microsoft JhengHei"/>
                 <a:cs typeface="Microsoft JhengHei"/>
               </a:rPr>
-              <a:t>預覽 redaction</a:t>
-            </a:r>
-            <a:r>
-              <a:rPr sz="1100" b="1">
-                <a:solidFill>
-                  <a:srgbClr val="F5B020"/>
-                </a:solidFill>
-                <a:latin typeface="Microsoft JhengHei"/>
-                <a:ea typeface="Microsoft JhengHei"/>
-                <a:cs typeface="Microsoft JhengHei"/>
-              </a:rPr>
-              <a:t>　Q10</a:t>
-            </a:r>
-          </a:p>
-        </p:txBody>
-      </p:sp>
-      <p:sp>
-        <p:nvSpPr>
-          <p:cNvPr id="13" name="TextBox 12"/>
-          <p:cNvSpPr txBox="1"/>
-          <p:nvPr/>
-        </p:nvSpPr>
-        <p:spPr>
-          <a:xfrm>
-            <a:off x="1481328" y="3337560"/>
-            <a:ext cx="4572000" cy="365760"/>
-          </a:xfrm>
-          <a:prstGeom prst="rect">
-            <a:avLst/>
-          </a:prstGeom>
-          <a:noFill/>
-        </p:spPr>
-        <p:txBody>
-          <a:bodyPr wrap="square" anchor="t" lIns="0" rIns="0" tIns="0" bIns="0">
-            <a:spAutoFit/>
-          </a:bodyPr>
-          <a:lstStyle/>
-          <a:p>
-            <a:pPr algn="l">
-              <a:lnSpc>
-                <a:spcPct val="112000"/>
-              </a:lnSpc>
-              <a:spcBef>
-                <a:spcPts val="0"/>
-              </a:spcBef>
-              <a:spcAft>
-                <a:spcPts val="600"/>
-              </a:spcAft>
-            </a:pPr>
-            <a:r>
-              <a:rPr sz="1200" b="0">
-                <a:solidFill>
-                  <a:srgbClr val="5A6B8C"/>
-                </a:solidFill>
-                <a:latin typeface="Microsoft JhengHei"/>
-                <a:ea typeface="Microsoft JhengHei"/>
-                <a:cs typeface="Microsoft JhengHei"/>
-              </a:rPr>
-              <a:t>email / 電話 / 案號 → placeholder</a:t>
-            </a:r>
-          </a:p>
-        </p:txBody>
-      </p:sp>
-      <p:sp>
-        <p:nvSpPr>
-          <p:cNvPr id="14" name="TextBox 13"/>
-          <p:cNvSpPr txBox="1"/>
-          <p:nvPr/>
-        </p:nvSpPr>
-        <p:spPr>
-          <a:xfrm>
-            <a:off x="914400" y="3922776"/>
-            <a:ext cx="502920" cy="457200"/>
-          </a:xfrm>
-          <a:prstGeom prst="rect">
-            <a:avLst/>
-          </a:prstGeom>
-          <a:noFill/>
-        </p:spPr>
-        <p:txBody>
-          <a:bodyPr wrap="square" anchor="t" lIns="0" rIns="0" tIns="0" bIns="0">
-            <a:spAutoFit/>
-          </a:bodyPr>
-          <a:lstStyle/>
-          <a:p>
-            <a:pPr algn="l">
-              <a:lnSpc>
-                <a:spcPct val="112000"/>
-              </a:lnSpc>
-              <a:spcBef>
-                <a:spcPts val="0"/>
-              </a:spcBef>
-              <a:spcAft>
-                <a:spcPts val="600"/>
-              </a:spcAft>
-            </a:pPr>
-            <a:r>
-              <a:rPr sz="2000" b="1">
-                <a:solidFill>
-                  <a:srgbClr val="F5B020"/>
-                </a:solidFill>
-                <a:latin typeface="Microsoft JhengHei"/>
-                <a:ea typeface="Microsoft JhengHei"/>
-                <a:cs typeface="Microsoft JhengHei"/>
-              </a:rPr>
-              <a:t>03</a:t>
-            </a:r>
-          </a:p>
-        </p:txBody>
-      </p:sp>
-      <p:sp>
-        <p:nvSpPr>
-          <p:cNvPr id="15" name="TextBox 14"/>
-          <p:cNvSpPr txBox="1"/>
-          <p:nvPr/>
-        </p:nvSpPr>
-        <p:spPr>
-          <a:xfrm>
-            <a:off x="1481328" y="3904488"/>
-            <a:ext cx="4572000" cy="365760"/>
-          </a:xfrm>
-          <a:prstGeom prst="rect">
-            <a:avLst/>
-          </a:prstGeom>
-          <a:noFill/>
-        </p:spPr>
-        <p:txBody>
-          <a:bodyPr wrap="square" anchor="t" lIns="0" rIns="0" tIns="0" bIns="0">
-            <a:spAutoFit/>
-          </a:bodyPr>
-          <a:lstStyle/>
-          <a:p>
-            <a:pPr algn="l">
-              <a:lnSpc>
-                <a:spcPct val="112000"/>
-              </a:lnSpc>
-              <a:spcBef>
-                <a:spcPts val="0"/>
-              </a:spcBef>
-              <a:spcAft>
-                <a:spcPts val="600"/>
-              </a:spcAft>
-            </a:pPr>
-            <a:r>
-              <a:rPr sz="1450" b="1">
+              <a:t>安全與信任不是功能,是預設不可關閉的閘道 — 這就是護城河</a:t>
+            </a:r>
+          </a:p>
+        </p:txBody>
+      </p:sp>
+      <p:sp>
+        <p:nvSpPr>
+          <p:cNvPr id="24" name="Rectangle 23"/>
+          <p:cNvSpPr/>
+          <p:nvPr/>
+        </p:nvSpPr>
+        <p:spPr>
+          <a:xfrm>
+            <a:off x="6400800" y="3664458"/>
+            <a:ext cx="118872" cy="118872"/>
+          </a:xfrm>
+          <a:prstGeom prst="rect">
+            <a:avLst/>
+          </a:prstGeom>
+          <a:solidFill>
+            <a:srgbClr val="F5B020"/>
+          </a:solidFill>
+          <a:ln>
+            <a:noFill/>
+          </a:ln>
+          <a:effectLst/>
+        </p:spPr>
+        <p:style>
+          <a:lnRef idx="1">
+            <a:schemeClr val="accent1"/>
+          </a:lnRef>
+          <a:fillRef idx="3">
+            <a:schemeClr val="accent1"/>
+          </a:fillRef>
+          <a:effectRef idx="2">
+            <a:schemeClr val="accent1"/>
+          </a:effectRef>
+          <a:fontRef idx="minor">
+            <a:schemeClr val="lt1"/>
+          </a:fontRef>
+        </p:style>
+        <p:txBody>
+          <a:bodyPr rtlCol="0" anchor="ctr"/>
+          <a:lstStyle/>
+          <a:p>
+            <a:pPr algn="ctr"/>
+          </a:p>
+        </p:txBody>
+      </p:sp>
+      <p:sp>
+        <p:nvSpPr>
+          <p:cNvPr id="25" name="TextBox 24"/>
+          <p:cNvSpPr txBox="1"/>
+          <p:nvPr/>
+        </p:nvSpPr>
+        <p:spPr>
+          <a:xfrm>
+            <a:off x="6693408" y="3586734"/>
+            <a:ext cx="4645152" cy="731520"/>
+          </a:xfrm>
+          <a:prstGeom prst="rect">
+            <a:avLst/>
+          </a:prstGeom>
+          <a:noFill/>
+        </p:spPr>
+        <p:txBody>
+          <a:bodyPr wrap="square" anchor="t" lIns="0" rIns="0" tIns="0" bIns="0">
+            <a:spAutoFit/>
+          </a:bodyPr>
+          <a:lstStyle/>
+          <a:p>
+            <a:pPr algn="l">
+              <a:lnSpc>
+                <a:spcPct val="110000"/>
+              </a:lnSpc>
+              <a:spcBef>
+                <a:spcPts val="0"/>
+              </a:spcBef>
+              <a:spcAft>
+                <a:spcPts val="0"/>
+              </a:spcAft>
+            </a:pPr>
+            <a:r>
+              <a:rPr sz="1350" b="0">
                 <a:solidFill>
                   <a:srgbClr val="1A2236"/>
                 </a:solidFill>
@@ -13173,151 +14133,90 @@
                 <a:ea typeface="Microsoft JhengHei"/>
                 <a:cs typeface="Microsoft JhengHei"/>
               </a:rPr>
-              <a:t>跑分析 → 點 [GROUNDED_REF_1]</a:t>
-            </a:r>
-            <a:r>
-              <a:rPr sz="1100" b="1">
-                <a:solidFill>
-                  <a:srgbClr val="F5B020"/>
-                </a:solidFill>
-                <a:latin typeface="Microsoft JhengHei"/>
-                <a:ea typeface="Microsoft JhengHei"/>
-                <a:cs typeface="Microsoft JhengHei"/>
-              </a:rPr>
-              <a:t>　Q14</a:t>
-            </a:r>
-          </a:p>
-        </p:txBody>
-      </p:sp>
-      <p:sp>
-        <p:nvSpPr>
-          <p:cNvPr id="16" name="TextBox 15"/>
-          <p:cNvSpPr txBox="1"/>
-          <p:nvPr/>
-        </p:nvSpPr>
-        <p:spPr>
-          <a:xfrm>
-            <a:off x="1481328" y="4270248"/>
-            <a:ext cx="4572000" cy="365760"/>
-          </a:xfrm>
-          <a:prstGeom prst="rect">
-            <a:avLst/>
-          </a:prstGeom>
-          <a:noFill/>
-        </p:spPr>
-        <p:txBody>
-          <a:bodyPr wrap="square" anchor="t" lIns="0" rIns="0" tIns="0" bIns="0">
-            <a:spAutoFit/>
-          </a:bodyPr>
-          <a:lstStyle/>
-          <a:p>
-            <a:pPr algn="l">
-              <a:lnSpc>
-                <a:spcPct val="112000"/>
-              </a:lnSpc>
-              <a:spcBef>
-                <a:spcPts val="0"/>
-              </a:spcBef>
-              <a:spcAft>
-                <a:spcPts val="600"/>
-              </a:spcAft>
-            </a:pPr>
-            <a:r>
-              <a:rPr sz="1200" b="0">
-                <a:solidFill>
-                  <a:srgbClr val="5A6B8C"/>
-                </a:solidFill>
-                <a:latin typeface="Microsoft JhengHei"/>
-                <a:ea typeface="Microsoft JhengHei"/>
-                <a:cs typeface="Microsoft JhengHei"/>
-              </a:rPr>
-              <a:t>看來源專利 + 段落 + 原文</a:t>
-            </a:r>
-          </a:p>
-        </p:txBody>
-      </p:sp>
-      <p:sp>
-        <p:nvSpPr>
-          <p:cNvPr id="17" name="TextBox 16"/>
-          <p:cNvSpPr txBox="1"/>
-          <p:nvPr/>
-        </p:nvSpPr>
-        <p:spPr>
-          <a:xfrm>
-            <a:off x="914400" y="4855464"/>
-            <a:ext cx="502920" cy="457200"/>
-          </a:xfrm>
-          <a:prstGeom prst="rect">
-            <a:avLst/>
-          </a:prstGeom>
-          <a:noFill/>
-        </p:spPr>
-        <p:txBody>
-          <a:bodyPr wrap="square" anchor="t" lIns="0" rIns="0" tIns="0" bIns="0">
-            <a:spAutoFit/>
-          </a:bodyPr>
-          <a:lstStyle/>
-          <a:p>
-            <a:pPr algn="l">
-              <a:lnSpc>
-                <a:spcPct val="112000"/>
-              </a:lnSpc>
-              <a:spcBef>
-                <a:spcPts val="0"/>
-              </a:spcBef>
-              <a:spcAft>
-                <a:spcPts val="600"/>
-              </a:spcAft>
-            </a:pPr>
-            <a:r>
-              <a:rPr sz="2000" b="1">
-                <a:solidFill>
-                  <a:srgbClr val="F5B020"/>
-                </a:solidFill>
-                <a:latin typeface="Microsoft JhengHei"/>
-                <a:ea typeface="Microsoft JhengHei"/>
-                <a:cs typeface="Microsoft JhengHei"/>
-              </a:rPr>
-              <a:t>04</a:t>
-            </a:r>
-          </a:p>
-        </p:txBody>
-      </p:sp>
-      <p:sp>
-        <p:nvSpPr>
-          <p:cNvPr id="18" name="TextBox 17"/>
-          <p:cNvSpPr txBox="1"/>
-          <p:nvPr/>
-        </p:nvSpPr>
-        <p:spPr>
-          <a:xfrm>
-            <a:off x="1481328" y="4837176"/>
-            <a:ext cx="4572000" cy="365760"/>
-          </a:xfrm>
-          <a:prstGeom prst="rect">
-            <a:avLst/>
-          </a:prstGeom>
-          <a:noFill/>
-        </p:spPr>
-        <p:txBody>
-          <a:bodyPr wrap="square" anchor="t" lIns="0" rIns="0" tIns="0" bIns="0">
-            <a:spAutoFit/>
-          </a:bodyPr>
-          <a:lstStyle/>
-          <a:p>
-            <a:pPr algn="l">
-              <a:lnSpc>
-                <a:spcPct val="112000"/>
-              </a:lnSpc>
-              <a:spcBef>
-                <a:spcPts val="0"/>
-              </a:spcBef>
-              <a:spcAft>
-                <a:spcPts val="600"/>
-              </a:spcAft>
-            </a:pPr>
-            <a:r>
-              <a:rPr sz="1450" b="1">
+              <a:t>受規範領域導入 AI,瓶頸在「可稽核 + 可究責」,不在模型本身</a:t>
+            </a:r>
+          </a:p>
+        </p:txBody>
+      </p:sp>
+      <p:sp>
+        <p:nvSpPr>
+          <p:cNvPr id="26" name="Rectangle 25"/>
+          <p:cNvSpPr/>
+          <p:nvPr/>
+        </p:nvSpPr>
+        <p:spPr>
+          <a:xfrm>
+            <a:off x="6400800" y="4246245"/>
+            <a:ext cx="118872" cy="118872"/>
+          </a:xfrm>
+          <a:prstGeom prst="rect">
+            <a:avLst/>
+          </a:prstGeom>
+          <a:solidFill>
+            <a:srgbClr val="F5B020"/>
+          </a:solidFill>
+          <a:ln>
+            <a:noFill/>
+          </a:ln>
+          <a:effectLst/>
+        </p:spPr>
+        <p:style>
+          <a:lnRef idx="1">
+            <a:schemeClr val="accent1"/>
+          </a:lnRef>
+          <a:fillRef idx="3">
+            <a:schemeClr val="accent1"/>
+          </a:fillRef>
+          <a:effectRef idx="2">
+            <a:schemeClr val="accent1"/>
+          </a:effectRef>
+          <a:fontRef idx="minor">
+            <a:schemeClr val="lt1"/>
+          </a:fontRef>
+        </p:style>
+        <p:txBody>
+          <a:bodyPr rtlCol="0" anchor="ctr"/>
+          <a:lstStyle/>
+          <a:p>
+            <a:pPr algn="ctr"/>
+          </a:p>
+        </p:txBody>
+      </p:sp>
+      <p:sp>
+        <p:nvSpPr>
+          <p:cNvPr id="27" name="TextBox 26"/>
+          <p:cNvSpPr txBox="1"/>
+          <p:nvPr/>
+        </p:nvSpPr>
+        <p:spPr>
+          <a:xfrm>
+            <a:off x="6693408" y="4168521"/>
+            <a:ext cx="4645152" cy="731520"/>
+          </a:xfrm>
+          <a:prstGeom prst="rect">
+            <a:avLst/>
+          </a:prstGeom>
+          <a:noFill/>
+        </p:spPr>
+        <p:txBody>
+          <a:bodyPr wrap="square" anchor="t" lIns="0" rIns="0" tIns="0" bIns="0">
+            <a:spAutoFit/>
+          </a:bodyPr>
+          <a:lstStyle/>
+          <a:p>
+            <a:pPr algn="l">
+              <a:lnSpc>
+                <a:spcPct val="110000"/>
+              </a:lnSpc>
+              <a:spcBef>
+                <a:spcPts val="0"/>
+              </a:spcBef>
+              <a:spcAft>
+                <a:spcPts val="0"/>
+              </a:spcAft>
+            </a:pPr>
+            <a:r>
+              <a:rPr sz="1350" b="0">
                 <a:solidFill>
                   <a:srgbClr val="1A2236"/>
                 </a:solidFill>
@@ -13325,474 +14224,7 @@
                 <a:ea typeface="Microsoft JhengHei"/>
                 <a:cs typeface="Microsoft JhengHei"/>
               </a:rPr>
-              <a:t>逐句 Accept / Edit</a:t>
-            </a:r>
-            <a:r>
-              <a:rPr sz="1100" b="1">
-                <a:solidFill>
-                  <a:srgbClr val="F5B020"/>
-                </a:solidFill>
-                <a:latin typeface="Microsoft JhengHei"/>
-                <a:ea typeface="Microsoft JhengHei"/>
-                <a:cs typeface="Microsoft JhengHei"/>
-              </a:rPr>
-              <a:t>　Q16</a:t>
-            </a:r>
-          </a:p>
-        </p:txBody>
-      </p:sp>
-      <p:sp>
-        <p:nvSpPr>
-          <p:cNvPr id="19" name="TextBox 18"/>
-          <p:cNvSpPr txBox="1"/>
-          <p:nvPr/>
-        </p:nvSpPr>
-        <p:spPr>
-          <a:xfrm>
-            <a:off x="1481328" y="5202936"/>
-            <a:ext cx="4572000" cy="365760"/>
-          </a:xfrm>
-          <a:prstGeom prst="rect">
-            <a:avLst/>
-          </a:prstGeom>
-          <a:noFill/>
-        </p:spPr>
-        <p:txBody>
-          <a:bodyPr wrap="square" anchor="t" lIns="0" rIns="0" tIns="0" bIns="0">
-            <a:spAutoFit/>
-          </a:bodyPr>
-          <a:lstStyle/>
-          <a:p>
-            <a:pPr algn="l">
-              <a:lnSpc>
-                <a:spcPct val="112000"/>
-              </a:lnSpc>
-              <a:spcBef>
-                <a:spcPts val="0"/>
-              </a:spcBef>
-              <a:spcAft>
-                <a:spcPts val="600"/>
-              </a:spcAft>
-            </a:pPr>
-            <a:r>
-              <a:rPr sz="1200" b="0">
-                <a:solidFill>
-                  <a:srgbClr val="5A6B8C"/>
-                </a:solidFill>
-                <a:latin typeface="Microsoft JhengHei"/>
-                <a:ea typeface="Microsoft JhengHei"/>
-                <a:cs typeface="Microsoft JhengHei"/>
-              </a:rPr>
-              <a:t>全部簽核才能匯出答辯稿</a:t>
-            </a:r>
-          </a:p>
-        </p:txBody>
-      </p:sp>
-      <p:sp>
-        <p:nvSpPr>
-          <p:cNvPr id="20" name="TextBox 19"/>
-          <p:cNvSpPr txBox="1"/>
-          <p:nvPr/>
-        </p:nvSpPr>
-        <p:spPr>
-          <a:xfrm>
-            <a:off x="6355080" y="2057400"/>
-            <a:ext cx="502920" cy="457200"/>
-          </a:xfrm>
-          <a:prstGeom prst="rect">
-            <a:avLst/>
-          </a:prstGeom>
-          <a:noFill/>
-        </p:spPr>
-        <p:txBody>
-          <a:bodyPr wrap="square" anchor="t" lIns="0" rIns="0" tIns="0" bIns="0">
-            <a:spAutoFit/>
-          </a:bodyPr>
-          <a:lstStyle/>
-          <a:p>
-            <a:pPr algn="l">
-              <a:lnSpc>
-                <a:spcPct val="112000"/>
-              </a:lnSpc>
-              <a:spcBef>
-                <a:spcPts val="0"/>
-              </a:spcBef>
-              <a:spcAft>
-                <a:spcPts val="600"/>
-              </a:spcAft>
-            </a:pPr>
-            <a:r>
-              <a:rPr sz="2000" b="1">
-                <a:solidFill>
-                  <a:srgbClr val="F5B020"/>
-                </a:solidFill>
-                <a:latin typeface="Microsoft JhengHei"/>
-                <a:ea typeface="Microsoft JhengHei"/>
-                <a:cs typeface="Microsoft JhengHei"/>
-              </a:rPr>
-              <a:t>05</a:t>
-            </a:r>
-          </a:p>
-        </p:txBody>
-      </p:sp>
-      <p:sp>
-        <p:nvSpPr>
-          <p:cNvPr id="21" name="TextBox 20"/>
-          <p:cNvSpPr txBox="1"/>
-          <p:nvPr/>
-        </p:nvSpPr>
-        <p:spPr>
-          <a:xfrm>
-            <a:off x="6922008" y="2039112"/>
-            <a:ext cx="4572000" cy="365760"/>
-          </a:xfrm>
-          <a:prstGeom prst="rect">
-            <a:avLst/>
-          </a:prstGeom>
-          <a:noFill/>
-        </p:spPr>
-        <p:txBody>
-          <a:bodyPr wrap="square" anchor="t" lIns="0" rIns="0" tIns="0" bIns="0">
-            <a:spAutoFit/>
-          </a:bodyPr>
-          <a:lstStyle/>
-          <a:p>
-            <a:pPr algn="l">
-              <a:lnSpc>
-                <a:spcPct val="112000"/>
-              </a:lnSpc>
-              <a:spcBef>
-                <a:spcPts val="0"/>
-              </a:spcBef>
-              <a:spcAft>
-                <a:spcPts val="600"/>
-              </a:spcAft>
-            </a:pPr>
-            <a:r>
-              <a:rPr sz="1450" b="1">
-                <a:solidFill>
-                  <a:srgbClr val="1A2236"/>
-                </a:solidFill>
-                <a:latin typeface="Microsoft JhengHei"/>
-                <a:ea typeface="Microsoft JhengHei"/>
-                <a:cs typeface="Microsoft JhengHei"/>
-              </a:rPr>
-              <a:t>以 Dave(稽核)登入</a:t>
-            </a:r>
-            <a:r>
-              <a:rPr sz="1100" b="1">
-                <a:solidFill>
-                  <a:srgbClr val="F5B020"/>
-                </a:solidFill>
-                <a:latin typeface="Microsoft JhengHei"/>
-                <a:ea typeface="Microsoft JhengHei"/>
-                <a:cs typeface="Microsoft JhengHei"/>
-              </a:rPr>
-              <a:t>　Q13</a:t>
-            </a:r>
-          </a:p>
-        </p:txBody>
-      </p:sp>
-      <p:sp>
-        <p:nvSpPr>
-          <p:cNvPr id="22" name="TextBox 21"/>
-          <p:cNvSpPr txBox="1"/>
-          <p:nvPr/>
-        </p:nvSpPr>
-        <p:spPr>
-          <a:xfrm>
-            <a:off x="6922008" y="2404872"/>
-            <a:ext cx="4572000" cy="365760"/>
-          </a:xfrm>
-          <a:prstGeom prst="rect">
-            <a:avLst/>
-          </a:prstGeom>
-          <a:noFill/>
-        </p:spPr>
-        <p:txBody>
-          <a:bodyPr wrap="square" anchor="t" lIns="0" rIns="0" tIns="0" bIns="0">
-            <a:spAutoFit/>
-          </a:bodyPr>
-          <a:lstStyle/>
-          <a:p>
-            <a:pPr algn="l">
-              <a:lnSpc>
-                <a:spcPct val="112000"/>
-              </a:lnSpc>
-              <a:spcBef>
-                <a:spcPts val="0"/>
-              </a:spcBef>
-              <a:spcAft>
-                <a:spcPts val="600"/>
-              </a:spcAft>
-            </a:pPr>
-            <a:r>
-              <a:rPr sz="1200" b="0">
-                <a:solidFill>
-                  <a:srgbClr val="5A6B8C"/>
-                </a:solidFill>
-                <a:latin typeface="Microsoft JhengHei"/>
-                <a:ea typeface="Microsoft JhengHei"/>
-                <a:cs typeface="Microsoft JhengHei"/>
-              </a:rPr>
-              <a:t>看 audit log + 驗證 hash chain(綠)</a:t>
-            </a:r>
-          </a:p>
-        </p:txBody>
-      </p:sp>
-      <p:sp>
-        <p:nvSpPr>
-          <p:cNvPr id="23" name="TextBox 22"/>
-          <p:cNvSpPr txBox="1"/>
-          <p:nvPr/>
-        </p:nvSpPr>
-        <p:spPr>
-          <a:xfrm>
-            <a:off x="6355080" y="2990088"/>
-            <a:ext cx="502920" cy="457200"/>
-          </a:xfrm>
-          <a:prstGeom prst="rect">
-            <a:avLst/>
-          </a:prstGeom>
-          <a:noFill/>
-        </p:spPr>
-        <p:txBody>
-          <a:bodyPr wrap="square" anchor="t" lIns="0" rIns="0" tIns="0" bIns="0">
-            <a:spAutoFit/>
-          </a:bodyPr>
-          <a:lstStyle/>
-          <a:p>
-            <a:pPr algn="l">
-              <a:lnSpc>
-                <a:spcPct val="112000"/>
-              </a:lnSpc>
-              <a:spcBef>
-                <a:spcPts val="0"/>
-              </a:spcBef>
-              <a:spcAft>
-                <a:spcPts val="600"/>
-              </a:spcAft>
-            </a:pPr>
-            <a:r>
-              <a:rPr sz="2000" b="1">
-                <a:solidFill>
-                  <a:srgbClr val="F5B020"/>
-                </a:solidFill>
-                <a:latin typeface="Microsoft JhengHei"/>
-                <a:ea typeface="Microsoft JhengHei"/>
-                <a:cs typeface="Microsoft JhengHei"/>
-              </a:rPr>
-              <a:t>06</a:t>
-            </a:r>
-          </a:p>
-        </p:txBody>
-      </p:sp>
-      <p:sp>
-        <p:nvSpPr>
-          <p:cNvPr id="24" name="TextBox 23"/>
-          <p:cNvSpPr txBox="1"/>
-          <p:nvPr/>
-        </p:nvSpPr>
-        <p:spPr>
-          <a:xfrm>
-            <a:off x="6922008" y="2971800"/>
-            <a:ext cx="4572000" cy="365760"/>
-          </a:xfrm>
-          <a:prstGeom prst="rect">
-            <a:avLst/>
-          </a:prstGeom>
-          <a:noFill/>
-        </p:spPr>
-        <p:txBody>
-          <a:bodyPr wrap="square" anchor="t" lIns="0" rIns="0" tIns="0" bIns="0">
-            <a:spAutoFit/>
-          </a:bodyPr>
-          <a:lstStyle/>
-          <a:p>
-            <a:pPr algn="l">
-              <a:lnSpc>
-                <a:spcPct val="112000"/>
-              </a:lnSpc>
-              <a:spcBef>
-                <a:spcPts val="0"/>
-              </a:spcBef>
-              <a:spcAft>
-                <a:spcPts val="600"/>
-              </a:spcAft>
-            </a:pPr>
-            <a:r>
-              <a:rPr sz="1450" b="1">
-                <a:solidFill>
-                  <a:srgbClr val="1A2236"/>
-                </a:solidFill>
-                <a:latin typeface="Microsoft JhengHei"/>
-                <a:ea typeface="Microsoft JhengHei"/>
-                <a:cs typeface="Microsoft JhengHei"/>
-              </a:rPr>
-              <a:t>改用 -CONF 案號</a:t>
-            </a:r>
-            <a:r>
-              <a:rPr sz="1100" b="1">
-                <a:solidFill>
-                  <a:srgbClr val="F5B020"/>
-                </a:solidFill>
-                <a:latin typeface="Microsoft JhengHei"/>
-                <a:ea typeface="Microsoft JhengHei"/>
-                <a:cs typeface="Microsoft JhengHei"/>
-              </a:rPr>
-              <a:t>　Q15</a:t>
-            </a:r>
-          </a:p>
-        </p:txBody>
-      </p:sp>
-      <p:sp>
-        <p:nvSpPr>
-          <p:cNvPr id="25" name="TextBox 24"/>
-          <p:cNvSpPr txBox="1"/>
-          <p:nvPr/>
-        </p:nvSpPr>
-        <p:spPr>
-          <a:xfrm>
-            <a:off x="6922008" y="3337560"/>
-            <a:ext cx="4572000" cy="365760"/>
-          </a:xfrm>
-          <a:prstGeom prst="rect">
-            <a:avLst/>
-          </a:prstGeom>
-          <a:noFill/>
-        </p:spPr>
-        <p:txBody>
-          <a:bodyPr wrap="square" anchor="t" lIns="0" rIns="0" tIns="0" bIns="0">
-            <a:spAutoFit/>
-          </a:bodyPr>
-          <a:lstStyle/>
-          <a:p>
-            <a:pPr algn="l">
-              <a:lnSpc>
-                <a:spcPct val="112000"/>
-              </a:lnSpc>
-              <a:spcBef>
-                <a:spcPts val="0"/>
-              </a:spcBef>
-              <a:spcAft>
-                <a:spcPts val="600"/>
-              </a:spcAft>
-            </a:pPr>
-            <a:r>
-              <a:rPr sz="1200" b="0">
-                <a:solidFill>
-                  <a:srgbClr val="5A6B8C"/>
-                </a:solidFill>
-                <a:latin typeface="Microsoft JhengHei"/>
-                <a:ea typeface="Microsoft JhengHei"/>
-                <a:cs typeface="Microsoft JhengHei"/>
-              </a:rPr>
-              <a:t>audit 模型自動切地端</a:t>
-            </a:r>
-          </a:p>
-        </p:txBody>
-      </p:sp>
-      <p:sp>
-        <p:nvSpPr>
-          <p:cNvPr id="26" name="TextBox 25"/>
-          <p:cNvSpPr txBox="1"/>
-          <p:nvPr/>
-        </p:nvSpPr>
-        <p:spPr>
-          <a:xfrm>
-            <a:off x="6355080" y="3922776"/>
-            <a:ext cx="502920" cy="457200"/>
-          </a:xfrm>
-          <a:prstGeom prst="rect">
-            <a:avLst/>
-          </a:prstGeom>
-          <a:noFill/>
-        </p:spPr>
-        <p:txBody>
-          <a:bodyPr wrap="square" anchor="t" lIns="0" rIns="0" tIns="0" bIns="0">
-            <a:spAutoFit/>
-          </a:bodyPr>
-          <a:lstStyle/>
-          <a:p>
-            <a:pPr algn="l">
-              <a:lnSpc>
-                <a:spcPct val="112000"/>
-              </a:lnSpc>
-              <a:spcBef>
-                <a:spcPts val="0"/>
-              </a:spcBef>
-              <a:spcAft>
-                <a:spcPts val="600"/>
-              </a:spcAft>
-            </a:pPr>
-            <a:r>
-              <a:rPr sz="2000" b="1">
-                <a:solidFill>
-                  <a:srgbClr val="F5B020"/>
-                </a:solidFill>
-                <a:latin typeface="Microsoft JhengHei"/>
-                <a:ea typeface="Microsoft JhengHei"/>
-                <a:cs typeface="Microsoft JhengHei"/>
-              </a:rPr>
-              <a:t>07</a:t>
-            </a:r>
-          </a:p>
-        </p:txBody>
-      </p:sp>
-      <p:sp>
-        <p:nvSpPr>
-          <p:cNvPr id="27" name="TextBox 26"/>
-          <p:cNvSpPr txBox="1"/>
-          <p:nvPr/>
-        </p:nvSpPr>
-        <p:spPr>
-          <a:xfrm>
-            <a:off x="6922008" y="3904488"/>
-            <a:ext cx="4572000" cy="365760"/>
-          </a:xfrm>
-          <a:prstGeom prst="rect">
-            <a:avLst/>
-          </a:prstGeom>
-          <a:noFill/>
-        </p:spPr>
-        <p:txBody>
-          <a:bodyPr wrap="square" anchor="t" lIns="0" rIns="0" tIns="0" bIns="0">
-            <a:spAutoFit/>
-          </a:bodyPr>
-          <a:lstStyle/>
-          <a:p>
-            <a:pPr algn="l">
-              <a:lnSpc>
-                <a:spcPct val="112000"/>
-              </a:lnSpc>
-              <a:spcBef>
-                <a:spcPts val="0"/>
-              </a:spcBef>
-              <a:spcAft>
-                <a:spcPts val="600"/>
-              </a:spcAft>
-            </a:pPr>
-            <a:r>
-              <a:rPr sz="1450" b="1">
-                <a:solidFill>
-                  <a:srgbClr val="1A2236"/>
-                </a:solidFill>
-                <a:latin typeface="Microsoft JhengHei"/>
-                <a:ea typeface="Microsoft JhengHei"/>
-                <a:cs typeface="Microsoft JhengHei"/>
-              </a:rPr>
-              <a:t>改用 Carol 登入</a:t>
-            </a:r>
-            <a:r>
-              <a:rPr sz="1100" b="1">
-                <a:solidFill>
-                  <a:srgbClr val="F5B020"/>
-                </a:solidFill>
-                <a:latin typeface="Microsoft JhengHei"/>
-                <a:ea typeface="Microsoft JhengHei"/>
-                <a:cs typeface="Microsoft JhengHei"/>
-              </a:rPr>
-              <a:t>　Q12</a:t>
+              <a:t>Mock-first 讓 demo 可重現,又能 env 一鍵換成 production 元件</a:t>
             </a:r>
           </a:p>
         </p:txBody>
@@ -13800,53 +14232,6 @@
       <p:sp>
         <p:nvSpPr>
           <p:cNvPr id="28" name="TextBox 27"/>
-          <p:cNvSpPr txBox="1"/>
-          <p:nvPr/>
-        </p:nvSpPr>
-        <p:spPr>
-          <a:xfrm>
-            <a:off x="6922008" y="4270248"/>
-            <a:ext cx="4572000" cy="365760"/>
-          </a:xfrm>
-          <a:prstGeom prst="rect">
-            <a:avLst/>
-          </a:prstGeom>
-          <a:noFill/>
-        </p:spPr>
-        <p:txBody>
-          <a:bodyPr wrap="square" anchor="t" lIns="0" rIns="0" tIns="0" bIns="0">
-            <a:spAutoFit/>
-          </a:bodyPr>
-          <a:lstStyle/>
-          <a:p>
-            <a:pPr algn="l">
-              <a:lnSpc>
-                <a:spcPct val="112000"/>
-              </a:lnSpc>
-              <a:spcBef>
-                <a:spcPts val="0"/>
-              </a:spcBef>
-              <a:spcAft>
-                <a:spcPts val="600"/>
-              </a:spcAft>
-            </a:pPr>
-            <a:r>
-              <a:rPr sz="1200" b="0">
-                <a:solidFill>
-                  <a:srgbClr val="5A6B8C"/>
-                </a:solidFill>
-                <a:latin typeface="Microsoft JhengHei"/>
-                <a:ea typeface="Microsoft JhengHei"/>
-                <a:cs typeface="Microsoft JhengHei"/>
-              </a:rPr>
-              <a:t>403 — 她不在這個 case</a:t>
-            </a:r>
-          </a:p>
-        </p:txBody>
-      </p:sp>
-      <p:sp>
-        <p:nvSpPr>
-          <p:cNvPr id="29" name="TextBox 28"/>
           <p:cNvSpPr txBox="1"/>
           <p:nvPr/>
         </p:nvSpPr>
@@ -13893,7 +14278,7 @@
       </p:sp>
       <p:sp>
         <p:nvSpPr>
-          <p:cNvPr id="30" name="TextBox 29"/>
+          <p:cNvPr id="29" name="TextBox 28"/>
           <p:cNvSpPr txBox="1"/>
           <p:nvPr/>
         </p:nvSpPr>
@@ -13933,7 +14318,7 @@
                 <a:ea typeface="Microsoft JhengHei"/>
                 <a:cs typeface="Microsoft JhengHei"/>
               </a:rPr>
-              <a:t>12</a:t>
+              <a:t>13</a:t>
             </a:r>
           </a:p>
         </p:txBody>
@@ -13947,6 +14332,1739 @@
 </file>
 
 <file path=ppt/slides/slide21.xml><?xml version="1.0" encoding="utf-8"?>
+<p:sld xmlns:a="http://schemas.openxmlformats.org/drawingml/2006/main" xmlns:p="http://schemas.openxmlformats.org/presentationml/2006/main" xmlns:r="http://schemas.openxmlformats.org/officeDocument/2006/relationships">
+  <p:cSld>
+    <p:spTree>
+      <p:nvGrpSpPr>
+        <p:cNvPr id="1" name=""/>
+        <p:cNvGrpSpPr/>
+        <p:nvPr/>
+      </p:nvGrpSpPr>
+      <p:grpSpPr/>
+      <p:sp>
+        <p:nvSpPr>
+          <p:cNvPr id="2" name="Rectangle 1"/>
+          <p:cNvSpPr/>
+          <p:nvPr/>
+        </p:nvSpPr>
+        <p:spPr>
+          <a:xfrm>
+            <a:off x="0" y="0"/>
+            <a:ext cx="12191695" cy="6858000"/>
+          </a:xfrm>
+          <a:prstGeom prst="rect">
+            <a:avLst/>
+          </a:prstGeom>
+          <a:solidFill>
+            <a:srgbClr val="1E3A8A"/>
+          </a:solidFill>
+          <a:ln>
+            <a:noFill/>
+          </a:ln>
+          <a:effectLst/>
+        </p:spPr>
+        <p:style>
+          <a:lnRef idx="1">
+            <a:schemeClr val="accent1"/>
+          </a:lnRef>
+          <a:fillRef idx="3">
+            <a:schemeClr val="accent1"/>
+          </a:fillRef>
+          <a:effectRef idx="2">
+            <a:schemeClr val="accent1"/>
+          </a:effectRef>
+          <a:fontRef idx="minor">
+            <a:schemeClr val="lt1"/>
+          </a:fontRef>
+        </p:style>
+        <p:txBody>
+          <a:bodyPr rtlCol="0" anchor="ctr"/>
+          <a:lstStyle/>
+          <a:p>
+            <a:pPr algn="ctr"/>
+          </a:p>
+        </p:txBody>
+      </p:sp>
+      <p:sp>
+        <p:nvSpPr>
+          <p:cNvPr id="3" name="Rectangle 2"/>
+          <p:cNvSpPr/>
+          <p:nvPr/>
+        </p:nvSpPr>
+        <p:spPr>
+          <a:xfrm>
+            <a:off x="0" y="0"/>
+            <a:ext cx="146304" cy="6858000"/>
+          </a:xfrm>
+          <a:prstGeom prst="rect">
+            <a:avLst/>
+          </a:prstGeom>
+          <a:solidFill>
+            <a:srgbClr val="F5B020"/>
+          </a:solidFill>
+          <a:ln>
+            <a:noFill/>
+          </a:ln>
+          <a:effectLst/>
+        </p:spPr>
+        <p:style>
+          <a:lnRef idx="1">
+            <a:schemeClr val="accent1"/>
+          </a:lnRef>
+          <a:fillRef idx="3">
+            <a:schemeClr val="accent1"/>
+          </a:fillRef>
+          <a:effectRef idx="2">
+            <a:schemeClr val="accent1"/>
+          </a:effectRef>
+          <a:fontRef idx="minor">
+            <a:schemeClr val="lt1"/>
+          </a:fontRef>
+        </p:style>
+        <p:txBody>
+          <a:bodyPr rtlCol="0" anchor="ctr"/>
+          <a:lstStyle/>
+          <a:p>
+            <a:pPr algn="ctr"/>
+          </a:p>
+        </p:txBody>
+      </p:sp>
+      <p:sp>
+        <p:nvSpPr>
+          <p:cNvPr id="4" name="TextBox 3"/>
+          <p:cNvSpPr txBox="1"/>
+          <p:nvPr/>
+        </p:nvSpPr>
+        <p:spPr>
+          <a:xfrm>
+            <a:off x="640080" y="1097280"/>
+            <a:ext cx="5486400" cy="3840480"/>
+          </a:xfrm>
+          <a:prstGeom prst="rect">
+            <a:avLst/>
+          </a:prstGeom>
+          <a:noFill/>
+        </p:spPr>
+        <p:txBody>
+          <a:bodyPr wrap="square" anchor="ctr" lIns="0" rIns="0" tIns="0" bIns="0">
+            <a:spAutoFit/>
+          </a:bodyPr>
+          <a:lstStyle/>
+          <a:p>
+            <a:pPr algn="l">
+              <a:lnSpc>
+                <a:spcPct val="112000"/>
+              </a:lnSpc>
+              <a:spcBef>
+                <a:spcPts val="0"/>
+              </a:spcBef>
+              <a:spcAft>
+                <a:spcPts val="600"/>
+              </a:spcAft>
+            </a:pPr>
+            <a:r>
+              <a:rPr sz="30000" b="1">
+                <a:solidFill>
+                  <a:srgbClr val="2A499A"/>
+                </a:solidFill>
+                <a:latin typeface="Microsoft JhengHei"/>
+                <a:ea typeface="Microsoft JhengHei"/>
+                <a:cs typeface="Microsoft JhengHei"/>
+              </a:rPr>
+              <a:t>7</a:t>
+            </a:r>
+          </a:p>
+        </p:txBody>
+      </p:sp>
+      <p:sp>
+        <p:nvSpPr>
+          <p:cNvPr id="5" name="TextBox 4"/>
+          <p:cNvSpPr txBox="1"/>
+          <p:nvPr/>
+        </p:nvSpPr>
+        <p:spPr>
+          <a:xfrm>
+            <a:off x="5486400" y="2606040"/>
+            <a:ext cx="6126480" cy="1097280"/>
+          </a:xfrm>
+          <a:prstGeom prst="rect">
+            <a:avLst/>
+          </a:prstGeom>
+          <a:noFill/>
+        </p:spPr>
+        <p:txBody>
+          <a:bodyPr wrap="square" anchor="b" lIns="0" rIns="0" tIns="0" bIns="0">
+            <a:spAutoFit/>
+          </a:bodyPr>
+          <a:lstStyle/>
+          <a:p>
+            <a:pPr algn="l">
+              <a:lnSpc>
+                <a:spcPct val="112000"/>
+              </a:lnSpc>
+              <a:spcBef>
+                <a:spcPts val="0"/>
+              </a:spcBef>
+              <a:spcAft>
+                <a:spcPts val="600"/>
+              </a:spcAft>
+            </a:pPr>
+            <a:r>
+              <a:rPr sz="4400" b="1">
+                <a:solidFill>
+                  <a:srgbClr val="FFFFFF"/>
+                </a:solidFill>
+                <a:latin typeface="Microsoft JhengHei"/>
+                <a:ea typeface="Microsoft JhengHei"/>
+                <a:cs typeface="Microsoft JhengHei"/>
+              </a:rPr>
+              <a:t>Demo</a:t>
+            </a:r>
+          </a:p>
+        </p:txBody>
+      </p:sp>
+      <p:sp>
+        <p:nvSpPr>
+          <p:cNvPr id="6" name="TextBox 5"/>
+          <p:cNvSpPr txBox="1"/>
+          <p:nvPr/>
+        </p:nvSpPr>
+        <p:spPr>
+          <a:xfrm>
+            <a:off x="5532120" y="3794760"/>
+            <a:ext cx="6126480" cy="548640"/>
+          </a:xfrm>
+          <a:prstGeom prst="rect">
+            <a:avLst/>
+          </a:prstGeom>
+          <a:noFill/>
+        </p:spPr>
+        <p:txBody>
+          <a:bodyPr wrap="square" anchor="t" lIns="0" rIns="0" tIns="0" bIns="0">
+            <a:spAutoFit/>
+          </a:bodyPr>
+          <a:lstStyle/>
+          <a:p>
+            <a:pPr algn="l">
+              <a:lnSpc>
+                <a:spcPct val="112000"/>
+              </a:lnSpc>
+              <a:spcBef>
+                <a:spcPts val="0"/>
+              </a:spcBef>
+              <a:spcAft>
+                <a:spcPts val="600"/>
+              </a:spcAft>
+            </a:pPr>
+            <a:r>
+              <a:rPr sz="1700" b="1">
+                <a:solidFill>
+                  <a:srgbClr val="F5B020"/>
+                </a:solidFill>
+                <a:latin typeface="Microsoft JhengHei"/>
+                <a:ea typeface="Microsoft JhengHei"/>
+                <a:cs typeface="Microsoft JhengHei"/>
+              </a:rPr>
+              <a:t>Live walkthrough</a:t>
+            </a:r>
+          </a:p>
+        </p:txBody>
+      </p:sp>
+      <p:cxnSp>
+        <p:nvCxnSpPr>
+          <p:cNvPr id="7" name="Connector 6"/>
+          <p:cNvCxnSpPr/>
+          <p:nvPr/>
+        </p:nvCxnSpPr>
+        <p:spPr>
+          <a:xfrm>
+            <a:off x="5541264" y="3657600"/>
+            <a:ext cx="2743199" cy="0"/>
+          </a:xfrm>
+          <a:prstGeom prst="bentConnector3">
+            <a:avLst/>
+          </a:prstGeom>
+          <a:ln w="17780">
+            <a:solidFill>
+              <a:srgbClr val="3B559E"/>
+            </a:solidFill>
+          </a:ln>
+        </p:spPr>
+        <p:style>
+          <a:lnRef idx="2">
+            <a:schemeClr val="accent1"/>
+          </a:lnRef>
+          <a:fillRef idx="0">
+            <a:schemeClr val="accent1"/>
+          </a:fillRef>
+          <a:effectRef idx="1">
+            <a:schemeClr val="accent1"/>
+          </a:effectRef>
+          <a:fontRef idx="minor">
+            <a:schemeClr val="tx1"/>
+          </a:fontRef>
+        </p:style>
+      </p:cxnSp>
+    </p:spTree>
+  </p:cSld>
+  <p:clrMapOvr>
+    <a:masterClrMapping/>
+  </p:clrMapOvr>
+</p:sld>
+</file>
+
+<file path=ppt/slides/slide22.xml><?xml version="1.0" encoding="utf-8"?>
+<p:sld xmlns:a="http://schemas.openxmlformats.org/drawingml/2006/main" xmlns:p="http://schemas.openxmlformats.org/presentationml/2006/main" xmlns:r="http://schemas.openxmlformats.org/officeDocument/2006/relationships">
+  <p:cSld>
+    <p:spTree>
+      <p:nvGrpSpPr>
+        <p:cNvPr id="1" name=""/>
+        <p:cNvGrpSpPr/>
+        <p:nvPr/>
+      </p:nvGrpSpPr>
+      <p:grpSpPr/>
+      <p:sp>
+        <p:nvSpPr>
+          <p:cNvPr id="2" name="Rectangle 1"/>
+          <p:cNvSpPr/>
+          <p:nvPr/>
+        </p:nvSpPr>
+        <p:spPr>
+          <a:xfrm>
+            <a:off x="0" y="0"/>
+            <a:ext cx="12191695" cy="6858000"/>
+          </a:xfrm>
+          <a:prstGeom prst="rect">
+            <a:avLst/>
+          </a:prstGeom>
+          <a:solidFill>
+            <a:srgbClr val="FFFFFF"/>
+          </a:solidFill>
+          <a:ln>
+            <a:noFill/>
+          </a:ln>
+          <a:effectLst/>
+        </p:spPr>
+        <p:style>
+          <a:lnRef idx="1">
+            <a:schemeClr val="accent1"/>
+          </a:lnRef>
+          <a:fillRef idx="3">
+            <a:schemeClr val="accent1"/>
+          </a:fillRef>
+          <a:effectRef idx="2">
+            <a:schemeClr val="accent1"/>
+          </a:effectRef>
+          <a:fontRef idx="minor">
+            <a:schemeClr val="lt1"/>
+          </a:fontRef>
+        </p:style>
+        <p:txBody>
+          <a:bodyPr rtlCol="0" anchor="ctr"/>
+          <a:lstStyle/>
+          <a:p>
+            <a:pPr algn="ctr"/>
+          </a:p>
+        </p:txBody>
+      </p:sp>
+      <p:sp>
+        <p:nvSpPr>
+          <p:cNvPr id="3" name="Rectangle 2"/>
+          <p:cNvSpPr/>
+          <p:nvPr/>
+        </p:nvSpPr>
+        <p:spPr>
+          <a:xfrm>
+            <a:off x="822960" y="658368"/>
+            <a:ext cx="146304" cy="146304"/>
+          </a:xfrm>
+          <a:prstGeom prst="rect">
+            <a:avLst/>
+          </a:prstGeom>
+          <a:solidFill>
+            <a:srgbClr val="F5B020"/>
+          </a:solidFill>
+          <a:ln>
+            <a:noFill/>
+          </a:ln>
+          <a:effectLst/>
+        </p:spPr>
+        <p:style>
+          <a:lnRef idx="1">
+            <a:schemeClr val="accent1"/>
+          </a:lnRef>
+          <a:fillRef idx="3">
+            <a:schemeClr val="accent1"/>
+          </a:fillRef>
+          <a:effectRef idx="2">
+            <a:schemeClr val="accent1"/>
+          </a:effectRef>
+          <a:fontRef idx="minor">
+            <a:schemeClr val="lt1"/>
+          </a:fontRef>
+        </p:style>
+        <p:txBody>
+          <a:bodyPr rtlCol="0" anchor="ctr"/>
+          <a:lstStyle/>
+          <a:p>
+            <a:pPr algn="ctr"/>
+          </a:p>
+        </p:txBody>
+      </p:sp>
+      <p:sp>
+        <p:nvSpPr>
+          <p:cNvPr id="4" name="TextBox 3"/>
+          <p:cNvSpPr txBox="1"/>
+          <p:nvPr/>
+        </p:nvSpPr>
+        <p:spPr>
+          <a:xfrm>
+            <a:off x="1078992" y="566928"/>
+            <a:ext cx="8229600" cy="365760"/>
+          </a:xfrm>
+          <a:prstGeom prst="rect">
+            <a:avLst/>
+          </a:prstGeom>
+          <a:noFill/>
+        </p:spPr>
+        <p:txBody>
+          <a:bodyPr wrap="square" anchor="t" lIns="0" rIns="0" tIns="0" bIns="0">
+            <a:spAutoFit/>
+          </a:bodyPr>
+          <a:lstStyle/>
+          <a:p>
+            <a:pPr algn="l">
+              <a:lnSpc>
+                <a:spcPct val="112000"/>
+              </a:lnSpc>
+              <a:spcBef>
+                <a:spcPts val="0"/>
+              </a:spcBef>
+              <a:spcAft>
+                <a:spcPts val="600"/>
+              </a:spcAft>
+            </a:pPr>
+            <a:r>
+              <a:rPr sz="1400" b="1">
+                <a:solidFill>
+                  <a:srgbClr val="F5B020"/>
+                </a:solidFill>
+                <a:latin typeface="Microsoft JhengHei"/>
+                <a:ea typeface="Microsoft JhengHei"/>
+                <a:cs typeface="Microsoft JhengHei"/>
+              </a:rPr>
+              <a:t>07 </a:t>
+            </a:r>
+            <a:r>
+              <a:rPr sz="1400" b="0">
+                <a:solidFill>
+                  <a:srgbClr val="5A6B8C"/>
+                </a:solidFill>
+                <a:latin typeface="Microsoft JhengHei"/>
+                <a:ea typeface="Microsoft JhengHei"/>
+                <a:cs typeface="Microsoft JhengHei"/>
+              </a:rPr>
+              <a:t>· Demo</a:t>
+            </a:r>
+          </a:p>
+        </p:txBody>
+      </p:sp>
+      <p:sp>
+        <p:nvSpPr>
+          <p:cNvPr id="5" name="TextBox 4"/>
+          <p:cNvSpPr txBox="1"/>
+          <p:nvPr/>
+        </p:nvSpPr>
+        <p:spPr>
+          <a:xfrm>
+            <a:off x="804672" y="914400"/>
+            <a:ext cx="10515600" cy="914400"/>
+          </a:xfrm>
+          <a:prstGeom prst="rect">
+            <a:avLst/>
+          </a:prstGeom>
+          <a:noFill/>
+        </p:spPr>
+        <p:txBody>
+          <a:bodyPr wrap="square" anchor="t" lIns="0" rIns="0" tIns="0" bIns="0">
+            <a:spAutoFit/>
+          </a:bodyPr>
+          <a:lstStyle/>
+          <a:p>
+            <a:pPr algn="l">
+              <a:lnSpc>
+                <a:spcPct val="112000"/>
+              </a:lnSpc>
+              <a:spcBef>
+                <a:spcPts val="0"/>
+              </a:spcBef>
+              <a:spcAft>
+                <a:spcPts val="600"/>
+              </a:spcAft>
+            </a:pPr>
+            <a:r>
+              <a:rPr sz="3300" b="1">
+                <a:solidFill>
+                  <a:srgbClr val="1E3A8A"/>
+                </a:solidFill>
+                <a:latin typeface="Microsoft JhengHei"/>
+                <a:ea typeface="Microsoft JhengHei"/>
+                <a:cs typeface="Microsoft JhengHei"/>
+              </a:rPr>
+              <a:t>現場操作流程</a:t>
+            </a:r>
+          </a:p>
+        </p:txBody>
+      </p:sp>
+      <p:cxnSp>
+        <p:nvCxnSpPr>
+          <p:cNvPr id="6" name="Connector 5"/>
+          <p:cNvCxnSpPr/>
+          <p:nvPr/>
+        </p:nvCxnSpPr>
+        <p:spPr>
+          <a:xfrm>
+            <a:off x="822960" y="1755648"/>
+            <a:ext cx="10561320" cy="0"/>
+          </a:xfrm>
+          <a:prstGeom prst="bentConnector3">
+            <a:avLst/>
+          </a:prstGeom>
+          <a:ln w="15240">
+            <a:solidFill>
+              <a:srgbClr val="D7DDEA"/>
+            </a:solidFill>
+          </a:ln>
+        </p:spPr>
+        <p:style>
+          <a:lnRef idx="2">
+            <a:schemeClr val="accent1"/>
+          </a:lnRef>
+          <a:fillRef idx="0">
+            <a:schemeClr val="accent1"/>
+          </a:fillRef>
+          <a:effectRef idx="1">
+            <a:schemeClr val="accent1"/>
+          </a:effectRef>
+          <a:fontRef idx="minor">
+            <a:schemeClr val="tx1"/>
+          </a:fontRef>
+        </p:style>
+      </p:cxnSp>
+      <p:sp>
+        <p:nvSpPr>
+          <p:cNvPr id="7" name="TextBox 6"/>
+          <p:cNvSpPr txBox="1"/>
+          <p:nvPr/>
+        </p:nvSpPr>
+        <p:spPr>
+          <a:xfrm>
+            <a:off x="8259775" y="182880"/>
+            <a:ext cx="3840480" cy="2377440"/>
+          </a:xfrm>
+          <a:prstGeom prst="rect">
+            <a:avLst/>
+          </a:prstGeom>
+          <a:noFill/>
+        </p:spPr>
+        <p:txBody>
+          <a:bodyPr wrap="square" anchor="t" lIns="0" rIns="0" tIns="0" bIns="0">
+            <a:spAutoFit/>
+          </a:bodyPr>
+          <a:lstStyle/>
+          <a:p>
+            <a:pPr algn="r">
+              <a:lnSpc>
+                <a:spcPct val="112000"/>
+              </a:lnSpc>
+              <a:spcBef>
+                <a:spcPts val="0"/>
+              </a:spcBef>
+              <a:spcAft>
+                <a:spcPts val="600"/>
+              </a:spcAft>
+            </a:pPr>
+            <a:r>
+              <a:rPr sz="15000" b="1">
+                <a:solidFill>
+                  <a:srgbClr val="EEF1F8"/>
+                </a:solidFill>
+                <a:latin typeface="Microsoft JhengHei"/>
+                <a:ea typeface="Microsoft JhengHei"/>
+                <a:cs typeface="Microsoft JhengHei"/>
+              </a:rPr>
+              <a:t>07</a:t>
+            </a:r>
+          </a:p>
+        </p:txBody>
+      </p:sp>
+      <p:sp>
+        <p:nvSpPr>
+          <p:cNvPr id="8" name="TextBox 7"/>
+          <p:cNvSpPr txBox="1"/>
+          <p:nvPr/>
+        </p:nvSpPr>
+        <p:spPr>
+          <a:xfrm>
+            <a:off x="914400" y="2057400"/>
+            <a:ext cx="502920" cy="457200"/>
+          </a:xfrm>
+          <a:prstGeom prst="rect">
+            <a:avLst/>
+          </a:prstGeom>
+          <a:noFill/>
+        </p:spPr>
+        <p:txBody>
+          <a:bodyPr wrap="square" anchor="t" lIns="0" rIns="0" tIns="0" bIns="0">
+            <a:spAutoFit/>
+          </a:bodyPr>
+          <a:lstStyle/>
+          <a:p>
+            <a:pPr algn="l">
+              <a:lnSpc>
+                <a:spcPct val="112000"/>
+              </a:lnSpc>
+              <a:spcBef>
+                <a:spcPts val="0"/>
+              </a:spcBef>
+              <a:spcAft>
+                <a:spcPts val="600"/>
+              </a:spcAft>
+            </a:pPr>
+            <a:r>
+              <a:rPr sz="2000" b="1">
+                <a:solidFill>
+                  <a:srgbClr val="F5B020"/>
+                </a:solidFill>
+                <a:latin typeface="Microsoft JhengHei"/>
+                <a:ea typeface="Microsoft JhengHei"/>
+                <a:cs typeface="Microsoft JhengHei"/>
+              </a:rPr>
+              <a:t>01</a:t>
+            </a:r>
+          </a:p>
+        </p:txBody>
+      </p:sp>
+      <p:sp>
+        <p:nvSpPr>
+          <p:cNvPr id="9" name="TextBox 8"/>
+          <p:cNvSpPr txBox="1"/>
+          <p:nvPr/>
+        </p:nvSpPr>
+        <p:spPr>
+          <a:xfrm>
+            <a:off x="1481328" y="2039112"/>
+            <a:ext cx="4572000" cy="365760"/>
+          </a:xfrm>
+          <a:prstGeom prst="rect">
+            <a:avLst/>
+          </a:prstGeom>
+          <a:noFill/>
+        </p:spPr>
+        <p:txBody>
+          <a:bodyPr wrap="square" anchor="t" lIns="0" rIns="0" tIns="0" bIns="0">
+            <a:spAutoFit/>
+          </a:bodyPr>
+          <a:lstStyle/>
+          <a:p>
+            <a:pPr algn="l">
+              <a:lnSpc>
+                <a:spcPct val="112000"/>
+              </a:lnSpc>
+              <a:spcBef>
+                <a:spcPts val="0"/>
+              </a:spcBef>
+              <a:spcAft>
+                <a:spcPts val="600"/>
+              </a:spcAft>
+            </a:pPr>
+            <a:r>
+              <a:rPr sz="1450" b="1">
+                <a:solidFill>
+                  <a:srgbClr val="1A2236"/>
+                </a:solidFill>
+                <a:latin typeface="Microsoft JhengHei"/>
+                <a:ea typeface="Microsoft JhengHei"/>
+                <a:cs typeface="Microsoft JhengHei"/>
+              </a:rPr>
+              <a:t>以 Alice(律師)登入</a:t>
+            </a:r>
+            <a:r>
+              <a:rPr sz="1100" b="1">
+                <a:solidFill>
+                  <a:srgbClr val="F5B020"/>
+                </a:solidFill>
+                <a:latin typeface="Microsoft JhengHei"/>
+                <a:ea typeface="Microsoft JhengHei"/>
+                <a:cs typeface="Microsoft JhengHei"/>
+              </a:rPr>
+              <a:t>　Q12</a:t>
+            </a:r>
+          </a:p>
+        </p:txBody>
+      </p:sp>
+      <p:sp>
+        <p:nvSpPr>
+          <p:cNvPr id="10" name="TextBox 9"/>
+          <p:cNvSpPr txBox="1"/>
+          <p:nvPr/>
+        </p:nvSpPr>
+        <p:spPr>
+          <a:xfrm>
+            <a:off x="1481328" y="2404872"/>
+            <a:ext cx="4572000" cy="365760"/>
+          </a:xfrm>
+          <a:prstGeom prst="rect">
+            <a:avLst/>
+          </a:prstGeom>
+          <a:noFill/>
+        </p:spPr>
+        <p:txBody>
+          <a:bodyPr wrap="square" anchor="t" lIns="0" rIns="0" tIns="0" bIns="0">
+            <a:spAutoFit/>
+          </a:bodyPr>
+          <a:lstStyle/>
+          <a:p>
+            <a:pPr algn="l">
+              <a:lnSpc>
+                <a:spcPct val="112000"/>
+              </a:lnSpc>
+              <a:spcBef>
+                <a:spcPts val="0"/>
+              </a:spcBef>
+              <a:spcAft>
+                <a:spcPts val="600"/>
+              </a:spcAft>
+            </a:pPr>
+            <a:r>
+              <a:rPr sz="1200" b="0">
+                <a:solidFill>
+                  <a:srgbClr val="5A6B8C"/>
+                </a:solidFill>
+                <a:latin typeface="Microsoft JhengHei"/>
+                <a:ea typeface="Microsoft JhengHei"/>
+                <a:cs typeface="Microsoft JhengHei"/>
+              </a:rPr>
+              <a:t>分析 CASE-2025-001</a:t>
+            </a:r>
+          </a:p>
+        </p:txBody>
+      </p:sp>
+      <p:sp>
+        <p:nvSpPr>
+          <p:cNvPr id="11" name="TextBox 10"/>
+          <p:cNvSpPr txBox="1"/>
+          <p:nvPr/>
+        </p:nvSpPr>
+        <p:spPr>
+          <a:xfrm>
+            <a:off x="914400" y="2990088"/>
+            <a:ext cx="502920" cy="457200"/>
+          </a:xfrm>
+          <a:prstGeom prst="rect">
+            <a:avLst/>
+          </a:prstGeom>
+          <a:noFill/>
+        </p:spPr>
+        <p:txBody>
+          <a:bodyPr wrap="square" anchor="t" lIns="0" rIns="0" tIns="0" bIns="0">
+            <a:spAutoFit/>
+          </a:bodyPr>
+          <a:lstStyle/>
+          <a:p>
+            <a:pPr algn="l">
+              <a:lnSpc>
+                <a:spcPct val="112000"/>
+              </a:lnSpc>
+              <a:spcBef>
+                <a:spcPts val="0"/>
+              </a:spcBef>
+              <a:spcAft>
+                <a:spcPts val="600"/>
+              </a:spcAft>
+            </a:pPr>
+            <a:r>
+              <a:rPr sz="2000" b="1">
+                <a:solidFill>
+                  <a:srgbClr val="F5B020"/>
+                </a:solidFill>
+                <a:latin typeface="Microsoft JhengHei"/>
+                <a:ea typeface="Microsoft JhengHei"/>
+                <a:cs typeface="Microsoft JhengHei"/>
+              </a:rPr>
+              <a:t>02</a:t>
+            </a:r>
+          </a:p>
+        </p:txBody>
+      </p:sp>
+      <p:sp>
+        <p:nvSpPr>
+          <p:cNvPr id="12" name="TextBox 11"/>
+          <p:cNvSpPr txBox="1"/>
+          <p:nvPr/>
+        </p:nvSpPr>
+        <p:spPr>
+          <a:xfrm>
+            <a:off x="1481328" y="2971800"/>
+            <a:ext cx="4572000" cy="365760"/>
+          </a:xfrm>
+          <a:prstGeom prst="rect">
+            <a:avLst/>
+          </a:prstGeom>
+          <a:noFill/>
+        </p:spPr>
+        <p:txBody>
+          <a:bodyPr wrap="square" anchor="t" lIns="0" rIns="0" tIns="0" bIns="0">
+            <a:spAutoFit/>
+          </a:bodyPr>
+          <a:lstStyle/>
+          <a:p>
+            <a:pPr algn="l">
+              <a:lnSpc>
+                <a:spcPct val="112000"/>
+              </a:lnSpc>
+              <a:spcBef>
+                <a:spcPts val="0"/>
+              </a:spcBef>
+              <a:spcAft>
+                <a:spcPts val="600"/>
+              </a:spcAft>
+            </a:pPr>
+            <a:r>
+              <a:rPr sz="1450" b="1">
+                <a:solidFill>
+                  <a:srgbClr val="1A2236"/>
+                </a:solidFill>
+                <a:latin typeface="Microsoft JhengHei"/>
+                <a:ea typeface="Microsoft JhengHei"/>
+                <a:cs typeface="Microsoft JhengHei"/>
+              </a:rPr>
+              <a:t>預覽 redaction</a:t>
+            </a:r>
+            <a:r>
+              <a:rPr sz="1100" b="1">
+                <a:solidFill>
+                  <a:srgbClr val="F5B020"/>
+                </a:solidFill>
+                <a:latin typeface="Microsoft JhengHei"/>
+                <a:ea typeface="Microsoft JhengHei"/>
+                <a:cs typeface="Microsoft JhengHei"/>
+              </a:rPr>
+              <a:t>　Q10</a:t>
+            </a:r>
+          </a:p>
+        </p:txBody>
+      </p:sp>
+      <p:sp>
+        <p:nvSpPr>
+          <p:cNvPr id="13" name="TextBox 12"/>
+          <p:cNvSpPr txBox="1"/>
+          <p:nvPr/>
+        </p:nvSpPr>
+        <p:spPr>
+          <a:xfrm>
+            <a:off x="1481328" y="3337560"/>
+            <a:ext cx="4572000" cy="365760"/>
+          </a:xfrm>
+          <a:prstGeom prst="rect">
+            <a:avLst/>
+          </a:prstGeom>
+          <a:noFill/>
+        </p:spPr>
+        <p:txBody>
+          <a:bodyPr wrap="square" anchor="t" lIns="0" rIns="0" tIns="0" bIns="0">
+            <a:spAutoFit/>
+          </a:bodyPr>
+          <a:lstStyle/>
+          <a:p>
+            <a:pPr algn="l">
+              <a:lnSpc>
+                <a:spcPct val="112000"/>
+              </a:lnSpc>
+              <a:spcBef>
+                <a:spcPts val="0"/>
+              </a:spcBef>
+              <a:spcAft>
+                <a:spcPts val="600"/>
+              </a:spcAft>
+            </a:pPr>
+            <a:r>
+              <a:rPr sz="1200" b="0">
+                <a:solidFill>
+                  <a:srgbClr val="5A6B8C"/>
+                </a:solidFill>
+                <a:latin typeface="Microsoft JhengHei"/>
+                <a:ea typeface="Microsoft JhengHei"/>
+                <a:cs typeface="Microsoft JhengHei"/>
+              </a:rPr>
+              <a:t>email / 電話 / 案號 → placeholder</a:t>
+            </a:r>
+          </a:p>
+        </p:txBody>
+      </p:sp>
+      <p:sp>
+        <p:nvSpPr>
+          <p:cNvPr id="14" name="TextBox 13"/>
+          <p:cNvSpPr txBox="1"/>
+          <p:nvPr/>
+        </p:nvSpPr>
+        <p:spPr>
+          <a:xfrm>
+            <a:off x="914400" y="3922776"/>
+            <a:ext cx="502920" cy="457200"/>
+          </a:xfrm>
+          <a:prstGeom prst="rect">
+            <a:avLst/>
+          </a:prstGeom>
+          <a:noFill/>
+        </p:spPr>
+        <p:txBody>
+          <a:bodyPr wrap="square" anchor="t" lIns="0" rIns="0" tIns="0" bIns="0">
+            <a:spAutoFit/>
+          </a:bodyPr>
+          <a:lstStyle/>
+          <a:p>
+            <a:pPr algn="l">
+              <a:lnSpc>
+                <a:spcPct val="112000"/>
+              </a:lnSpc>
+              <a:spcBef>
+                <a:spcPts val="0"/>
+              </a:spcBef>
+              <a:spcAft>
+                <a:spcPts val="600"/>
+              </a:spcAft>
+            </a:pPr>
+            <a:r>
+              <a:rPr sz="2000" b="1">
+                <a:solidFill>
+                  <a:srgbClr val="F5B020"/>
+                </a:solidFill>
+                <a:latin typeface="Microsoft JhengHei"/>
+                <a:ea typeface="Microsoft JhengHei"/>
+                <a:cs typeface="Microsoft JhengHei"/>
+              </a:rPr>
+              <a:t>03</a:t>
+            </a:r>
+          </a:p>
+        </p:txBody>
+      </p:sp>
+      <p:sp>
+        <p:nvSpPr>
+          <p:cNvPr id="15" name="TextBox 14"/>
+          <p:cNvSpPr txBox="1"/>
+          <p:nvPr/>
+        </p:nvSpPr>
+        <p:spPr>
+          <a:xfrm>
+            <a:off x="1481328" y="3904488"/>
+            <a:ext cx="4572000" cy="365760"/>
+          </a:xfrm>
+          <a:prstGeom prst="rect">
+            <a:avLst/>
+          </a:prstGeom>
+          <a:noFill/>
+        </p:spPr>
+        <p:txBody>
+          <a:bodyPr wrap="square" anchor="t" lIns="0" rIns="0" tIns="0" bIns="0">
+            <a:spAutoFit/>
+          </a:bodyPr>
+          <a:lstStyle/>
+          <a:p>
+            <a:pPr algn="l">
+              <a:lnSpc>
+                <a:spcPct val="112000"/>
+              </a:lnSpc>
+              <a:spcBef>
+                <a:spcPts val="0"/>
+              </a:spcBef>
+              <a:spcAft>
+                <a:spcPts val="600"/>
+              </a:spcAft>
+            </a:pPr>
+            <a:r>
+              <a:rPr sz="1450" b="1">
+                <a:solidFill>
+                  <a:srgbClr val="1A2236"/>
+                </a:solidFill>
+                <a:latin typeface="Microsoft JhengHei"/>
+                <a:ea typeface="Microsoft JhengHei"/>
+                <a:cs typeface="Microsoft JhengHei"/>
+              </a:rPr>
+              <a:t>跑分析 → 點 [GROUNDED_REF_1]</a:t>
+            </a:r>
+            <a:r>
+              <a:rPr sz="1100" b="1">
+                <a:solidFill>
+                  <a:srgbClr val="F5B020"/>
+                </a:solidFill>
+                <a:latin typeface="Microsoft JhengHei"/>
+                <a:ea typeface="Microsoft JhengHei"/>
+                <a:cs typeface="Microsoft JhengHei"/>
+              </a:rPr>
+              <a:t>　Q14</a:t>
+            </a:r>
+          </a:p>
+        </p:txBody>
+      </p:sp>
+      <p:sp>
+        <p:nvSpPr>
+          <p:cNvPr id="16" name="TextBox 15"/>
+          <p:cNvSpPr txBox="1"/>
+          <p:nvPr/>
+        </p:nvSpPr>
+        <p:spPr>
+          <a:xfrm>
+            <a:off x="1481328" y="4270248"/>
+            <a:ext cx="4572000" cy="365760"/>
+          </a:xfrm>
+          <a:prstGeom prst="rect">
+            <a:avLst/>
+          </a:prstGeom>
+          <a:noFill/>
+        </p:spPr>
+        <p:txBody>
+          <a:bodyPr wrap="square" anchor="t" lIns="0" rIns="0" tIns="0" bIns="0">
+            <a:spAutoFit/>
+          </a:bodyPr>
+          <a:lstStyle/>
+          <a:p>
+            <a:pPr algn="l">
+              <a:lnSpc>
+                <a:spcPct val="112000"/>
+              </a:lnSpc>
+              <a:spcBef>
+                <a:spcPts val="0"/>
+              </a:spcBef>
+              <a:spcAft>
+                <a:spcPts val="600"/>
+              </a:spcAft>
+            </a:pPr>
+            <a:r>
+              <a:rPr sz="1200" b="0">
+                <a:solidFill>
+                  <a:srgbClr val="5A6B8C"/>
+                </a:solidFill>
+                <a:latin typeface="Microsoft JhengHei"/>
+                <a:ea typeface="Microsoft JhengHei"/>
+                <a:cs typeface="Microsoft JhengHei"/>
+              </a:rPr>
+              <a:t>看來源專利 + 段落 + 原文</a:t>
+            </a:r>
+          </a:p>
+        </p:txBody>
+      </p:sp>
+      <p:sp>
+        <p:nvSpPr>
+          <p:cNvPr id="17" name="TextBox 16"/>
+          <p:cNvSpPr txBox="1"/>
+          <p:nvPr/>
+        </p:nvSpPr>
+        <p:spPr>
+          <a:xfrm>
+            <a:off x="914400" y="4855464"/>
+            <a:ext cx="502920" cy="457200"/>
+          </a:xfrm>
+          <a:prstGeom prst="rect">
+            <a:avLst/>
+          </a:prstGeom>
+          <a:noFill/>
+        </p:spPr>
+        <p:txBody>
+          <a:bodyPr wrap="square" anchor="t" lIns="0" rIns="0" tIns="0" bIns="0">
+            <a:spAutoFit/>
+          </a:bodyPr>
+          <a:lstStyle/>
+          <a:p>
+            <a:pPr algn="l">
+              <a:lnSpc>
+                <a:spcPct val="112000"/>
+              </a:lnSpc>
+              <a:spcBef>
+                <a:spcPts val="0"/>
+              </a:spcBef>
+              <a:spcAft>
+                <a:spcPts val="600"/>
+              </a:spcAft>
+            </a:pPr>
+            <a:r>
+              <a:rPr sz="2000" b="1">
+                <a:solidFill>
+                  <a:srgbClr val="F5B020"/>
+                </a:solidFill>
+                <a:latin typeface="Microsoft JhengHei"/>
+                <a:ea typeface="Microsoft JhengHei"/>
+                <a:cs typeface="Microsoft JhengHei"/>
+              </a:rPr>
+              <a:t>04</a:t>
+            </a:r>
+          </a:p>
+        </p:txBody>
+      </p:sp>
+      <p:sp>
+        <p:nvSpPr>
+          <p:cNvPr id="18" name="TextBox 17"/>
+          <p:cNvSpPr txBox="1"/>
+          <p:nvPr/>
+        </p:nvSpPr>
+        <p:spPr>
+          <a:xfrm>
+            <a:off x="1481328" y="4837176"/>
+            <a:ext cx="4572000" cy="365760"/>
+          </a:xfrm>
+          <a:prstGeom prst="rect">
+            <a:avLst/>
+          </a:prstGeom>
+          <a:noFill/>
+        </p:spPr>
+        <p:txBody>
+          <a:bodyPr wrap="square" anchor="t" lIns="0" rIns="0" tIns="0" bIns="0">
+            <a:spAutoFit/>
+          </a:bodyPr>
+          <a:lstStyle/>
+          <a:p>
+            <a:pPr algn="l">
+              <a:lnSpc>
+                <a:spcPct val="112000"/>
+              </a:lnSpc>
+              <a:spcBef>
+                <a:spcPts val="0"/>
+              </a:spcBef>
+              <a:spcAft>
+                <a:spcPts val="600"/>
+              </a:spcAft>
+            </a:pPr>
+            <a:r>
+              <a:rPr sz="1450" b="1">
+                <a:solidFill>
+                  <a:srgbClr val="1A2236"/>
+                </a:solidFill>
+                <a:latin typeface="Microsoft JhengHei"/>
+                <a:ea typeface="Microsoft JhengHei"/>
+                <a:cs typeface="Microsoft JhengHei"/>
+              </a:rPr>
+              <a:t>逐句 Accept / Edit</a:t>
+            </a:r>
+            <a:r>
+              <a:rPr sz="1100" b="1">
+                <a:solidFill>
+                  <a:srgbClr val="F5B020"/>
+                </a:solidFill>
+                <a:latin typeface="Microsoft JhengHei"/>
+                <a:ea typeface="Microsoft JhengHei"/>
+                <a:cs typeface="Microsoft JhengHei"/>
+              </a:rPr>
+              <a:t>　Q16</a:t>
+            </a:r>
+          </a:p>
+        </p:txBody>
+      </p:sp>
+      <p:sp>
+        <p:nvSpPr>
+          <p:cNvPr id="19" name="TextBox 18"/>
+          <p:cNvSpPr txBox="1"/>
+          <p:nvPr/>
+        </p:nvSpPr>
+        <p:spPr>
+          <a:xfrm>
+            <a:off x="1481328" y="5202936"/>
+            <a:ext cx="4572000" cy="365760"/>
+          </a:xfrm>
+          <a:prstGeom prst="rect">
+            <a:avLst/>
+          </a:prstGeom>
+          <a:noFill/>
+        </p:spPr>
+        <p:txBody>
+          <a:bodyPr wrap="square" anchor="t" lIns="0" rIns="0" tIns="0" bIns="0">
+            <a:spAutoFit/>
+          </a:bodyPr>
+          <a:lstStyle/>
+          <a:p>
+            <a:pPr algn="l">
+              <a:lnSpc>
+                <a:spcPct val="112000"/>
+              </a:lnSpc>
+              <a:spcBef>
+                <a:spcPts val="0"/>
+              </a:spcBef>
+              <a:spcAft>
+                <a:spcPts val="600"/>
+              </a:spcAft>
+            </a:pPr>
+            <a:r>
+              <a:rPr sz="1200" b="0">
+                <a:solidFill>
+                  <a:srgbClr val="5A6B8C"/>
+                </a:solidFill>
+                <a:latin typeface="Microsoft JhengHei"/>
+                <a:ea typeface="Microsoft JhengHei"/>
+                <a:cs typeface="Microsoft JhengHei"/>
+              </a:rPr>
+              <a:t>全部簽核才能匯出答辯稿</a:t>
+            </a:r>
+          </a:p>
+        </p:txBody>
+      </p:sp>
+      <p:sp>
+        <p:nvSpPr>
+          <p:cNvPr id="20" name="TextBox 19"/>
+          <p:cNvSpPr txBox="1"/>
+          <p:nvPr/>
+        </p:nvSpPr>
+        <p:spPr>
+          <a:xfrm>
+            <a:off x="6355080" y="2057400"/>
+            <a:ext cx="502920" cy="457200"/>
+          </a:xfrm>
+          <a:prstGeom prst="rect">
+            <a:avLst/>
+          </a:prstGeom>
+          <a:noFill/>
+        </p:spPr>
+        <p:txBody>
+          <a:bodyPr wrap="square" anchor="t" lIns="0" rIns="0" tIns="0" bIns="0">
+            <a:spAutoFit/>
+          </a:bodyPr>
+          <a:lstStyle/>
+          <a:p>
+            <a:pPr algn="l">
+              <a:lnSpc>
+                <a:spcPct val="112000"/>
+              </a:lnSpc>
+              <a:spcBef>
+                <a:spcPts val="0"/>
+              </a:spcBef>
+              <a:spcAft>
+                <a:spcPts val="600"/>
+              </a:spcAft>
+            </a:pPr>
+            <a:r>
+              <a:rPr sz="2000" b="1">
+                <a:solidFill>
+                  <a:srgbClr val="F5B020"/>
+                </a:solidFill>
+                <a:latin typeface="Microsoft JhengHei"/>
+                <a:ea typeface="Microsoft JhengHei"/>
+                <a:cs typeface="Microsoft JhengHei"/>
+              </a:rPr>
+              <a:t>05</a:t>
+            </a:r>
+          </a:p>
+        </p:txBody>
+      </p:sp>
+      <p:sp>
+        <p:nvSpPr>
+          <p:cNvPr id="21" name="TextBox 20"/>
+          <p:cNvSpPr txBox="1"/>
+          <p:nvPr/>
+        </p:nvSpPr>
+        <p:spPr>
+          <a:xfrm>
+            <a:off x="6922008" y="2039112"/>
+            <a:ext cx="4572000" cy="365760"/>
+          </a:xfrm>
+          <a:prstGeom prst="rect">
+            <a:avLst/>
+          </a:prstGeom>
+          <a:noFill/>
+        </p:spPr>
+        <p:txBody>
+          <a:bodyPr wrap="square" anchor="t" lIns="0" rIns="0" tIns="0" bIns="0">
+            <a:spAutoFit/>
+          </a:bodyPr>
+          <a:lstStyle/>
+          <a:p>
+            <a:pPr algn="l">
+              <a:lnSpc>
+                <a:spcPct val="112000"/>
+              </a:lnSpc>
+              <a:spcBef>
+                <a:spcPts val="0"/>
+              </a:spcBef>
+              <a:spcAft>
+                <a:spcPts val="600"/>
+              </a:spcAft>
+            </a:pPr>
+            <a:r>
+              <a:rPr sz="1450" b="1">
+                <a:solidFill>
+                  <a:srgbClr val="1A2236"/>
+                </a:solidFill>
+                <a:latin typeface="Microsoft JhengHei"/>
+                <a:ea typeface="Microsoft JhengHei"/>
+                <a:cs typeface="Microsoft JhengHei"/>
+              </a:rPr>
+              <a:t>以 Dave(稽核)登入</a:t>
+            </a:r>
+            <a:r>
+              <a:rPr sz="1100" b="1">
+                <a:solidFill>
+                  <a:srgbClr val="F5B020"/>
+                </a:solidFill>
+                <a:latin typeface="Microsoft JhengHei"/>
+                <a:ea typeface="Microsoft JhengHei"/>
+                <a:cs typeface="Microsoft JhengHei"/>
+              </a:rPr>
+              <a:t>　Q13</a:t>
+            </a:r>
+          </a:p>
+        </p:txBody>
+      </p:sp>
+      <p:sp>
+        <p:nvSpPr>
+          <p:cNvPr id="22" name="TextBox 21"/>
+          <p:cNvSpPr txBox="1"/>
+          <p:nvPr/>
+        </p:nvSpPr>
+        <p:spPr>
+          <a:xfrm>
+            <a:off x="6922008" y="2404872"/>
+            <a:ext cx="4572000" cy="365760"/>
+          </a:xfrm>
+          <a:prstGeom prst="rect">
+            <a:avLst/>
+          </a:prstGeom>
+          <a:noFill/>
+        </p:spPr>
+        <p:txBody>
+          <a:bodyPr wrap="square" anchor="t" lIns="0" rIns="0" tIns="0" bIns="0">
+            <a:spAutoFit/>
+          </a:bodyPr>
+          <a:lstStyle/>
+          <a:p>
+            <a:pPr algn="l">
+              <a:lnSpc>
+                <a:spcPct val="112000"/>
+              </a:lnSpc>
+              <a:spcBef>
+                <a:spcPts val="0"/>
+              </a:spcBef>
+              <a:spcAft>
+                <a:spcPts val="600"/>
+              </a:spcAft>
+            </a:pPr>
+            <a:r>
+              <a:rPr sz="1200" b="0">
+                <a:solidFill>
+                  <a:srgbClr val="5A6B8C"/>
+                </a:solidFill>
+                <a:latin typeface="Microsoft JhengHei"/>
+                <a:ea typeface="Microsoft JhengHei"/>
+                <a:cs typeface="Microsoft JhengHei"/>
+              </a:rPr>
+              <a:t>看 audit log + 驗證 hash chain(綠)</a:t>
+            </a:r>
+          </a:p>
+        </p:txBody>
+      </p:sp>
+      <p:sp>
+        <p:nvSpPr>
+          <p:cNvPr id="23" name="TextBox 22"/>
+          <p:cNvSpPr txBox="1"/>
+          <p:nvPr/>
+        </p:nvSpPr>
+        <p:spPr>
+          <a:xfrm>
+            <a:off x="6355080" y="2990088"/>
+            <a:ext cx="502920" cy="457200"/>
+          </a:xfrm>
+          <a:prstGeom prst="rect">
+            <a:avLst/>
+          </a:prstGeom>
+          <a:noFill/>
+        </p:spPr>
+        <p:txBody>
+          <a:bodyPr wrap="square" anchor="t" lIns="0" rIns="0" tIns="0" bIns="0">
+            <a:spAutoFit/>
+          </a:bodyPr>
+          <a:lstStyle/>
+          <a:p>
+            <a:pPr algn="l">
+              <a:lnSpc>
+                <a:spcPct val="112000"/>
+              </a:lnSpc>
+              <a:spcBef>
+                <a:spcPts val="0"/>
+              </a:spcBef>
+              <a:spcAft>
+                <a:spcPts val="600"/>
+              </a:spcAft>
+            </a:pPr>
+            <a:r>
+              <a:rPr sz="2000" b="1">
+                <a:solidFill>
+                  <a:srgbClr val="F5B020"/>
+                </a:solidFill>
+                <a:latin typeface="Microsoft JhengHei"/>
+                <a:ea typeface="Microsoft JhengHei"/>
+                <a:cs typeface="Microsoft JhengHei"/>
+              </a:rPr>
+              <a:t>06</a:t>
+            </a:r>
+          </a:p>
+        </p:txBody>
+      </p:sp>
+      <p:sp>
+        <p:nvSpPr>
+          <p:cNvPr id="24" name="TextBox 23"/>
+          <p:cNvSpPr txBox="1"/>
+          <p:nvPr/>
+        </p:nvSpPr>
+        <p:spPr>
+          <a:xfrm>
+            <a:off x="6922008" y="2971800"/>
+            <a:ext cx="4572000" cy="365760"/>
+          </a:xfrm>
+          <a:prstGeom prst="rect">
+            <a:avLst/>
+          </a:prstGeom>
+          <a:noFill/>
+        </p:spPr>
+        <p:txBody>
+          <a:bodyPr wrap="square" anchor="t" lIns="0" rIns="0" tIns="0" bIns="0">
+            <a:spAutoFit/>
+          </a:bodyPr>
+          <a:lstStyle/>
+          <a:p>
+            <a:pPr algn="l">
+              <a:lnSpc>
+                <a:spcPct val="112000"/>
+              </a:lnSpc>
+              <a:spcBef>
+                <a:spcPts val="0"/>
+              </a:spcBef>
+              <a:spcAft>
+                <a:spcPts val="600"/>
+              </a:spcAft>
+            </a:pPr>
+            <a:r>
+              <a:rPr sz="1450" b="1">
+                <a:solidFill>
+                  <a:srgbClr val="1A2236"/>
+                </a:solidFill>
+                <a:latin typeface="Microsoft JhengHei"/>
+                <a:ea typeface="Microsoft JhengHei"/>
+                <a:cs typeface="Microsoft JhengHei"/>
+              </a:rPr>
+              <a:t>改用 -CONF 案號</a:t>
+            </a:r>
+            <a:r>
+              <a:rPr sz="1100" b="1">
+                <a:solidFill>
+                  <a:srgbClr val="F5B020"/>
+                </a:solidFill>
+                <a:latin typeface="Microsoft JhengHei"/>
+                <a:ea typeface="Microsoft JhengHei"/>
+                <a:cs typeface="Microsoft JhengHei"/>
+              </a:rPr>
+              <a:t>　Q15</a:t>
+            </a:r>
+          </a:p>
+        </p:txBody>
+      </p:sp>
+      <p:sp>
+        <p:nvSpPr>
+          <p:cNvPr id="25" name="TextBox 24"/>
+          <p:cNvSpPr txBox="1"/>
+          <p:nvPr/>
+        </p:nvSpPr>
+        <p:spPr>
+          <a:xfrm>
+            <a:off x="6922008" y="3337560"/>
+            <a:ext cx="4572000" cy="365760"/>
+          </a:xfrm>
+          <a:prstGeom prst="rect">
+            <a:avLst/>
+          </a:prstGeom>
+          <a:noFill/>
+        </p:spPr>
+        <p:txBody>
+          <a:bodyPr wrap="square" anchor="t" lIns="0" rIns="0" tIns="0" bIns="0">
+            <a:spAutoFit/>
+          </a:bodyPr>
+          <a:lstStyle/>
+          <a:p>
+            <a:pPr algn="l">
+              <a:lnSpc>
+                <a:spcPct val="112000"/>
+              </a:lnSpc>
+              <a:spcBef>
+                <a:spcPts val="0"/>
+              </a:spcBef>
+              <a:spcAft>
+                <a:spcPts val="600"/>
+              </a:spcAft>
+            </a:pPr>
+            <a:r>
+              <a:rPr sz="1200" b="0">
+                <a:solidFill>
+                  <a:srgbClr val="5A6B8C"/>
+                </a:solidFill>
+                <a:latin typeface="Microsoft JhengHei"/>
+                <a:ea typeface="Microsoft JhengHei"/>
+                <a:cs typeface="Microsoft JhengHei"/>
+              </a:rPr>
+              <a:t>audit 模型自動切地端</a:t>
+            </a:r>
+          </a:p>
+        </p:txBody>
+      </p:sp>
+      <p:sp>
+        <p:nvSpPr>
+          <p:cNvPr id="26" name="TextBox 25"/>
+          <p:cNvSpPr txBox="1"/>
+          <p:nvPr/>
+        </p:nvSpPr>
+        <p:spPr>
+          <a:xfrm>
+            <a:off x="6355080" y="3922776"/>
+            <a:ext cx="502920" cy="457200"/>
+          </a:xfrm>
+          <a:prstGeom prst="rect">
+            <a:avLst/>
+          </a:prstGeom>
+          <a:noFill/>
+        </p:spPr>
+        <p:txBody>
+          <a:bodyPr wrap="square" anchor="t" lIns="0" rIns="0" tIns="0" bIns="0">
+            <a:spAutoFit/>
+          </a:bodyPr>
+          <a:lstStyle/>
+          <a:p>
+            <a:pPr algn="l">
+              <a:lnSpc>
+                <a:spcPct val="112000"/>
+              </a:lnSpc>
+              <a:spcBef>
+                <a:spcPts val="0"/>
+              </a:spcBef>
+              <a:spcAft>
+                <a:spcPts val="600"/>
+              </a:spcAft>
+            </a:pPr>
+            <a:r>
+              <a:rPr sz="2000" b="1">
+                <a:solidFill>
+                  <a:srgbClr val="F5B020"/>
+                </a:solidFill>
+                <a:latin typeface="Microsoft JhengHei"/>
+                <a:ea typeface="Microsoft JhengHei"/>
+                <a:cs typeface="Microsoft JhengHei"/>
+              </a:rPr>
+              <a:t>07</a:t>
+            </a:r>
+          </a:p>
+        </p:txBody>
+      </p:sp>
+      <p:sp>
+        <p:nvSpPr>
+          <p:cNvPr id="27" name="TextBox 26"/>
+          <p:cNvSpPr txBox="1"/>
+          <p:nvPr/>
+        </p:nvSpPr>
+        <p:spPr>
+          <a:xfrm>
+            <a:off x="6922008" y="3904488"/>
+            <a:ext cx="4572000" cy="365760"/>
+          </a:xfrm>
+          <a:prstGeom prst="rect">
+            <a:avLst/>
+          </a:prstGeom>
+          <a:noFill/>
+        </p:spPr>
+        <p:txBody>
+          <a:bodyPr wrap="square" anchor="t" lIns="0" rIns="0" tIns="0" bIns="0">
+            <a:spAutoFit/>
+          </a:bodyPr>
+          <a:lstStyle/>
+          <a:p>
+            <a:pPr algn="l">
+              <a:lnSpc>
+                <a:spcPct val="112000"/>
+              </a:lnSpc>
+              <a:spcBef>
+                <a:spcPts val="0"/>
+              </a:spcBef>
+              <a:spcAft>
+                <a:spcPts val="600"/>
+              </a:spcAft>
+            </a:pPr>
+            <a:r>
+              <a:rPr sz="1450" b="1">
+                <a:solidFill>
+                  <a:srgbClr val="1A2236"/>
+                </a:solidFill>
+                <a:latin typeface="Microsoft JhengHei"/>
+                <a:ea typeface="Microsoft JhengHei"/>
+                <a:cs typeface="Microsoft JhengHei"/>
+              </a:rPr>
+              <a:t>改用 Carol 登入</a:t>
+            </a:r>
+            <a:r>
+              <a:rPr sz="1100" b="1">
+                <a:solidFill>
+                  <a:srgbClr val="F5B020"/>
+                </a:solidFill>
+                <a:latin typeface="Microsoft JhengHei"/>
+                <a:ea typeface="Microsoft JhengHei"/>
+                <a:cs typeface="Microsoft JhengHei"/>
+              </a:rPr>
+              <a:t>　Q12</a:t>
+            </a:r>
+          </a:p>
+        </p:txBody>
+      </p:sp>
+      <p:sp>
+        <p:nvSpPr>
+          <p:cNvPr id="28" name="TextBox 27"/>
+          <p:cNvSpPr txBox="1"/>
+          <p:nvPr/>
+        </p:nvSpPr>
+        <p:spPr>
+          <a:xfrm>
+            <a:off x="6922008" y="4270248"/>
+            <a:ext cx="4572000" cy="365760"/>
+          </a:xfrm>
+          <a:prstGeom prst="rect">
+            <a:avLst/>
+          </a:prstGeom>
+          <a:noFill/>
+        </p:spPr>
+        <p:txBody>
+          <a:bodyPr wrap="square" anchor="t" lIns="0" rIns="0" tIns="0" bIns="0">
+            <a:spAutoFit/>
+          </a:bodyPr>
+          <a:lstStyle/>
+          <a:p>
+            <a:pPr algn="l">
+              <a:lnSpc>
+                <a:spcPct val="112000"/>
+              </a:lnSpc>
+              <a:spcBef>
+                <a:spcPts val="0"/>
+              </a:spcBef>
+              <a:spcAft>
+                <a:spcPts val="600"/>
+              </a:spcAft>
+            </a:pPr>
+            <a:r>
+              <a:rPr sz="1200" b="0">
+                <a:solidFill>
+                  <a:srgbClr val="5A6B8C"/>
+                </a:solidFill>
+                <a:latin typeface="Microsoft JhengHei"/>
+                <a:ea typeface="Microsoft JhengHei"/>
+                <a:cs typeface="Microsoft JhengHei"/>
+              </a:rPr>
+              <a:t>403 — 她不在這個 case</a:t>
+            </a:r>
+          </a:p>
+        </p:txBody>
+      </p:sp>
+      <p:sp>
+        <p:nvSpPr>
+          <p:cNvPr id="29" name="TextBox 28"/>
+          <p:cNvSpPr txBox="1"/>
+          <p:nvPr/>
+        </p:nvSpPr>
+        <p:spPr>
+          <a:xfrm>
+            <a:off x="822960" y="6455664"/>
+            <a:ext cx="8229600" cy="274320"/>
+          </a:xfrm>
+          <a:prstGeom prst="rect">
+            <a:avLst/>
+          </a:prstGeom>
+          <a:noFill/>
+        </p:spPr>
+        <p:txBody>
+          <a:bodyPr wrap="square" anchor="t" lIns="0" rIns="0" tIns="0" bIns="0">
+            <a:spAutoFit/>
+          </a:bodyPr>
+          <a:lstStyle/>
+          <a:p>
+            <a:pPr algn="l">
+              <a:lnSpc>
+                <a:spcPct val="112000"/>
+              </a:lnSpc>
+              <a:spcBef>
+                <a:spcPts val="0"/>
+              </a:spcBef>
+              <a:spcAft>
+                <a:spcPts val="600"/>
+              </a:spcAft>
+            </a:pPr>
+            <a:r>
+              <a:rPr sz="1000" b="0">
+                <a:solidFill>
+                  <a:srgbClr val="8A97B2"/>
+                </a:solidFill>
+                <a:latin typeface="Microsoft JhengHei"/>
+                <a:ea typeface="Microsoft JhengHei"/>
+                <a:cs typeface="Microsoft JhengHei"/>
+              </a:rPr>
+              <a:t>PatentMind AI　·　NCCU GDGoC × Computex 2026</a:t>
+            </a:r>
+          </a:p>
+        </p:txBody>
+      </p:sp>
+      <p:sp>
+        <p:nvSpPr>
+          <p:cNvPr id="30" name="TextBox 29"/>
+          <p:cNvSpPr txBox="1"/>
+          <p:nvPr/>
+        </p:nvSpPr>
+        <p:spPr>
+          <a:xfrm>
+            <a:off x="10637215" y="6455664"/>
+            <a:ext cx="731520" cy="274320"/>
+          </a:xfrm>
+          <a:prstGeom prst="rect">
+            <a:avLst/>
+          </a:prstGeom>
+          <a:noFill/>
+        </p:spPr>
+        <p:txBody>
+          <a:bodyPr wrap="square" anchor="t" lIns="0" rIns="0" tIns="0" bIns="0">
+            <a:spAutoFit/>
+          </a:bodyPr>
+          <a:lstStyle/>
+          <a:p>
+            <a:pPr algn="r">
+              <a:lnSpc>
+                <a:spcPct val="112000"/>
+              </a:lnSpc>
+              <a:spcBef>
+                <a:spcPts val="0"/>
+              </a:spcBef>
+              <a:spcAft>
+                <a:spcPts val="600"/>
+              </a:spcAft>
+            </a:pPr>
+            <a:r>
+              <a:rPr sz="1000" b="0">
+                <a:solidFill>
+                  <a:srgbClr val="8A97B2"/>
+                </a:solidFill>
+                <a:latin typeface="Microsoft JhengHei"/>
+                <a:ea typeface="Microsoft JhengHei"/>
+                <a:cs typeface="Microsoft JhengHei"/>
+              </a:rPr>
+              <a:t>14</a:t>
+            </a:r>
+          </a:p>
+        </p:txBody>
+      </p:sp>
+    </p:spTree>
+  </p:cSld>
+  <p:clrMapOvr>
+    <a:masterClrMapping/>
+  </p:clrMapOvr>
+</p:sld>
+</file>
+
+<file path=ppt/slides/slide23.xml><?xml version="1.0" encoding="utf-8"?>
 <p:sld xmlns:a="http://schemas.openxmlformats.org/drawingml/2006/main" xmlns:p="http://schemas.openxmlformats.org/presentationml/2006/main" xmlns:r="http://schemas.openxmlformats.org/officeDocument/2006/relationships">
   <p:cSld>
     <p:spTree>

--- a/presentation/PatentMind_簡報.pptx
+++ b/presentation/PatentMind_簡報.pptx
@@ -4432,7 +4432,7 @@
                 <a:ea typeface="Microsoft JhengHei"/>
                 <a:cs typeface="Microsoft JhengHei"/>
               </a:rPr>
-              <a:t>· 平台整合實證</a:t>
+              <a:t>· 平台整合</a:t>
             </a:r>
           </a:p>
         </p:txBody>
@@ -5243,7 +5243,7 @@
                 <a:ea typeface="Microsoft JhengHei"/>
                 <a:cs typeface="Microsoft JhengHei"/>
               </a:rPr>
-              <a:t>· 平台整合實證</a:t>
+              <a:t>· 平台整合</a:t>
             </a:r>
           </a:p>
         </p:txBody>
@@ -6145,7 +6145,7 @@
                 <a:ea typeface="Microsoft JhengHei"/>
                 <a:cs typeface="Microsoft JhengHei"/>
               </a:rPr>
-              <a:t>· 平台整合實證</a:t>
+              <a:t>· 平台整合</a:t>
             </a:r>
           </a:p>
         </p:txBody>
@@ -6192,7 +6192,7 @@
                 <a:ea typeface="Microsoft JhengHei"/>
                 <a:cs typeface="Microsoft JhengHei"/>
               </a:rPr>
-              <a:t>實機證明 ①｜真模型分析結果</a:t>
+              <a:t>運行實況 ①｜真實模型的分析結果</a:t>
             </a:r>
           </a:p>
         </p:txBody>
@@ -7112,7 +7112,7 @@
                 <a:ea typeface="Microsoft JhengHei"/>
                 <a:cs typeface="Microsoft JhengHei"/>
               </a:rPr>
-              <a:t>· 平台整合實證</a:t>
+              <a:t>· 平台整合</a:t>
             </a:r>
           </a:p>
         </p:txBody>
@@ -7159,7 +7159,7 @@
                 <a:ea typeface="Microsoft JhengHei"/>
                 <a:cs typeface="Microsoft JhengHei"/>
               </a:rPr>
-              <a:t>實機證明 ②｜稽核鏈與服務狀態</a:t>
+              <a:t>運行實況 ②｜稽核鏈與服務狀態</a:t>
             </a:r>
           </a:p>
         </p:txBody>
@@ -9629,7 +9629,7 @@
                 <a:ea typeface="Microsoft JhengHei"/>
                 <a:cs typeface="Microsoft JhengHei"/>
               </a:rPr>
-              <a:t>平台整合實證</a:t>
+              <a:t>平台整合</a:t>
             </a:r>
           </a:p>
         </p:txBody>

--- a/presentation/PatentMind_簡報.pptx
+++ b/presentation/PatentMind_簡報.pptx
@@ -4479,7 +4479,7 @@
                 <a:ea typeface="Microsoft JhengHei"/>
                 <a:cs typeface="Microsoft JhengHei"/>
               </a:rPr>
-              <a:t>實機整合 ①｜digiRunner 前線閘道</a:t>
+              <a:t>實機整合｜digiRunner 前線閘道</a:t>
             </a:r>
           </a:p>
         </p:txBody>
@@ -5290,7 +5290,7 @@
                 <a:ea typeface="Microsoft JhengHei"/>
                 <a:cs typeface="Microsoft JhengHei"/>
               </a:rPr>
-              <a:t>實機整合 ②｜Dify AI 工作流</a:t>
+              <a:t>實機整合｜Dify AI 工作流</a:t>
             </a:r>
           </a:p>
         </p:txBody>
@@ -6192,7 +6192,7 @@
                 <a:ea typeface="Microsoft JhengHei"/>
                 <a:cs typeface="Microsoft JhengHei"/>
               </a:rPr>
-              <a:t>運行實況 ①｜真實模型的分析結果</a:t>
+              <a:t>運行實況｜真實模型的分析結果</a:t>
             </a:r>
           </a:p>
         </p:txBody>
@@ -7159,7 +7159,7 @@
                 <a:ea typeface="Microsoft JhengHei"/>
                 <a:cs typeface="Microsoft JhengHei"/>
               </a:rPr>
-              <a:t>運行實況 ②｜稽核鏈與服務狀態</a:t>
+              <a:t>運行實況｜稽核鏈與服務狀態</a:t>
             </a:r>
           </a:p>
         </p:txBody>

--- a/presentation/PatentMind_簡報.pptx
+++ b/presentation/PatentMind_簡報.pptx
@@ -20,6 +20,8 @@
     <p:sldId id="268" r:id="rId19"/>
     <p:sldId id="269" r:id="rId20"/>
     <p:sldId id="270" r:id="rId21"/>
+    <p:sldId id="271" r:id="rId22"/>
+    <p:sldId id="272" r:id="rId23"/>
   </p:sldIdLst>
   <p:sldSz cx="12191695" cy="6858000" type="screen4x3"/>
   <p:notesSz cx="6858000" cy="9144000"/>
@@ -3661,7 +3663,7 @@
                 <a:ea typeface="Microsoft JhengHei"/>
                 <a:cs typeface="Microsoft JhengHei"/>
               </a:rPr>
-              <a:t>畫面 ③｜草稿與引證驗證</a:t>
+              <a:t>畫面 ①｜登入與角色權限</a:t>
             </a:r>
           </a:p>
         </p:txBody>
@@ -3703,7 +3705,7 @@
       </p:cxnSp>
       <p:pic>
         <p:nvPicPr>
-          <p:cNvPr id="7" name="Picture 6" descr="analyze-result-desktop-chromium-desktop.png"/>
+          <p:cNvPr id="7" name="Picture 6" descr="landing-desktop-1440-chromium-desktop.png"/>
           <p:cNvPicPr>
             <a:picLocks noChangeAspect="1"/>
           </p:cNvPicPr>
@@ -3829,7 +3831,7 @@
                 <a:ea typeface="Microsoft JhengHei"/>
                 <a:cs typeface="Microsoft JhengHei"/>
               </a:rPr>
-              <a:t>生成 → 驗證兩段式</a:t>
+              <a:t>官方入口風格</a:t>
             </a:r>
           </a:p>
         </p:txBody>
@@ -3876,7 +3878,7 @@
                 <a:ea typeface="Microsoft JhengHei"/>
                 <a:cs typeface="Microsoft JhengHei"/>
               </a:rPr>
-              <a:t>草稿產生後系統自動驗證每個引用;查無實據的引用直接剝除並標示。</a:t>
+              <a:t>乾淨版面、弱化技術術語;律師第一眼就知道在哪裡開始。</a:t>
             </a:r>
           </a:p>
         </p:txBody>
@@ -3978,7 +3980,7 @@
                 <a:ea typeface="Microsoft JhengHei"/>
                 <a:cs typeface="Microsoft JhengHei"/>
               </a:rPr>
-              <a:t>引用可點開</a:t>
+              <a:t>四種角色</a:t>
             </a:r>
           </a:p>
         </p:txBody>
@@ -4025,7 +4027,7 @@
                 <a:ea typeface="Microsoft JhengHei"/>
                 <a:cs typeface="Microsoft JhengHei"/>
               </a:rPr>
-              <a:t>點任何引用即顯示來源文件與原文段落,律師不用自己翻。</a:t>
+              <a:t>律師 / 助理 / IT / 稽核 — 各自看到的功能與案件都不同。</a:t>
             </a:r>
           </a:p>
         </p:txBody>
@@ -4127,7 +4129,7 @@
                 <a:ea typeface="Microsoft JhengHei"/>
                 <a:cs typeface="Microsoft JhengHei"/>
               </a:rPr>
-              <a:t>逐句簽核</a:t>
+              <a:t>案件級權限</a:t>
             </a:r>
           </a:p>
         </p:txBody>
@@ -4174,7 +4176,7 @@
                 <a:ea typeface="Microsoft JhengHei"/>
                 <a:cs typeface="Microsoft JhengHei"/>
               </a:rPr>
-              <a:t>每句標示由 AI 或律師撰寫,逐句 Accept / Edit;全部確認才能匯出。</a:t>
+              <a:t>登入身分決定可碰哪些案件,之後每一筆請求都重新檢查。</a:t>
             </a:r>
           </a:p>
         </p:txBody>
@@ -4421,7 +4423,7 @@
                 <a:ea typeface="Microsoft JhengHei"/>
                 <a:cs typeface="Microsoft JhengHei"/>
               </a:rPr>
-              <a:t>05 </a:t>
+              <a:t>04 </a:t>
             </a:r>
             <a:r>
               <a:rPr sz="1400" b="0">
@@ -4432,7 +4434,7 @@
                 <a:ea typeface="Microsoft JhengHei"/>
                 <a:cs typeface="Microsoft JhengHei"/>
               </a:rPr>
-              <a:t>· 平台整合</a:t>
+              <a:t>· 產品畫面</a:t>
             </a:r>
           </a:p>
         </p:txBody>
@@ -4479,7 +4481,7 @@
                 <a:ea typeface="Microsoft JhengHei"/>
                 <a:cs typeface="Microsoft JhengHei"/>
               </a:rPr>
-              <a:t>實機整合｜digiRunner 前線閘道</a:t>
+              <a:t>畫面 ②｜分析工作台(三欄)</a:t>
             </a:r>
           </a:p>
         </p:txBody>
@@ -4519,123 +4521,49 @@
           </a:fontRef>
         </p:style>
       </p:cxnSp>
-      <p:sp>
-        <p:nvSpPr>
-          <p:cNvPr id="7" name="TextBox 6"/>
-          <p:cNvSpPr txBox="1"/>
-          <p:nvPr/>
-        </p:nvSpPr>
-        <p:spPr>
-          <a:xfrm>
-            <a:off x="8259775" y="182880"/>
-            <a:ext cx="3840480" cy="2377440"/>
-          </a:xfrm>
-          <a:prstGeom prst="rect">
-            <a:avLst/>
-          </a:prstGeom>
-          <a:noFill/>
-        </p:spPr>
-        <p:txBody>
-          <a:bodyPr wrap="square" anchor="t" lIns="0" rIns="0" tIns="0" bIns="0">
-            <a:spAutoFit/>
-          </a:bodyPr>
-          <a:lstStyle/>
-          <a:p>
-            <a:pPr algn="r">
-              <a:lnSpc>
-                <a:spcPct val="112000"/>
-              </a:lnSpc>
-              <a:spcBef>
-                <a:spcPts val="0"/>
-              </a:spcBef>
-              <a:spcAft>
-                <a:spcPts val="600"/>
-              </a:spcAft>
-            </a:pPr>
-            <a:r>
-              <a:rPr sz="15000" b="1">
-                <a:solidFill>
-                  <a:srgbClr val="EEF1F8"/>
-                </a:solidFill>
-                <a:latin typeface="Microsoft JhengHei"/>
-                <a:ea typeface="Microsoft JhengHei"/>
-                <a:cs typeface="Microsoft JhengHei"/>
-              </a:rPr>
-              <a:t>05</a:t>
-            </a:r>
-          </a:p>
-        </p:txBody>
-      </p:sp>
-      <p:sp>
-        <p:nvSpPr>
-          <p:cNvPr id="8" name="TextBox 7"/>
-          <p:cNvSpPr txBox="1"/>
-          <p:nvPr/>
-        </p:nvSpPr>
-        <p:spPr>
-          <a:xfrm>
-            <a:off x="822960" y="1965960"/>
-            <a:ext cx="10515600" cy="457200"/>
-          </a:xfrm>
-          <a:prstGeom prst="rect">
-            <a:avLst/>
-          </a:prstGeom>
-          <a:noFill/>
-        </p:spPr>
-        <p:txBody>
-          <a:bodyPr wrap="square" anchor="t" lIns="0" rIns="0" tIns="0" bIns="0">
-            <a:spAutoFit/>
-          </a:bodyPr>
-          <a:lstStyle/>
-          <a:p>
-            <a:pPr algn="l">
-              <a:lnSpc>
-                <a:spcPct val="125000"/>
-              </a:lnSpc>
-              <a:spcBef>
-                <a:spcPts val="0"/>
-              </a:spcBef>
-              <a:spcAft>
-                <a:spcPts val="600"/>
-              </a:spcAft>
-            </a:pPr>
-            <a:r>
-              <a:rPr sz="1700" b="1">
-                <a:solidFill>
-                  <a:srgbClr val="1E3A8A"/>
-                </a:solidFill>
-                <a:latin typeface="Microsoft JhengHei"/>
-                <a:ea typeface="Microsoft JhengHei"/>
-                <a:cs typeface="Microsoft JhengHei"/>
-              </a:rPr>
-              <a:t>digiRunner(TPIsoftware 開源版)= 企業 API 閘道　</a:t>
-            </a:r>
-            <a:r>
-              <a:rPr sz="1500" b="0">
-                <a:solidFill>
-                  <a:srgbClr val="5A6B8C"/>
-                </a:solidFill>
-                <a:latin typeface="Microsoft JhengHei"/>
-                <a:ea typeface="Microsoft JhengHei"/>
-                <a:cs typeface="Microsoft JhengHei"/>
-              </a:rPr>
-              <a:t>部署於 :18080,所有前端流量先經過它,再轉發到系統閘道。</a:t>
-            </a:r>
-          </a:p>
-        </p:txBody>
-      </p:sp>
-      <p:sp>
-        <p:nvSpPr>
-          <p:cNvPr id="9" name="Rectangle 8"/>
+      <p:pic>
+        <p:nvPicPr>
+          <p:cNvPr id="7" name="Picture 6" descr="analyze-empty-desktop-chromium-desktop.png"/>
+          <p:cNvPicPr>
+            <a:picLocks noChangeAspect="1"/>
+          </p:cNvPicPr>
+          <p:nvPr/>
+        </p:nvPicPr>
+        <p:blipFill>
+          <a:blip r:embed="rId2"/>
+          <a:stretch>
+            <a:fillRect/>
+          </a:stretch>
+        </p:blipFill>
+        <p:spPr>
+          <a:xfrm>
+            <a:off x="822960" y="2148840"/>
+            <a:ext cx="5925312" cy="3703320"/>
+          </a:xfrm>
+          <a:prstGeom prst="rect">
+            <a:avLst/>
+          </a:prstGeom>
+          <a:effectLst>
+            <a:outerShdw blurRad="90000" dist="38100" dir="5400000" rotWithShape="0">
+              <a:srgbClr val="1A2236">
+                <a:alpha val="26000"/>
+              </a:srgbClr>
+            </a:outerShdw>
+          </a:effectLst>
+        </p:spPr>
+      </p:pic>
+      <p:sp>
+        <p:nvSpPr>
+          <p:cNvPr id="8" name="Oval 7"/>
           <p:cNvSpPr/>
           <p:nvPr/>
         </p:nvSpPr>
         <p:spPr>
           <a:xfrm>
-            <a:off x="914400" y="2866644"/>
-            <a:ext cx="118872" cy="118872"/>
-          </a:xfrm>
-          <a:prstGeom prst="rect">
+            <a:off x="7251192" y="2286000"/>
+            <a:ext cx="310896" cy="310896"/>
+          </a:xfrm>
+          <a:prstGeom prst="ellipse">
             <a:avLst/>
           </a:prstGeom>
           <a:solidFill>
@@ -4661,10 +4589,68 @@
           </a:fontRef>
         </p:style>
         <p:txBody>
-          <a:bodyPr rtlCol="0" anchor="ctr"/>
+          <a:bodyPr rtlCol="0" anchor="ctr" tIns="0" bIns="0"/>
           <a:lstStyle/>
           <a:p>
             <a:pPr algn="ctr"/>
+            <a:r>
+              <a:rPr sz="1400" b="1">
+                <a:solidFill>
+                  <a:srgbClr val="FFFFFF"/>
+                </a:solidFill>
+                <a:latin typeface="Microsoft JhengHei"/>
+                <a:ea typeface="Microsoft JhengHei"/>
+                <a:cs typeface="Microsoft JhengHei"/>
+              </a:rPr>
+              <a:t>1</a:t>
+            </a:r>
+          </a:p>
+        </p:txBody>
+      </p:sp>
+      <p:sp>
+        <p:nvSpPr>
+          <p:cNvPr id="9" name="TextBox 8"/>
+          <p:cNvSpPr txBox="1"/>
+          <p:nvPr/>
+        </p:nvSpPr>
+        <p:spPr>
+          <a:xfrm>
+            <a:off x="7708392" y="2249424"/>
+            <a:ext cx="3843223" cy="365760"/>
+          </a:xfrm>
+          <a:prstGeom prst="rect">
+            <a:avLst/>
+          </a:prstGeom>
+          <a:noFill/>
+        </p:spPr>
+        <p:txBody>
+          <a:bodyPr wrap="square" anchor="t" lIns="0" rIns="0" tIns="0" bIns="0">
+            <a:spAutoFit/>
+          </a:bodyPr>
+          <a:lstStyle/>
+          <a:p>
+            <a:pPr algn="l">
+              <a:lnSpc>
+                <a:spcPct val="112000"/>
+              </a:lnSpc>
+              <a:spcBef>
+                <a:spcPts val="0"/>
+              </a:spcBef>
+              <a:spcAft>
+                <a:spcPts val="600"/>
+              </a:spcAft>
+            </a:pPr>
+            <a:r>
+              <a:rPr sz="1550" b="1">
+                <a:solidFill>
+                  <a:srgbClr val="1E3A8A"/>
+                </a:solidFill>
+                <a:latin typeface="Microsoft JhengHei"/>
+                <a:ea typeface="Microsoft JhengHei"/>
+                <a:cs typeface="Microsoft JhengHei"/>
+              </a:rPr>
+              <a:t>左欄輸入</a:t>
+            </a:r>
           </a:p>
         </p:txBody>
       </p:sp>
@@ -4676,8 +4662,8 @@
         </p:nvSpPr>
         <p:spPr>
           <a:xfrm>
-            <a:off x="1207008" y="2788920"/>
-            <a:ext cx="10040112" cy="731520"/>
+            <a:off x="7708392" y="2587752"/>
+            <a:ext cx="3843223" cy="731520"/>
           </a:xfrm>
           <a:prstGeom prst="rect">
             <a:avLst/>
@@ -4692,41 +4678,41 @@
           <a:p>
             <a:pPr algn="l">
               <a:lnSpc>
-                <a:spcPct val="110000"/>
-              </a:lnSpc>
-              <a:spcBef>
-                <a:spcPts val="0"/>
-              </a:spcBef>
-              <a:spcAft>
-                <a:spcPts val="0"/>
-              </a:spcAft>
-            </a:pPr>
-            <a:r>
-              <a:rPr sz="1550" b="0">
-                <a:solidFill>
-                  <a:srgbClr val="1A2236"/>
-                </a:solidFill>
-                <a:latin typeface="Microsoft JhengHei"/>
-                <a:ea typeface="Microsoft JhengHei"/>
-                <a:cs typeface="Microsoft JhengHei"/>
-              </a:rPr>
-              <a:t>路由全自動註冊:12 條 API 路由以管理 API 寫入,零手動設定,重啟自動重建</a:t>
-            </a:r>
-          </a:p>
-        </p:txBody>
-      </p:sp>
-      <p:sp>
-        <p:nvSpPr>
-          <p:cNvPr id="11" name="Rectangle 10"/>
+                <a:spcPct val="116000"/>
+              </a:lnSpc>
+              <a:spcBef>
+                <a:spcPts val="0"/>
+              </a:spcBef>
+              <a:spcAft>
+                <a:spcPts val="600"/>
+              </a:spcAft>
+            </a:pPr>
+            <a:r>
+              <a:rPr sz="1250" b="0">
+                <a:solidFill>
+                  <a:srgbClr val="5A6B8C"/>
+                </a:solidFill>
+                <a:latin typeface="Microsoft JhengHei"/>
+                <a:ea typeface="Microsoft JhengHei"/>
+                <a:cs typeface="Microsoft JhengHei"/>
+              </a:rPr>
+              <a:t>案號 + 拖放 PDF / DOCX 或直接貼上 OA 全文。</a:t>
+            </a:r>
+          </a:p>
+        </p:txBody>
+      </p:sp>
+      <p:sp>
+        <p:nvSpPr>
+          <p:cNvPr id="11" name="Oval 10"/>
           <p:cNvSpPr/>
           <p:nvPr/>
         </p:nvSpPr>
         <p:spPr>
           <a:xfrm>
-            <a:off x="914400" y="3351847"/>
-            <a:ext cx="118872" cy="118872"/>
-          </a:xfrm>
-          <a:prstGeom prst="rect">
+            <a:off x="7251192" y="3218688"/>
+            <a:ext cx="310896" cy="310896"/>
+          </a:xfrm>
+          <a:prstGeom prst="ellipse">
             <a:avLst/>
           </a:prstGeom>
           <a:solidFill>
@@ -4752,10 +4738,21 @@
           </a:fontRef>
         </p:style>
         <p:txBody>
-          <a:bodyPr rtlCol="0" anchor="ctr"/>
+          <a:bodyPr rtlCol="0" anchor="ctr" tIns="0" bIns="0"/>
           <a:lstStyle/>
           <a:p>
             <a:pPr algn="ctr"/>
+            <a:r>
+              <a:rPr sz="1400" b="1">
+                <a:solidFill>
+                  <a:srgbClr val="FFFFFF"/>
+                </a:solidFill>
+                <a:latin typeface="Microsoft JhengHei"/>
+                <a:ea typeface="Microsoft JhengHei"/>
+                <a:cs typeface="Microsoft JhengHei"/>
+              </a:rPr>
+              <a:t>2</a:t>
+            </a:r>
           </a:p>
         </p:txBody>
       </p:sp>
@@ -4767,8 +4764,8 @@
         </p:nvSpPr>
         <p:spPr>
           <a:xfrm>
-            <a:off x="1207008" y="3274123"/>
-            <a:ext cx="10040112" cy="731520"/>
+            <a:off x="7708392" y="3182112"/>
+            <a:ext cx="3843223" cy="365760"/>
           </a:xfrm>
           <a:prstGeom prst="rect">
             <a:avLst/>
@@ -4783,41 +4780,88 @@
           <a:p>
             <a:pPr algn="l">
               <a:lnSpc>
-                <a:spcPct val="110000"/>
-              </a:lnSpc>
-              <a:spcBef>
-                <a:spcPts val="0"/>
-              </a:spcBef>
-              <a:spcAft>
-                <a:spcPts val="0"/>
-              </a:spcAft>
-            </a:pPr>
-            <a:r>
-              <a:rPr sz="1550" b="0">
-                <a:solidFill>
-                  <a:srgbClr val="1A2236"/>
-                </a:solidFill>
-                <a:latin typeface="Microsoft JhengHei"/>
-                <a:ea typeface="Microsoft JhengHei"/>
-                <a:cs typeface="Microsoft JhengHei"/>
-              </a:rPr>
-              <a:t>身分標頭轉發:digiRunner 驗證後以信任標頭傳遞身分;偽造標頭一律 401</a:t>
-            </a:r>
-          </a:p>
-        </p:txBody>
-      </p:sp>
-      <p:sp>
-        <p:nvSpPr>
-          <p:cNvPr id="13" name="Rectangle 12"/>
+                <a:spcPct val="112000"/>
+              </a:lnSpc>
+              <a:spcBef>
+                <a:spcPts val="0"/>
+              </a:spcBef>
+              <a:spcAft>
+                <a:spcPts val="600"/>
+              </a:spcAft>
+            </a:pPr>
+            <a:r>
+              <a:rPr sz="1550" b="1">
+                <a:solidFill>
+                  <a:srgbClr val="1E3A8A"/>
+                </a:solidFill>
+                <a:latin typeface="Microsoft JhengHei"/>
+                <a:ea typeface="Microsoft JhengHei"/>
+                <a:cs typeface="Microsoft JhengHei"/>
+              </a:rPr>
+              <a:t>中右欄結果</a:t>
+            </a:r>
+          </a:p>
+        </p:txBody>
+      </p:sp>
+      <p:sp>
+        <p:nvSpPr>
+          <p:cNvPr id="13" name="TextBox 12"/>
+          <p:cNvSpPr txBox="1"/>
+          <p:nvPr/>
+        </p:nvSpPr>
+        <p:spPr>
+          <a:xfrm>
+            <a:off x="7708392" y="3520440"/>
+            <a:ext cx="3843223" cy="731520"/>
+          </a:xfrm>
+          <a:prstGeom prst="rect">
+            <a:avLst/>
+          </a:prstGeom>
+          <a:noFill/>
+        </p:spPr>
+        <p:txBody>
+          <a:bodyPr wrap="square" anchor="t" lIns="0" rIns="0" tIns="0" bIns="0">
+            <a:spAutoFit/>
+          </a:bodyPr>
+          <a:lstStyle/>
+          <a:p>
+            <a:pPr algn="l">
+              <a:lnSpc>
+                <a:spcPct val="116000"/>
+              </a:lnSpc>
+              <a:spcBef>
+                <a:spcPts val="0"/>
+              </a:spcBef>
+              <a:spcAft>
+                <a:spcPts val="600"/>
+              </a:spcAft>
+            </a:pPr>
+            <a:r>
+              <a:rPr sz="1250" b="0">
+                <a:solidFill>
+                  <a:srgbClr val="5A6B8C"/>
+                </a:solidFill>
+                <a:latin typeface="Microsoft JhengHei"/>
+                <a:ea typeface="Microsoft JhengHei"/>
+                <a:cs typeface="Microsoft JhengHei"/>
+              </a:rPr>
+              <a:t>分析後中欄出申復書草稿,右欄列審查官引證與檢索命中的前案。</a:t>
+            </a:r>
+          </a:p>
+        </p:txBody>
+      </p:sp>
+      <p:sp>
+        <p:nvSpPr>
+          <p:cNvPr id="14" name="Oval 13"/>
           <p:cNvSpPr/>
           <p:nvPr/>
         </p:nvSpPr>
         <p:spPr>
           <a:xfrm>
-            <a:off x="914400" y="3837050"/>
-            <a:ext cx="118872" cy="118872"/>
-          </a:xfrm>
-          <a:prstGeom prst="rect">
+            <a:off x="7251192" y="4151376"/>
+            <a:ext cx="310896" cy="310896"/>
+          </a:xfrm>
+          <a:prstGeom prst="ellipse">
             <a:avLst/>
           </a:prstGeom>
           <a:solidFill>
@@ -4843,23 +4887,34 @@
           </a:fontRef>
         </p:style>
         <p:txBody>
-          <a:bodyPr rtlCol="0" anchor="ctr"/>
+          <a:bodyPr rtlCol="0" anchor="ctr" tIns="0" bIns="0"/>
           <a:lstStyle/>
           <a:p>
             <a:pPr algn="ctr"/>
-          </a:p>
-        </p:txBody>
-      </p:sp>
-      <p:sp>
-        <p:nvSpPr>
-          <p:cNvPr id="14" name="TextBox 13"/>
-          <p:cNvSpPr txBox="1"/>
-          <p:nvPr/>
-        </p:nvSpPr>
-        <p:spPr>
-          <a:xfrm>
-            <a:off x="1207008" y="3759326"/>
-            <a:ext cx="10040112" cy="731520"/>
+            <a:r>
+              <a:rPr sz="1400" b="1">
+                <a:solidFill>
+                  <a:srgbClr val="FFFFFF"/>
+                </a:solidFill>
+                <a:latin typeface="Microsoft JhengHei"/>
+                <a:ea typeface="Microsoft JhengHei"/>
+                <a:cs typeface="Microsoft JhengHei"/>
+              </a:rPr>
+              <a:t>3</a:t>
+            </a:r>
+          </a:p>
+        </p:txBody>
+      </p:sp>
+      <p:sp>
+        <p:nvSpPr>
+          <p:cNvPr id="15" name="TextBox 14"/>
+          <p:cNvSpPr txBox="1"/>
+          <p:nvPr/>
+        </p:nvSpPr>
+        <p:spPr>
+          <a:xfrm>
+            <a:off x="7708392" y="4114800"/>
+            <a:ext cx="3843223" cy="365760"/>
           </a:xfrm>
           <a:prstGeom prst="rect">
             <a:avLst/>
@@ -4874,64 +4929,29 @@
           <a:p>
             <a:pPr algn="l">
               <a:lnSpc>
-                <a:spcPct val="110000"/>
-              </a:lnSpc>
-              <a:spcBef>
-                <a:spcPts val="0"/>
-              </a:spcBef>
-              <a:spcAft>
-                <a:spcPts val="0"/>
-              </a:spcAft>
-            </a:pPr>
-            <a:r>
-              <a:rPr sz="1550" b="0">
-                <a:solidFill>
-                  <a:srgbClr val="1A2236"/>
-                </a:solidFill>
-                <a:latin typeface="Microsoft JhengHei"/>
-                <a:ea typeface="Microsoft JhengHei"/>
-                <a:cs typeface="Microsoft JhengHei"/>
-              </a:rPr>
-              <a:t>為企業落地鋪路:SSO、流量治理、API 金鑰管理都在這一層接上</a:t>
-            </a:r>
-          </a:p>
-        </p:txBody>
-      </p:sp>
-      <p:cxnSp>
-        <p:nvCxnSpPr>
-          <p:cNvPr id="15" name="Connector 14"/>
-          <p:cNvCxnSpPr/>
-          <p:nvPr/>
-        </p:nvCxnSpPr>
-        <p:spPr>
-          <a:xfrm>
-            <a:off x="822960" y="5394960"/>
-            <a:ext cx="10561320" cy="0"/>
-          </a:xfrm>
-          <a:prstGeom prst="bentConnector3">
-            <a:avLst/>
-          </a:prstGeom>
-          <a:ln w="15240">
-            <a:solidFill>
-              <a:srgbClr val="D7DDEA"/>
-            </a:solidFill>
-          </a:ln>
-        </p:spPr>
-        <p:style>
-          <a:lnRef idx="2">
-            <a:schemeClr val="accent1"/>
-          </a:lnRef>
-          <a:fillRef idx="0">
-            <a:schemeClr val="accent1"/>
-          </a:fillRef>
-          <a:effectRef idx="1">
-            <a:schemeClr val="accent1"/>
-          </a:effectRef>
-          <a:fontRef idx="minor">
-            <a:schemeClr val="tx1"/>
-          </a:fontRef>
-        </p:style>
-      </p:cxnSp>
+                <a:spcPct val="112000"/>
+              </a:lnSpc>
+              <a:spcBef>
+                <a:spcPts val="0"/>
+              </a:spcBef>
+              <a:spcAft>
+                <a:spcPts val="600"/>
+              </a:spcAft>
+            </a:pPr>
+            <a:r>
+              <a:rPr sz="1550" b="1">
+                <a:solidFill>
+                  <a:srgbClr val="1E3A8A"/>
+                </a:solidFill>
+                <a:latin typeface="Microsoft JhengHei"/>
+                <a:ea typeface="Microsoft JhengHei"/>
+                <a:cs typeface="Microsoft JhengHei"/>
+              </a:rPr>
+              <a:t>安全狀態一眼可見</a:t>
+            </a:r>
+          </a:p>
+        </p:txBody>
+      </p:sp>
       <p:sp>
         <p:nvSpPr>
           <p:cNvPr id="16" name="TextBox 15"/>
@@ -4940,8 +4960,8 @@
         </p:nvSpPr>
         <p:spPr>
           <a:xfrm>
-            <a:off x="822960" y="5559552"/>
-            <a:ext cx="10515600" cy="640080"/>
+            <a:off x="7708392" y="4453128"/>
+            <a:ext cx="3843223" cy="731520"/>
           </a:xfrm>
           <a:prstGeom prst="rect">
             <a:avLst/>
@@ -4956,7 +4976,7 @@
           <a:p>
             <a:pPr algn="l">
               <a:lnSpc>
-                <a:spcPct val="125000"/>
+                <a:spcPct val="116000"/>
               </a:lnSpc>
               <a:spcBef>
                 <a:spcPts val="0"/>
@@ -4966,26 +4986,15 @@
               </a:spcAft>
             </a:pPr>
             <a:r>
-              <a:rPr sz="1500" b="1">
-                <a:solidFill>
-                  <a:srgbClr val="F5B020"/>
-                </a:solidFill>
-                <a:latin typeface="Microsoft JhengHei"/>
-                <a:ea typeface="Microsoft JhengHei"/>
-                <a:cs typeface="Microsoft JhengHei"/>
-              </a:rPr>
-              <a:t>實機驗證　</a:t>
-            </a:r>
-            <a:r>
-              <a:rPr sz="1450" b="0">
-                <a:solidFill>
-                  <a:srgbClr val="1A2236"/>
-                </a:solidFill>
-                <a:latin typeface="Microsoft JhengHei"/>
-                <a:ea typeface="Microsoft JhengHei"/>
-                <a:cs typeface="Microsoft JhengHei"/>
-              </a:rPr>
-              <a:t>瀏覽器 → digiRunner → 閘道 → 推論引擎完整走通;7 項自動化煙霧測試全數通過。</a:t>
+              <a:rPr sz="1250" b="0">
+                <a:solidFill>
+                  <a:srgbClr val="5A6B8C"/>
+                </a:solidFill>
+                <a:latin typeface="Microsoft JhengHei"/>
+                <a:ea typeface="Microsoft JhengHei"/>
+                <a:cs typeface="Microsoft JhengHei"/>
+              </a:rPr>
+              <a:t>頂部顯示「資料遮罩:開啟 / 資料保存於本地」;頁尾四燈顯示各服務健康狀態。</a:t>
             </a:r>
           </a:p>
         </p:txBody>
@@ -5232,7 +5241,7 @@
                 <a:ea typeface="Microsoft JhengHei"/>
                 <a:cs typeface="Microsoft JhengHei"/>
               </a:rPr>
-              <a:t>05 </a:t>
+              <a:t>04 </a:t>
             </a:r>
             <a:r>
               <a:rPr sz="1400" b="0">
@@ -5243,7 +5252,7 @@
                 <a:ea typeface="Microsoft JhengHei"/>
                 <a:cs typeface="Microsoft JhengHei"/>
               </a:rPr>
-              <a:t>· 平台整合</a:t>
+              <a:t>· 產品畫面</a:t>
             </a:r>
           </a:p>
         </p:txBody>
@@ -5290,7 +5299,7 @@
                 <a:ea typeface="Microsoft JhengHei"/>
                 <a:cs typeface="Microsoft JhengHei"/>
               </a:rPr>
-              <a:t>實機整合｜Dify AI 工作流</a:t>
+              <a:t>畫面 ③｜草稿與引證驗證</a:t>
             </a:r>
           </a:p>
         </p:txBody>
@@ -5330,123 +5339,49 @@
           </a:fontRef>
         </p:style>
       </p:cxnSp>
-      <p:sp>
-        <p:nvSpPr>
-          <p:cNvPr id="7" name="TextBox 6"/>
-          <p:cNvSpPr txBox="1"/>
-          <p:nvPr/>
-        </p:nvSpPr>
-        <p:spPr>
-          <a:xfrm>
-            <a:off x="8259775" y="182880"/>
-            <a:ext cx="3840480" cy="2377440"/>
-          </a:xfrm>
-          <a:prstGeom prst="rect">
-            <a:avLst/>
-          </a:prstGeom>
-          <a:noFill/>
-        </p:spPr>
-        <p:txBody>
-          <a:bodyPr wrap="square" anchor="t" lIns="0" rIns="0" tIns="0" bIns="0">
-            <a:spAutoFit/>
-          </a:bodyPr>
-          <a:lstStyle/>
-          <a:p>
-            <a:pPr algn="r">
-              <a:lnSpc>
-                <a:spcPct val="112000"/>
-              </a:lnSpc>
-              <a:spcBef>
-                <a:spcPts val="0"/>
-              </a:spcBef>
-              <a:spcAft>
-                <a:spcPts val="600"/>
-              </a:spcAft>
-            </a:pPr>
-            <a:r>
-              <a:rPr sz="15000" b="1">
-                <a:solidFill>
-                  <a:srgbClr val="EEF1F8"/>
-                </a:solidFill>
-                <a:latin typeface="Microsoft JhengHei"/>
-                <a:ea typeface="Microsoft JhengHei"/>
-                <a:cs typeface="Microsoft JhengHei"/>
-              </a:rPr>
-              <a:t>05</a:t>
-            </a:r>
-          </a:p>
-        </p:txBody>
-      </p:sp>
-      <p:sp>
-        <p:nvSpPr>
-          <p:cNvPr id="8" name="TextBox 7"/>
-          <p:cNvSpPr txBox="1"/>
-          <p:nvPr/>
-        </p:nvSpPr>
-        <p:spPr>
-          <a:xfrm>
-            <a:off x="822960" y="1965960"/>
-            <a:ext cx="10515600" cy="457200"/>
-          </a:xfrm>
-          <a:prstGeom prst="rect">
-            <a:avLst/>
-          </a:prstGeom>
-          <a:noFill/>
-        </p:spPr>
-        <p:txBody>
-          <a:bodyPr wrap="square" anchor="t" lIns="0" rIns="0" tIns="0" bIns="0">
-            <a:spAutoFit/>
-          </a:bodyPr>
-          <a:lstStyle/>
-          <a:p>
-            <a:pPr algn="l">
-              <a:lnSpc>
-                <a:spcPct val="125000"/>
-              </a:lnSpc>
-              <a:spcBef>
-                <a:spcPts val="0"/>
-              </a:spcBef>
-              <a:spcAft>
-                <a:spcPts val="600"/>
-              </a:spcAft>
-            </a:pPr>
-            <a:r>
-              <a:rPr sz="1700" b="1">
-                <a:solidFill>
-                  <a:srgbClr val="1E3A8A"/>
-                </a:solidFill>
-                <a:latin typeface="Microsoft JhengHei"/>
-                <a:ea typeface="Microsoft JhengHei"/>
-                <a:cs typeface="Microsoft JhengHei"/>
-              </a:rPr>
-              <a:t>Dify(社群版,自架)= AI workflow 編排平台　</a:t>
-            </a:r>
-            <a:r>
-              <a:rPr sz="1500" b="0">
-                <a:solidFill>
-                  <a:srgbClr val="5A6B8C"/>
-                </a:solidFill>
-                <a:latin typeface="Microsoft JhengHei"/>
-                <a:ea typeface="Microsoft JhengHei"/>
-                <a:cs typeface="Microsoft JhengHei"/>
-              </a:rPr>
-              <a:t>部署於 :8088,申復書的解析與草擬透過 Dify workflow 呼叫本地模型 qwen2.5:7b。</a:t>
-            </a:r>
-          </a:p>
-        </p:txBody>
-      </p:sp>
-      <p:sp>
-        <p:nvSpPr>
-          <p:cNvPr id="9" name="Rectangle 8"/>
+      <p:pic>
+        <p:nvPicPr>
+          <p:cNvPr id="7" name="Picture 6" descr="analyze-result-desktop-chromium-desktop.png"/>
+          <p:cNvPicPr>
+            <a:picLocks noChangeAspect="1"/>
+          </p:cNvPicPr>
+          <p:nvPr/>
+        </p:nvPicPr>
+        <p:blipFill>
+          <a:blip r:embed="rId2"/>
+          <a:stretch>
+            <a:fillRect/>
+          </a:stretch>
+        </p:blipFill>
+        <p:spPr>
+          <a:xfrm>
+            <a:off x="822960" y="2148840"/>
+            <a:ext cx="5925312" cy="3703320"/>
+          </a:xfrm>
+          <a:prstGeom prst="rect">
+            <a:avLst/>
+          </a:prstGeom>
+          <a:effectLst>
+            <a:outerShdw blurRad="90000" dist="38100" dir="5400000" rotWithShape="0">
+              <a:srgbClr val="1A2236">
+                <a:alpha val="26000"/>
+              </a:srgbClr>
+            </a:outerShdw>
+          </a:effectLst>
+        </p:spPr>
+      </p:pic>
+      <p:sp>
+        <p:nvSpPr>
+          <p:cNvPr id="8" name="Oval 7"/>
           <p:cNvSpPr/>
           <p:nvPr/>
         </p:nvSpPr>
         <p:spPr>
           <a:xfrm>
-            <a:off x="914400" y="2866644"/>
-            <a:ext cx="118872" cy="118872"/>
-          </a:xfrm>
-          <a:prstGeom prst="rect">
+            <a:off x="7251192" y="2286000"/>
+            <a:ext cx="310896" cy="310896"/>
+          </a:xfrm>
+          <a:prstGeom prst="ellipse">
             <a:avLst/>
           </a:prstGeom>
           <a:solidFill>
@@ -5472,10 +5407,68 @@
           </a:fontRef>
         </p:style>
         <p:txBody>
-          <a:bodyPr rtlCol="0" anchor="ctr"/>
+          <a:bodyPr rtlCol="0" anchor="ctr" tIns="0" bIns="0"/>
           <a:lstStyle/>
           <a:p>
             <a:pPr algn="ctr"/>
+            <a:r>
+              <a:rPr sz="1400" b="1">
+                <a:solidFill>
+                  <a:srgbClr val="FFFFFF"/>
+                </a:solidFill>
+                <a:latin typeface="Microsoft JhengHei"/>
+                <a:ea typeface="Microsoft JhengHei"/>
+                <a:cs typeface="Microsoft JhengHei"/>
+              </a:rPr>
+              <a:t>1</a:t>
+            </a:r>
+          </a:p>
+        </p:txBody>
+      </p:sp>
+      <p:sp>
+        <p:nvSpPr>
+          <p:cNvPr id="9" name="TextBox 8"/>
+          <p:cNvSpPr txBox="1"/>
+          <p:nvPr/>
+        </p:nvSpPr>
+        <p:spPr>
+          <a:xfrm>
+            <a:off x="7708392" y="2249424"/>
+            <a:ext cx="3843223" cy="365760"/>
+          </a:xfrm>
+          <a:prstGeom prst="rect">
+            <a:avLst/>
+          </a:prstGeom>
+          <a:noFill/>
+        </p:spPr>
+        <p:txBody>
+          <a:bodyPr wrap="square" anchor="t" lIns="0" rIns="0" tIns="0" bIns="0">
+            <a:spAutoFit/>
+          </a:bodyPr>
+          <a:lstStyle/>
+          <a:p>
+            <a:pPr algn="l">
+              <a:lnSpc>
+                <a:spcPct val="112000"/>
+              </a:lnSpc>
+              <a:spcBef>
+                <a:spcPts val="0"/>
+              </a:spcBef>
+              <a:spcAft>
+                <a:spcPts val="600"/>
+              </a:spcAft>
+            </a:pPr>
+            <a:r>
+              <a:rPr sz="1550" b="1">
+                <a:solidFill>
+                  <a:srgbClr val="1E3A8A"/>
+                </a:solidFill>
+                <a:latin typeface="Microsoft JhengHei"/>
+                <a:ea typeface="Microsoft JhengHei"/>
+                <a:cs typeface="Microsoft JhengHei"/>
+              </a:rPr>
+              <a:t>生成 → 驗證兩段式</a:t>
+            </a:r>
           </a:p>
         </p:txBody>
       </p:sp>
@@ -5487,8 +5480,8 @@
         </p:nvSpPr>
         <p:spPr>
           <a:xfrm>
-            <a:off x="1207008" y="2788920"/>
-            <a:ext cx="10040112" cy="731520"/>
+            <a:off x="7708392" y="2587752"/>
+            <a:ext cx="3843223" cy="731520"/>
           </a:xfrm>
           <a:prstGeom prst="rect">
             <a:avLst/>
@@ -5503,41 +5496,41 @@
           <a:p>
             <a:pPr algn="l">
               <a:lnSpc>
-                <a:spcPct val="110000"/>
-              </a:lnSpc>
-              <a:spcBef>
-                <a:spcPts val="0"/>
-              </a:spcBef>
-              <a:spcAft>
-                <a:spcPts val="0"/>
-              </a:spcAft>
-            </a:pPr>
-            <a:r>
-              <a:rPr sz="1550" b="0">
-                <a:solidFill>
-                  <a:srgbClr val="1A2236"/>
-                </a:solidFill>
-                <a:latin typeface="Microsoft JhengHei"/>
-                <a:ea typeface="Microsoft JhengHei"/>
-                <a:cs typeface="Microsoft JhengHei"/>
-              </a:rPr>
-              <a:t>一鍵自動建置:管理帳號、模型接入、workflow 匯入、API 金鑰全由腳本完成</a:t>
-            </a:r>
-          </a:p>
-        </p:txBody>
-      </p:sp>
-      <p:sp>
-        <p:nvSpPr>
-          <p:cNvPr id="11" name="Rectangle 10"/>
+                <a:spcPct val="116000"/>
+              </a:lnSpc>
+              <a:spcBef>
+                <a:spcPts val="0"/>
+              </a:spcBef>
+              <a:spcAft>
+                <a:spcPts val="600"/>
+              </a:spcAft>
+            </a:pPr>
+            <a:r>
+              <a:rPr sz="1250" b="0">
+                <a:solidFill>
+                  <a:srgbClr val="5A6B8C"/>
+                </a:solidFill>
+                <a:latin typeface="Microsoft JhengHei"/>
+                <a:ea typeface="Microsoft JhengHei"/>
+                <a:cs typeface="Microsoft JhengHei"/>
+              </a:rPr>
+              <a:t>草稿產生後系統自動驗證每個引用;查無實據的引用直接剝除並標示。</a:t>
+            </a:r>
+          </a:p>
+        </p:txBody>
+      </p:sp>
+      <p:sp>
+        <p:nvSpPr>
+          <p:cNvPr id="11" name="Oval 10"/>
           <p:cNvSpPr/>
           <p:nvPr/>
         </p:nvSpPr>
         <p:spPr>
           <a:xfrm>
-            <a:off x="914400" y="3351847"/>
-            <a:ext cx="118872" cy="118872"/>
-          </a:xfrm>
-          <a:prstGeom prst="rect">
+            <a:off x="7251192" y="3218688"/>
+            <a:ext cx="310896" cy="310896"/>
+          </a:xfrm>
+          <a:prstGeom prst="ellipse">
             <a:avLst/>
           </a:prstGeom>
           <a:solidFill>
@@ -5563,10 +5556,21 @@
           </a:fontRef>
         </p:style>
         <p:txBody>
-          <a:bodyPr rtlCol="0" anchor="ctr"/>
+          <a:bodyPr rtlCol="0" anchor="ctr" tIns="0" bIns="0"/>
           <a:lstStyle/>
           <a:p>
             <a:pPr algn="ctr"/>
+            <a:r>
+              <a:rPr sz="1400" b="1">
+                <a:solidFill>
+                  <a:srgbClr val="FFFFFF"/>
+                </a:solidFill>
+                <a:latin typeface="Microsoft JhengHei"/>
+                <a:ea typeface="Microsoft JhengHei"/>
+                <a:cs typeface="Microsoft JhengHei"/>
+              </a:rPr>
+              <a:t>2</a:t>
+            </a:r>
           </a:p>
         </p:txBody>
       </p:sp>
@@ -5578,8 +5582,8 @@
         </p:nvSpPr>
         <p:spPr>
           <a:xfrm>
-            <a:off x="1207008" y="3274123"/>
-            <a:ext cx="10040112" cy="731520"/>
+            <a:off x="7708392" y="3182112"/>
+            <a:ext cx="3843223" cy="365760"/>
           </a:xfrm>
           <a:prstGeom prst="rect">
             <a:avLst/>
@@ -5594,41 +5598,88 @@
           <a:p>
             <a:pPr algn="l">
               <a:lnSpc>
-                <a:spcPct val="110000"/>
-              </a:lnSpc>
-              <a:spcBef>
-                <a:spcPts val="0"/>
-              </a:spcBef>
-              <a:spcAft>
-                <a:spcPts val="0"/>
-              </a:spcAft>
-            </a:pPr>
-            <a:r>
-              <a:rPr sz="1550" b="0">
-                <a:solidFill>
-                  <a:srgbClr val="1A2236"/>
-                </a:solidFill>
-                <a:latin typeface="Microsoft JhengHei"/>
-                <a:ea typeface="Microsoft JhengHei"/>
-                <a:cs typeface="Microsoft JhengHei"/>
-              </a:rPr>
-              <a:t>提示詞單一來源:workflow 由版本控制中的提示詞檔自動生成,不會兩邊不同步</a:t>
-            </a:r>
-          </a:p>
-        </p:txBody>
-      </p:sp>
-      <p:sp>
-        <p:nvSpPr>
-          <p:cNvPr id="13" name="Rectangle 12"/>
+                <a:spcPct val="112000"/>
+              </a:lnSpc>
+              <a:spcBef>
+                <a:spcPts val="0"/>
+              </a:spcBef>
+              <a:spcAft>
+                <a:spcPts val="600"/>
+              </a:spcAft>
+            </a:pPr>
+            <a:r>
+              <a:rPr sz="1550" b="1">
+                <a:solidFill>
+                  <a:srgbClr val="1E3A8A"/>
+                </a:solidFill>
+                <a:latin typeface="Microsoft JhengHei"/>
+                <a:ea typeface="Microsoft JhengHei"/>
+                <a:cs typeface="Microsoft JhengHei"/>
+              </a:rPr>
+              <a:t>引用可點開</a:t>
+            </a:r>
+          </a:p>
+        </p:txBody>
+      </p:sp>
+      <p:sp>
+        <p:nvSpPr>
+          <p:cNvPr id="13" name="TextBox 12"/>
+          <p:cNvSpPr txBox="1"/>
+          <p:nvPr/>
+        </p:nvSpPr>
+        <p:spPr>
+          <a:xfrm>
+            <a:off x="7708392" y="3520440"/>
+            <a:ext cx="3843223" cy="731520"/>
+          </a:xfrm>
+          <a:prstGeom prst="rect">
+            <a:avLst/>
+          </a:prstGeom>
+          <a:noFill/>
+        </p:spPr>
+        <p:txBody>
+          <a:bodyPr wrap="square" anchor="t" lIns="0" rIns="0" tIns="0" bIns="0">
+            <a:spAutoFit/>
+          </a:bodyPr>
+          <a:lstStyle/>
+          <a:p>
+            <a:pPr algn="l">
+              <a:lnSpc>
+                <a:spcPct val="116000"/>
+              </a:lnSpc>
+              <a:spcBef>
+                <a:spcPts val="0"/>
+              </a:spcBef>
+              <a:spcAft>
+                <a:spcPts val="600"/>
+              </a:spcAft>
+            </a:pPr>
+            <a:r>
+              <a:rPr sz="1250" b="0">
+                <a:solidFill>
+                  <a:srgbClr val="5A6B8C"/>
+                </a:solidFill>
+                <a:latin typeface="Microsoft JhengHei"/>
+                <a:ea typeface="Microsoft JhengHei"/>
+                <a:cs typeface="Microsoft JhengHei"/>
+              </a:rPr>
+              <a:t>點任何引用即顯示來源文件與原文段落,律師不用自己翻。</a:t>
+            </a:r>
+          </a:p>
+        </p:txBody>
+      </p:sp>
+      <p:sp>
+        <p:nvSpPr>
+          <p:cNvPr id="14" name="Oval 13"/>
           <p:cNvSpPr/>
           <p:nvPr/>
         </p:nvSpPr>
         <p:spPr>
           <a:xfrm>
-            <a:off x="914400" y="3837050"/>
-            <a:ext cx="118872" cy="118872"/>
-          </a:xfrm>
-          <a:prstGeom prst="rect">
+            <a:off x="7251192" y="4151376"/>
+            <a:ext cx="310896" cy="310896"/>
+          </a:xfrm>
+          <a:prstGeom prst="ellipse">
             <a:avLst/>
           </a:prstGeom>
           <a:solidFill>
@@ -5654,23 +5705,34 @@
           </a:fontRef>
         </p:style>
         <p:txBody>
-          <a:bodyPr rtlCol="0" anchor="ctr"/>
+          <a:bodyPr rtlCol="0" anchor="ctr" tIns="0" bIns="0"/>
           <a:lstStyle/>
           <a:p>
             <a:pPr algn="ctr"/>
-          </a:p>
-        </p:txBody>
-      </p:sp>
-      <p:sp>
-        <p:nvSpPr>
-          <p:cNvPr id="14" name="TextBox 13"/>
-          <p:cNvSpPr txBox="1"/>
-          <p:nvPr/>
-        </p:nvSpPr>
-        <p:spPr>
-          <a:xfrm>
-            <a:off x="1207008" y="3759326"/>
-            <a:ext cx="10040112" cy="731520"/>
+            <a:r>
+              <a:rPr sz="1400" b="1">
+                <a:solidFill>
+                  <a:srgbClr val="FFFFFF"/>
+                </a:solidFill>
+                <a:latin typeface="Microsoft JhengHei"/>
+                <a:ea typeface="Microsoft JhengHei"/>
+                <a:cs typeface="Microsoft JhengHei"/>
+              </a:rPr>
+              <a:t>3</a:t>
+            </a:r>
+          </a:p>
+        </p:txBody>
+      </p:sp>
+      <p:sp>
+        <p:nvSpPr>
+          <p:cNvPr id="15" name="TextBox 14"/>
+          <p:cNvSpPr txBox="1"/>
+          <p:nvPr/>
+        </p:nvSpPr>
+        <p:spPr>
+          <a:xfrm>
+            <a:off x="7708392" y="4114800"/>
+            <a:ext cx="3843223" cy="365760"/>
           </a:xfrm>
           <a:prstGeom prst="rect">
             <a:avLst/>
@@ -5685,70 +5747,26 @@
           <a:p>
             <a:pPr algn="l">
               <a:lnSpc>
-                <a:spcPct val="110000"/>
-              </a:lnSpc>
-              <a:spcBef>
-                <a:spcPts val="0"/>
-              </a:spcBef>
-              <a:spcAft>
-                <a:spcPts val="0"/>
-              </a:spcAft>
-            </a:pPr>
-            <a:r>
-              <a:rPr sz="1550" b="0">
-                <a:solidFill>
-                  <a:srgbClr val="1A2236"/>
-                </a:solidFill>
-                <a:latin typeface="Microsoft JhengHei"/>
-                <a:ea typeface="Microsoft JhengHei"/>
-                <a:cs typeface="Microsoft JhengHei"/>
-              </a:rPr>
-              <a:t>降級不裝死:Dify 斷線自動退回備援引擎,畫面出現醒目警示,絕不冒充真結果</a:t>
-            </a:r>
-          </a:p>
-        </p:txBody>
-      </p:sp>
-      <p:sp>
-        <p:nvSpPr>
-          <p:cNvPr id="15" name="Rectangle 14"/>
-          <p:cNvSpPr/>
-          <p:nvPr/>
-        </p:nvSpPr>
-        <p:spPr>
-          <a:xfrm>
-            <a:off x="914400" y="4322254"/>
-            <a:ext cx="118872" cy="118872"/>
-          </a:xfrm>
-          <a:prstGeom prst="rect">
-            <a:avLst/>
-          </a:prstGeom>
-          <a:solidFill>
-            <a:srgbClr val="F5B020"/>
-          </a:solidFill>
-          <a:ln>
-            <a:noFill/>
-          </a:ln>
-          <a:effectLst/>
-        </p:spPr>
-        <p:style>
-          <a:lnRef idx="1">
-            <a:schemeClr val="accent1"/>
-          </a:lnRef>
-          <a:fillRef idx="3">
-            <a:schemeClr val="accent1"/>
-          </a:fillRef>
-          <a:effectRef idx="2">
-            <a:schemeClr val="accent1"/>
-          </a:effectRef>
-          <a:fontRef idx="minor">
-            <a:schemeClr val="lt1"/>
-          </a:fontRef>
-        </p:style>
-        <p:txBody>
-          <a:bodyPr rtlCol="0" anchor="ctr"/>
-          <a:lstStyle/>
-          <a:p>
-            <a:pPr algn="ctr"/>
+                <a:spcPct val="112000"/>
+              </a:lnSpc>
+              <a:spcBef>
+                <a:spcPts val="0"/>
+              </a:spcBef>
+              <a:spcAft>
+                <a:spcPts val="600"/>
+              </a:spcAft>
+            </a:pPr>
+            <a:r>
+              <a:rPr sz="1550" b="1">
+                <a:solidFill>
+                  <a:srgbClr val="1E3A8A"/>
+                </a:solidFill>
+                <a:latin typeface="Microsoft JhengHei"/>
+                <a:ea typeface="Microsoft JhengHei"/>
+                <a:cs typeface="Microsoft JhengHei"/>
+              </a:rPr>
+              <a:t>逐句簽核</a:t>
+            </a:r>
           </a:p>
         </p:txBody>
       </p:sp>
@@ -5760,8 +5778,8 @@
         </p:nvSpPr>
         <p:spPr>
           <a:xfrm>
-            <a:off x="1207008" y="4244530"/>
-            <a:ext cx="10040112" cy="731520"/>
+            <a:off x="7708392" y="4453128"/>
+            <a:ext cx="3843223" cy="731520"/>
           </a:xfrm>
           <a:prstGeom prst="rect">
             <a:avLst/>
@@ -5776,89 +5794,7 @@
           <a:p>
             <a:pPr algn="l">
               <a:lnSpc>
-                <a:spcPct val="110000"/>
-              </a:lnSpc>
-              <a:spcBef>
-                <a:spcPts val="0"/>
-              </a:spcBef>
-              <a:spcAft>
-                <a:spcPts val="0"/>
-              </a:spcAft>
-            </a:pPr>
-            <a:r>
-              <a:rPr sz="1550" b="0">
-                <a:solidFill>
-                  <a:srgbClr val="1A2236"/>
-                </a:solidFill>
-                <a:latin typeface="Microsoft JhengHei"/>
-                <a:ea typeface="Microsoft JhengHei"/>
-                <a:cs typeface="Microsoft JhengHei"/>
-              </a:rPr>
-              <a:t>引證驗證留在系統內:防幻覺的最後一道牆不外包給任何平台</a:t>
-            </a:r>
-          </a:p>
-        </p:txBody>
-      </p:sp>
-      <p:cxnSp>
-        <p:nvCxnSpPr>
-          <p:cNvPr id="17" name="Connector 16"/>
-          <p:cNvCxnSpPr/>
-          <p:nvPr/>
-        </p:nvCxnSpPr>
-        <p:spPr>
-          <a:xfrm>
-            <a:off x="822960" y="5394960"/>
-            <a:ext cx="10561320" cy="0"/>
-          </a:xfrm>
-          <a:prstGeom prst="bentConnector3">
-            <a:avLst/>
-          </a:prstGeom>
-          <a:ln w="15240">
-            <a:solidFill>
-              <a:srgbClr val="D7DDEA"/>
-            </a:solidFill>
-          </a:ln>
-        </p:spPr>
-        <p:style>
-          <a:lnRef idx="2">
-            <a:schemeClr val="accent1"/>
-          </a:lnRef>
-          <a:fillRef idx="0">
-            <a:schemeClr val="accent1"/>
-          </a:fillRef>
-          <a:effectRef idx="1">
-            <a:schemeClr val="accent1"/>
-          </a:effectRef>
-          <a:fontRef idx="minor">
-            <a:schemeClr val="tx1"/>
-          </a:fontRef>
-        </p:style>
-      </p:cxnSp>
-      <p:sp>
-        <p:nvSpPr>
-          <p:cNvPr id="18" name="TextBox 17"/>
-          <p:cNvSpPr txBox="1"/>
-          <p:nvPr/>
-        </p:nvSpPr>
-        <p:spPr>
-          <a:xfrm>
-            <a:off x="822960" y="5559552"/>
-            <a:ext cx="10515600" cy="640080"/>
-          </a:xfrm>
-          <a:prstGeom prst="rect">
-            <a:avLst/>
-          </a:prstGeom>
-          <a:noFill/>
-        </p:spPr>
-        <p:txBody>
-          <a:bodyPr wrap="square" anchor="t" lIns="0" rIns="0" tIns="0" bIns="0">
-            <a:spAutoFit/>
-          </a:bodyPr>
-          <a:lstStyle/>
-          <a:p>
-            <a:pPr algn="l">
-              <a:lnSpc>
-                <a:spcPct val="125000"/>
+                <a:spcPct val="116000"/>
               </a:lnSpc>
               <a:spcBef>
                 <a:spcPts val="0"/>
@@ -5868,33 +5804,22 @@
               </a:spcAft>
             </a:pPr>
             <a:r>
-              <a:rPr sz="1500" b="1">
-                <a:solidFill>
-                  <a:srgbClr val="F5B020"/>
-                </a:solidFill>
-                <a:latin typeface="Microsoft JhengHei"/>
-                <a:ea typeface="Microsoft JhengHei"/>
-                <a:cs typeface="Microsoft JhengHei"/>
-              </a:rPr>
-              <a:t>實機驗證　</a:t>
-            </a:r>
-            <a:r>
-              <a:rPr sz="1450" b="0">
-                <a:solidFill>
-                  <a:srgbClr val="1A2236"/>
-                </a:solidFill>
-                <a:latin typeface="Microsoft JhengHei"/>
-                <a:ea typeface="Microsoft JhengHei"/>
-                <a:cs typeface="Microsoft JhengHei"/>
-              </a:rPr>
-              <a:t>真實 OA 經 Dify + 本地模型完整分析:28 秒產出正確分類與繁中草稿。</a:t>
-            </a:r>
-          </a:p>
-        </p:txBody>
-      </p:sp>
-      <p:sp>
-        <p:nvSpPr>
-          <p:cNvPr id="19" name="TextBox 18"/>
+              <a:rPr sz="1250" b="0">
+                <a:solidFill>
+                  <a:srgbClr val="5A6B8C"/>
+                </a:solidFill>
+                <a:latin typeface="Microsoft JhengHei"/>
+                <a:ea typeface="Microsoft JhengHei"/>
+                <a:cs typeface="Microsoft JhengHei"/>
+              </a:rPr>
+              <a:t>每句標示由 AI 或律師撰寫,逐句 Accept / Edit;全部確認才能匯出。</a:t>
+            </a:r>
+          </a:p>
+        </p:txBody>
+      </p:sp>
+      <p:sp>
+        <p:nvSpPr>
+          <p:cNvPr id="17" name="TextBox 16"/>
           <p:cNvSpPr txBox="1"/>
           <p:nvPr/>
         </p:nvSpPr>
@@ -5941,7 +5866,7 @@
       </p:sp>
       <p:sp>
         <p:nvSpPr>
-          <p:cNvPr id="20" name="TextBox 19"/>
+          <p:cNvPr id="18" name="TextBox 17"/>
           <p:cNvSpPr txBox="1"/>
           <p:nvPr/>
         </p:nvSpPr>
@@ -6192,7 +6117,7 @@
                 <a:ea typeface="Microsoft JhengHei"/>
                 <a:cs typeface="Microsoft JhengHei"/>
               </a:rPr>
-              <a:t>運行實況｜真實模型的分析結果</a:t>
+              <a:t>實機整合｜digiRunner 前線閘道</a:t>
             </a:r>
           </a:p>
         </p:txBody>
@@ -6232,49 +6157,123 @@
           </a:fontRef>
         </p:style>
       </p:cxnSp>
-      <p:pic>
-        <p:nvPicPr>
-          <p:cNvPr id="7" name="Picture 6" descr="real_05_result_real_qwen.png"/>
-          <p:cNvPicPr>
-            <a:picLocks noChangeAspect="1"/>
-          </p:cNvPicPr>
-          <p:nvPr/>
-        </p:nvPicPr>
-        <p:blipFill>
-          <a:blip r:embed="rId2"/>
-          <a:stretch>
-            <a:fillRect/>
-          </a:stretch>
-        </p:blipFill>
-        <p:spPr>
-          <a:xfrm>
-            <a:off x="822960" y="2148840"/>
-            <a:ext cx="5925312" cy="3703320"/>
-          </a:xfrm>
-          <a:prstGeom prst="rect">
-            <a:avLst/>
-          </a:prstGeom>
-          <a:effectLst>
-            <a:outerShdw blurRad="90000" dist="38100" dir="5400000" rotWithShape="0">
-              <a:srgbClr val="1A2236">
-                <a:alpha val="26000"/>
-              </a:srgbClr>
-            </a:outerShdw>
-          </a:effectLst>
-        </p:spPr>
-      </p:pic>
-      <p:sp>
-        <p:nvSpPr>
-          <p:cNvPr id="8" name="Oval 7"/>
+      <p:sp>
+        <p:nvSpPr>
+          <p:cNvPr id="7" name="TextBox 6"/>
+          <p:cNvSpPr txBox="1"/>
+          <p:nvPr/>
+        </p:nvSpPr>
+        <p:spPr>
+          <a:xfrm>
+            <a:off x="8259775" y="182880"/>
+            <a:ext cx="3840480" cy="2377440"/>
+          </a:xfrm>
+          <a:prstGeom prst="rect">
+            <a:avLst/>
+          </a:prstGeom>
+          <a:noFill/>
+        </p:spPr>
+        <p:txBody>
+          <a:bodyPr wrap="square" anchor="t" lIns="0" rIns="0" tIns="0" bIns="0">
+            <a:spAutoFit/>
+          </a:bodyPr>
+          <a:lstStyle/>
+          <a:p>
+            <a:pPr algn="r">
+              <a:lnSpc>
+                <a:spcPct val="112000"/>
+              </a:lnSpc>
+              <a:spcBef>
+                <a:spcPts val="0"/>
+              </a:spcBef>
+              <a:spcAft>
+                <a:spcPts val="600"/>
+              </a:spcAft>
+            </a:pPr>
+            <a:r>
+              <a:rPr sz="15000" b="1">
+                <a:solidFill>
+                  <a:srgbClr val="EEF1F8"/>
+                </a:solidFill>
+                <a:latin typeface="Microsoft JhengHei"/>
+                <a:ea typeface="Microsoft JhengHei"/>
+                <a:cs typeface="Microsoft JhengHei"/>
+              </a:rPr>
+              <a:t>05</a:t>
+            </a:r>
+          </a:p>
+        </p:txBody>
+      </p:sp>
+      <p:sp>
+        <p:nvSpPr>
+          <p:cNvPr id="8" name="TextBox 7"/>
+          <p:cNvSpPr txBox="1"/>
+          <p:nvPr/>
+        </p:nvSpPr>
+        <p:spPr>
+          <a:xfrm>
+            <a:off x="822960" y="1965960"/>
+            <a:ext cx="10515600" cy="457200"/>
+          </a:xfrm>
+          <a:prstGeom prst="rect">
+            <a:avLst/>
+          </a:prstGeom>
+          <a:noFill/>
+        </p:spPr>
+        <p:txBody>
+          <a:bodyPr wrap="square" anchor="t" lIns="0" rIns="0" tIns="0" bIns="0">
+            <a:spAutoFit/>
+          </a:bodyPr>
+          <a:lstStyle/>
+          <a:p>
+            <a:pPr algn="l">
+              <a:lnSpc>
+                <a:spcPct val="125000"/>
+              </a:lnSpc>
+              <a:spcBef>
+                <a:spcPts val="0"/>
+              </a:spcBef>
+              <a:spcAft>
+                <a:spcPts val="600"/>
+              </a:spcAft>
+            </a:pPr>
+            <a:r>
+              <a:rPr sz="1700" b="1">
+                <a:solidFill>
+                  <a:srgbClr val="1E3A8A"/>
+                </a:solidFill>
+                <a:latin typeface="Microsoft JhengHei"/>
+                <a:ea typeface="Microsoft JhengHei"/>
+                <a:cs typeface="Microsoft JhengHei"/>
+              </a:rPr>
+              <a:t>digiRunner(TPIsoftware 開源版)= 企業 API 閘道　</a:t>
+            </a:r>
+            <a:r>
+              <a:rPr sz="1500" b="0">
+                <a:solidFill>
+                  <a:srgbClr val="5A6B8C"/>
+                </a:solidFill>
+                <a:latin typeface="Microsoft JhengHei"/>
+                <a:ea typeface="Microsoft JhengHei"/>
+                <a:cs typeface="Microsoft JhengHei"/>
+              </a:rPr>
+              <a:t>部署於 :18080,所有前端流量先經過它,再轉發到系統閘道。</a:t>
+            </a:r>
+          </a:p>
+        </p:txBody>
+      </p:sp>
+      <p:sp>
+        <p:nvSpPr>
+          <p:cNvPr id="9" name="Rectangle 8"/>
           <p:cNvSpPr/>
           <p:nvPr/>
         </p:nvSpPr>
         <p:spPr>
           <a:xfrm>
-            <a:off x="7251192" y="2286000"/>
-            <a:ext cx="310896" cy="310896"/>
-          </a:xfrm>
-          <a:prstGeom prst="ellipse">
+            <a:off x="914400" y="2866644"/>
+            <a:ext cx="118872" cy="118872"/>
+          </a:xfrm>
+          <a:prstGeom prst="rect">
             <a:avLst/>
           </a:prstGeom>
           <a:solidFill>
@@ -6300,34 +6299,23 @@
           </a:fontRef>
         </p:style>
         <p:txBody>
-          <a:bodyPr rtlCol="0" anchor="ctr" tIns="0" bIns="0"/>
+          <a:bodyPr rtlCol="0" anchor="ctr"/>
           <a:lstStyle/>
           <a:p>
             <a:pPr algn="ctr"/>
-            <a:r>
-              <a:rPr sz="1400" b="1">
-                <a:solidFill>
-                  <a:srgbClr val="FFFFFF"/>
-                </a:solidFill>
-                <a:latin typeface="Microsoft JhengHei"/>
-                <a:ea typeface="Microsoft JhengHei"/>
-                <a:cs typeface="Microsoft JhengHei"/>
-              </a:rPr>
-              <a:t>1</a:t>
-            </a:r>
-          </a:p>
-        </p:txBody>
-      </p:sp>
-      <p:sp>
-        <p:nvSpPr>
-          <p:cNvPr id="9" name="TextBox 8"/>
-          <p:cNvSpPr txBox="1"/>
-          <p:nvPr/>
-        </p:nvSpPr>
-        <p:spPr>
-          <a:xfrm>
-            <a:off x="7708392" y="2249424"/>
-            <a:ext cx="3843223" cy="365760"/>
+          </a:p>
+        </p:txBody>
+      </p:sp>
+      <p:sp>
+        <p:nvSpPr>
+          <p:cNvPr id="10" name="TextBox 9"/>
+          <p:cNvSpPr txBox="1"/>
+          <p:nvPr/>
+        </p:nvSpPr>
+        <p:spPr>
+          <a:xfrm>
+            <a:off x="1207008" y="2788920"/>
+            <a:ext cx="10040112" cy="731520"/>
           </a:xfrm>
           <a:prstGeom prst="rect">
             <a:avLst/>
@@ -6342,88 +6330,41 @@
           <a:p>
             <a:pPr algn="l">
               <a:lnSpc>
-                <a:spcPct val="112000"/>
-              </a:lnSpc>
-              <a:spcBef>
-                <a:spcPts val="0"/>
-              </a:spcBef>
-              <a:spcAft>
-                <a:spcPts val="600"/>
-              </a:spcAft>
-            </a:pPr>
-            <a:r>
-              <a:rPr sz="1550" b="1">
-                <a:solidFill>
-                  <a:srgbClr val="1E3A8A"/>
-                </a:solidFill>
-                <a:latin typeface="Microsoft JhengHei"/>
-                <a:ea typeface="Microsoft JhengHei"/>
-                <a:cs typeface="Microsoft JhengHei"/>
-              </a:rPr>
-              <a:t>全鏈路 28 秒</a:t>
-            </a:r>
-          </a:p>
-        </p:txBody>
-      </p:sp>
-      <p:sp>
-        <p:nvSpPr>
-          <p:cNvPr id="10" name="TextBox 9"/>
-          <p:cNvSpPr txBox="1"/>
-          <p:nvPr/>
-        </p:nvSpPr>
-        <p:spPr>
-          <a:xfrm>
-            <a:off x="7708392" y="2587752"/>
-            <a:ext cx="3843223" cy="731520"/>
-          </a:xfrm>
-          <a:prstGeom prst="rect">
-            <a:avLst/>
-          </a:prstGeom>
-          <a:noFill/>
-        </p:spPr>
-        <p:txBody>
-          <a:bodyPr wrap="square" anchor="t" lIns="0" rIns="0" tIns="0" bIns="0">
-            <a:spAutoFit/>
-          </a:bodyPr>
-          <a:lstStyle/>
-          <a:p>
-            <a:pPr algn="l">
-              <a:lnSpc>
-                <a:spcPct val="116000"/>
-              </a:lnSpc>
-              <a:spcBef>
-                <a:spcPts val="0"/>
-              </a:spcBef>
-              <a:spcAft>
-                <a:spcPts val="600"/>
-              </a:spcAft>
-            </a:pPr>
-            <a:r>
-              <a:rPr sz="1250" b="0">
-                <a:solidFill>
-                  <a:srgbClr val="5A6B8C"/>
-                </a:solidFill>
-                <a:latin typeface="Microsoft JhengHei"/>
-                <a:ea typeface="Microsoft JhengHei"/>
-                <a:cs typeface="Microsoft JhengHei"/>
-              </a:rPr>
-              <a:t>瀏覽器 → digiRunner → 閘道 → 推論引擎 → Dify → 本地模型,無一模擬。</a:t>
-            </a:r>
-          </a:p>
-        </p:txBody>
-      </p:sp>
-      <p:sp>
-        <p:nvSpPr>
-          <p:cNvPr id="11" name="Oval 10"/>
+                <a:spcPct val="110000"/>
+              </a:lnSpc>
+              <a:spcBef>
+                <a:spcPts val="0"/>
+              </a:spcBef>
+              <a:spcAft>
+                <a:spcPts val="0"/>
+              </a:spcAft>
+            </a:pPr>
+            <a:r>
+              <a:rPr sz="1550" b="0">
+                <a:solidFill>
+                  <a:srgbClr val="1A2236"/>
+                </a:solidFill>
+                <a:latin typeface="Microsoft JhengHei"/>
+                <a:ea typeface="Microsoft JhengHei"/>
+                <a:cs typeface="Microsoft JhengHei"/>
+              </a:rPr>
+              <a:t>路由全自動註冊:12 條 API 路由以管理 API 寫入,零手動設定,重啟自動重建</a:t>
+            </a:r>
+          </a:p>
+        </p:txBody>
+      </p:sp>
+      <p:sp>
+        <p:nvSpPr>
+          <p:cNvPr id="11" name="Rectangle 10"/>
           <p:cNvSpPr/>
           <p:nvPr/>
         </p:nvSpPr>
         <p:spPr>
           <a:xfrm>
-            <a:off x="7251192" y="3218688"/>
-            <a:ext cx="310896" cy="310896"/>
-          </a:xfrm>
-          <a:prstGeom prst="ellipse">
+            <a:off x="914400" y="3351847"/>
+            <a:ext cx="118872" cy="118872"/>
+          </a:xfrm>
+          <a:prstGeom prst="rect">
             <a:avLst/>
           </a:prstGeom>
           <a:solidFill>
@@ -6449,21 +6390,10 @@
           </a:fontRef>
         </p:style>
         <p:txBody>
-          <a:bodyPr rtlCol="0" anchor="ctr" tIns="0" bIns="0"/>
+          <a:bodyPr rtlCol="0" anchor="ctr"/>
           <a:lstStyle/>
           <a:p>
             <a:pPr algn="ctr"/>
-            <a:r>
-              <a:rPr sz="1400" b="1">
-                <a:solidFill>
-                  <a:srgbClr val="FFFFFF"/>
-                </a:solidFill>
-                <a:latin typeface="Microsoft JhengHei"/>
-                <a:ea typeface="Microsoft JhengHei"/>
-                <a:cs typeface="Microsoft JhengHei"/>
-              </a:rPr>
-              <a:t>2</a:t>
-            </a:r>
           </a:p>
         </p:txBody>
       </p:sp>
@@ -6475,8 +6405,8 @@
         </p:nvSpPr>
         <p:spPr>
           <a:xfrm>
-            <a:off x="7708392" y="3182112"/>
-            <a:ext cx="3843223" cy="365760"/>
+            <a:off x="1207008" y="3274123"/>
+            <a:ext cx="10040112" cy="731520"/>
           </a:xfrm>
           <a:prstGeom prst="rect">
             <a:avLst/>
@@ -6491,88 +6421,41 @@
           <a:p>
             <a:pPr algn="l">
               <a:lnSpc>
-                <a:spcPct val="112000"/>
-              </a:lnSpc>
-              <a:spcBef>
-                <a:spcPts val="0"/>
-              </a:spcBef>
-              <a:spcAft>
-                <a:spcPts val="600"/>
-              </a:spcAft>
-            </a:pPr>
-            <a:r>
-              <a:rPr sz="1550" b="1">
-                <a:solidFill>
-                  <a:srgbClr val="1E3A8A"/>
-                </a:solidFill>
-                <a:latin typeface="Microsoft JhengHei"/>
-                <a:ea typeface="Microsoft JhengHei"/>
-                <a:cs typeface="Microsoft JhengHei"/>
-              </a:rPr>
-              <a:t>正確抓出瑕疵</a:t>
-            </a:r>
-          </a:p>
-        </p:txBody>
-      </p:sp>
-      <p:sp>
-        <p:nvSpPr>
-          <p:cNvPr id="13" name="TextBox 12"/>
-          <p:cNvSpPr txBox="1"/>
-          <p:nvPr/>
-        </p:nvSpPr>
-        <p:spPr>
-          <a:xfrm>
-            <a:off x="7708392" y="3520440"/>
-            <a:ext cx="3843223" cy="731520"/>
-          </a:xfrm>
-          <a:prstGeom prst="rect">
-            <a:avLst/>
-          </a:prstGeom>
-          <a:noFill/>
-        </p:spPr>
-        <p:txBody>
-          <a:bodyPr wrap="square" anchor="t" lIns="0" rIns="0" tIns="0" bIns="0">
-            <a:spAutoFit/>
-          </a:bodyPr>
-          <a:lstStyle/>
-          <a:p>
-            <a:pPr algn="l">
-              <a:lnSpc>
-                <a:spcPct val="116000"/>
-              </a:lnSpc>
-              <a:spcBef>
-                <a:spcPts val="0"/>
-              </a:spcBef>
-              <a:spcAft>
-                <a:spcPts val="600"/>
-              </a:spcAft>
-            </a:pPr>
-            <a:r>
-              <a:rPr sz="1250" b="0">
-                <a:solidFill>
-                  <a:srgbClr val="5A6B8C"/>
-                </a:solidFill>
-                <a:latin typeface="Microsoft JhengHei"/>
-                <a:ea typeface="Microsoft JhengHei"/>
-                <a:cs typeface="Microsoft JhengHei"/>
-              </a:rPr>
-              <a:t>台灣 OA:請求項 9「該第一電動車」缺先行詞 — 真模型分類正確。</a:t>
-            </a:r>
-          </a:p>
-        </p:txBody>
-      </p:sp>
-      <p:sp>
-        <p:nvSpPr>
-          <p:cNvPr id="14" name="Oval 13"/>
+                <a:spcPct val="110000"/>
+              </a:lnSpc>
+              <a:spcBef>
+                <a:spcPts val="0"/>
+              </a:spcBef>
+              <a:spcAft>
+                <a:spcPts val="0"/>
+              </a:spcAft>
+            </a:pPr>
+            <a:r>
+              <a:rPr sz="1550" b="0">
+                <a:solidFill>
+                  <a:srgbClr val="1A2236"/>
+                </a:solidFill>
+                <a:latin typeface="Microsoft JhengHei"/>
+                <a:ea typeface="Microsoft JhengHei"/>
+                <a:cs typeface="Microsoft JhengHei"/>
+              </a:rPr>
+              <a:t>身分標頭轉發:digiRunner 驗證後以信任標頭傳遞身分;偽造標頭一律 401</a:t>
+            </a:r>
+          </a:p>
+        </p:txBody>
+      </p:sp>
+      <p:sp>
+        <p:nvSpPr>
+          <p:cNvPr id="13" name="Rectangle 12"/>
           <p:cNvSpPr/>
           <p:nvPr/>
         </p:nvSpPr>
         <p:spPr>
           <a:xfrm>
-            <a:off x="7251192" y="4151376"/>
-            <a:ext cx="310896" cy="310896"/>
-          </a:xfrm>
-          <a:prstGeom prst="ellipse">
+            <a:off x="914400" y="3837050"/>
+            <a:ext cx="118872" cy="118872"/>
+          </a:xfrm>
+          <a:prstGeom prst="rect">
             <a:avLst/>
           </a:prstGeom>
           <a:solidFill>
@@ -6598,34 +6481,23 @@
           </a:fontRef>
         </p:style>
         <p:txBody>
-          <a:bodyPr rtlCol="0" anchor="ctr" tIns="0" bIns="0"/>
+          <a:bodyPr rtlCol="0" anchor="ctr"/>
           <a:lstStyle/>
           <a:p>
             <a:pPr algn="ctr"/>
-            <a:r>
-              <a:rPr sz="1400" b="1">
-                <a:solidFill>
-                  <a:srgbClr val="FFFFFF"/>
-                </a:solidFill>
-                <a:latin typeface="Microsoft JhengHei"/>
-                <a:ea typeface="Microsoft JhengHei"/>
-                <a:cs typeface="Microsoft JhengHei"/>
-              </a:rPr>
-              <a:t>3</a:t>
-            </a:r>
-          </a:p>
-        </p:txBody>
-      </p:sp>
-      <p:sp>
-        <p:nvSpPr>
-          <p:cNvPr id="15" name="TextBox 14"/>
-          <p:cNvSpPr txBox="1"/>
-          <p:nvPr/>
-        </p:nvSpPr>
-        <p:spPr>
-          <a:xfrm>
-            <a:off x="7708392" y="4114800"/>
-            <a:ext cx="3843223" cy="365760"/>
+          </a:p>
+        </p:txBody>
+      </p:sp>
+      <p:sp>
+        <p:nvSpPr>
+          <p:cNvPr id="14" name="TextBox 13"/>
+          <p:cNvSpPr txBox="1"/>
+          <p:nvPr/>
+        </p:nvSpPr>
+        <p:spPr>
+          <a:xfrm>
+            <a:off x="1207008" y="3759326"/>
+            <a:ext cx="10040112" cy="731520"/>
           </a:xfrm>
           <a:prstGeom prst="rect">
             <a:avLst/>
@@ -6640,141 +6512,74 @@
           <a:p>
             <a:pPr algn="l">
               <a:lnSpc>
-                <a:spcPct val="112000"/>
-              </a:lnSpc>
-              <a:spcBef>
-                <a:spcPts val="0"/>
-              </a:spcBef>
-              <a:spcAft>
-                <a:spcPts val="600"/>
-              </a:spcAft>
-            </a:pPr>
-            <a:r>
-              <a:rPr sz="1550" b="1">
-                <a:solidFill>
-                  <a:srgbClr val="1E3A8A"/>
-                </a:solidFill>
-                <a:latin typeface="Microsoft JhengHei"/>
-                <a:ea typeface="Microsoft JhengHei"/>
-                <a:cs typeface="Microsoft JhengHei"/>
-              </a:rPr>
-              <a:t>硬牆當場攔截</a:t>
-            </a:r>
-          </a:p>
-        </p:txBody>
-      </p:sp>
-      <p:sp>
-        <p:nvSpPr>
-          <p:cNvPr id="16" name="TextBox 15"/>
-          <p:cNvSpPr txBox="1"/>
-          <p:nvPr/>
-        </p:nvSpPr>
-        <p:spPr>
-          <a:xfrm>
-            <a:off x="7708392" y="4453128"/>
-            <a:ext cx="3843223" cy="731520"/>
-          </a:xfrm>
-          <a:prstGeom prst="rect">
-            <a:avLst/>
-          </a:prstGeom>
-          <a:noFill/>
-        </p:spPr>
-        <p:txBody>
-          <a:bodyPr wrap="square" anchor="t" lIns="0" rIns="0" tIns="0" bIns="0">
-            <a:spAutoFit/>
-          </a:bodyPr>
-          <a:lstStyle/>
-          <a:p>
-            <a:pPr algn="l">
-              <a:lnSpc>
-                <a:spcPct val="116000"/>
-              </a:lnSpc>
-              <a:spcBef>
-                <a:spcPts val="0"/>
-              </a:spcBef>
-              <a:spcAft>
-                <a:spcPts val="600"/>
-              </a:spcAft>
-            </a:pPr>
-            <a:r>
-              <a:rPr sz="1250" b="0">
-                <a:solidFill>
-                  <a:srgbClr val="5A6B8C"/>
-                </a:solidFill>
-                <a:latin typeface="Microsoft JhengHei"/>
-                <a:ea typeface="Microsoft JhengHei"/>
-                <a:cs typeface="Microsoft JhengHei"/>
-              </a:rPr>
-              <a:t>真模型也想捏造引用 — 系統即時剝除並在畫面標示。</a:t>
-            </a:r>
-          </a:p>
-        </p:txBody>
-      </p:sp>
-      <p:sp>
-        <p:nvSpPr>
-          <p:cNvPr id="17" name="Oval 16"/>
-          <p:cNvSpPr/>
-          <p:nvPr/>
-        </p:nvSpPr>
-        <p:spPr>
-          <a:xfrm>
-            <a:off x="7251192" y="5084064"/>
-            <a:ext cx="310896" cy="310896"/>
-          </a:xfrm>
-          <a:prstGeom prst="ellipse">
-            <a:avLst/>
-          </a:prstGeom>
-          <a:solidFill>
-            <a:srgbClr val="F5B020"/>
-          </a:solidFill>
-          <a:ln>
-            <a:noFill/>
+                <a:spcPct val="110000"/>
+              </a:lnSpc>
+              <a:spcBef>
+                <a:spcPts val="0"/>
+              </a:spcBef>
+              <a:spcAft>
+                <a:spcPts val="0"/>
+              </a:spcAft>
+            </a:pPr>
+            <a:r>
+              <a:rPr sz="1550" b="0">
+                <a:solidFill>
+                  <a:srgbClr val="1A2236"/>
+                </a:solidFill>
+                <a:latin typeface="Microsoft JhengHei"/>
+                <a:ea typeface="Microsoft JhengHei"/>
+                <a:cs typeface="Microsoft JhengHei"/>
+              </a:rPr>
+              <a:t>為企業落地鋪路:SSO、流量治理、API 金鑰管理都在這一層接上</a:t>
+            </a:r>
+          </a:p>
+        </p:txBody>
+      </p:sp>
+      <p:cxnSp>
+        <p:nvCxnSpPr>
+          <p:cNvPr id="15" name="Connector 14"/>
+          <p:cNvCxnSpPr/>
+          <p:nvPr/>
+        </p:nvCxnSpPr>
+        <p:spPr>
+          <a:xfrm>
+            <a:off x="822960" y="5394960"/>
+            <a:ext cx="10561320" cy="0"/>
+          </a:xfrm>
+          <a:prstGeom prst="bentConnector3">
+            <a:avLst/>
+          </a:prstGeom>
+          <a:ln w="15240">
+            <a:solidFill>
+              <a:srgbClr val="D7DDEA"/>
+            </a:solidFill>
           </a:ln>
-          <a:effectLst/>
         </p:spPr>
         <p:style>
-          <a:lnRef idx="1">
+          <a:lnRef idx="2">
             <a:schemeClr val="accent1"/>
           </a:lnRef>
-          <a:fillRef idx="3">
+          <a:fillRef idx="0">
             <a:schemeClr val="accent1"/>
           </a:fillRef>
-          <a:effectRef idx="2">
+          <a:effectRef idx="1">
             <a:schemeClr val="accent1"/>
           </a:effectRef>
           <a:fontRef idx="minor">
-            <a:schemeClr val="lt1"/>
+            <a:schemeClr val="tx1"/>
           </a:fontRef>
         </p:style>
-        <p:txBody>
-          <a:bodyPr rtlCol="0" anchor="ctr" tIns="0" bIns="0"/>
-          <a:lstStyle/>
-          <a:p>
-            <a:pPr algn="ctr"/>
-            <a:r>
-              <a:rPr sz="1400" b="1">
-                <a:solidFill>
-                  <a:srgbClr val="FFFFFF"/>
-                </a:solidFill>
-                <a:latin typeface="Microsoft JhengHei"/>
-                <a:ea typeface="Microsoft JhengHei"/>
-                <a:cs typeface="Microsoft JhengHei"/>
-              </a:rPr>
-              <a:t>4</a:t>
-            </a:r>
-          </a:p>
-        </p:txBody>
-      </p:sp>
-      <p:sp>
-        <p:nvSpPr>
-          <p:cNvPr id="18" name="TextBox 17"/>
-          <p:cNvSpPr txBox="1"/>
-          <p:nvPr/>
-        </p:nvSpPr>
-        <p:spPr>
-          <a:xfrm>
-            <a:off x="7708392" y="5047488"/>
-            <a:ext cx="3843223" cy="365760"/>
+      </p:cxnSp>
+      <p:sp>
+        <p:nvSpPr>
+          <p:cNvPr id="16" name="TextBox 15"/>
+          <p:cNvSpPr txBox="1"/>
+          <p:nvPr/>
+        </p:nvSpPr>
+        <p:spPr>
+          <a:xfrm>
+            <a:off x="822960" y="5559552"/>
+            <a:ext cx="10515600" cy="640080"/>
           </a:xfrm>
           <a:prstGeom prst="rect">
             <a:avLst/>
@@ -6789,7 +6594,7 @@
           <a:p>
             <a:pPr algn="l">
               <a:lnSpc>
-                <a:spcPct val="112000"/>
+                <a:spcPct val="125000"/>
               </a:lnSpc>
               <a:spcBef>
                 <a:spcPts val="0"/>
@@ -6799,69 +6604,33 @@
               </a:spcAft>
             </a:pPr>
             <a:r>
-              <a:rPr sz="1550" b="1">
-                <a:solidFill>
-                  <a:srgbClr val="1E3A8A"/>
-                </a:solidFill>
-                <a:latin typeface="Microsoft JhengHei"/>
-                <a:ea typeface="Microsoft JhengHei"/>
-                <a:cs typeface="Microsoft JhengHei"/>
-              </a:rPr>
-              <a:t>繁中申復書</a:t>
-            </a:r>
-          </a:p>
-        </p:txBody>
-      </p:sp>
-      <p:sp>
-        <p:nvSpPr>
-          <p:cNvPr id="19" name="TextBox 18"/>
-          <p:cNvSpPr txBox="1"/>
-          <p:nvPr/>
-        </p:nvSpPr>
-        <p:spPr>
-          <a:xfrm>
-            <a:off x="7708392" y="5385816"/>
-            <a:ext cx="3843223" cy="731520"/>
-          </a:xfrm>
-          <a:prstGeom prst="rect">
-            <a:avLst/>
-          </a:prstGeom>
-          <a:noFill/>
-        </p:spPr>
-        <p:txBody>
-          <a:bodyPr wrap="square" anchor="t" lIns="0" rIns="0" tIns="0" bIns="0">
-            <a:spAutoFit/>
-          </a:bodyPr>
-          <a:lstStyle/>
-          <a:p>
-            <a:pPr algn="l">
-              <a:lnSpc>
-                <a:spcPct val="116000"/>
-              </a:lnSpc>
-              <a:spcBef>
-                <a:spcPts val="0"/>
-              </a:spcBef>
-              <a:spcAft>
-                <a:spcPts val="600"/>
-              </a:spcAft>
-            </a:pPr>
-            <a:r>
-              <a:rPr sz="1250" b="0">
-                <a:solidFill>
-                  <a:srgbClr val="5A6B8C"/>
-                </a:solidFill>
-                <a:latin typeface="Microsoft JhengHei"/>
-                <a:ea typeface="Microsoft JhengHei"/>
-                <a:cs typeface="Microsoft JhengHei"/>
-              </a:rPr>
-              <a:t>本地模型產出符合公文格式的申復書草稿,逐句簽核後才可匯出。</a:t>
-            </a:r>
-          </a:p>
-        </p:txBody>
-      </p:sp>
-      <p:sp>
-        <p:nvSpPr>
-          <p:cNvPr id="20" name="TextBox 19"/>
+              <a:rPr sz="1500" b="1">
+                <a:solidFill>
+                  <a:srgbClr val="F5B020"/>
+                </a:solidFill>
+                <a:latin typeface="Microsoft JhengHei"/>
+                <a:ea typeface="Microsoft JhengHei"/>
+                <a:cs typeface="Microsoft JhengHei"/>
+              </a:rPr>
+              <a:t>實機驗證　</a:t>
+            </a:r>
+            <a:r>
+              <a:rPr sz="1450" b="0">
+                <a:solidFill>
+                  <a:srgbClr val="1A2236"/>
+                </a:solidFill>
+                <a:latin typeface="Microsoft JhengHei"/>
+                <a:ea typeface="Microsoft JhengHei"/>
+                <a:cs typeface="Microsoft JhengHei"/>
+              </a:rPr>
+              <a:t>瀏覽器 → digiRunner → 閘道 → 推論引擎完整走通;7 項自動化煙霧測試全數通過。</a:t>
+            </a:r>
+          </a:p>
+        </p:txBody>
+      </p:sp>
+      <p:sp>
+        <p:nvSpPr>
+          <p:cNvPr id="17" name="TextBox 16"/>
           <p:cNvSpPr txBox="1"/>
           <p:nvPr/>
         </p:nvSpPr>
@@ -6908,7 +6677,7 @@
       </p:sp>
       <p:sp>
         <p:nvSpPr>
-          <p:cNvPr id="21" name="TextBox 20"/>
+          <p:cNvPr id="18" name="TextBox 17"/>
           <p:cNvSpPr txBox="1"/>
           <p:nvPr/>
         </p:nvSpPr>
@@ -7159,7 +6928,7 @@
                 <a:ea typeface="Microsoft JhengHei"/>
                 <a:cs typeface="Microsoft JhengHei"/>
               </a:rPr>
-              <a:t>運行實況｜稽核鏈與服務狀態</a:t>
+              <a:t>實機整合｜Dify AI 工作流</a:t>
             </a:r>
           </a:p>
         </p:txBody>
@@ -7199,49 +6968,123 @@
           </a:fontRef>
         </p:style>
       </p:cxnSp>
-      <p:pic>
-        <p:nvPicPr>
-          <p:cNvPr id="7" name="Picture 6" descr="real_08_chain_verified.png"/>
-          <p:cNvPicPr>
-            <a:picLocks noChangeAspect="1"/>
-          </p:cNvPicPr>
-          <p:nvPr/>
-        </p:nvPicPr>
-        <p:blipFill>
-          <a:blip r:embed="rId2"/>
-          <a:stretch>
-            <a:fillRect/>
-          </a:stretch>
-        </p:blipFill>
-        <p:spPr>
-          <a:xfrm>
-            <a:off x="822960" y="2148840"/>
-            <a:ext cx="5925312" cy="3703320"/>
-          </a:xfrm>
-          <a:prstGeom prst="rect">
-            <a:avLst/>
-          </a:prstGeom>
-          <a:effectLst>
-            <a:outerShdw blurRad="90000" dist="38100" dir="5400000" rotWithShape="0">
-              <a:srgbClr val="1A2236">
-                <a:alpha val="26000"/>
-              </a:srgbClr>
-            </a:outerShdw>
-          </a:effectLst>
-        </p:spPr>
-      </p:pic>
-      <p:sp>
-        <p:nvSpPr>
-          <p:cNvPr id="8" name="Oval 7"/>
+      <p:sp>
+        <p:nvSpPr>
+          <p:cNvPr id="7" name="TextBox 6"/>
+          <p:cNvSpPr txBox="1"/>
+          <p:nvPr/>
+        </p:nvSpPr>
+        <p:spPr>
+          <a:xfrm>
+            <a:off x="8259775" y="182880"/>
+            <a:ext cx="3840480" cy="2377440"/>
+          </a:xfrm>
+          <a:prstGeom prst="rect">
+            <a:avLst/>
+          </a:prstGeom>
+          <a:noFill/>
+        </p:spPr>
+        <p:txBody>
+          <a:bodyPr wrap="square" anchor="t" lIns="0" rIns="0" tIns="0" bIns="0">
+            <a:spAutoFit/>
+          </a:bodyPr>
+          <a:lstStyle/>
+          <a:p>
+            <a:pPr algn="r">
+              <a:lnSpc>
+                <a:spcPct val="112000"/>
+              </a:lnSpc>
+              <a:spcBef>
+                <a:spcPts val="0"/>
+              </a:spcBef>
+              <a:spcAft>
+                <a:spcPts val="600"/>
+              </a:spcAft>
+            </a:pPr>
+            <a:r>
+              <a:rPr sz="15000" b="1">
+                <a:solidFill>
+                  <a:srgbClr val="EEF1F8"/>
+                </a:solidFill>
+                <a:latin typeface="Microsoft JhengHei"/>
+                <a:ea typeface="Microsoft JhengHei"/>
+                <a:cs typeface="Microsoft JhengHei"/>
+              </a:rPr>
+              <a:t>05</a:t>
+            </a:r>
+          </a:p>
+        </p:txBody>
+      </p:sp>
+      <p:sp>
+        <p:nvSpPr>
+          <p:cNvPr id="8" name="TextBox 7"/>
+          <p:cNvSpPr txBox="1"/>
+          <p:nvPr/>
+        </p:nvSpPr>
+        <p:spPr>
+          <a:xfrm>
+            <a:off x="822960" y="1965960"/>
+            <a:ext cx="10515600" cy="457200"/>
+          </a:xfrm>
+          <a:prstGeom prst="rect">
+            <a:avLst/>
+          </a:prstGeom>
+          <a:noFill/>
+        </p:spPr>
+        <p:txBody>
+          <a:bodyPr wrap="square" anchor="t" lIns="0" rIns="0" tIns="0" bIns="0">
+            <a:spAutoFit/>
+          </a:bodyPr>
+          <a:lstStyle/>
+          <a:p>
+            <a:pPr algn="l">
+              <a:lnSpc>
+                <a:spcPct val="125000"/>
+              </a:lnSpc>
+              <a:spcBef>
+                <a:spcPts val="0"/>
+              </a:spcBef>
+              <a:spcAft>
+                <a:spcPts val="600"/>
+              </a:spcAft>
+            </a:pPr>
+            <a:r>
+              <a:rPr sz="1700" b="1">
+                <a:solidFill>
+                  <a:srgbClr val="1E3A8A"/>
+                </a:solidFill>
+                <a:latin typeface="Microsoft JhengHei"/>
+                <a:ea typeface="Microsoft JhengHei"/>
+                <a:cs typeface="Microsoft JhengHei"/>
+              </a:rPr>
+              <a:t>Dify(社群版,自架)= AI workflow 編排平台　</a:t>
+            </a:r>
+            <a:r>
+              <a:rPr sz="1500" b="0">
+                <a:solidFill>
+                  <a:srgbClr val="5A6B8C"/>
+                </a:solidFill>
+                <a:latin typeface="Microsoft JhengHei"/>
+                <a:ea typeface="Microsoft JhengHei"/>
+                <a:cs typeface="Microsoft JhengHei"/>
+              </a:rPr>
+              <a:t>部署於 :8088,申復書的解析與草擬透過 Dify workflow 呼叫本地模型 qwen2.5:7b。</a:t>
+            </a:r>
+          </a:p>
+        </p:txBody>
+      </p:sp>
+      <p:sp>
+        <p:nvSpPr>
+          <p:cNvPr id="9" name="Rectangle 8"/>
           <p:cNvSpPr/>
           <p:nvPr/>
         </p:nvSpPr>
         <p:spPr>
           <a:xfrm>
-            <a:off x="7251192" y="2286000"/>
-            <a:ext cx="310896" cy="310896"/>
-          </a:xfrm>
-          <a:prstGeom prst="ellipse">
+            <a:off x="914400" y="2866644"/>
+            <a:ext cx="118872" cy="118872"/>
+          </a:xfrm>
+          <a:prstGeom prst="rect">
             <a:avLst/>
           </a:prstGeom>
           <a:solidFill>
@@ -7267,34 +7110,23 @@
           </a:fontRef>
         </p:style>
         <p:txBody>
-          <a:bodyPr rtlCol="0" anchor="ctr" tIns="0" bIns="0"/>
+          <a:bodyPr rtlCol="0" anchor="ctr"/>
           <a:lstStyle/>
           <a:p>
             <a:pPr algn="ctr"/>
-            <a:r>
-              <a:rPr sz="1400" b="1">
-                <a:solidFill>
-                  <a:srgbClr val="FFFFFF"/>
-                </a:solidFill>
-                <a:latin typeface="Microsoft JhengHei"/>
-                <a:ea typeface="Microsoft JhengHei"/>
-                <a:cs typeface="Microsoft JhengHei"/>
-              </a:rPr>
-              <a:t>1</a:t>
-            </a:r>
-          </a:p>
-        </p:txBody>
-      </p:sp>
-      <p:sp>
-        <p:nvSpPr>
-          <p:cNvPr id="9" name="TextBox 8"/>
-          <p:cNvSpPr txBox="1"/>
-          <p:nvPr/>
-        </p:nvSpPr>
-        <p:spPr>
-          <a:xfrm>
-            <a:off x="7708392" y="2249424"/>
-            <a:ext cx="3843223" cy="365760"/>
+          </a:p>
+        </p:txBody>
+      </p:sp>
+      <p:sp>
+        <p:nvSpPr>
+          <p:cNvPr id="10" name="TextBox 9"/>
+          <p:cNvSpPr txBox="1"/>
+          <p:nvPr/>
+        </p:nvSpPr>
+        <p:spPr>
+          <a:xfrm>
+            <a:off x="1207008" y="2788920"/>
+            <a:ext cx="10040112" cy="731520"/>
           </a:xfrm>
           <a:prstGeom prst="rect">
             <a:avLst/>
@@ -7309,88 +7141,41 @@
           <a:p>
             <a:pPr algn="l">
               <a:lnSpc>
-                <a:spcPct val="112000"/>
-              </a:lnSpc>
-              <a:spcBef>
-                <a:spcPts val="0"/>
-              </a:spcBef>
-              <a:spcAft>
-                <a:spcPts val="600"/>
-              </a:spcAft>
-            </a:pPr>
-            <a:r>
-              <a:rPr sz="1550" b="1">
-                <a:solidFill>
-                  <a:srgbClr val="1E3A8A"/>
-                </a:solidFill>
-                <a:latin typeface="Microsoft JhengHei"/>
-                <a:ea typeface="Microsoft JhengHei"/>
-                <a:cs typeface="Microsoft JhengHei"/>
-              </a:rPr>
-              <a:t>記錄實際模型</a:t>
-            </a:r>
-          </a:p>
-        </p:txBody>
-      </p:sp>
-      <p:sp>
-        <p:nvSpPr>
-          <p:cNvPr id="10" name="TextBox 9"/>
-          <p:cNvSpPr txBox="1"/>
-          <p:nvPr/>
-        </p:nvSpPr>
-        <p:spPr>
-          <a:xfrm>
-            <a:off x="7708392" y="2587752"/>
-            <a:ext cx="3843223" cy="731520"/>
-          </a:xfrm>
-          <a:prstGeom prst="rect">
-            <a:avLst/>
-          </a:prstGeom>
-          <a:noFill/>
-        </p:spPr>
-        <p:txBody>
-          <a:bodyPr wrap="square" anchor="t" lIns="0" rIns="0" tIns="0" bIns="0">
-            <a:spAutoFit/>
-          </a:bodyPr>
-          <a:lstStyle/>
-          <a:p>
-            <a:pPr algn="l">
-              <a:lnSpc>
-                <a:spcPct val="116000"/>
-              </a:lnSpc>
-              <a:spcBef>
-                <a:spcPts val="0"/>
-              </a:spcBef>
-              <a:spcAft>
-                <a:spcPts val="600"/>
-              </a:spcAft>
-            </a:pPr>
-            <a:r>
-              <a:rPr sz="1250" b="0">
-                <a:solidFill>
-                  <a:srgbClr val="5A6B8C"/>
-                </a:solidFill>
-                <a:latin typeface="Microsoft JhengHei"/>
-                <a:ea typeface="Microsoft JhengHei"/>
-                <a:cs typeface="Microsoft JhengHei"/>
-              </a:rPr>
-              <a:t>每筆分析的稽核列寫明用了哪個模型 — 可究責、可回溯。</a:t>
-            </a:r>
-          </a:p>
-        </p:txBody>
-      </p:sp>
-      <p:sp>
-        <p:nvSpPr>
-          <p:cNvPr id="11" name="Oval 10"/>
+                <a:spcPct val="110000"/>
+              </a:lnSpc>
+              <a:spcBef>
+                <a:spcPts val="0"/>
+              </a:spcBef>
+              <a:spcAft>
+                <a:spcPts val="0"/>
+              </a:spcAft>
+            </a:pPr>
+            <a:r>
+              <a:rPr sz="1550" b="0">
+                <a:solidFill>
+                  <a:srgbClr val="1A2236"/>
+                </a:solidFill>
+                <a:latin typeface="Microsoft JhengHei"/>
+                <a:ea typeface="Microsoft JhengHei"/>
+                <a:cs typeface="Microsoft JhengHei"/>
+              </a:rPr>
+              <a:t>一鍵自動建置:管理帳號、模型接入、workflow 匯入、API 金鑰全由腳本完成</a:t>
+            </a:r>
+          </a:p>
+        </p:txBody>
+      </p:sp>
+      <p:sp>
+        <p:nvSpPr>
+          <p:cNvPr id="11" name="Rectangle 10"/>
           <p:cNvSpPr/>
           <p:nvPr/>
         </p:nvSpPr>
         <p:spPr>
           <a:xfrm>
-            <a:off x="7251192" y="3218688"/>
-            <a:ext cx="310896" cy="310896"/>
-          </a:xfrm>
-          <a:prstGeom prst="ellipse">
+            <a:off x="914400" y="3351847"/>
+            <a:ext cx="118872" cy="118872"/>
+          </a:xfrm>
+          <a:prstGeom prst="rect">
             <a:avLst/>
           </a:prstGeom>
           <a:solidFill>
@@ -7416,21 +7201,10 @@
           </a:fontRef>
         </p:style>
         <p:txBody>
-          <a:bodyPr rtlCol="0" anchor="ctr" tIns="0" bIns="0"/>
+          <a:bodyPr rtlCol="0" anchor="ctr"/>
           <a:lstStyle/>
           <a:p>
             <a:pPr algn="ctr"/>
-            <a:r>
-              <a:rPr sz="1400" b="1">
-                <a:solidFill>
-                  <a:srgbClr val="FFFFFF"/>
-                </a:solidFill>
-                <a:latin typeface="Microsoft JhengHei"/>
-                <a:ea typeface="Microsoft JhengHei"/>
-                <a:cs typeface="Microsoft JhengHei"/>
-              </a:rPr>
-              <a:t>2</a:t>
-            </a:r>
           </a:p>
         </p:txBody>
       </p:sp>
@@ -7442,8 +7216,8 @@
         </p:nvSpPr>
         <p:spPr>
           <a:xfrm>
-            <a:off x="7708392" y="3182112"/>
-            <a:ext cx="3843223" cy="365760"/>
+            <a:off x="1207008" y="3274123"/>
+            <a:ext cx="10040112" cy="731520"/>
           </a:xfrm>
           <a:prstGeom prst="rect">
             <a:avLst/>
@@ -7458,88 +7232,41 @@
           <a:p>
             <a:pPr algn="l">
               <a:lnSpc>
-                <a:spcPct val="112000"/>
-              </a:lnSpc>
-              <a:spcBef>
-                <a:spcPts val="0"/>
-              </a:spcBef>
-              <a:spcAft>
-                <a:spcPts val="600"/>
-              </a:spcAft>
-            </a:pPr>
-            <a:r>
-              <a:rPr sz="1550" b="1">
-                <a:solidFill>
-                  <a:srgbClr val="1E3A8A"/>
-                </a:solidFill>
-                <a:latin typeface="Microsoft JhengHei"/>
-                <a:ea typeface="Microsoft JhengHei"/>
-                <a:cs typeface="Microsoft JhengHei"/>
-              </a:rPr>
-              <a:t>雜湊鏈全數驗證</a:t>
-            </a:r>
-          </a:p>
-        </p:txBody>
-      </p:sp>
-      <p:sp>
-        <p:nvSpPr>
-          <p:cNvPr id="13" name="TextBox 12"/>
-          <p:cNvSpPr txBox="1"/>
-          <p:nvPr/>
-        </p:nvSpPr>
-        <p:spPr>
-          <a:xfrm>
-            <a:off x="7708392" y="3520440"/>
-            <a:ext cx="3843223" cy="731520"/>
-          </a:xfrm>
-          <a:prstGeom prst="rect">
-            <a:avLst/>
-          </a:prstGeom>
-          <a:noFill/>
-        </p:spPr>
-        <p:txBody>
-          <a:bodyPr wrap="square" anchor="t" lIns="0" rIns="0" tIns="0" bIns="0">
-            <a:spAutoFit/>
-          </a:bodyPr>
-          <a:lstStyle/>
-          <a:p>
-            <a:pPr algn="l">
-              <a:lnSpc>
-                <a:spcPct val="116000"/>
-              </a:lnSpc>
-              <a:spcBef>
-                <a:spcPts val="0"/>
-              </a:spcBef>
-              <a:spcAft>
-                <a:spcPts val="600"/>
-              </a:spcAft>
-            </a:pPr>
-            <a:r>
-              <a:rPr sz="1250" b="0">
-                <a:solidFill>
-                  <a:srgbClr val="5A6B8C"/>
-                </a:solidFill>
-                <a:latin typeface="Microsoft JhengHei"/>
-                <a:ea typeface="Microsoft JhengHei"/>
-                <a:cs typeface="Microsoft JhengHei"/>
-              </a:rPr>
-              <a:t>29 筆紀錄 0 不一致;一鍵驗證,竄改即現形。</a:t>
-            </a:r>
-          </a:p>
-        </p:txBody>
-      </p:sp>
-      <p:sp>
-        <p:nvSpPr>
-          <p:cNvPr id="14" name="Oval 13"/>
+                <a:spcPct val="110000"/>
+              </a:lnSpc>
+              <a:spcBef>
+                <a:spcPts val="0"/>
+              </a:spcBef>
+              <a:spcAft>
+                <a:spcPts val="0"/>
+              </a:spcAft>
+            </a:pPr>
+            <a:r>
+              <a:rPr sz="1550" b="0">
+                <a:solidFill>
+                  <a:srgbClr val="1A2236"/>
+                </a:solidFill>
+                <a:latin typeface="Microsoft JhengHei"/>
+                <a:ea typeface="Microsoft JhengHei"/>
+                <a:cs typeface="Microsoft JhengHei"/>
+              </a:rPr>
+              <a:t>提示詞單一來源:workflow 由版本控制中的提示詞檔自動生成,不會兩邊不同步</a:t>
+            </a:r>
+          </a:p>
+        </p:txBody>
+      </p:sp>
+      <p:sp>
+        <p:nvSpPr>
+          <p:cNvPr id="13" name="Rectangle 12"/>
           <p:cNvSpPr/>
           <p:nvPr/>
         </p:nvSpPr>
         <p:spPr>
           <a:xfrm>
-            <a:off x="7251192" y="4151376"/>
-            <a:ext cx="310896" cy="310896"/>
-          </a:xfrm>
-          <a:prstGeom prst="ellipse">
+            <a:off x="914400" y="3837050"/>
+            <a:ext cx="118872" cy="118872"/>
+          </a:xfrm>
+          <a:prstGeom prst="rect">
             <a:avLst/>
           </a:prstGeom>
           <a:solidFill>
@@ -7565,34 +7292,23 @@
           </a:fontRef>
         </p:style>
         <p:txBody>
-          <a:bodyPr rtlCol="0" anchor="ctr" tIns="0" bIns="0"/>
+          <a:bodyPr rtlCol="0" anchor="ctr"/>
           <a:lstStyle/>
           <a:p>
             <a:pPr algn="ctr"/>
-            <a:r>
-              <a:rPr sz="1400" b="1">
-                <a:solidFill>
-                  <a:srgbClr val="FFFFFF"/>
-                </a:solidFill>
-                <a:latin typeface="Microsoft JhengHei"/>
-                <a:ea typeface="Microsoft JhengHei"/>
-                <a:cs typeface="Microsoft JhengHei"/>
-              </a:rPr>
-              <a:t>3</a:t>
-            </a:r>
-          </a:p>
-        </p:txBody>
-      </p:sp>
-      <p:sp>
-        <p:nvSpPr>
-          <p:cNvPr id="15" name="TextBox 14"/>
-          <p:cNvSpPr txBox="1"/>
-          <p:nvPr/>
-        </p:nvSpPr>
-        <p:spPr>
-          <a:xfrm>
-            <a:off x="7708392" y="4114800"/>
-            <a:ext cx="3843223" cy="365760"/>
+          </a:p>
+        </p:txBody>
+      </p:sp>
+      <p:sp>
+        <p:nvSpPr>
+          <p:cNvPr id="14" name="TextBox 13"/>
+          <p:cNvSpPr txBox="1"/>
+          <p:nvPr/>
+        </p:nvSpPr>
+        <p:spPr>
+          <a:xfrm>
+            <a:off x="1207008" y="3759326"/>
+            <a:ext cx="10040112" cy="731520"/>
           </a:xfrm>
           <a:prstGeom prst="rect">
             <a:avLst/>
@@ -7607,88 +7323,41 @@
           <a:p>
             <a:pPr algn="l">
               <a:lnSpc>
-                <a:spcPct val="112000"/>
-              </a:lnSpc>
-              <a:spcBef>
-                <a:spcPts val="0"/>
-              </a:spcBef>
-              <a:spcAft>
-                <a:spcPts val="600"/>
-              </a:spcAft>
-            </a:pPr>
-            <a:r>
-              <a:rPr sz="1550" b="1">
-                <a:solidFill>
-                  <a:srgbClr val="1E3A8A"/>
-                </a:solidFill>
-                <a:latin typeface="Microsoft JhengHei"/>
-                <a:ea typeface="Microsoft JhengHei"/>
-                <a:cs typeface="Microsoft JhengHei"/>
-              </a:rPr>
-              <a:t>遮罩留痕</a:t>
-            </a:r>
-          </a:p>
-        </p:txBody>
-      </p:sp>
-      <p:sp>
-        <p:nvSpPr>
-          <p:cNvPr id="16" name="TextBox 15"/>
-          <p:cNvSpPr txBox="1"/>
-          <p:nvPr/>
-        </p:nvSpPr>
-        <p:spPr>
-          <a:xfrm>
-            <a:off x="7708392" y="4453128"/>
-            <a:ext cx="3843223" cy="731520"/>
-          </a:xfrm>
-          <a:prstGeom prst="rect">
-            <a:avLst/>
-          </a:prstGeom>
-          <a:noFill/>
-        </p:spPr>
-        <p:txBody>
-          <a:bodyPr wrap="square" anchor="t" lIns="0" rIns="0" tIns="0" bIns="0">
-            <a:spAutoFit/>
-          </a:bodyPr>
-          <a:lstStyle/>
-          <a:p>
-            <a:pPr algn="l">
-              <a:lnSpc>
-                <a:spcPct val="116000"/>
-              </a:lnSpc>
-              <a:spcBef>
-                <a:spcPts val="0"/>
-              </a:spcBef>
-              <a:spcAft>
-                <a:spcPts val="600"/>
-              </a:spcAft>
-            </a:pPr>
-            <a:r>
-              <a:rPr sz="1250" b="0">
-                <a:solidFill>
-                  <a:srgbClr val="5A6B8C"/>
-                </a:solidFill>
-                <a:latin typeface="Microsoft JhengHei"/>
-                <a:ea typeface="Microsoft JhengHei"/>
-                <a:cs typeface="Microsoft JhengHei"/>
-              </a:rPr>
-              <a:t>命中的遮罩規則寫入稽核,證明遮罩真的有跑。</a:t>
-            </a:r>
-          </a:p>
-        </p:txBody>
-      </p:sp>
-      <p:sp>
-        <p:nvSpPr>
-          <p:cNvPr id="17" name="Oval 16"/>
+                <a:spcPct val="110000"/>
+              </a:lnSpc>
+              <a:spcBef>
+                <a:spcPts val="0"/>
+              </a:spcBef>
+              <a:spcAft>
+                <a:spcPts val="0"/>
+              </a:spcAft>
+            </a:pPr>
+            <a:r>
+              <a:rPr sz="1550" b="0">
+                <a:solidFill>
+                  <a:srgbClr val="1A2236"/>
+                </a:solidFill>
+                <a:latin typeface="Microsoft JhengHei"/>
+                <a:ea typeface="Microsoft JhengHei"/>
+                <a:cs typeface="Microsoft JhengHei"/>
+              </a:rPr>
+              <a:t>降級不裝死:Dify 斷線自動退回備援引擎,畫面出現醒目警示,絕不冒充真結果</a:t>
+            </a:r>
+          </a:p>
+        </p:txBody>
+      </p:sp>
+      <p:sp>
+        <p:nvSpPr>
+          <p:cNvPr id="15" name="Rectangle 14"/>
           <p:cNvSpPr/>
           <p:nvPr/>
         </p:nvSpPr>
         <p:spPr>
           <a:xfrm>
-            <a:off x="7251192" y="5084064"/>
-            <a:ext cx="310896" cy="310896"/>
-          </a:xfrm>
-          <a:prstGeom prst="ellipse">
+            <a:off x="914400" y="4322254"/>
+            <a:ext cx="118872" cy="118872"/>
+          </a:xfrm>
+          <a:prstGeom prst="rect">
             <a:avLst/>
           </a:prstGeom>
           <a:solidFill>
@@ -7714,24 +7383,95 @@
           </a:fontRef>
         </p:style>
         <p:txBody>
-          <a:bodyPr rtlCol="0" anchor="ctr" tIns="0" bIns="0"/>
+          <a:bodyPr rtlCol="0" anchor="ctr"/>
           <a:lstStyle/>
           <a:p>
             <a:pPr algn="ctr"/>
-            <a:r>
-              <a:rPr sz="1400" b="1">
-                <a:solidFill>
-                  <a:srgbClr val="FFFFFF"/>
-                </a:solidFill>
-                <a:latin typeface="Microsoft JhengHei"/>
-                <a:ea typeface="Microsoft JhengHei"/>
-                <a:cs typeface="Microsoft JhengHei"/>
-              </a:rPr>
-              <a:t>4</a:t>
-            </a:r>
-          </a:p>
-        </p:txBody>
-      </p:sp>
+          </a:p>
+        </p:txBody>
+      </p:sp>
+      <p:sp>
+        <p:nvSpPr>
+          <p:cNvPr id="16" name="TextBox 15"/>
+          <p:cNvSpPr txBox="1"/>
+          <p:nvPr/>
+        </p:nvSpPr>
+        <p:spPr>
+          <a:xfrm>
+            <a:off x="1207008" y="4244530"/>
+            <a:ext cx="10040112" cy="731520"/>
+          </a:xfrm>
+          <a:prstGeom prst="rect">
+            <a:avLst/>
+          </a:prstGeom>
+          <a:noFill/>
+        </p:spPr>
+        <p:txBody>
+          <a:bodyPr wrap="square" anchor="t" lIns="0" rIns="0" tIns="0" bIns="0">
+            <a:spAutoFit/>
+          </a:bodyPr>
+          <a:lstStyle/>
+          <a:p>
+            <a:pPr algn="l">
+              <a:lnSpc>
+                <a:spcPct val="110000"/>
+              </a:lnSpc>
+              <a:spcBef>
+                <a:spcPts val="0"/>
+              </a:spcBef>
+              <a:spcAft>
+                <a:spcPts val="0"/>
+              </a:spcAft>
+            </a:pPr>
+            <a:r>
+              <a:rPr sz="1550" b="0">
+                <a:solidFill>
+                  <a:srgbClr val="1A2236"/>
+                </a:solidFill>
+                <a:latin typeface="Microsoft JhengHei"/>
+                <a:ea typeface="Microsoft JhengHei"/>
+                <a:cs typeface="Microsoft JhengHei"/>
+              </a:rPr>
+              <a:t>引證驗證留在系統內:防幻覺的最後一道牆不外包給任何平台</a:t>
+            </a:r>
+          </a:p>
+        </p:txBody>
+      </p:sp>
+      <p:cxnSp>
+        <p:nvCxnSpPr>
+          <p:cNvPr id="17" name="Connector 16"/>
+          <p:cNvCxnSpPr/>
+          <p:nvPr/>
+        </p:nvCxnSpPr>
+        <p:spPr>
+          <a:xfrm>
+            <a:off x="822960" y="5394960"/>
+            <a:ext cx="10561320" cy="0"/>
+          </a:xfrm>
+          <a:prstGeom prst="bentConnector3">
+            <a:avLst/>
+          </a:prstGeom>
+          <a:ln w="15240">
+            <a:solidFill>
+              <a:srgbClr val="D7DDEA"/>
+            </a:solidFill>
+          </a:ln>
+        </p:spPr>
+        <p:style>
+          <a:lnRef idx="2">
+            <a:schemeClr val="accent1"/>
+          </a:lnRef>
+          <a:fillRef idx="0">
+            <a:schemeClr val="accent1"/>
+          </a:fillRef>
+          <a:effectRef idx="1">
+            <a:schemeClr val="accent1"/>
+          </a:effectRef>
+          <a:fontRef idx="minor">
+            <a:schemeClr val="tx1"/>
+          </a:fontRef>
+        </p:style>
+      </p:cxnSp>
       <p:sp>
         <p:nvSpPr>
           <p:cNvPr id="18" name="TextBox 17"/>
@@ -7740,8 +7480,8 @@
         </p:nvSpPr>
         <p:spPr>
           <a:xfrm>
-            <a:off x="7708392" y="5047488"/>
-            <a:ext cx="3843223" cy="365760"/>
+            <a:off x="822960" y="5559552"/>
+            <a:ext cx="10515600" cy="640080"/>
           </a:xfrm>
           <a:prstGeom prst="rect">
             <a:avLst/>
@@ -7756,7 +7496,7 @@
           <a:p>
             <a:pPr algn="l">
               <a:lnSpc>
-                <a:spcPct val="112000"/>
+                <a:spcPct val="125000"/>
               </a:lnSpc>
               <a:spcBef>
                 <a:spcPts val="0"/>
@@ -7766,15 +7506,26 @@
               </a:spcAft>
             </a:pPr>
             <a:r>
-              <a:rPr sz="1550" b="1">
-                <a:solidFill>
-                  <a:srgbClr val="1E3A8A"/>
-                </a:solidFill>
-                <a:latin typeface="Microsoft JhengHei"/>
-                <a:ea typeface="Microsoft JhengHei"/>
-                <a:cs typeface="Microsoft JhengHei"/>
-              </a:rPr>
-              <a:t>四燈全綠</a:t>
+              <a:rPr sz="1500" b="1">
+                <a:solidFill>
+                  <a:srgbClr val="F5B020"/>
+                </a:solidFill>
+                <a:latin typeface="Microsoft JhengHei"/>
+                <a:ea typeface="Microsoft JhengHei"/>
+                <a:cs typeface="Microsoft JhengHei"/>
+              </a:rPr>
+              <a:t>實機驗證　</a:t>
+            </a:r>
+            <a:r>
+              <a:rPr sz="1450" b="0">
+                <a:solidFill>
+                  <a:srgbClr val="1A2236"/>
+                </a:solidFill>
+                <a:latin typeface="Microsoft JhengHei"/>
+                <a:ea typeface="Microsoft JhengHei"/>
+                <a:cs typeface="Microsoft JhengHei"/>
+              </a:rPr>
+              <a:t>真實 OA 經 Dify + 本地模型完整分析:28 秒產出正確分類與繁中草稿。</a:t>
             </a:r>
           </a:p>
         </p:txBody>
@@ -7782,53 +7533,6 @@
       <p:sp>
         <p:nvSpPr>
           <p:cNvPr id="19" name="TextBox 18"/>
-          <p:cNvSpPr txBox="1"/>
-          <p:nvPr/>
-        </p:nvSpPr>
-        <p:spPr>
-          <a:xfrm>
-            <a:off x="7708392" y="5385816"/>
-            <a:ext cx="3843223" cy="731520"/>
-          </a:xfrm>
-          <a:prstGeom prst="rect">
-            <a:avLst/>
-          </a:prstGeom>
-          <a:noFill/>
-        </p:spPr>
-        <p:txBody>
-          <a:bodyPr wrap="square" anchor="t" lIns="0" rIns="0" tIns="0" bIns="0">
-            <a:spAutoFit/>
-          </a:bodyPr>
-          <a:lstStyle/>
-          <a:p>
-            <a:pPr algn="l">
-              <a:lnSpc>
-                <a:spcPct val="116000"/>
-              </a:lnSpc>
-              <a:spcBef>
-                <a:spcPts val="0"/>
-              </a:spcBef>
-              <a:spcAft>
-                <a:spcPts val="600"/>
-              </a:spcAft>
-            </a:pPr>
-            <a:r>
-              <a:rPr sz="1250" b="0">
-                <a:solidFill>
-                  <a:srgbClr val="5A6B8C"/>
-                </a:solidFill>
-                <a:latin typeface="Microsoft JhengHei"/>
-                <a:ea typeface="Microsoft JhengHei"/>
-                <a:cs typeface="Microsoft JhengHei"/>
-              </a:rPr>
-              <a:t>頁尾即時顯示閘道 / 推論引擎 / digiRunner / Dify 健康狀態。</a:t>
-            </a:r>
-          </a:p>
-        </p:txBody>
-      </p:sp>
-      <p:sp>
-        <p:nvSpPr>
-          <p:cNvPr id="20" name="TextBox 19"/>
           <p:cNvSpPr txBox="1"/>
           <p:nvPr/>
         </p:nvSpPr>
@@ -7875,7 +7579,7 @@
       </p:sp>
       <p:sp>
         <p:nvSpPr>
-          <p:cNvPr id="21" name="TextBox 20"/>
+          <p:cNvPr id="20" name="TextBox 19"/>
           <p:cNvSpPr txBox="1"/>
           <p:nvPr/>
         </p:nvSpPr>
@@ -7953,6 +7657,1940 @@
             <a:avLst/>
           </a:prstGeom>
           <a:solidFill>
+            <a:srgbClr val="FFFFFF"/>
+          </a:solidFill>
+          <a:ln>
+            <a:noFill/>
+          </a:ln>
+          <a:effectLst/>
+        </p:spPr>
+        <p:style>
+          <a:lnRef idx="1">
+            <a:schemeClr val="accent1"/>
+          </a:lnRef>
+          <a:fillRef idx="3">
+            <a:schemeClr val="accent1"/>
+          </a:fillRef>
+          <a:effectRef idx="2">
+            <a:schemeClr val="accent1"/>
+          </a:effectRef>
+          <a:fontRef idx="minor">
+            <a:schemeClr val="lt1"/>
+          </a:fontRef>
+        </p:style>
+        <p:txBody>
+          <a:bodyPr rtlCol="0" anchor="ctr"/>
+          <a:lstStyle/>
+          <a:p>
+            <a:pPr algn="ctr"/>
+          </a:p>
+        </p:txBody>
+      </p:sp>
+      <p:sp>
+        <p:nvSpPr>
+          <p:cNvPr id="3" name="Rectangle 2"/>
+          <p:cNvSpPr/>
+          <p:nvPr/>
+        </p:nvSpPr>
+        <p:spPr>
+          <a:xfrm>
+            <a:off x="822960" y="658368"/>
+            <a:ext cx="146304" cy="146304"/>
+          </a:xfrm>
+          <a:prstGeom prst="rect">
+            <a:avLst/>
+          </a:prstGeom>
+          <a:solidFill>
+            <a:srgbClr val="F5B020"/>
+          </a:solidFill>
+          <a:ln>
+            <a:noFill/>
+          </a:ln>
+          <a:effectLst/>
+        </p:spPr>
+        <p:style>
+          <a:lnRef idx="1">
+            <a:schemeClr val="accent1"/>
+          </a:lnRef>
+          <a:fillRef idx="3">
+            <a:schemeClr val="accent1"/>
+          </a:fillRef>
+          <a:effectRef idx="2">
+            <a:schemeClr val="accent1"/>
+          </a:effectRef>
+          <a:fontRef idx="minor">
+            <a:schemeClr val="lt1"/>
+          </a:fontRef>
+        </p:style>
+        <p:txBody>
+          <a:bodyPr rtlCol="0" anchor="ctr"/>
+          <a:lstStyle/>
+          <a:p>
+            <a:pPr algn="ctr"/>
+          </a:p>
+        </p:txBody>
+      </p:sp>
+      <p:sp>
+        <p:nvSpPr>
+          <p:cNvPr id="4" name="TextBox 3"/>
+          <p:cNvSpPr txBox="1"/>
+          <p:nvPr/>
+        </p:nvSpPr>
+        <p:spPr>
+          <a:xfrm>
+            <a:off x="1078992" y="566928"/>
+            <a:ext cx="8229600" cy="365760"/>
+          </a:xfrm>
+          <a:prstGeom prst="rect">
+            <a:avLst/>
+          </a:prstGeom>
+          <a:noFill/>
+        </p:spPr>
+        <p:txBody>
+          <a:bodyPr wrap="square" anchor="t" lIns="0" rIns="0" tIns="0" bIns="0">
+            <a:spAutoFit/>
+          </a:bodyPr>
+          <a:lstStyle/>
+          <a:p>
+            <a:pPr algn="l">
+              <a:lnSpc>
+                <a:spcPct val="112000"/>
+              </a:lnSpc>
+              <a:spcBef>
+                <a:spcPts val="0"/>
+              </a:spcBef>
+              <a:spcAft>
+                <a:spcPts val="600"/>
+              </a:spcAft>
+            </a:pPr>
+            <a:r>
+              <a:rPr sz="1400" b="1">
+                <a:solidFill>
+                  <a:srgbClr val="F5B020"/>
+                </a:solidFill>
+                <a:latin typeface="Microsoft JhengHei"/>
+                <a:ea typeface="Microsoft JhengHei"/>
+                <a:cs typeface="Microsoft JhengHei"/>
+              </a:rPr>
+              <a:t>05 </a:t>
+            </a:r>
+            <a:r>
+              <a:rPr sz="1400" b="0">
+                <a:solidFill>
+                  <a:srgbClr val="5A6B8C"/>
+                </a:solidFill>
+                <a:latin typeface="Microsoft JhengHei"/>
+                <a:ea typeface="Microsoft JhengHei"/>
+                <a:cs typeface="Microsoft JhengHei"/>
+              </a:rPr>
+              <a:t>· 平台整合</a:t>
+            </a:r>
+          </a:p>
+        </p:txBody>
+      </p:sp>
+      <p:sp>
+        <p:nvSpPr>
+          <p:cNvPr id="5" name="TextBox 4"/>
+          <p:cNvSpPr txBox="1"/>
+          <p:nvPr/>
+        </p:nvSpPr>
+        <p:spPr>
+          <a:xfrm>
+            <a:off x="804672" y="914400"/>
+            <a:ext cx="10515600" cy="914400"/>
+          </a:xfrm>
+          <a:prstGeom prst="rect">
+            <a:avLst/>
+          </a:prstGeom>
+          <a:noFill/>
+        </p:spPr>
+        <p:txBody>
+          <a:bodyPr wrap="square" anchor="t" lIns="0" rIns="0" tIns="0" bIns="0">
+            <a:spAutoFit/>
+          </a:bodyPr>
+          <a:lstStyle/>
+          <a:p>
+            <a:pPr algn="l">
+              <a:lnSpc>
+                <a:spcPct val="112000"/>
+              </a:lnSpc>
+              <a:spcBef>
+                <a:spcPts val="0"/>
+              </a:spcBef>
+              <a:spcAft>
+                <a:spcPts val="600"/>
+              </a:spcAft>
+            </a:pPr>
+            <a:r>
+              <a:rPr sz="3300" b="1">
+                <a:solidFill>
+                  <a:srgbClr val="1E3A8A"/>
+                </a:solidFill>
+                <a:latin typeface="Microsoft JhengHei"/>
+                <a:ea typeface="Microsoft JhengHei"/>
+                <a:cs typeface="Microsoft JhengHei"/>
+              </a:rPr>
+              <a:t>運行實況｜真實模型的分析結果</a:t>
+            </a:r>
+          </a:p>
+        </p:txBody>
+      </p:sp>
+      <p:cxnSp>
+        <p:nvCxnSpPr>
+          <p:cNvPr id="6" name="Connector 5"/>
+          <p:cNvCxnSpPr/>
+          <p:nvPr/>
+        </p:nvCxnSpPr>
+        <p:spPr>
+          <a:xfrm>
+            <a:off x="822960" y="1755648"/>
+            <a:ext cx="10561320" cy="0"/>
+          </a:xfrm>
+          <a:prstGeom prst="bentConnector3">
+            <a:avLst/>
+          </a:prstGeom>
+          <a:ln w="15240">
+            <a:solidFill>
+              <a:srgbClr val="D7DDEA"/>
+            </a:solidFill>
+          </a:ln>
+        </p:spPr>
+        <p:style>
+          <a:lnRef idx="2">
+            <a:schemeClr val="accent1"/>
+          </a:lnRef>
+          <a:fillRef idx="0">
+            <a:schemeClr val="accent1"/>
+          </a:fillRef>
+          <a:effectRef idx="1">
+            <a:schemeClr val="accent1"/>
+          </a:effectRef>
+          <a:fontRef idx="minor">
+            <a:schemeClr val="tx1"/>
+          </a:fontRef>
+        </p:style>
+      </p:cxnSp>
+      <p:pic>
+        <p:nvPicPr>
+          <p:cNvPr id="7" name="Picture 6" descr="real_05_result_real_qwen.png"/>
+          <p:cNvPicPr>
+            <a:picLocks noChangeAspect="1"/>
+          </p:cNvPicPr>
+          <p:nvPr/>
+        </p:nvPicPr>
+        <p:blipFill>
+          <a:blip r:embed="rId2"/>
+          <a:stretch>
+            <a:fillRect/>
+          </a:stretch>
+        </p:blipFill>
+        <p:spPr>
+          <a:xfrm>
+            <a:off x="822960" y="2148840"/>
+            <a:ext cx="5925312" cy="3703320"/>
+          </a:xfrm>
+          <a:prstGeom prst="rect">
+            <a:avLst/>
+          </a:prstGeom>
+          <a:effectLst>
+            <a:outerShdw blurRad="90000" dist="38100" dir="5400000" rotWithShape="0">
+              <a:srgbClr val="1A2236">
+                <a:alpha val="26000"/>
+              </a:srgbClr>
+            </a:outerShdw>
+          </a:effectLst>
+        </p:spPr>
+      </p:pic>
+      <p:sp>
+        <p:nvSpPr>
+          <p:cNvPr id="8" name="Oval 7"/>
+          <p:cNvSpPr/>
+          <p:nvPr/>
+        </p:nvSpPr>
+        <p:spPr>
+          <a:xfrm>
+            <a:off x="7251192" y="2286000"/>
+            <a:ext cx="310896" cy="310896"/>
+          </a:xfrm>
+          <a:prstGeom prst="ellipse">
+            <a:avLst/>
+          </a:prstGeom>
+          <a:solidFill>
+            <a:srgbClr val="F5B020"/>
+          </a:solidFill>
+          <a:ln>
+            <a:noFill/>
+          </a:ln>
+          <a:effectLst/>
+        </p:spPr>
+        <p:style>
+          <a:lnRef idx="1">
+            <a:schemeClr val="accent1"/>
+          </a:lnRef>
+          <a:fillRef idx="3">
+            <a:schemeClr val="accent1"/>
+          </a:fillRef>
+          <a:effectRef idx="2">
+            <a:schemeClr val="accent1"/>
+          </a:effectRef>
+          <a:fontRef idx="minor">
+            <a:schemeClr val="lt1"/>
+          </a:fontRef>
+        </p:style>
+        <p:txBody>
+          <a:bodyPr rtlCol="0" anchor="ctr" tIns="0" bIns="0"/>
+          <a:lstStyle/>
+          <a:p>
+            <a:pPr algn="ctr"/>
+            <a:r>
+              <a:rPr sz="1400" b="1">
+                <a:solidFill>
+                  <a:srgbClr val="FFFFFF"/>
+                </a:solidFill>
+                <a:latin typeface="Microsoft JhengHei"/>
+                <a:ea typeface="Microsoft JhengHei"/>
+                <a:cs typeface="Microsoft JhengHei"/>
+              </a:rPr>
+              <a:t>1</a:t>
+            </a:r>
+          </a:p>
+        </p:txBody>
+      </p:sp>
+      <p:sp>
+        <p:nvSpPr>
+          <p:cNvPr id="9" name="TextBox 8"/>
+          <p:cNvSpPr txBox="1"/>
+          <p:nvPr/>
+        </p:nvSpPr>
+        <p:spPr>
+          <a:xfrm>
+            <a:off x="7708392" y="2249424"/>
+            <a:ext cx="3843223" cy="365760"/>
+          </a:xfrm>
+          <a:prstGeom prst="rect">
+            <a:avLst/>
+          </a:prstGeom>
+          <a:noFill/>
+        </p:spPr>
+        <p:txBody>
+          <a:bodyPr wrap="square" anchor="t" lIns="0" rIns="0" tIns="0" bIns="0">
+            <a:spAutoFit/>
+          </a:bodyPr>
+          <a:lstStyle/>
+          <a:p>
+            <a:pPr algn="l">
+              <a:lnSpc>
+                <a:spcPct val="112000"/>
+              </a:lnSpc>
+              <a:spcBef>
+                <a:spcPts val="0"/>
+              </a:spcBef>
+              <a:spcAft>
+                <a:spcPts val="600"/>
+              </a:spcAft>
+            </a:pPr>
+            <a:r>
+              <a:rPr sz="1550" b="1">
+                <a:solidFill>
+                  <a:srgbClr val="1E3A8A"/>
+                </a:solidFill>
+                <a:latin typeface="Microsoft JhengHei"/>
+                <a:ea typeface="Microsoft JhengHei"/>
+                <a:cs typeface="Microsoft JhengHei"/>
+              </a:rPr>
+              <a:t>全鏈路 28 秒</a:t>
+            </a:r>
+          </a:p>
+        </p:txBody>
+      </p:sp>
+      <p:sp>
+        <p:nvSpPr>
+          <p:cNvPr id="10" name="TextBox 9"/>
+          <p:cNvSpPr txBox="1"/>
+          <p:nvPr/>
+        </p:nvSpPr>
+        <p:spPr>
+          <a:xfrm>
+            <a:off x="7708392" y="2587752"/>
+            <a:ext cx="3843223" cy="731520"/>
+          </a:xfrm>
+          <a:prstGeom prst="rect">
+            <a:avLst/>
+          </a:prstGeom>
+          <a:noFill/>
+        </p:spPr>
+        <p:txBody>
+          <a:bodyPr wrap="square" anchor="t" lIns="0" rIns="0" tIns="0" bIns="0">
+            <a:spAutoFit/>
+          </a:bodyPr>
+          <a:lstStyle/>
+          <a:p>
+            <a:pPr algn="l">
+              <a:lnSpc>
+                <a:spcPct val="116000"/>
+              </a:lnSpc>
+              <a:spcBef>
+                <a:spcPts val="0"/>
+              </a:spcBef>
+              <a:spcAft>
+                <a:spcPts val="600"/>
+              </a:spcAft>
+            </a:pPr>
+            <a:r>
+              <a:rPr sz="1250" b="0">
+                <a:solidFill>
+                  <a:srgbClr val="5A6B8C"/>
+                </a:solidFill>
+                <a:latin typeface="Microsoft JhengHei"/>
+                <a:ea typeface="Microsoft JhengHei"/>
+                <a:cs typeface="Microsoft JhengHei"/>
+              </a:rPr>
+              <a:t>瀏覽器 → digiRunner → 閘道 → 推論引擎 → Dify → 本地模型,無一模擬。</a:t>
+            </a:r>
+          </a:p>
+        </p:txBody>
+      </p:sp>
+      <p:sp>
+        <p:nvSpPr>
+          <p:cNvPr id="11" name="Oval 10"/>
+          <p:cNvSpPr/>
+          <p:nvPr/>
+        </p:nvSpPr>
+        <p:spPr>
+          <a:xfrm>
+            <a:off x="7251192" y="3218688"/>
+            <a:ext cx="310896" cy="310896"/>
+          </a:xfrm>
+          <a:prstGeom prst="ellipse">
+            <a:avLst/>
+          </a:prstGeom>
+          <a:solidFill>
+            <a:srgbClr val="F5B020"/>
+          </a:solidFill>
+          <a:ln>
+            <a:noFill/>
+          </a:ln>
+          <a:effectLst/>
+        </p:spPr>
+        <p:style>
+          <a:lnRef idx="1">
+            <a:schemeClr val="accent1"/>
+          </a:lnRef>
+          <a:fillRef idx="3">
+            <a:schemeClr val="accent1"/>
+          </a:fillRef>
+          <a:effectRef idx="2">
+            <a:schemeClr val="accent1"/>
+          </a:effectRef>
+          <a:fontRef idx="minor">
+            <a:schemeClr val="lt1"/>
+          </a:fontRef>
+        </p:style>
+        <p:txBody>
+          <a:bodyPr rtlCol="0" anchor="ctr" tIns="0" bIns="0"/>
+          <a:lstStyle/>
+          <a:p>
+            <a:pPr algn="ctr"/>
+            <a:r>
+              <a:rPr sz="1400" b="1">
+                <a:solidFill>
+                  <a:srgbClr val="FFFFFF"/>
+                </a:solidFill>
+                <a:latin typeface="Microsoft JhengHei"/>
+                <a:ea typeface="Microsoft JhengHei"/>
+                <a:cs typeface="Microsoft JhengHei"/>
+              </a:rPr>
+              <a:t>2</a:t>
+            </a:r>
+          </a:p>
+        </p:txBody>
+      </p:sp>
+      <p:sp>
+        <p:nvSpPr>
+          <p:cNvPr id="12" name="TextBox 11"/>
+          <p:cNvSpPr txBox="1"/>
+          <p:nvPr/>
+        </p:nvSpPr>
+        <p:spPr>
+          <a:xfrm>
+            <a:off x="7708392" y="3182112"/>
+            <a:ext cx="3843223" cy="365760"/>
+          </a:xfrm>
+          <a:prstGeom prst="rect">
+            <a:avLst/>
+          </a:prstGeom>
+          <a:noFill/>
+        </p:spPr>
+        <p:txBody>
+          <a:bodyPr wrap="square" anchor="t" lIns="0" rIns="0" tIns="0" bIns="0">
+            <a:spAutoFit/>
+          </a:bodyPr>
+          <a:lstStyle/>
+          <a:p>
+            <a:pPr algn="l">
+              <a:lnSpc>
+                <a:spcPct val="112000"/>
+              </a:lnSpc>
+              <a:spcBef>
+                <a:spcPts val="0"/>
+              </a:spcBef>
+              <a:spcAft>
+                <a:spcPts val="600"/>
+              </a:spcAft>
+            </a:pPr>
+            <a:r>
+              <a:rPr sz="1550" b="1">
+                <a:solidFill>
+                  <a:srgbClr val="1E3A8A"/>
+                </a:solidFill>
+                <a:latin typeface="Microsoft JhengHei"/>
+                <a:ea typeface="Microsoft JhengHei"/>
+                <a:cs typeface="Microsoft JhengHei"/>
+              </a:rPr>
+              <a:t>正確抓出瑕疵</a:t>
+            </a:r>
+          </a:p>
+        </p:txBody>
+      </p:sp>
+      <p:sp>
+        <p:nvSpPr>
+          <p:cNvPr id="13" name="TextBox 12"/>
+          <p:cNvSpPr txBox="1"/>
+          <p:nvPr/>
+        </p:nvSpPr>
+        <p:spPr>
+          <a:xfrm>
+            <a:off x="7708392" y="3520440"/>
+            <a:ext cx="3843223" cy="731520"/>
+          </a:xfrm>
+          <a:prstGeom prst="rect">
+            <a:avLst/>
+          </a:prstGeom>
+          <a:noFill/>
+        </p:spPr>
+        <p:txBody>
+          <a:bodyPr wrap="square" anchor="t" lIns="0" rIns="0" tIns="0" bIns="0">
+            <a:spAutoFit/>
+          </a:bodyPr>
+          <a:lstStyle/>
+          <a:p>
+            <a:pPr algn="l">
+              <a:lnSpc>
+                <a:spcPct val="116000"/>
+              </a:lnSpc>
+              <a:spcBef>
+                <a:spcPts val="0"/>
+              </a:spcBef>
+              <a:spcAft>
+                <a:spcPts val="600"/>
+              </a:spcAft>
+            </a:pPr>
+            <a:r>
+              <a:rPr sz="1250" b="0">
+                <a:solidFill>
+                  <a:srgbClr val="5A6B8C"/>
+                </a:solidFill>
+                <a:latin typeface="Microsoft JhengHei"/>
+                <a:ea typeface="Microsoft JhengHei"/>
+                <a:cs typeface="Microsoft JhengHei"/>
+              </a:rPr>
+              <a:t>台灣 OA:請求項 9「該第一電動車」缺先行詞 — 真模型分類正確。</a:t>
+            </a:r>
+          </a:p>
+        </p:txBody>
+      </p:sp>
+      <p:sp>
+        <p:nvSpPr>
+          <p:cNvPr id="14" name="Oval 13"/>
+          <p:cNvSpPr/>
+          <p:nvPr/>
+        </p:nvSpPr>
+        <p:spPr>
+          <a:xfrm>
+            <a:off x="7251192" y="4151376"/>
+            <a:ext cx="310896" cy="310896"/>
+          </a:xfrm>
+          <a:prstGeom prst="ellipse">
+            <a:avLst/>
+          </a:prstGeom>
+          <a:solidFill>
+            <a:srgbClr val="F5B020"/>
+          </a:solidFill>
+          <a:ln>
+            <a:noFill/>
+          </a:ln>
+          <a:effectLst/>
+        </p:spPr>
+        <p:style>
+          <a:lnRef idx="1">
+            <a:schemeClr val="accent1"/>
+          </a:lnRef>
+          <a:fillRef idx="3">
+            <a:schemeClr val="accent1"/>
+          </a:fillRef>
+          <a:effectRef idx="2">
+            <a:schemeClr val="accent1"/>
+          </a:effectRef>
+          <a:fontRef idx="minor">
+            <a:schemeClr val="lt1"/>
+          </a:fontRef>
+        </p:style>
+        <p:txBody>
+          <a:bodyPr rtlCol="0" anchor="ctr" tIns="0" bIns="0"/>
+          <a:lstStyle/>
+          <a:p>
+            <a:pPr algn="ctr"/>
+            <a:r>
+              <a:rPr sz="1400" b="1">
+                <a:solidFill>
+                  <a:srgbClr val="FFFFFF"/>
+                </a:solidFill>
+                <a:latin typeface="Microsoft JhengHei"/>
+                <a:ea typeface="Microsoft JhengHei"/>
+                <a:cs typeface="Microsoft JhengHei"/>
+              </a:rPr>
+              <a:t>3</a:t>
+            </a:r>
+          </a:p>
+        </p:txBody>
+      </p:sp>
+      <p:sp>
+        <p:nvSpPr>
+          <p:cNvPr id="15" name="TextBox 14"/>
+          <p:cNvSpPr txBox="1"/>
+          <p:nvPr/>
+        </p:nvSpPr>
+        <p:spPr>
+          <a:xfrm>
+            <a:off x="7708392" y="4114800"/>
+            <a:ext cx="3843223" cy="365760"/>
+          </a:xfrm>
+          <a:prstGeom prst="rect">
+            <a:avLst/>
+          </a:prstGeom>
+          <a:noFill/>
+        </p:spPr>
+        <p:txBody>
+          <a:bodyPr wrap="square" anchor="t" lIns="0" rIns="0" tIns="0" bIns="0">
+            <a:spAutoFit/>
+          </a:bodyPr>
+          <a:lstStyle/>
+          <a:p>
+            <a:pPr algn="l">
+              <a:lnSpc>
+                <a:spcPct val="112000"/>
+              </a:lnSpc>
+              <a:spcBef>
+                <a:spcPts val="0"/>
+              </a:spcBef>
+              <a:spcAft>
+                <a:spcPts val="600"/>
+              </a:spcAft>
+            </a:pPr>
+            <a:r>
+              <a:rPr sz="1550" b="1">
+                <a:solidFill>
+                  <a:srgbClr val="1E3A8A"/>
+                </a:solidFill>
+                <a:latin typeface="Microsoft JhengHei"/>
+                <a:ea typeface="Microsoft JhengHei"/>
+                <a:cs typeface="Microsoft JhengHei"/>
+              </a:rPr>
+              <a:t>硬牆當場攔截</a:t>
+            </a:r>
+          </a:p>
+        </p:txBody>
+      </p:sp>
+      <p:sp>
+        <p:nvSpPr>
+          <p:cNvPr id="16" name="TextBox 15"/>
+          <p:cNvSpPr txBox="1"/>
+          <p:nvPr/>
+        </p:nvSpPr>
+        <p:spPr>
+          <a:xfrm>
+            <a:off x="7708392" y="4453128"/>
+            <a:ext cx="3843223" cy="731520"/>
+          </a:xfrm>
+          <a:prstGeom prst="rect">
+            <a:avLst/>
+          </a:prstGeom>
+          <a:noFill/>
+        </p:spPr>
+        <p:txBody>
+          <a:bodyPr wrap="square" anchor="t" lIns="0" rIns="0" tIns="0" bIns="0">
+            <a:spAutoFit/>
+          </a:bodyPr>
+          <a:lstStyle/>
+          <a:p>
+            <a:pPr algn="l">
+              <a:lnSpc>
+                <a:spcPct val="116000"/>
+              </a:lnSpc>
+              <a:spcBef>
+                <a:spcPts val="0"/>
+              </a:spcBef>
+              <a:spcAft>
+                <a:spcPts val="600"/>
+              </a:spcAft>
+            </a:pPr>
+            <a:r>
+              <a:rPr sz="1250" b="0">
+                <a:solidFill>
+                  <a:srgbClr val="5A6B8C"/>
+                </a:solidFill>
+                <a:latin typeface="Microsoft JhengHei"/>
+                <a:ea typeface="Microsoft JhengHei"/>
+                <a:cs typeface="Microsoft JhengHei"/>
+              </a:rPr>
+              <a:t>真模型也想捏造引用 — 系統即時剝除並在畫面標示。</a:t>
+            </a:r>
+          </a:p>
+        </p:txBody>
+      </p:sp>
+      <p:sp>
+        <p:nvSpPr>
+          <p:cNvPr id="17" name="Oval 16"/>
+          <p:cNvSpPr/>
+          <p:nvPr/>
+        </p:nvSpPr>
+        <p:spPr>
+          <a:xfrm>
+            <a:off x="7251192" y="5084064"/>
+            <a:ext cx="310896" cy="310896"/>
+          </a:xfrm>
+          <a:prstGeom prst="ellipse">
+            <a:avLst/>
+          </a:prstGeom>
+          <a:solidFill>
+            <a:srgbClr val="F5B020"/>
+          </a:solidFill>
+          <a:ln>
+            <a:noFill/>
+          </a:ln>
+          <a:effectLst/>
+        </p:spPr>
+        <p:style>
+          <a:lnRef idx="1">
+            <a:schemeClr val="accent1"/>
+          </a:lnRef>
+          <a:fillRef idx="3">
+            <a:schemeClr val="accent1"/>
+          </a:fillRef>
+          <a:effectRef idx="2">
+            <a:schemeClr val="accent1"/>
+          </a:effectRef>
+          <a:fontRef idx="minor">
+            <a:schemeClr val="lt1"/>
+          </a:fontRef>
+        </p:style>
+        <p:txBody>
+          <a:bodyPr rtlCol="0" anchor="ctr" tIns="0" bIns="0"/>
+          <a:lstStyle/>
+          <a:p>
+            <a:pPr algn="ctr"/>
+            <a:r>
+              <a:rPr sz="1400" b="1">
+                <a:solidFill>
+                  <a:srgbClr val="FFFFFF"/>
+                </a:solidFill>
+                <a:latin typeface="Microsoft JhengHei"/>
+                <a:ea typeface="Microsoft JhengHei"/>
+                <a:cs typeface="Microsoft JhengHei"/>
+              </a:rPr>
+              <a:t>4</a:t>
+            </a:r>
+          </a:p>
+        </p:txBody>
+      </p:sp>
+      <p:sp>
+        <p:nvSpPr>
+          <p:cNvPr id="18" name="TextBox 17"/>
+          <p:cNvSpPr txBox="1"/>
+          <p:nvPr/>
+        </p:nvSpPr>
+        <p:spPr>
+          <a:xfrm>
+            <a:off x="7708392" y="5047488"/>
+            <a:ext cx="3843223" cy="365760"/>
+          </a:xfrm>
+          <a:prstGeom prst="rect">
+            <a:avLst/>
+          </a:prstGeom>
+          <a:noFill/>
+        </p:spPr>
+        <p:txBody>
+          <a:bodyPr wrap="square" anchor="t" lIns="0" rIns="0" tIns="0" bIns="0">
+            <a:spAutoFit/>
+          </a:bodyPr>
+          <a:lstStyle/>
+          <a:p>
+            <a:pPr algn="l">
+              <a:lnSpc>
+                <a:spcPct val="112000"/>
+              </a:lnSpc>
+              <a:spcBef>
+                <a:spcPts val="0"/>
+              </a:spcBef>
+              <a:spcAft>
+                <a:spcPts val="600"/>
+              </a:spcAft>
+            </a:pPr>
+            <a:r>
+              <a:rPr sz="1550" b="1">
+                <a:solidFill>
+                  <a:srgbClr val="1E3A8A"/>
+                </a:solidFill>
+                <a:latin typeface="Microsoft JhengHei"/>
+                <a:ea typeface="Microsoft JhengHei"/>
+                <a:cs typeface="Microsoft JhengHei"/>
+              </a:rPr>
+              <a:t>繁中申復書</a:t>
+            </a:r>
+          </a:p>
+        </p:txBody>
+      </p:sp>
+      <p:sp>
+        <p:nvSpPr>
+          <p:cNvPr id="19" name="TextBox 18"/>
+          <p:cNvSpPr txBox="1"/>
+          <p:nvPr/>
+        </p:nvSpPr>
+        <p:spPr>
+          <a:xfrm>
+            <a:off x="7708392" y="5385816"/>
+            <a:ext cx="3843223" cy="731520"/>
+          </a:xfrm>
+          <a:prstGeom prst="rect">
+            <a:avLst/>
+          </a:prstGeom>
+          <a:noFill/>
+        </p:spPr>
+        <p:txBody>
+          <a:bodyPr wrap="square" anchor="t" lIns="0" rIns="0" tIns="0" bIns="0">
+            <a:spAutoFit/>
+          </a:bodyPr>
+          <a:lstStyle/>
+          <a:p>
+            <a:pPr algn="l">
+              <a:lnSpc>
+                <a:spcPct val="116000"/>
+              </a:lnSpc>
+              <a:spcBef>
+                <a:spcPts val="0"/>
+              </a:spcBef>
+              <a:spcAft>
+                <a:spcPts val="600"/>
+              </a:spcAft>
+            </a:pPr>
+            <a:r>
+              <a:rPr sz="1250" b="0">
+                <a:solidFill>
+                  <a:srgbClr val="5A6B8C"/>
+                </a:solidFill>
+                <a:latin typeface="Microsoft JhengHei"/>
+                <a:ea typeface="Microsoft JhengHei"/>
+                <a:cs typeface="Microsoft JhengHei"/>
+              </a:rPr>
+              <a:t>本地模型產出符合公文格式的申復書草稿,逐句簽核後才可匯出。</a:t>
+            </a:r>
+          </a:p>
+        </p:txBody>
+      </p:sp>
+      <p:sp>
+        <p:nvSpPr>
+          <p:cNvPr id="20" name="TextBox 19"/>
+          <p:cNvSpPr txBox="1"/>
+          <p:nvPr/>
+        </p:nvSpPr>
+        <p:spPr>
+          <a:xfrm>
+            <a:off x="822960" y="6455664"/>
+            <a:ext cx="8229600" cy="274320"/>
+          </a:xfrm>
+          <a:prstGeom prst="rect">
+            <a:avLst/>
+          </a:prstGeom>
+          <a:noFill/>
+        </p:spPr>
+        <p:txBody>
+          <a:bodyPr wrap="square" anchor="t" lIns="0" rIns="0" tIns="0" bIns="0">
+            <a:spAutoFit/>
+          </a:bodyPr>
+          <a:lstStyle/>
+          <a:p>
+            <a:pPr algn="l">
+              <a:lnSpc>
+                <a:spcPct val="112000"/>
+              </a:lnSpc>
+              <a:spcBef>
+                <a:spcPts val="0"/>
+              </a:spcBef>
+              <a:spcAft>
+                <a:spcPts val="600"/>
+              </a:spcAft>
+            </a:pPr>
+            <a:r>
+              <a:rPr sz="1000" b="0">
+                <a:solidFill>
+                  <a:srgbClr val="8A97B2"/>
+                </a:solidFill>
+                <a:latin typeface="Microsoft JhengHei"/>
+                <a:ea typeface="Microsoft JhengHei"/>
+                <a:cs typeface="Microsoft JhengHei"/>
+              </a:rPr>
+              <a:t>PatentMind AI　·　NCCU GDGoC × Computex 2026</a:t>
+            </a:r>
+          </a:p>
+        </p:txBody>
+      </p:sp>
+      <p:sp>
+        <p:nvSpPr>
+          <p:cNvPr id="21" name="TextBox 20"/>
+          <p:cNvSpPr txBox="1"/>
+          <p:nvPr/>
+        </p:nvSpPr>
+        <p:spPr>
+          <a:xfrm>
+            <a:off x="10637215" y="6455664"/>
+            <a:ext cx="731520" cy="274320"/>
+          </a:xfrm>
+          <a:prstGeom prst="rect">
+            <a:avLst/>
+          </a:prstGeom>
+          <a:noFill/>
+        </p:spPr>
+        <p:txBody>
+          <a:bodyPr wrap="square" anchor="t" lIns="0" rIns="0" tIns="0" bIns="0">
+            <a:spAutoFit/>
+          </a:bodyPr>
+          <a:lstStyle/>
+          <a:p>
+            <a:pPr algn="r">
+              <a:lnSpc>
+                <a:spcPct val="112000"/>
+              </a:lnSpc>
+              <a:spcBef>
+                <a:spcPts val="0"/>
+              </a:spcBef>
+              <a:spcAft>
+                <a:spcPts val="600"/>
+              </a:spcAft>
+            </a:pPr>
+            <a:r>
+              <a:rPr sz="1000" b="0">
+                <a:solidFill>
+                  <a:srgbClr val="8A97B2"/>
+                </a:solidFill>
+                <a:latin typeface="Microsoft JhengHei"/>
+                <a:ea typeface="Microsoft JhengHei"/>
+                <a:cs typeface="Microsoft JhengHei"/>
+              </a:rPr>
+              <a:t>14</a:t>
+            </a:r>
+          </a:p>
+        </p:txBody>
+      </p:sp>
+    </p:spTree>
+  </p:cSld>
+  <p:clrMapOvr>
+    <a:masterClrMapping/>
+  </p:clrMapOvr>
+</p:sld>
+</file>
+
+<file path=ppt/slides/slide16.xml><?xml version="1.0" encoding="utf-8"?>
+<p:sld xmlns:a="http://schemas.openxmlformats.org/drawingml/2006/main" xmlns:p="http://schemas.openxmlformats.org/presentationml/2006/main" xmlns:r="http://schemas.openxmlformats.org/officeDocument/2006/relationships">
+  <p:cSld>
+    <p:spTree>
+      <p:nvGrpSpPr>
+        <p:cNvPr id="1" name=""/>
+        <p:cNvGrpSpPr/>
+        <p:nvPr/>
+      </p:nvGrpSpPr>
+      <p:grpSpPr/>
+      <p:sp>
+        <p:nvSpPr>
+          <p:cNvPr id="2" name="Rectangle 1"/>
+          <p:cNvSpPr/>
+          <p:nvPr/>
+        </p:nvSpPr>
+        <p:spPr>
+          <a:xfrm>
+            <a:off x="0" y="0"/>
+            <a:ext cx="12191695" cy="6858000"/>
+          </a:xfrm>
+          <a:prstGeom prst="rect">
+            <a:avLst/>
+          </a:prstGeom>
+          <a:solidFill>
+            <a:srgbClr val="FFFFFF"/>
+          </a:solidFill>
+          <a:ln>
+            <a:noFill/>
+          </a:ln>
+          <a:effectLst/>
+        </p:spPr>
+        <p:style>
+          <a:lnRef idx="1">
+            <a:schemeClr val="accent1"/>
+          </a:lnRef>
+          <a:fillRef idx="3">
+            <a:schemeClr val="accent1"/>
+          </a:fillRef>
+          <a:effectRef idx="2">
+            <a:schemeClr val="accent1"/>
+          </a:effectRef>
+          <a:fontRef idx="minor">
+            <a:schemeClr val="lt1"/>
+          </a:fontRef>
+        </p:style>
+        <p:txBody>
+          <a:bodyPr rtlCol="0" anchor="ctr"/>
+          <a:lstStyle/>
+          <a:p>
+            <a:pPr algn="ctr"/>
+          </a:p>
+        </p:txBody>
+      </p:sp>
+      <p:sp>
+        <p:nvSpPr>
+          <p:cNvPr id="3" name="Rectangle 2"/>
+          <p:cNvSpPr/>
+          <p:nvPr/>
+        </p:nvSpPr>
+        <p:spPr>
+          <a:xfrm>
+            <a:off x="822960" y="658368"/>
+            <a:ext cx="146304" cy="146304"/>
+          </a:xfrm>
+          <a:prstGeom prst="rect">
+            <a:avLst/>
+          </a:prstGeom>
+          <a:solidFill>
+            <a:srgbClr val="F5B020"/>
+          </a:solidFill>
+          <a:ln>
+            <a:noFill/>
+          </a:ln>
+          <a:effectLst/>
+        </p:spPr>
+        <p:style>
+          <a:lnRef idx="1">
+            <a:schemeClr val="accent1"/>
+          </a:lnRef>
+          <a:fillRef idx="3">
+            <a:schemeClr val="accent1"/>
+          </a:fillRef>
+          <a:effectRef idx="2">
+            <a:schemeClr val="accent1"/>
+          </a:effectRef>
+          <a:fontRef idx="minor">
+            <a:schemeClr val="lt1"/>
+          </a:fontRef>
+        </p:style>
+        <p:txBody>
+          <a:bodyPr rtlCol="0" anchor="ctr"/>
+          <a:lstStyle/>
+          <a:p>
+            <a:pPr algn="ctr"/>
+          </a:p>
+        </p:txBody>
+      </p:sp>
+      <p:sp>
+        <p:nvSpPr>
+          <p:cNvPr id="4" name="TextBox 3"/>
+          <p:cNvSpPr txBox="1"/>
+          <p:nvPr/>
+        </p:nvSpPr>
+        <p:spPr>
+          <a:xfrm>
+            <a:off x="1078992" y="566928"/>
+            <a:ext cx="8229600" cy="365760"/>
+          </a:xfrm>
+          <a:prstGeom prst="rect">
+            <a:avLst/>
+          </a:prstGeom>
+          <a:noFill/>
+        </p:spPr>
+        <p:txBody>
+          <a:bodyPr wrap="square" anchor="t" lIns="0" rIns="0" tIns="0" bIns="0">
+            <a:spAutoFit/>
+          </a:bodyPr>
+          <a:lstStyle/>
+          <a:p>
+            <a:pPr algn="l">
+              <a:lnSpc>
+                <a:spcPct val="112000"/>
+              </a:lnSpc>
+              <a:spcBef>
+                <a:spcPts val="0"/>
+              </a:spcBef>
+              <a:spcAft>
+                <a:spcPts val="600"/>
+              </a:spcAft>
+            </a:pPr>
+            <a:r>
+              <a:rPr sz="1400" b="1">
+                <a:solidFill>
+                  <a:srgbClr val="F5B020"/>
+                </a:solidFill>
+                <a:latin typeface="Microsoft JhengHei"/>
+                <a:ea typeface="Microsoft JhengHei"/>
+                <a:cs typeface="Microsoft JhengHei"/>
+              </a:rPr>
+              <a:t>05 </a:t>
+            </a:r>
+            <a:r>
+              <a:rPr sz="1400" b="0">
+                <a:solidFill>
+                  <a:srgbClr val="5A6B8C"/>
+                </a:solidFill>
+                <a:latin typeface="Microsoft JhengHei"/>
+                <a:ea typeface="Microsoft JhengHei"/>
+                <a:cs typeface="Microsoft JhengHei"/>
+              </a:rPr>
+              <a:t>· 平台整合</a:t>
+            </a:r>
+          </a:p>
+        </p:txBody>
+      </p:sp>
+      <p:sp>
+        <p:nvSpPr>
+          <p:cNvPr id="5" name="TextBox 4"/>
+          <p:cNvSpPr txBox="1"/>
+          <p:nvPr/>
+        </p:nvSpPr>
+        <p:spPr>
+          <a:xfrm>
+            <a:off x="804672" y="914400"/>
+            <a:ext cx="10515600" cy="914400"/>
+          </a:xfrm>
+          <a:prstGeom prst="rect">
+            <a:avLst/>
+          </a:prstGeom>
+          <a:noFill/>
+        </p:spPr>
+        <p:txBody>
+          <a:bodyPr wrap="square" anchor="t" lIns="0" rIns="0" tIns="0" bIns="0">
+            <a:spAutoFit/>
+          </a:bodyPr>
+          <a:lstStyle/>
+          <a:p>
+            <a:pPr algn="l">
+              <a:lnSpc>
+                <a:spcPct val="112000"/>
+              </a:lnSpc>
+              <a:spcBef>
+                <a:spcPts val="0"/>
+              </a:spcBef>
+              <a:spcAft>
+                <a:spcPts val="600"/>
+              </a:spcAft>
+            </a:pPr>
+            <a:r>
+              <a:rPr sz="3300" b="1">
+                <a:solidFill>
+                  <a:srgbClr val="1E3A8A"/>
+                </a:solidFill>
+                <a:latin typeface="Microsoft JhengHei"/>
+                <a:ea typeface="Microsoft JhengHei"/>
+                <a:cs typeface="Microsoft JhengHei"/>
+              </a:rPr>
+              <a:t>運行實況｜稽核鏈與服務狀態</a:t>
+            </a:r>
+          </a:p>
+        </p:txBody>
+      </p:sp>
+      <p:cxnSp>
+        <p:nvCxnSpPr>
+          <p:cNvPr id="6" name="Connector 5"/>
+          <p:cNvCxnSpPr/>
+          <p:nvPr/>
+        </p:nvCxnSpPr>
+        <p:spPr>
+          <a:xfrm>
+            <a:off x="822960" y="1755648"/>
+            <a:ext cx="10561320" cy="0"/>
+          </a:xfrm>
+          <a:prstGeom prst="bentConnector3">
+            <a:avLst/>
+          </a:prstGeom>
+          <a:ln w="15240">
+            <a:solidFill>
+              <a:srgbClr val="D7DDEA"/>
+            </a:solidFill>
+          </a:ln>
+        </p:spPr>
+        <p:style>
+          <a:lnRef idx="2">
+            <a:schemeClr val="accent1"/>
+          </a:lnRef>
+          <a:fillRef idx="0">
+            <a:schemeClr val="accent1"/>
+          </a:fillRef>
+          <a:effectRef idx="1">
+            <a:schemeClr val="accent1"/>
+          </a:effectRef>
+          <a:fontRef idx="minor">
+            <a:schemeClr val="tx1"/>
+          </a:fontRef>
+        </p:style>
+      </p:cxnSp>
+      <p:pic>
+        <p:nvPicPr>
+          <p:cNvPr id="7" name="Picture 6" descr="real_08_chain_verified.png"/>
+          <p:cNvPicPr>
+            <a:picLocks noChangeAspect="1"/>
+          </p:cNvPicPr>
+          <p:nvPr/>
+        </p:nvPicPr>
+        <p:blipFill>
+          <a:blip r:embed="rId2"/>
+          <a:stretch>
+            <a:fillRect/>
+          </a:stretch>
+        </p:blipFill>
+        <p:spPr>
+          <a:xfrm>
+            <a:off x="822960" y="2148840"/>
+            <a:ext cx="5925312" cy="3703320"/>
+          </a:xfrm>
+          <a:prstGeom prst="rect">
+            <a:avLst/>
+          </a:prstGeom>
+          <a:effectLst>
+            <a:outerShdw blurRad="90000" dist="38100" dir="5400000" rotWithShape="0">
+              <a:srgbClr val="1A2236">
+                <a:alpha val="26000"/>
+              </a:srgbClr>
+            </a:outerShdw>
+          </a:effectLst>
+        </p:spPr>
+      </p:pic>
+      <p:sp>
+        <p:nvSpPr>
+          <p:cNvPr id="8" name="Oval 7"/>
+          <p:cNvSpPr/>
+          <p:nvPr/>
+        </p:nvSpPr>
+        <p:spPr>
+          <a:xfrm>
+            <a:off x="7251192" y="2286000"/>
+            <a:ext cx="310896" cy="310896"/>
+          </a:xfrm>
+          <a:prstGeom prst="ellipse">
+            <a:avLst/>
+          </a:prstGeom>
+          <a:solidFill>
+            <a:srgbClr val="F5B020"/>
+          </a:solidFill>
+          <a:ln>
+            <a:noFill/>
+          </a:ln>
+          <a:effectLst/>
+        </p:spPr>
+        <p:style>
+          <a:lnRef idx="1">
+            <a:schemeClr val="accent1"/>
+          </a:lnRef>
+          <a:fillRef idx="3">
+            <a:schemeClr val="accent1"/>
+          </a:fillRef>
+          <a:effectRef idx="2">
+            <a:schemeClr val="accent1"/>
+          </a:effectRef>
+          <a:fontRef idx="minor">
+            <a:schemeClr val="lt1"/>
+          </a:fontRef>
+        </p:style>
+        <p:txBody>
+          <a:bodyPr rtlCol="0" anchor="ctr" tIns="0" bIns="0"/>
+          <a:lstStyle/>
+          <a:p>
+            <a:pPr algn="ctr"/>
+            <a:r>
+              <a:rPr sz="1400" b="1">
+                <a:solidFill>
+                  <a:srgbClr val="FFFFFF"/>
+                </a:solidFill>
+                <a:latin typeface="Microsoft JhengHei"/>
+                <a:ea typeface="Microsoft JhengHei"/>
+                <a:cs typeface="Microsoft JhengHei"/>
+              </a:rPr>
+              <a:t>1</a:t>
+            </a:r>
+          </a:p>
+        </p:txBody>
+      </p:sp>
+      <p:sp>
+        <p:nvSpPr>
+          <p:cNvPr id="9" name="TextBox 8"/>
+          <p:cNvSpPr txBox="1"/>
+          <p:nvPr/>
+        </p:nvSpPr>
+        <p:spPr>
+          <a:xfrm>
+            <a:off x="7708392" y="2249424"/>
+            <a:ext cx="3843223" cy="365760"/>
+          </a:xfrm>
+          <a:prstGeom prst="rect">
+            <a:avLst/>
+          </a:prstGeom>
+          <a:noFill/>
+        </p:spPr>
+        <p:txBody>
+          <a:bodyPr wrap="square" anchor="t" lIns="0" rIns="0" tIns="0" bIns="0">
+            <a:spAutoFit/>
+          </a:bodyPr>
+          <a:lstStyle/>
+          <a:p>
+            <a:pPr algn="l">
+              <a:lnSpc>
+                <a:spcPct val="112000"/>
+              </a:lnSpc>
+              <a:spcBef>
+                <a:spcPts val="0"/>
+              </a:spcBef>
+              <a:spcAft>
+                <a:spcPts val="600"/>
+              </a:spcAft>
+            </a:pPr>
+            <a:r>
+              <a:rPr sz="1550" b="1">
+                <a:solidFill>
+                  <a:srgbClr val="1E3A8A"/>
+                </a:solidFill>
+                <a:latin typeface="Microsoft JhengHei"/>
+                <a:ea typeface="Microsoft JhengHei"/>
+                <a:cs typeface="Microsoft JhengHei"/>
+              </a:rPr>
+              <a:t>記錄實際模型</a:t>
+            </a:r>
+          </a:p>
+        </p:txBody>
+      </p:sp>
+      <p:sp>
+        <p:nvSpPr>
+          <p:cNvPr id="10" name="TextBox 9"/>
+          <p:cNvSpPr txBox="1"/>
+          <p:nvPr/>
+        </p:nvSpPr>
+        <p:spPr>
+          <a:xfrm>
+            <a:off x="7708392" y="2587752"/>
+            <a:ext cx="3843223" cy="731520"/>
+          </a:xfrm>
+          <a:prstGeom prst="rect">
+            <a:avLst/>
+          </a:prstGeom>
+          <a:noFill/>
+        </p:spPr>
+        <p:txBody>
+          <a:bodyPr wrap="square" anchor="t" lIns="0" rIns="0" tIns="0" bIns="0">
+            <a:spAutoFit/>
+          </a:bodyPr>
+          <a:lstStyle/>
+          <a:p>
+            <a:pPr algn="l">
+              <a:lnSpc>
+                <a:spcPct val="116000"/>
+              </a:lnSpc>
+              <a:spcBef>
+                <a:spcPts val="0"/>
+              </a:spcBef>
+              <a:spcAft>
+                <a:spcPts val="600"/>
+              </a:spcAft>
+            </a:pPr>
+            <a:r>
+              <a:rPr sz="1250" b="0">
+                <a:solidFill>
+                  <a:srgbClr val="5A6B8C"/>
+                </a:solidFill>
+                <a:latin typeface="Microsoft JhengHei"/>
+                <a:ea typeface="Microsoft JhengHei"/>
+                <a:cs typeface="Microsoft JhengHei"/>
+              </a:rPr>
+              <a:t>每筆分析的稽核列寫明用了哪個模型 — 可究責、可回溯。</a:t>
+            </a:r>
+          </a:p>
+        </p:txBody>
+      </p:sp>
+      <p:sp>
+        <p:nvSpPr>
+          <p:cNvPr id="11" name="Oval 10"/>
+          <p:cNvSpPr/>
+          <p:nvPr/>
+        </p:nvSpPr>
+        <p:spPr>
+          <a:xfrm>
+            <a:off x="7251192" y="3218688"/>
+            <a:ext cx="310896" cy="310896"/>
+          </a:xfrm>
+          <a:prstGeom prst="ellipse">
+            <a:avLst/>
+          </a:prstGeom>
+          <a:solidFill>
+            <a:srgbClr val="F5B020"/>
+          </a:solidFill>
+          <a:ln>
+            <a:noFill/>
+          </a:ln>
+          <a:effectLst/>
+        </p:spPr>
+        <p:style>
+          <a:lnRef idx="1">
+            <a:schemeClr val="accent1"/>
+          </a:lnRef>
+          <a:fillRef idx="3">
+            <a:schemeClr val="accent1"/>
+          </a:fillRef>
+          <a:effectRef idx="2">
+            <a:schemeClr val="accent1"/>
+          </a:effectRef>
+          <a:fontRef idx="minor">
+            <a:schemeClr val="lt1"/>
+          </a:fontRef>
+        </p:style>
+        <p:txBody>
+          <a:bodyPr rtlCol="0" anchor="ctr" tIns="0" bIns="0"/>
+          <a:lstStyle/>
+          <a:p>
+            <a:pPr algn="ctr"/>
+            <a:r>
+              <a:rPr sz="1400" b="1">
+                <a:solidFill>
+                  <a:srgbClr val="FFFFFF"/>
+                </a:solidFill>
+                <a:latin typeface="Microsoft JhengHei"/>
+                <a:ea typeface="Microsoft JhengHei"/>
+                <a:cs typeface="Microsoft JhengHei"/>
+              </a:rPr>
+              <a:t>2</a:t>
+            </a:r>
+          </a:p>
+        </p:txBody>
+      </p:sp>
+      <p:sp>
+        <p:nvSpPr>
+          <p:cNvPr id="12" name="TextBox 11"/>
+          <p:cNvSpPr txBox="1"/>
+          <p:nvPr/>
+        </p:nvSpPr>
+        <p:spPr>
+          <a:xfrm>
+            <a:off x="7708392" y="3182112"/>
+            <a:ext cx="3843223" cy="365760"/>
+          </a:xfrm>
+          <a:prstGeom prst="rect">
+            <a:avLst/>
+          </a:prstGeom>
+          <a:noFill/>
+        </p:spPr>
+        <p:txBody>
+          <a:bodyPr wrap="square" anchor="t" lIns="0" rIns="0" tIns="0" bIns="0">
+            <a:spAutoFit/>
+          </a:bodyPr>
+          <a:lstStyle/>
+          <a:p>
+            <a:pPr algn="l">
+              <a:lnSpc>
+                <a:spcPct val="112000"/>
+              </a:lnSpc>
+              <a:spcBef>
+                <a:spcPts val="0"/>
+              </a:spcBef>
+              <a:spcAft>
+                <a:spcPts val="600"/>
+              </a:spcAft>
+            </a:pPr>
+            <a:r>
+              <a:rPr sz="1550" b="1">
+                <a:solidFill>
+                  <a:srgbClr val="1E3A8A"/>
+                </a:solidFill>
+                <a:latin typeface="Microsoft JhengHei"/>
+                <a:ea typeface="Microsoft JhengHei"/>
+                <a:cs typeface="Microsoft JhengHei"/>
+              </a:rPr>
+              <a:t>雜湊鏈全數驗證</a:t>
+            </a:r>
+          </a:p>
+        </p:txBody>
+      </p:sp>
+      <p:sp>
+        <p:nvSpPr>
+          <p:cNvPr id="13" name="TextBox 12"/>
+          <p:cNvSpPr txBox="1"/>
+          <p:nvPr/>
+        </p:nvSpPr>
+        <p:spPr>
+          <a:xfrm>
+            <a:off x="7708392" y="3520440"/>
+            <a:ext cx="3843223" cy="731520"/>
+          </a:xfrm>
+          <a:prstGeom prst="rect">
+            <a:avLst/>
+          </a:prstGeom>
+          <a:noFill/>
+        </p:spPr>
+        <p:txBody>
+          <a:bodyPr wrap="square" anchor="t" lIns="0" rIns="0" tIns="0" bIns="0">
+            <a:spAutoFit/>
+          </a:bodyPr>
+          <a:lstStyle/>
+          <a:p>
+            <a:pPr algn="l">
+              <a:lnSpc>
+                <a:spcPct val="116000"/>
+              </a:lnSpc>
+              <a:spcBef>
+                <a:spcPts val="0"/>
+              </a:spcBef>
+              <a:spcAft>
+                <a:spcPts val="600"/>
+              </a:spcAft>
+            </a:pPr>
+            <a:r>
+              <a:rPr sz="1250" b="0">
+                <a:solidFill>
+                  <a:srgbClr val="5A6B8C"/>
+                </a:solidFill>
+                <a:latin typeface="Microsoft JhengHei"/>
+                <a:ea typeface="Microsoft JhengHei"/>
+                <a:cs typeface="Microsoft JhengHei"/>
+              </a:rPr>
+              <a:t>29 筆紀錄 0 不一致;一鍵驗證,竄改即現形。</a:t>
+            </a:r>
+          </a:p>
+        </p:txBody>
+      </p:sp>
+      <p:sp>
+        <p:nvSpPr>
+          <p:cNvPr id="14" name="Oval 13"/>
+          <p:cNvSpPr/>
+          <p:nvPr/>
+        </p:nvSpPr>
+        <p:spPr>
+          <a:xfrm>
+            <a:off x="7251192" y="4151376"/>
+            <a:ext cx="310896" cy="310896"/>
+          </a:xfrm>
+          <a:prstGeom prst="ellipse">
+            <a:avLst/>
+          </a:prstGeom>
+          <a:solidFill>
+            <a:srgbClr val="F5B020"/>
+          </a:solidFill>
+          <a:ln>
+            <a:noFill/>
+          </a:ln>
+          <a:effectLst/>
+        </p:spPr>
+        <p:style>
+          <a:lnRef idx="1">
+            <a:schemeClr val="accent1"/>
+          </a:lnRef>
+          <a:fillRef idx="3">
+            <a:schemeClr val="accent1"/>
+          </a:fillRef>
+          <a:effectRef idx="2">
+            <a:schemeClr val="accent1"/>
+          </a:effectRef>
+          <a:fontRef idx="minor">
+            <a:schemeClr val="lt1"/>
+          </a:fontRef>
+        </p:style>
+        <p:txBody>
+          <a:bodyPr rtlCol="0" anchor="ctr" tIns="0" bIns="0"/>
+          <a:lstStyle/>
+          <a:p>
+            <a:pPr algn="ctr"/>
+            <a:r>
+              <a:rPr sz="1400" b="1">
+                <a:solidFill>
+                  <a:srgbClr val="FFFFFF"/>
+                </a:solidFill>
+                <a:latin typeface="Microsoft JhengHei"/>
+                <a:ea typeface="Microsoft JhengHei"/>
+                <a:cs typeface="Microsoft JhengHei"/>
+              </a:rPr>
+              <a:t>3</a:t>
+            </a:r>
+          </a:p>
+        </p:txBody>
+      </p:sp>
+      <p:sp>
+        <p:nvSpPr>
+          <p:cNvPr id="15" name="TextBox 14"/>
+          <p:cNvSpPr txBox="1"/>
+          <p:nvPr/>
+        </p:nvSpPr>
+        <p:spPr>
+          <a:xfrm>
+            <a:off x="7708392" y="4114800"/>
+            <a:ext cx="3843223" cy="365760"/>
+          </a:xfrm>
+          <a:prstGeom prst="rect">
+            <a:avLst/>
+          </a:prstGeom>
+          <a:noFill/>
+        </p:spPr>
+        <p:txBody>
+          <a:bodyPr wrap="square" anchor="t" lIns="0" rIns="0" tIns="0" bIns="0">
+            <a:spAutoFit/>
+          </a:bodyPr>
+          <a:lstStyle/>
+          <a:p>
+            <a:pPr algn="l">
+              <a:lnSpc>
+                <a:spcPct val="112000"/>
+              </a:lnSpc>
+              <a:spcBef>
+                <a:spcPts val="0"/>
+              </a:spcBef>
+              <a:spcAft>
+                <a:spcPts val="600"/>
+              </a:spcAft>
+            </a:pPr>
+            <a:r>
+              <a:rPr sz="1550" b="1">
+                <a:solidFill>
+                  <a:srgbClr val="1E3A8A"/>
+                </a:solidFill>
+                <a:latin typeface="Microsoft JhengHei"/>
+                <a:ea typeface="Microsoft JhengHei"/>
+                <a:cs typeface="Microsoft JhengHei"/>
+              </a:rPr>
+              <a:t>遮罩留痕</a:t>
+            </a:r>
+          </a:p>
+        </p:txBody>
+      </p:sp>
+      <p:sp>
+        <p:nvSpPr>
+          <p:cNvPr id="16" name="TextBox 15"/>
+          <p:cNvSpPr txBox="1"/>
+          <p:nvPr/>
+        </p:nvSpPr>
+        <p:spPr>
+          <a:xfrm>
+            <a:off x="7708392" y="4453128"/>
+            <a:ext cx="3843223" cy="731520"/>
+          </a:xfrm>
+          <a:prstGeom prst="rect">
+            <a:avLst/>
+          </a:prstGeom>
+          <a:noFill/>
+        </p:spPr>
+        <p:txBody>
+          <a:bodyPr wrap="square" anchor="t" lIns="0" rIns="0" tIns="0" bIns="0">
+            <a:spAutoFit/>
+          </a:bodyPr>
+          <a:lstStyle/>
+          <a:p>
+            <a:pPr algn="l">
+              <a:lnSpc>
+                <a:spcPct val="116000"/>
+              </a:lnSpc>
+              <a:spcBef>
+                <a:spcPts val="0"/>
+              </a:spcBef>
+              <a:spcAft>
+                <a:spcPts val="600"/>
+              </a:spcAft>
+            </a:pPr>
+            <a:r>
+              <a:rPr sz="1250" b="0">
+                <a:solidFill>
+                  <a:srgbClr val="5A6B8C"/>
+                </a:solidFill>
+                <a:latin typeface="Microsoft JhengHei"/>
+                <a:ea typeface="Microsoft JhengHei"/>
+                <a:cs typeface="Microsoft JhengHei"/>
+              </a:rPr>
+              <a:t>命中的遮罩規則寫入稽核,證明遮罩真的有跑。</a:t>
+            </a:r>
+          </a:p>
+        </p:txBody>
+      </p:sp>
+      <p:sp>
+        <p:nvSpPr>
+          <p:cNvPr id="17" name="Oval 16"/>
+          <p:cNvSpPr/>
+          <p:nvPr/>
+        </p:nvSpPr>
+        <p:spPr>
+          <a:xfrm>
+            <a:off x="7251192" y="5084064"/>
+            <a:ext cx="310896" cy="310896"/>
+          </a:xfrm>
+          <a:prstGeom prst="ellipse">
+            <a:avLst/>
+          </a:prstGeom>
+          <a:solidFill>
+            <a:srgbClr val="F5B020"/>
+          </a:solidFill>
+          <a:ln>
+            <a:noFill/>
+          </a:ln>
+          <a:effectLst/>
+        </p:spPr>
+        <p:style>
+          <a:lnRef idx="1">
+            <a:schemeClr val="accent1"/>
+          </a:lnRef>
+          <a:fillRef idx="3">
+            <a:schemeClr val="accent1"/>
+          </a:fillRef>
+          <a:effectRef idx="2">
+            <a:schemeClr val="accent1"/>
+          </a:effectRef>
+          <a:fontRef idx="minor">
+            <a:schemeClr val="lt1"/>
+          </a:fontRef>
+        </p:style>
+        <p:txBody>
+          <a:bodyPr rtlCol="0" anchor="ctr" tIns="0" bIns="0"/>
+          <a:lstStyle/>
+          <a:p>
+            <a:pPr algn="ctr"/>
+            <a:r>
+              <a:rPr sz="1400" b="1">
+                <a:solidFill>
+                  <a:srgbClr val="FFFFFF"/>
+                </a:solidFill>
+                <a:latin typeface="Microsoft JhengHei"/>
+                <a:ea typeface="Microsoft JhengHei"/>
+                <a:cs typeface="Microsoft JhengHei"/>
+              </a:rPr>
+              <a:t>4</a:t>
+            </a:r>
+          </a:p>
+        </p:txBody>
+      </p:sp>
+      <p:sp>
+        <p:nvSpPr>
+          <p:cNvPr id="18" name="TextBox 17"/>
+          <p:cNvSpPr txBox="1"/>
+          <p:nvPr/>
+        </p:nvSpPr>
+        <p:spPr>
+          <a:xfrm>
+            <a:off x="7708392" y="5047488"/>
+            <a:ext cx="3843223" cy="365760"/>
+          </a:xfrm>
+          <a:prstGeom prst="rect">
+            <a:avLst/>
+          </a:prstGeom>
+          <a:noFill/>
+        </p:spPr>
+        <p:txBody>
+          <a:bodyPr wrap="square" anchor="t" lIns="0" rIns="0" tIns="0" bIns="0">
+            <a:spAutoFit/>
+          </a:bodyPr>
+          <a:lstStyle/>
+          <a:p>
+            <a:pPr algn="l">
+              <a:lnSpc>
+                <a:spcPct val="112000"/>
+              </a:lnSpc>
+              <a:spcBef>
+                <a:spcPts val="0"/>
+              </a:spcBef>
+              <a:spcAft>
+                <a:spcPts val="600"/>
+              </a:spcAft>
+            </a:pPr>
+            <a:r>
+              <a:rPr sz="1550" b="1">
+                <a:solidFill>
+                  <a:srgbClr val="1E3A8A"/>
+                </a:solidFill>
+                <a:latin typeface="Microsoft JhengHei"/>
+                <a:ea typeface="Microsoft JhengHei"/>
+                <a:cs typeface="Microsoft JhengHei"/>
+              </a:rPr>
+              <a:t>四燈全綠</a:t>
+            </a:r>
+          </a:p>
+        </p:txBody>
+      </p:sp>
+      <p:sp>
+        <p:nvSpPr>
+          <p:cNvPr id="19" name="TextBox 18"/>
+          <p:cNvSpPr txBox="1"/>
+          <p:nvPr/>
+        </p:nvSpPr>
+        <p:spPr>
+          <a:xfrm>
+            <a:off x="7708392" y="5385816"/>
+            <a:ext cx="3843223" cy="731520"/>
+          </a:xfrm>
+          <a:prstGeom prst="rect">
+            <a:avLst/>
+          </a:prstGeom>
+          <a:noFill/>
+        </p:spPr>
+        <p:txBody>
+          <a:bodyPr wrap="square" anchor="t" lIns="0" rIns="0" tIns="0" bIns="0">
+            <a:spAutoFit/>
+          </a:bodyPr>
+          <a:lstStyle/>
+          <a:p>
+            <a:pPr algn="l">
+              <a:lnSpc>
+                <a:spcPct val="116000"/>
+              </a:lnSpc>
+              <a:spcBef>
+                <a:spcPts val="0"/>
+              </a:spcBef>
+              <a:spcAft>
+                <a:spcPts val="600"/>
+              </a:spcAft>
+            </a:pPr>
+            <a:r>
+              <a:rPr sz="1250" b="0">
+                <a:solidFill>
+                  <a:srgbClr val="5A6B8C"/>
+                </a:solidFill>
+                <a:latin typeface="Microsoft JhengHei"/>
+                <a:ea typeface="Microsoft JhengHei"/>
+                <a:cs typeface="Microsoft JhengHei"/>
+              </a:rPr>
+              <a:t>頁尾即時顯示閘道 / 推論引擎 / digiRunner / Dify 健康狀態。</a:t>
+            </a:r>
+          </a:p>
+        </p:txBody>
+      </p:sp>
+      <p:sp>
+        <p:nvSpPr>
+          <p:cNvPr id="20" name="TextBox 19"/>
+          <p:cNvSpPr txBox="1"/>
+          <p:nvPr/>
+        </p:nvSpPr>
+        <p:spPr>
+          <a:xfrm>
+            <a:off x="822960" y="6455664"/>
+            <a:ext cx="8229600" cy="274320"/>
+          </a:xfrm>
+          <a:prstGeom prst="rect">
+            <a:avLst/>
+          </a:prstGeom>
+          <a:noFill/>
+        </p:spPr>
+        <p:txBody>
+          <a:bodyPr wrap="square" anchor="t" lIns="0" rIns="0" tIns="0" bIns="0">
+            <a:spAutoFit/>
+          </a:bodyPr>
+          <a:lstStyle/>
+          <a:p>
+            <a:pPr algn="l">
+              <a:lnSpc>
+                <a:spcPct val="112000"/>
+              </a:lnSpc>
+              <a:spcBef>
+                <a:spcPts val="0"/>
+              </a:spcBef>
+              <a:spcAft>
+                <a:spcPts val="600"/>
+              </a:spcAft>
+            </a:pPr>
+            <a:r>
+              <a:rPr sz="1000" b="0">
+                <a:solidFill>
+                  <a:srgbClr val="8A97B2"/>
+                </a:solidFill>
+                <a:latin typeface="Microsoft JhengHei"/>
+                <a:ea typeface="Microsoft JhengHei"/>
+                <a:cs typeface="Microsoft JhengHei"/>
+              </a:rPr>
+              <a:t>PatentMind AI　·　NCCU GDGoC × Computex 2026</a:t>
+            </a:r>
+          </a:p>
+        </p:txBody>
+      </p:sp>
+      <p:sp>
+        <p:nvSpPr>
+          <p:cNvPr id="21" name="TextBox 20"/>
+          <p:cNvSpPr txBox="1"/>
+          <p:nvPr/>
+        </p:nvSpPr>
+        <p:spPr>
+          <a:xfrm>
+            <a:off x="10637215" y="6455664"/>
+            <a:ext cx="731520" cy="274320"/>
+          </a:xfrm>
+          <a:prstGeom prst="rect">
+            <a:avLst/>
+          </a:prstGeom>
+          <a:noFill/>
+        </p:spPr>
+        <p:txBody>
+          <a:bodyPr wrap="square" anchor="t" lIns="0" rIns="0" tIns="0" bIns="0">
+            <a:spAutoFit/>
+          </a:bodyPr>
+          <a:lstStyle/>
+          <a:p>
+            <a:pPr algn="r">
+              <a:lnSpc>
+                <a:spcPct val="112000"/>
+              </a:lnSpc>
+              <a:spcBef>
+                <a:spcPts val="0"/>
+              </a:spcBef>
+              <a:spcAft>
+                <a:spcPts val="600"/>
+              </a:spcAft>
+            </a:pPr>
+            <a:r>
+              <a:rPr sz="1000" b="0">
+                <a:solidFill>
+                  <a:srgbClr val="8A97B2"/>
+                </a:solidFill>
+                <a:latin typeface="Microsoft JhengHei"/>
+                <a:ea typeface="Microsoft JhengHei"/>
+                <a:cs typeface="Microsoft JhengHei"/>
+              </a:rPr>
+              <a:t>15</a:t>
+            </a:r>
+          </a:p>
+        </p:txBody>
+      </p:sp>
+    </p:spTree>
+  </p:cSld>
+  <p:clrMapOvr>
+    <a:masterClrMapping/>
+  </p:clrMapOvr>
+</p:sld>
+</file>
+
+<file path=ppt/slides/slide17.xml><?xml version="1.0" encoding="utf-8"?>
+<p:sld xmlns:a="http://schemas.openxmlformats.org/drawingml/2006/main" xmlns:p="http://schemas.openxmlformats.org/presentationml/2006/main" xmlns:r="http://schemas.openxmlformats.org/officeDocument/2006/relationships">
+  <p:cSld>
+    <p:spTree>
+      <p:nvGrpSpPr>
+        <p:cNvPr id="1" name=""/>
+        <p:cNvGrpSpPr/>
+        <p:nvPr/>
+      </p:nvGrpSpPr>
+      <p:grpSpPr/>
+      <p:sp>
+        <p:nvSpPr>
+          <p:cNvPr id="2" name="Rectangle 1"/>
+          <p:cNvSpPr/>
+          <p:nvPr/>
+        </p:nvSpPr>
+        <p:spPr>
+          <a:xfrm>
+            <a:off x="0" y="0"/>
+            <a:ext cx="12191695" cy="6858000"/>
+          </a:xfrm>
+          <a:prstGeom prst="rect">
+            <a:avLst/>
+          </a:prstGeom>
+          <a:solidFill>
             <a:srgbClr val="1E3A8A"/>
           </a:solidFill>
           <a:ln>
@@ -9394,7 +11032,7 @@
                 <a:ea typeface="Microsoft JhengHei"/>
                 <a:cs typeface="Microsoft JhengHei"/>
               </a:rPr>
-              <a:t>架構與信任設計</a:t>
+              <a:t>流程 · 模組 · 資料流 · AI 任務</a:t>
             </a:r>
           </a:p>
         </p:txBody>
@@ -13664,7 +15302,7 @@
                 <a:ea typeface="Microsoft JhengHei"/>
                 <a:cs typeface="Microsoft JhengHei"/>
               </a:rPr>
-              <a:t>AI 起草,律師定稿</a:t>
+              <a:t>操作流程：人和系統怎麼分工</a:t>
             </a:r>
           </a:p>
         </p:txBody>
@@ -13704,745 +15342,40 @@
           </a:fontRef>
         </p:style>
       </p:cxnSp>
-      <p:sp>
-        <p:nvSpPr>
-          <p:cNvPr id="7" name="TextBox 6"/>
-          <p:cNvSpPr txBox="1"/>
-          <p:nvPr/>
-        </p:nvSpPr>
-        <p:spPr>
-          <a:xfrm>
-            <a:off x="8259775" y="182880"/>
-            <a:ext cx="3840480" cy="2377440"/>
-          </a:xfrm>
-          <a:prstGeom prst="rect">
-            <a:avLst/>
-          </a:prstGeom>
-          <a:noFill/>
-        </p:spPr>
-        <p:txBody>
-          <a:bodyPr wrap="square" anchor="t" lIns="0" rIns="0" tIns="0" bIns="0">
-            <a:spAutoFit/>
-          </a:bodyPr>
-          <a:lstStyle/>
-          <a:p>
-            <a:pPr algn="r">
-              <a:lnSpc>
-                <a:spcPct val="112000"/>
-              </a:lnSpc>
-              <a:spcBef>
-                <a:spcPts val="0"/>
-              </a:spcBef>
-              <a:spcAft>
-                <a:spcPts val="600"/>
-              </a:spcAft>
-            </a:pPr>
-            <a:r>
-              <a:rPr sz="15000" b="1">
-                <a:solidFill>
-                  <a:srgbClr val="EEF1F8"/>
-                </a:solidFill>
-                <a:latin typeface="Microsoft JhengHei"/>
-                <a:ea typeface="Microsoft JhengHei"/>
-                <a:cs typeface="Microsoft JhengHei"/>
-              </a:rPr>
-              <a:t>03</a:t>
-            </a:r>
-          </a:p>
-        </p:txBody>
-      </p:sp>
-      <p:sp>
-        <p:nvSpPr>
-          <p:cNvPr id="8" name="Rectangle 7"/>
-          <p:cNvSpPr/>
-          <p:nvPr/>
-        </p:nvSpPr>
-        <p:spPr>
-          <a:xfrm>
-            <a:off x="914400" y="2194560"/>
-            <a:ext cx="54864" cy="1298448"/>
-          </a:xfrm>
-          <a:prstGeom prst="rect">
-            <a:avLst/>
-          </a:prstGeom>
-          <a:solidFill>
-            <a:srgbClr val="F5B020"/>
-          </a:solidFill>
-          <a:ln>
-            <a:noFill/>
-          </a:ln>
-          <a:effectLst/>
-        </p:spPr>
-        <p:style>
-          <a:lnRef idx="1">
-            <a:schemeClr val="accent1"/>
-          </a:lnRef>
-          <a:fillRef idx="3">
-            <a:schemeClr val="accent1"/>
-          </a:fillRef>
-          <a:effectRef idx="2">
-            <a:schemeClr val="accent1"/>
-          </a:effectRef>
-          <a:fontRef idx="minor">
-            <a:schemeClr val="lt1"/>
-          </a:fontRef>
-        </p:style>
-        <p:txBody>
-          <a:bodyPr rtlCol="0" anchor="ctr"/>
-          <a:lstStyle/>
-          <a:p>
-            <a:pPr algn="ctr"/>
-          </a:p>
-        </p:txBody>
-      </p:sp>
-      <p:sp>
-        <p:nvSpPr>
-          <p:cNvPr id="9" name="TextBox 8"/>
-          <p:cNvSpPr txBox="1"/>
-          <p:nvPr/>
-        </p:nvSpPr>
-        <p:spPr>
-          <a:xfrm>
-            <a:off x="1170432" y="2148840"/>
-            <a:ext cx="4892040" cy="457200"/>
-          </a:xfrm>
-          <a:prstGeom prst="rect">
-            <a:avLst/>
-          </a:prstGeom>
-          <a:noFill/>
-        </p:spPr>
-        <p:txBody>
-          <a:bodyPr wrap="square" anchor="t" lIns="0" rIns="0" tIns="0" bIns="0">
-            <a:spAutoFit/>
-          </a:bodyPr>
-          <a:lstStyle/>
-          <a:p>
-            <a:pPr algn="l">
-              <a:lnSpc>
-                <a:spcPct val="112000"/>
-              </a:lnSpc>
-              <a:spcBef>
-                <a:spcPts val="0"/>
-              </a:spcBef>
-              <a:spcAft>
-                <a:spcPts val="600"/>
-              </a:spcAft>
-            </a:pPr>
-            <a:r>
-              <a:rPr sz="1900" b="1">
-                <a:solidFill>
-                  <a:srgbClr val="F5B020"/>
-                </a:solidFill>
-                <a:latin typeface="Microsoft JhengHei"/>
-                <a:ea typeface="Microsoft JhengHei"/>
-                <a:cs typeface="Microsoft JhengHei"/>
-              </a:rPr>
-              <a:t>1　</a:t>
-            </a:r>
-            <a:r>
-              <a:rPr sz="1900" b="1">
-                <a:solidFill>
-                  <a:srgbClr val="1E3A8A"/>
-                </a:solidFill>
-                <a:latin typeface="Microsoft JhengHei"/>
-                <a:ea typeface="Microsoft JhengHei"/>
-                <a:cs typeface="Microsoft JhengHei"/>
-              </a:rPr>
-              <a:t>自動分類核駁理由</a:t>
-            </a:r>
-          </a:p>
-        </p:txBody>
-      </p:sp>
-      <p:sp>
-        <p:nvSpPr>
-          <p:cNvPr id="10" name="TextBox 9"/>
-          <p:cNvSpPr txBox="1"/>
-          <p:nvPr/>
-        </p:nvSpPr>
-        <p:spPr>
-          <a:xfrm>
-            <a:off x="1170432" y="2651760"/>
-            <a:ext cx="4892040" cy="1005840"/>
-          </a:xfrm>
-          <a:prstGeom prst="rect">
-            <a:avLst/>
-          </a:prstGeom>
-          <a:noFill/>
-        </p:spPr>
-        <p:txBody>
-          <a:bodyPr wrap="square" anchor="t" lIns="0" rIns="0" tIns="0" bIns="0">
-            <a:spAutoFit/>
-          </a:bodyPr>
-          <a:lstStyle/>
-          <a:p>
-            <a:pPr algn="l">
-              <a:lnSpc>
-                <a:spcPct val="125000"/>
-              </a:lnSpc>
-              <a:spcBef>
-                <a:spcPts val="0"/>
-              </a:spcBef>
-              <a:spcAft>
-                <a:spcPts val="600"/>
-              </a:spcAft>
-            </a:pPr>
-            <a:r>
-              <a:rPr sz="1350" b="0">
-                <a:solidFill>
-                  <a:srgbClr val="5A6B8C"/>
-                </a:solidFill>
-                <a:latin typeface="Microsoft JhengHei"/>
-                <a:ea typeface="Microsoft JhengHei"/>
-                <a:cs typeface="Microsoft JhengHei"/>
-              </a:rPr>
-              <a:t>中文 / 英文 OA 都能讀;新穎性、進步性、明確性、缺先行詞等逐項拆解,標示受影響的請求項。</a:t>
-            </a:r>
-          </a:p>
-        </p:txBody>
-      </p:sp>
-      <p:sp>
-        <p:nvSpPr>
-          <p:cNvPr id="11" name="Rectangle 10"/>
-          <p:cNvSpPr/>
-          <p:nvPr/>
-        </p:nvSpPr>
-        <p:spPr>
-          <a:xfrm>
-            <a:off x="6355080" y="2194560"/>
-            <a:ext cx="54864" cy="1298448"/>
-          </a:xfrm>
-          <a:prstGeom prst="rect">
-            <a:avLst/>
-          </a:prstGeom>
-          <a:solidFill>
-            <a:srgbClr val="F5B020"/>
-          </a:solidFill>
-          <a:ln>
-            <a:noFill/>
-          </a:ln>
-          <a:effectLst/>
-        </p:spPr>
-        <p:style>
-          <a:lnRef idx="1">
-            <a:schemeClr val="accent1"/>
-          </a:lnRef>
-          <a:fillRef idx="3">
-            <a:schemeClr val="accent1"/>
-          </a:fillRef>
-          <a:effectRef idx="2">
-            <a:schemeClr val="accent1"/>
-          </a:effectRef>
-          <a:fontRef idx="minor">
-            <a:schemeClr val="lt1"/>
-          </a:fontRef>
-        </p:style>
-        <p:txBody>
-          <a:bodyPr rtlCol="0" anchor="ctr"/>
-          <a:lstStyle/>
-          <a:p>
-            <a:pPr algn="ctr"/>
-          </a:p>
-        </p:txBody>
-      </p:sp>
-      <p:sp>
-        <p:nvSpPr>
-          <p:cNvPr id="12" name="TextBox 11"/>
-          <p:cNvSpPr txBox="1"/>
-          <p:nvPr/>
-        </p:nvSpPr>
-        <p:spPr>
-          <a:xfrm>
-            <a:off x="6611112" y="2148840"/>
-            <a:ext cx="4892040" cy="457200"/>
-          </a:xfrm>
-          <a:prstGeom prst="rect">
-            <a:avLst/>
-          </a:prstGeom>
-          <a:noFill/>
-        </p:spPr>
-        <p:txBody>
-          <a:bodyPr wrap="square" anchor="t" lIns="0" rIns="0" tIns="0" bIns="0">
-            <a:spAutoFit/>
-          </a:bodyPr>
-          <a:lstStyle/>
-          <a:p>
-            <a:pPr algn="l">
-              <a:lnSpc>
-                <a:spcPct val="112000"/>
-              </a:lnSpc>
-              <a:spcBef>
-                <a:spcPts val="0"/>
-              </a:spcBef>
-              <a:spcAft>
-                <a:spcPts val="600"/>
-              </a:spcAft>
-            </a:pPr>
-            <a:r>
-              <a:rPr sz="1900" b="1">
-                <a:solidFill>
-                  <a:srgbClr val="F5B020"/>
-                </a:solidFill>
-                <a:latin typeface="Microsoft JhengHei"/>
-                <a:ea typeface="Microsoft JhengHei"/>
-                <a:cs typeface="Microsoft JhengHei"/>
-              </a:rPr>
-              <a:t>2　</a:t>
-            </a:r>
-            <a:r>
-              <a:rPr sz="1900" b="1">
-                <a:solidFill>
-                  <a:srgbClr val="1E3A8A"/>
-                </a:solidFill>
-                <a:latin typeface="Microsoft JhengHei"/>
-                <a:ea typeface="Microsoft JhengHei"/>
-                <a:cs typeface="Microsoft JhengHei"/>
-              </a:rPr>
-              <a:t>證據先行的草稿</a:t>
-            </a:r>
-          </a:p>
-        </p:txBody>
-      </p:sp>
-      <p:sp>
-        <p:nvSpPr>
-          <p:cNvPr id="13" name="TextBox 12"/>
-          <p:cNvSpPr txBox="1"/>
-          <p:nvPr/>
-        </p:nvSpPr>
-        <p:spPr>
-          <a:xfrm>
-            <a:off x="6611112" y="2651760"/>
-            <a:ext cx="4892040" cy="1005840"/>
-          </a:xfrm>
-          <a:prstGeom prst="rect">
-            <a:avLst/>
-          </a:prstGeom>
-          <a:noFill/>
-        </p:spPr>
-        <p:txBody>
-          <a:bodyPr wrap="square" anchor="t" lIns="0" rIns="0" tIns="0" bIns="0">
-            <a:spAutoFit/>
-          </a:bodyPr>
-          <a:lstStyle/>
-          <a:p>
-            <a:pPr algn="l">
-              <a:lnSpc>
-                <a:spcPct val="125000"/>
-              </a:lnSpc>
-              <a:spcBef>
-                <a:spcPts val="0"/>
-              </a:spcBef>
-              <a:spcAft>
-                <a:spcPts val="600"/>
-              </a:spcAft>
-            </a:pPr>
-            <a:r>
-              <a:rPr sz="1350" b="0">
-                <a:solidFill>
-                  <a:srgbClr val="5A6B8C"/>
-                </a:solidFill>
-                <a:latin typeface="Microsoft JhengHei"/>
-                <a:ea typeface="Microsoft JhengHei"/>
-                <a:cs typeface="Microsoft JhengHei"/>
-              </a:rPr>
-              <a:t>草稿裡的每個引用,都必須來自系統實際檢索到的文件;引用旁直接附上原文段落。</a:t>
-            </a:r>
-          </a:p>
-        </p:txBody>
-      </p:sp>
-      <p:sp>
-        <p:nvSpPr>
-          <p:cNvPr id="14" name="Rectangle 13"/>
-          <p:cNvSpPr/>
-          <p:nvPr/>
-        </p:nvSpPr>
-        <p:spPr>
-          <a:xfrm>
-            <a:off x="914400" y="3822191"/>
-            <a:ext cx="54864" cy="1298448"/>
-          </a:xfrm>
-          <a:prstGeom prst="rect">
-            <a:avLst/>
-          </a:prstGeom>
-          <a:solidFill>
-            <a:srgbClr val="F5B020"/>
-          </a:solidFill>
-          <a:ln>
-            <a:noFill/>
-          </a:ln>
-          <a:effectLst/>
-        </p:spPr>
-        <p:style>
-          <a:lnRef idx="1">
-            <a:schemeClr val="accent1"/>
-          </a:lnRef>
-          <a:fillRef idx="3">
-            <a:schemeClr val="accent1"/>
-          </a:fillRef>
-          <a:effectRef idx="2">
-            <a:schemeClr val="accent1"/>
-          </a:effectRef>
-          <a:fontRef idx="minor">
-            <a:schemeClr val="lt1"/>
-          </a:fontRef>
-        </p:style>
-        <p:txBody>
-          <a:bodyPr rtlCol="0" anchor="ctr"/>
-          <a:lstStyle/>
-          <a:p>
-            <a:pPr algn="ctr"/>
-          </a:p>
-        </p:txBody>
-      </p:sp>
-      <p:sp>
-        <p:nvSpPr>
-          <p:cNvPr id="15" name="TextBox 14"/>
-          <p:cNvSpPr txBox="1"/>
-          <p:nvPr/>
-        </p:nvSpPr>
-        <p:spPr>
-          <a:xfrm>
-            <a:off x="1170432" y="3776472"/>
-            <a:ext cx="4892040" cy="457200"/>
-          </a:xfrm>
-          <a:prstGeom prst="rect">
-            <a:avLst/>
-          </a:prstGeom>
-          <a:noFill/>
-        </p:spPr>
-        <p:txBody>
-          <a:bodyPr wrap="square" anchor="t" lIns="0" rIns="0" tIns="0" bIns="0">
-            <a:spAutoFit/>
-          </a:bodyPr>
-          <a:lstStyle/>
-          <a:p>
-            <a:pPr algn="l">
-              <a:lnSpc>
-                <a:spcPct val="112000"/>
-              </a:lnSpc>
-              <a:spcBef>
-                <a:spcPts val="0"/>
-              </a:spcBef>
-              <a:spcAft>
-                <a:spcPts val="600"/>
-              </a:spcAft>
-            </a:pPr>
-            <a:r>
-              <a:rPr sz="1900" b="1">
-                <a:solidFill>
-                  <a:srgbClr val="F5B020"/>
-                </a:solidFill>
-                <a:latin typeface="Microsoft JhengHei"/>
-                <a:ea typeface="Microsoft JhengHei"/>
-                <a:cs typeface="Microsoft JhengHei"/>
-              </a:rPr>
-              <a:t>3　</a:t>
-            </a:r>
-            <a:r>
-              <a:rPr sz="1900" b="1">
-                <a:solidFill>
-                  <a:srgbClr val="1E3A8A"/>
-                </a:solidFill>
-                <a:latin typeface="Microsoft JhengHei"/>
-                <a:ea typeface="Microsoft JhengHei"/>
-                <a:cs typeface="Microsoft JhengHei"/>
-              </a:rPr>
-              <a:t>期限自動試算</a:t>
-            </a:r>
-          </a:p>
-        </p:txBody>
-      </p:sp>
-      <p:sp>
-        <p:nvSpPr>
-          <p:cNvPr id="16" name="TextBox 15"/>
-          <p:cNvSpPr txBox="1"/>
-          <p:nvPr/>
-        </p:nvSpPr>
-        <p:spPr>
-          <a:xfrm>
-            <a:off x="1170432" y="4279392"/>
-            <a:ext cx="4892040" cy="1005840"/>
-          </a:xfrm>
-          <a:prstGeom prst="rect">
-            <a:avLst/>
-          </a:prstGeom>
-          <a:noFill/>
-        </p:spPr>
-        <p:txBody>
-          <a:bodyPr wrap="square" anchor="t" lIns="0" rIns="0" tIns="0" bIns="0">
-            <a:spAutoFit/>
-          </a:bodyPr>
-          <a:lstStyle/>
-          <a:p>
-            <a:pPr algn="l">
-              <a:lnSpc>
-                <a:spcPct val="125000"/>
-              </a:lnSpc>
-              <a:spcBef>
-                <a:spcPts val="0"/>
-              </a:spcBef>
-              <a:spcAft>
-                <a:spcPts val="600"/>
-              </a:spcAft>
-            </a:pPr>
-            <a:r>
-              <a:rPr sz="1350" b="0">
-                <a:solidFill>
-                  <a:srgbClr val="5A6B8C"/>
-                </a:solidFill>
-                <a:latin typeface="Microsoft JhengHei"/>
-                <a:ea typeface="Microsoft JhengHei"/>
-                <a:cs typeface="Microsoft JhengHei"/>
-              </a:rPr>
-              <a:t>從公文日期起算法定期限,假日自動順延,並給內部建議完成日。</a:t>
-            </a:r>
-          </a:p>
-        </p:txBody>
-      </p:sp>
-      <p:sp>
-        <p:nvSpPr>
-          <p:cNvPr id="17" name="Rectangle 16"/>
-          <p:cNvSpPr/>
-          <p:nvPr/>
-        </p:nvSpPr>
-        <p:spPr>
-          <a:xfrm>
-            <a:off x="6355080" y="3822191"/>
-            <a:ext cx="54864" cy="1298448"/>
-          </a:xfrm>
-          <a:prstGeom prst="rect">
-            <a:avLst/>
-          </a:prstGeom>
-          <a:solidFill>
-            <a:srgbClr val="F5B020"/>
-          </a:solidFill>
-          <a:ln>
-            <a:noFill/>
-          </a:ln>
-          <a:effectLst/>
-        </p:spPr>
-        <p:style>
-          <a:lnRef idx="1">
-            <a:schemeClr val="accent1"/>
-          </a:lnRef>
-          <a:fillRef idx="3">
-            <a:schemeClr val="accent1"/>
-          </a:fillRef>
-          <a:effectRef idx="2">
-            <a:schemeClr val="accent1"/>
-          </a:effectRef>
-          <a:fontRef idx="minor">
-            <a:schemeClr val="lt1"/>
-          </a:fontRef>
-        </p:style>
-        <p:txBody>
-          <a:bodyPr rtlCol="0" anchor="ctr"/>
-          <a:lstStyle/>
-          <a:p>
-            <a:pPr algn="ctr"/>
-          </a:p>
-        </p:txBody>
-      </p:sp>
-      <p:sp>
-        <p:nvSpPr>
-          <p:cNvPr id="18" name="TextBox 17"/>
-          <p:cNvSpPr txBox="1"/>
-          <p:nvPr/>
-        </p:nvSpPr>
-        <p:spPr>
-          <a:xfrm>
-            <a:off x="6611112" y="3776472"/>
-            <a:ext cx="4892040" cy="457200"/>
-          </a:xfrm>
-          <a:prstGeom prst="rect">
-            <a:avLst/>
-          </a:prstGeom>
-          <a:noFill/>
-        </p:spPr>
-        <p:txBody>
-          <a:bodyPr wrap="square" anchor="t" lIns="0" rIns="0" tIns="0" bIns="0">
-            <a:spAutoFit/>
-          </a:bodyPr>
-          <a:lstStyle/>
-          <a:p>
-            <a:pPr algn="l">
-              <a:lnSpc>
-                <a:spcPct val="112000"/>
-              </a:lnSpc>
-              <a:spcBef>
-                <a:spcPts val="0"/>
-              </a:spcBef>
-              <a:spcAft>
-                <a:spcPts val="600"/>
-              </a:spcAft>
-            </a:pPr>
-            <a:r>
-              <a:rPr sz="1900" b="1">
-                <a:solidFill>
-                  <a:srgbClr val="F5B020"/>
-                </a:solidFill>
-                <a:latin typeface="Microsoft JhengHei"/>
-                <a:ea typeface="Microsoft JhengHei"/>
-                <a:cs typeface="Microsoft JhengHei"/>
-              </a:rPr>
-              <a:t>4　</a:t>
-            </a:r>
-            <a:r>
-              <a:rPr sz="1900" b="1">
-                <a:solidFill>
-                  <a:srgbClr val="1E3A8A"/>
-                </a:solidFill>
-                <a:latin typeface="Microsoft JhengHei"/>
-                <a:ea typeface="Microsoft JhengHei"/>
-                <a:cs typeface="Microsoft JhengHei"/>
-              </a:rPr>
-              <a:t>簽核才能送件</a:t>
-            </a:r>
-          </a:p>
-        </p:txBody>
-      </p:sp>
-      <p:sp>
-        <p:nvSpPr>
-          <p:cNvPr id="19" name="TextBox 18"/>
-          <p:cNvSpPr txBox="1"/>
-          <p:nvPr/>
-        </p:nvSpPr>
-        <p:spPr>
-          <a:xfrm>
-            <a:off x="6611112" y="4279392"/>
-            <a:ext cx="4892040" cy="1005840"/>
-          </a:xfrm>
-          <a:prstGeom prst="rect">
-            <a:avLst/>
-          </a:prstGeom>
-          <a:noFill/>
-        </p:spPr>
-        <p:txBody>
-          <a:bodyPr wrap="square" anchor="t" lIns="0" rIns="0" tIns="0" bIns="0">
-            <a:spAutoFit/>
-          </a:bodyPr>
-          <a:lstStyle/>
-          <a:p>
-            <a:pPr algn="l">
-              <a:lnSpc>
-                <a:spcPct val="125000"/>
-              </a:lnSpc>
-              <a:spcBef>
-                <a:spcPts val="0"/>
-              </a:spcBef>
-              <a:spcAft>
-                <a:spcPts val="600"/>
-              </a:spcAft>
-            </a:pPr>
-            <a:r>
-              <a:rPr sz="1350" b="0">
-                <a:solidFill>
-                  <a:srgbClr val="5A6B8C"/>
-                </a:solidFill>
-                <a:latin typeface="Microsoft JhengHei"/>
-                <a:ea typeface="Microsoft JhengHei"/>
-                <a:cs typeface="Microsoft JhengHei"/>
-              </a:rPr>
-              <a:t>律師逐句確認 AI / 人工段落;未完成簽核,匯出按鈕直接被系統擋下。</a:t>
-            </a:r>
-          </a:p>
-        </p:txBody>
-      </p:sp>
-      <p:cxnSp>
-        <p:nvCxnSpPr>
-          <p:cNvPr id="20" name="Connector 19"/>
-          <p:cNvCxnSpPr/>
-          <p:nvPr/>
-        </p:nvCxnSpPr>
-        <p:spPr>
-          <a:xfrm>
-            <a:off x="822960" y="5532120"/>
-            <a:ext cx="10561320" cy="0"/>
-          </a:xfrm>
-          <a:prstGeom prst="bentConnector3">
-            <a:avLst/>
-          </a:prstGeom>
-          <a:ln w="15240">
-            <a:solidFill>
-              <a:srgbClr val="D7DDEA"/>
-            </a:solidFill>
-          </a:ln>
-        </p:spPr>
-        <p:style>
-          <a:lnRef idx="2">
-            <a:schemeClr val="accent1"/>
-          </a:lnRef>
-          <a:fillRef idx="0">
-            <a:schemeClr val="accent1"/>
-          </a:fillRef>
-          <a:effectRef idx="1">
-            <a:schemeClr val="accent1"/>
-          </a:effectRef>
-          <a:fontRef idx="minor">
-            <a:schemeClr val="tx1"/>
-          </a:fontRef>
-        </p:style>
-      </p:cxnSp>
-      <p:sp>
-        <p:nvSpPr>
-          <p:cNvPr id="21" name="TextBox 20"/>
-          <p:cNvSpPr txBox="1"/>
-          <p:nvPr/>
-        </p:nvSpPr>
-        <p:spPr>
-          <a:xfrm>
-            <a:off x="822960" y="5669280"/>
-            <a:ext cx="10515600" cy="548640"/>
-          </a:xfrm>
-          <a:prstGeom prst="rect">
-            <a:avLst/>
-          </a:prstGeom>
-          <a:noFill/>
-        </p:spPr>
-        <p:txBody>
-          <a:bodyPr wrap="square" anchor="t" lIns="0" rIns="0" tIns="0" bIns="0">
-            <a:spAutoFit/>
-          </a:bodyPr>
-          <a:lstStyle/>
-          <a:p>
-            <a:pPr algn="l">
-              <a:lnSpc>
-                <a:spcPct val="125000"/>
-              </a:lnSpc>
-              <a:spcBef>
-                <a:spcPts val="0"/>
-              </a:spcBef>
-              <a:spcAft>
-                <a:spcPts val="600"/>
-              </a:spcAft>
-            </a:pPr>
-            <a:r>
-              <a:rPr sz="1500" b="1">
-                <a:solidFill>
-                  <a:srgbClr val="F5B020"/>
-                </a:solidFill>
-                <a:latin typeface="Microsoft JhengHei"/>
-                <a:ea typeface="Microsoft JhengHei"/>
-                <a:cs typeface="Microsoft JhengHei"/>
-              </a:rPr>
-              <a:t>核心原則　</a:t>
-            </a:r>
-            <a:r>
-              <a:rPr sz="1500" b="0">
-                <a:solidFill>
-                  <a:srgbClr val="1A2236"/>
-                </a:solidFill>
-                <a:latin typeface="Microsoft JhengHei"/>
-                <a:ea typeface="Microsoft JhengHei"/>
-                <a:cs typeface="Microsoft JhengHei"/>
-              </a:rPr>
-              <a:t>AI 是放大器,不是替代 — 每一份送出去的文件,都有具名律師逐句負責。</a:t>
-            </a:r>
-          </a:p>
-        </p:txBody>
-      </p:sp>
-      <p:sp>
-        <p:nvSpPr>
-          <p:cNvPr id="22" name="TextBox 21"/>
+      <p:pic>
+        <p:nvPicPr>
+          <p:cNvPr id="7" name="Picture 6" descr="flow_user.png"/>
+          <p:cNvPicPr>
+            <a:picLocks noChangeAspect="1"/>
+          </p:cNvPicPr>
+          <p:nvPr/>
+        </p:nvPicPr>
+        <p:blipFill>
+          <a:blip r:embed="rId2"/>
+          <a:stretch>
+            <a:fillRect/>
+          </a:stretch>
+        </p:blipFill>
+        <p:spPr>
+          <a:xfrm>
+            <a:off x="1531615" y="1938528"/>
+            <a:ext cx="9128463" cy="4370832"/>
+          </a:xfrm>
+          <a:prstGeom prst="rect">
+            <a:avLst/>
+          </a:prstGeom>
+          <a:effectLst>
+            <a:outerShdw blurRad="90000" dist="38100" dir="5400000" rotWithShape="0">
+              <a:srgbClr val="1A2236">
+                <a:alpha val="26000"/>
+              </a:srgbClr>
+            </a:outerShdw>
+          </a:effectLst>
+        </p:spPr>
+      </p:pic>
+      <p:sp>
+        <p:nvSpPr>
+          <p:cNvPr id="8" name="TextBox 7"/>
           <p:cNvSpPr txBox="1"/>
           <p:nvPr/>
         </p:nvSpPr>
@@ -14489,7 +15422,7 @@
       </p:sp>
       <p:sp>
         <p:nvSpPr>
-          <p:cNvPr id="23" name="TextBox 22"/>
+          <p:cNvPr id="9" name="TextBox 8"/>
           <p:cNvSpPr txBox="1"/>
           <p:nvPr/>
         </p:nvSpPr>
@@ -14740,7 +15673,7 @@
                 <a:ea typeface="Microsoft JhengHei"/>
                 <a:cs typeface="Microsoft JhengHei"/>
               </a:rPr>
-              <a:t>系統架構：一條安全管線</a:t>
+              <a:t>功能模組架構：模組分工與互動</a:t>
             </a:r>
           </a:p>
         </p:txBody>
@@ -14796,8 +15729,8 @@
         </p:blipFill>
         <p:spPr>
           <a:xfrm>
-            <a:off x="566928" y="2103120"/>
-            <a:ext cx="11064240" cy="5532120"/>
+            <a:off x="472287" y="1938528"/>
+            <a:ext cx="11247120" cy="3795903"/>
           </a:xfrm>
           <a:prstGeom prst="rect">
             <a:avLst/>
@@ -14819,7 +15752,7 @@
         </p:nvSpPr>
         <p:spPr>
           <a:xfrm>
-            <a:off x="822960" y="7744967"/>
+            <a:off x="822960" y="5899023"/>
             <a:ext cx="10607040" cy="457200"/>
           </a:xfrm>
           <a:prstGeom prst="rect">
@@ -15169,7 +16102,7 @@
                 <a:ea typeface="Microsoft JhengHei"/>
                 <a:cs typeface="Microsoft JhengHei"/>
               </a:rPr>
-              <a:t>四個「預設開啟、不可關閉」的信任設計</a:t>
+              <a:t>資料流：從來源到產出</a:t>
             </a:r>
           </a:p>
         </p:txBody>
@@ -15209,608 +16142,40 @@
           </a:fontRef>
         </p:style>
       </p:cxnSp>
-      <p:sp>
-        <p:nvSpPr>
-          <p:cNvPr id="7" name="TextBox 6"/>
-          <p:cNvSpPr txBox="1"/>
-          <p:nvPr/>
-        </p:nvSpPr>
-        <p:spPr>
-          <a:xfrm>
-            <a:off x="8259775" y="182880"/>
-            <a:ext cx="3840480" cy="2377440"/>
-          </a:xfrm>
-          <a:prstGeom prst="rect">
-            <a:avLst/>
-          </a:prstGeom>
-          <a:noFill/>
-        </p:spPr>
-        <p:txBody>
-          <a:bodyPr wrap="square" anchor="t" lIns="0" rIns="0" tIns="0" bIns="0">
-            <a:spAutoFit/>
-          </a:bodyPr>
-          <a:lstStyle/>
-          <a:p>
-            <a:pPr algn="r">
-              <a:lnSpc>
-                <a:spcPct val="112000"/>
-              </a:lnSpc>
-              <a:spcBef>
-                <a:spcPts val="0"/>
-              </a:spcBef>
-              <a:spcAft>
-                <a:spcPts val="600"/>
-              </a:spcAft>
-            </a:pPr>
-            <a:r>
-              <a:rPr sz="15000" b="1">
-                <a:solidFill>
-                  <a:srgbClr val="EEF1F8"/>
-                </a:solidFill>
-                <a:latin typeface="Microsoft JhengHei"/>
-                <a:ea typeface="Microsoft JhengHei"/>
-                <a:cs typeface="Microsoft JhengHei"/>
-              </a:rPr>
-              <a:t>03</a:t>
-            </a:r>
-          </a:p>
-        </p:txBody>
-      </p:sp>
-      <p:sp>
-        <p:nvSpPr>
-          <p:cNvPr id="8" name="Rectangle 7"/>
-          <p:cNvSpPr/>
-          <p:nvPr/>
-        </p:nvSpPr>
-        <p:spPr>
-          <a:xfrm>
-            <a:off x="914400" y="2194560"/>
-            <a:ext cx="54864" cy="1463040"/>
-          </a:xfrm>
-          <a:prstGeom prst="rect">
-            <a:avLst/>
-          </a:prstGeom>
-          <a:solidFill>
-            <a:srgbClr val="1E3A8A"/>
-          </a:solidFill>
-          <a:ln>
-            <a:noFill/>
-          </a:ln>
-          <a:effectLst/>
-        </p:spPr>
-        <p:style>
-          <a:lnRef idx="1">
-            <a:schemeClr val="accent1"/>
-          </a:lnRef>
-          <a:fillRef idx="3">
-            <a:schemeClr val="accent1"/>
-          </a:fillRef>
-          <a:effectRef idx="2">
-            <a:schemeClr val="accent1"/>
-          </a:effectRef>
-          <a:fontRef idx="minor">
-            <a:schemeClr val="lt1"/>
-          </a:fontRef>
-        </p:style>
-        <p:txBody>
-          <a:bodyPr rtlCol="0" anchor="ctr"/>
-          <a:lstStyle/>
-          <a:p>
-            <a:pPr algn="ctr"/>
-          </a:p>
-        </p:txBody>
-      </p:sp>
-      <p:sp>
-        <p:nvSpPr>
-          <p:cNvPr id="9" name="TextBox 8"/>
-          <p:cNvSpPr txBox="1"/>
-          <p:nvPr/>
-        </p:nvSpPr>
-        <p:spPr>
-          <a:xfrm>
-            <a:off x="1170432" y="2148840"/>
-            <a:ext cx="4892040" cy="457200"/>
-          </a:xfrm>
-          <a:prstGeom prst="rect">
-            <a:avLst/>
-          </a:prstGeom>
-          <a:noFill/>
-        </p:spPr>
-        <p:txBody>
-          <a:bodyPr wrap="square" anchor="t" lIns="0" rIns="0" tIns="0" bIns="0">
-            <a:spAutoFit/>
-          </a:bodyPr>
-          <a:lstStyle/>
-          <a:p>
-            <a:pPr algn="l">
-              <a:lnSpc>
-                <a:spcPct val="112000"/>
-              </a:lnSpc>
-              <a:spcBef>
-                <a:spcPts val="0"/>
-              </a:spcBef>
-              <a:spcAft>
-                <a:spcPts val="600"/>
-              </a:spcAft>
-            </a:pPr>
-            <a:r>
-              <a:rPr sz="1850" b="1">
-                <a:solidFill>
-                  <a:srgbClr val="1E3A8A"/>
-                </a:solidFill>
-                <a:latin typeface="Microsoft JhengHei"/>
-                <a:ea typeface="Microsoft JhengHei"/>
-                <a:cs typeface="Microsoft JhengHei"/>
-              </a:rPr>
-              <a:t>可逆資料遮罩</a:t>
-            </a:r>
-          </a:p>
-        </p:txBody>
-      </p:sp>
-      <p:sp>
-        <p:nvSpPr>
-          <p:cNvPr id="10" name="TextBox 9"/>
-          <p:cNvSpPr txBox="1"/>
-          <p:nvPr/>
-        </p:nvSpPr>
-        <p:spPr>
-          <a:xfrm>
-            <a:off x="1170432" y="2624328"/>
-            <a:ext cx="4892040" cy="1143000"/>
-          </a:xfrm>
-          <a:prstGeom prst="rect">
-            <a:avLst/>
-          </a:prstGeom>
-          <a:noFill/>
-        </p:spPr>
-        <p:txBody>
-          <a:bodyPr wrap="square" anchor="t" lIns="0" rIns="0" tIns="0" bIns="0">
-            <a:spAutoFit/>
-          </a:bodyPr>
-          <a:lstStyle/>
-          <a:p>
-            <a:pPr algn="l">
-              <a:lnSpc>
-                <a:spcPct val="125000"/>
-              </a:lnSpc>
-              <a:spcBef>
-                <a:spcPts val="0"/>
-              </a:spcBef>
-              <a:spcAft>
-                <a:spcPts val="600"/>
-              </a:spcAft>
-            </a:pPr>
-            <a:r>
-              <a:rPr sz="1350" b="0">
-                <a:solidFill>
-                  <a:srgbClr val="5A6B8C"/>
-                </a:solidFill>
-                <a:latin typeface="Microsoft JhengHei"/>
-                <a:ea typeface="Microsoft JhengHei"/>
-                <a:cs typeface="Microsoft JhengHei"/>
-              </a:rPr>
-              <a:t>送往模型前,當事人、案號、聯絡方式先替換成代碼;對照表只存在事務所機器,模型拿到的永遠是代碼。</a:t>
-            </a:r>
-          </a:p>
-        </p:txBody>
-      </p:sp>
-      <p:sp>
-        <p:nvSpPr>
-          <p:cNvPr id="11" name="Rectangle 10"/>
-          <p:cNvSpPr/>
-          <p:nvPr/>
-        </p:nvSpPr>
-        <p:spPr>
-          <a:xfrm>
-            <a:off x="6355080" y="2194560"/>
-            <a:ext cx="54864" cy="1463040"/>
-          </a:xfrm>
-          <a:prstGeom prst="rect">
-            <a:avLst/>
-          </a:prstGeom>
-          <a:solidFill>
-            <a:srgbClr val="1E3A8A"/>
-          </a:solidFill>
-          <a:ln>
-            <a:noFill/>
-          </a:ln>
-          <a:effectLst/>
-        </p:spPr>
-        <p:style>
-          <a:lnRef idx="1">
-            <a:schemeClr val="accent1"/>
-          </a:lnRef>
-          <a:fillRef idx="3">
-            <a:schemeClr val="accent1"/>
-          </a:fillRef>
-          <a:effectRef idx="2">
-            <a:schemeClr val="accent1"/>
-          </a:effectRef>
-          <a:fontRef idx="minor">
-            <a:schemeClr val="lt1"/>
-          </a:fontRef>
-        </p:style>
-        <p:txBody>
-          <a:bodyPr rtlCol="0" anchor="ctr"/>
-          <a:lstStyle/>
-          <a:p>
-            <a:pPr algn="ctr"/>
-          </a:p>
-        </p:txBody>
-      </p:sp>
-      <p:sp>
-        <p:nvSpPr>
-          <p:cNvPr id="12" name="TextBox 11"/>
-          <p:cNvSpPr txBox="1"/>
-          <p:nvPr/>
-        </p:nvSpPr>
-        <p:spPr>
-          <a:xfrm>
-            <a:off x="6611112" y="2148840"/>
-            <a:ext cx="4892040" cy="457200"/>
-          </a:xfrm>
-          <a:prstGeom prst="rect">
-            <a:avLst/>
-          </a:prstGeom>
-          <a:noFill/>
-        </p:spPr>
-        <p:txBody>
-          <a:bodyPr wrap="square" anchor="t" lIns="0" rIns="0" tIns="0" bIns="0">
-            <a:spAutoFit/>
-          </a:bodyPr>
-          <a:lstStyle/>
-          <a:p>
-            <a:pPr algn="l">
-              <a:lnSpc>
-                <a:spcPct val="112000"/>
-              </a:lnSpc>
-              <a:spcBef>
-                <a:spcPts val="0"/>
-              </a:spcBef>
-              <a:spcAft>
-                <a:spcPts val="600"/>
-              </a:spcAft>
-            </a:pPr>
-            <a:r>
-              <a:rPr sz="1850" b="1">
-                <a:solidFill>
-                  <a:srgbClr val="1E3A8A"/>
-                </a:solidFill>
-                <a:latin typeface="Microsoft JhengHei"/>
-                <a:ea typeface="Microsoft JhengHei"/>
-                <a:cs typeface="Microsoft JhengHei"/>
-              </a:rPr>
-              <a:t>引證驗證硬牆</a:t>
-            </a:r>
-          </a:p>
-        </p:txBody>
-      </p:sp>
-      <p:sp>
-        <p:nvSpPr>
-          <p:cNvPr id="13" name="TextBox 12"/>
-          <p:cNvSpPr txBox="1"/>
-          <p:nvPr/>
-        </p:nvSpPr>
-        <p:spPr>
-          <a:xfrm>
-            <a:off x="6611112" y="2624328"/>
-            <a:ext cx="4892040" cy="1143000"/>
-          </a:xfrm>
-          <a:prstGeom prst="rect">
-            <a:avLst/>
-          </a:prstGeom>
-          <a:noFill/>
-        </p:spPr>
-        <p:txBody>
-          <a:bodyPr wrap="square" anchor="t" lIns="0" rIns="0" tIns="0" bIns="0">
-            <a:spAutoFit/>
-          </a:bodyPr>
-          <a:lstStyle/>
-          <a:p>
-            <a:pPr algn="l">
-              <a:lnSpc>
-                <a:spcPct val="125000"/>
-              </a:lnSpc>
-              <a:spcBef>
-                <a:spcPts val="0"/>
-              </a:spcBef>
-              <a:spcAft>
-                <a:spcPts val="600"/>
-              </a:spcAft>
-            </a:pPr>
-            <a:r>
-              <a:rPr sz="1350" b="0">
-                <a:solidFill>
-                  <a:srgbClr val="5A6B8C"/>
-                </a:solidFill>
-                <a:latin typeface="Microsoft JhengHei"/>
-                <a:ea typeface="Microsoft JhengHei"/>
-                <a:cs typeface="Microsoft JhengHei"/>
-              </a:rPr>
-              <a:t>模型生成後,系統逐一比對引用是否真的存在於檢索結果;捏造的引用直接剝除並在畫面標示。</a:t>
-            </a:r>
-          </a:p>
-        </p:txBody>
-      </p:sp>
-      <p:sp>
-        <p:nvSpPr>
-          <p:cNvPr id="14" name="Rectangle 13"/>
-          <p:cNvSpPr/>
-          <p:nvPr/>
-        </p:nvSpPr>
-        <p:spPr>
-          <a:xfrm>
-            <a:off x="914400" y="3977639"/>
-            <a:ext cx="54864" cy="1463040"/>
-          </a:xfrm>
-          <a:prstGeom prst="rect">
-            <a:avLst/>
-          </a:prstGeom>
-          <a:solidFill>
-            <a:srgbClr val="1E3A8A"/>
-          </a:solidFill>
-          <a:ln>
-            <a:noFill/>
-          </a:ln>
-          <a:effectLst/>
-        </p:spPr>
-        <p:style>
-          <a:lnRef idx="1">
-            <a:schemeClr val="accent1"/>
-          </a:lnRef>
-          <a:fillRef idx="3">
-            <a:schemeClr val="accent1"/>
-          </a:fillRef>
-          <a:effectRef idx="2">
-            <a:schemeClr val="accent1"/>
-          </a:effectRef>
-          <a:fontRef idx="minor">
-            <a:schemeClr val="lt1"/>
-          </a:fontRef>
-        </p:style>
-        <p:txBody>
-          <a:bodyPr rtlCol="0" anchor="ctr"/>
-          <a:lstStyle/>
-          <a:p>
-            <a:pPr algn="ctr"/>
-          </a:p>
-        </p:txBody>
-      </p:sp>
-      <p:sp>
-        <p:nvSpPr>
-          <p:cNvPr id="15" name="TextBox 14"/>
-          <p:cNvSpPr txBox="1"/>
-          <p:nvPr/>
-        </p:nvSpPr>
-        <p:spPr>
-          <a:xfrm>
-            <a:off x="1170432" y="3931920"/>
-            <a:ext cx="4892040" cy="457200"/>
-          </a:xfrm>
-          <a:prstGeom prst="rect">
-            <a:avLst/>
-          </a:prstGeom>
-          <a:noFill/>
-        </p:spPr>
-        <p:txBody>
-          <a:bodyPr wrap="square" anchor="t" lIns="0" rIns="0" tIns="0" bIns="0">
-            <a:spAutoFit/>
-          </a:bodyPr>
-          <a:lstStyle/>
-          <a:p>
-            <a:pPr algn="l">
-              <a:lnSpc>
-                <a:spcPct val="112000"/>
-              </a:lnSpc>
-              <a:spcBef>
-                <a:spcPts val="0"/>
-              </a:spcBef>
-              <a:spcAft>
-                <a:spcPts val="600"/>
-              </a:spcAft>
-            </a:pPr>
-            <a:r>
-              <a:rPr sz="1850" b="1">
-                <a:solidFill>
-                  <a:srgbClr val="1E3A8A"/>
-                </a:solidFill>
-                <a:latin typeface="Microsoft JhengHei"/>
-                <a:ea typeface="Microsoft JhengHei"/>
-                <a:cs typeface="Microsoft JhengHei"/>
-              </a:rPr>
-              <a:t>不可竄改稽核</a:t>
-            </a:r>
-          </a:p>
-        </p:txBody>
-      </p:sp>
-      <p:sp>
-        <p:nvSpPr>
-          <p:cNvPr id="16" name="TextBox 15"/>
-          <p:cNvSpPr txBox="1"/>
-          <p:nvPr/>
-        </p:nvSpPr>
-        <p:spPr>
-          <a:xfrm>
-            <a:off x="1170432" y="4407408"/>
-            <a:ext cx="4892040" cy="1143000"/>
-          </a:xfrm>
-          <a:prstGeom prst="rect">
-            <a:avLst/>
-          </a:prstGeom>
-          <a:noFill/>
-        </p:spPr>
-        <p:txBody>
-          <a:bodyPr wrap="square" anchor="t" lIns="0" rIns="0" tIns="0" bIns="0">
-            <a:spAutoFit/>
-          </a:bodyPr>
-          <a:lstStyle/>
-          <a:p>
-            <a:pPr algn="l">
-              <a:lnSpc>
-                <a:spcPct val="125000"/>
-              </a:lnSpc>
-              <a:spcBef>
-                <a:spcPts val="0"/>
-              </a:spcBef>
-              <a:spcAft>
-                <a:spcPts val="600"/>
-              </a:spcAft>
-            </a:pPr>
-            <a:r>
-              <a:rPr sz="1350" b="0">
-                <a:solidFill>
-                  <a:srgbClr val="5A6B8C"/>
-                </a:solidFill>
-                <a:latin typeface="Microsoft JhengHei"/>
-                <a:ea typeface="Microsoft JhengHei"/>
-                <a:cs typeface="Microsoft JhengHei"/>
-              </a:rPr>
-              <a:t>每一筆請求寫入一列稽核紀錄,以雜湊鏈串接;任何竄改都會讓驗證亮紅燈,稽核員一鍵可驗。</a:t>
-            </a:r>
-          </a:p>
-        </p:txBody>
-      </p:sp>
-      <p:sp>
-        <p:nvSpPr>
-          <p:cNvPr id="17" name="Rectangle 16"/>
-          <p:cNvSpPr/>
-          <p:nvPr/>
-        </p:nvSpPr>
-        <p:spPr>
-          <a:xfrm>
-            <a:off x="6355080" y="3977639"/>
-            <a:ext cx="54864" cy="1463040"/>
-          </a:xfrm>
-          <a:prstGeom prst="rect">
-            <a:avLst/>
-          </a:prstGeom>
-          <a:solidFill>
-            <a:srgbClr val="1E3A8A"/>
-          </a:solidFill>
-          <a:ln>
-            <a:noFill/>
-          </a:ln>
-          <a:effectLst/>
-        </p:spPr>
-        <p:style>
-          <a:lnRef idx="1">
-            <a:schemeClr val="accent1"/>
-          </a:lnRef>
-          <a:fillRef idx="3">
-            <a:schemeClr val="accent1"/>
-          </a:fillRef>
-          <a:effectRef idx="2">
-            <a:schemeClr val="accent1"/>
-          </a:effectRef>
-          <a:fontRef idx="minor">
-            <a:schemeClr val="lt1"/>
-          </a:fontRef>
-        </p:style>
-        <p:txBody>
-          <a:bodyPr rtlCol="0" anchor="ctr"/>
-          <a:lstStyle/>
-          <a:p>
-            <a:pPr algn="ctr"/>
-          </a:p>
-        </p:txBody>
-      </p:sp>
-      <p:sp>
-        <p:nvSpPr>
-          <p:cNvPr id="18" name="TextBox 17"/>
-          <p:cNvSpPr txBox="1"/>
-          <p:nvPr/>
-        </p:nvSpPr>
-        <p:spPr>
-          <a:xfrm>
-            <a:off x="6611112" y="3931920"/>
-            <a:ext cx="4892040" cy="457200"/>
-          </a:xfrm>
-          <a:prstGeom prst="rect">
-            <a:avLst/>
-          </a:prstGeom>
-          <a:noFill/>
-        </p:spPr>
-        <p:txBody>
-          <a:bodyPr wrap="square" anchor="t" lIns="0" rIns="0" tIns="0" bIns="0">
-            <a:spAutoFit/>
-          </a:bodyPr>
-          <a:lstStyle/>
-          <a:p>
-            <a:pPr algn="l">
-              <a:lnSpc>
-                <a:spcPct val="112000"/>
-              </a:lnSpc>
-              <a:spcBef>
-                <a:spcPts val="0"/>
-              </a:spcBef>
-              <a:spcAft>
-                <a:spcPts val="600"/>
-              </a:spcAft>
-            </a:pPr>
-            <a:r>
-              <a:rPr sz="1850" b="1">
-                <a:solidFill>
-                  <a:srgbClr val="1E3A8A"/>
-                </a:solidFill>
-                <a:latin typeface="Microsoft JhengHei"/>
-                <a:ea typeface="Microsoft JhengHei"/>
-                <a:cs typeface="Microsoft JhengHei"/>
-              </a:rPr>
-              <a:t>機密強制地端</a:t>
-            </a:r>
-          </a:p>
-        </p:txBody>
-      </p:sp>
-      <p:sp>
-        <p:nvSpPr>
-          <p:cNvPr id="19" name="TextBox 18"/>
-          <p:cNvSpPr txBox="1"/>
-          <p:nvPr/>
-        </p:nvSpPr>
-        <p:spPr>
-          <a:xfrm>
-            <a:off x="6611112" y="4407408"/>
-            <a:ext cx="4892040" cy="1143000"/>
-          </a:xfrm>
-          <a:prstGeom prst="rect">
-            <a:avLst/>
-          </a:prstGeom>
-          <a:noFill/>
-        </p:spPr>
-        <p:txBody>
-          <a:bodyPr wrap="square" anchor="t" lIns="0" rIns="0" tIns="0" bIns="0">
-            <a:spAutoFit/>
-          </a:bodyPr>
-          <a:lstStyle/>
-          <a:p>
-            <a:pPr algn="l">
-              <a:lnSpc>
-                <a:spcPct val="125000"/>
-              </a:lnSpc>
-              <a:spcBef>
-                <a:spcPts val="0"/>
-              </a:spcBef>
-              <a:spcAft>
-                <a:spcPts val="600"/>
-              </a:spcAft>
-            </a:pPr>
-            <a:r>
-              <a:rPr sz="1350" b="0">
-                <a:solidFill>
-                  <a:srgbClr val="5A6B8C"/>
-                </a:solidFill>
-                <a:latin typeface="Microsoft JhengHei"/>
-                <a:ea typeface="Microsoft JhengHei"/>
-                <a:cs typeface="Microsoft JhengHei"/>
-              </a:rPr>
-              <a:t>標記為機密的案件,系統強制改走事務所內的本地模型;就算設定錯誤,程式層也會直接拒絕外送。</a:t>
-            </a:r>
-          </a:p>
-        </p:txBody>
-      </p:sp>
-      <p:sp>
-        <p:nvSpPr>
-          <p:cNvPr id="20" name="TextBox 19"/>
+      <p:pic>
+        <p:nvPicPr>
+          <p:cNvPr id="7" name="Picture 6" descr="flow_data.png"/>
+          <p:cNvPicPr>
+            <a:picLocks noChangeAspect="1"/>
+          </p:cNvPicPr>
+          <p:nvPr/>
+        </p:nvPicPr>
+        <p:blipFill>
+          <a:blip r:embed="rId2"/>
+          <a:stretch>
+            <a:fillRect/>
+          </a:stretch>
+        </p:blipFill>
+        <p:spPr>
+          <a:xfrm>
+            <a:off x="1531615" y="1938528"/>
+            <a:ext cx="9128463" cy="4370832"/>
+          </a:xfrm>
+          <a:prstGeom prst="rect">
+            <a:avLst/>
+          </a:prstGeom>
+          <a:effectLst>
+            <a:outerShdw blurRad="90000" dist="38100" dir="5400000" rotWithShape="0">
+              <a:srgbClr val="1A2236">
+                <a:alpha val="26000"/>
+              </a:srgbClr>
+            </a:outerShdw>
+          </a:effectLst>
+        </p:spPr>
+      </p:pic>
+      <p:sp>
+        <p:nvSpPr>
+          <p:cNvPr id="8" name="TextBox 7"/>
           <p:cNvSpPr txBox="1"/>
           <p:nvPr/>
         </p:nvSpPr>
@@ -15857,7 +16222,7 @@
       </p:sp>
       <p:sp>
         <p:nvSpPr>
-          <p:cNvPr id="21" name="TextBox 20"/>
+          <p:cNvPr id="9" name="TextBox 8"/>
           <p:cNvSpPr txBox="1"/>
           <p:nvPr/>
         </p:nvSpPr>
@@ -16050,7 +16415,7 @@
                 <a:ea typeface="Microsoft JhengHei"/>
                 <a:cs typeface="Microsoft JhengHei"/>
               </a:rPr>
-              <a:t>04 </a:t>
+              <a:t>03 </a:t>
             </a:r>
             <a:r>
               <a:rPr sz="1400" b="0">
@@ -16061,7 +16426,7 @@
                 <a:ea typeface="Microsoft JhengHei"/>
                 <a:cs typeface="Microsoft JhengHei"/>
               </a:rPr>
-              <a:t>· 產品畫面</a:t>
+              <a:t>· 系統怎麼運作</a:t>
             </a:r>
           </a:p>
         </p:txBody>
@@ -16108,7 +16473,7 @@
                 <a:ea typeface="Microsoft JhengHei"/>
                 <a:cs typeface="Microsoft JhengHei"/>
               </a:rPr>
-              <a:t>畫面 ①｜登入與角色權限</a:t>
+              <a:t>AI 任務執行流程：六步閉環</a:t>
             </a:r>
           </a:p>
         </p:txBody>
@@ -16150,7 +16515,7 @@
       </p:cxnSp>
       <p:pic>
         <p:nvPicPr>
-          <p:cNvPr id="7" name="Picture 6" descr="landing-desktop-1440-chromium-desktop.png"/>
+          <p:cNvPr id="7" name="Picture 6" descr="flow_ai.png"/>
           <p:cNvPicPr>
             <a:picLocks noChangeAspect="1"/>
           </p:cNvPicPr>
@@ -16164,8 +16529,8 @@
         </p:blipFill>
         <p:spPr>
           <a:xfrm>
-            <a:off x="822960" y="2148840"/>
-            <a:ext cx="5925312" cy="3703320"/>
+            <a:off x="1531615" y="1938528"/>
+            <a:ext cx="9128463" cy="4370832"/>
           </a:xfrm>
           <a:prstGeom prst="rect">
             <a:avLst/>
@@ -16181,454 +16546,7 @@
       </p:pic>
       <p:sp>
         <p:nvSpPr>
-          <p:cNvPr id="8" name="Oval 7"/>
-          <p:cNvSpPr/>
-          <p:nvPr/>
-        </p:nvSpPr>
-        <p:spPr>
-          <a:xfrm>
-            <a:off x="7251192" y="2286000"/>
-            <a:ext cx="310896" cy="310896"/>
-          </a:xfrm>
-          <a:prstGeom prst="ellipse">
-            <a:avLst/>
-          </a:prstGeom>
-          <a:solidFill>
-            <a:srgbClr val="F5B020"/>
-          </a:solidFill>
-          <a:ln>
-            <a:noFill/>
-          </a:ln>
-          <a:effectLst/>
-        </p:spPr>
-        <p:style>
-          <a:lnRef idx="1">
-            <a:schemeClr val="accent1"/>
-          </a:lnRef>
-          <a:fillRef idx="3">
-            <a:schemeClr val="accent1"/>
-          </a:fillRef>
-          <a:effectRef idx="2">
-            <a:schemeClr val="accent1"/>
-          </a:effectRef>
-          <a:fontRef idx="minor">
-            <a:schemeClr val="lt1"/>
-          </a:fontRef>
-        </p:style>
-        <p:txBody>
-          <a:bodyPr rtlCol="0" anchor="ctr" tIns="0" bIns="0"/>
-          <a:lstStyle/>
-          <a:p>
-            <a:pPr algn="ctr"/>
-            <a:r>
-              <a:rPr sz="1400" b="1">
-                <a:solidFill>
-                  <a:srgbClr val="FFFFFF"/>
-                </a:solidFill>
-                <a:latin typeface="Microsoft JhengHei"/>
-                <a:ea typeface="Microsoft JhengHei"/>
-                <a:cs typeface="Microsoft JhengHei"/>
-              </a:rPr>
-              <a:t>1</a:t>
-            </a:r>
-          </a:p>
-        </p:txBody>
-      </p:sp>
-      <p:sp>
-        <p:nvSpPr>
-          <p:cNvPr id="9" name="TextBox 8"/>
-          <p:cNvSpPr txBox="1"/>
-          <p:nvPr/>
-        </p:nvSpPr>
-        <p:spPr>
-          <a:xfrm>
-            <a:off x="7708392" y="2249424"/>
-            <a:ext cx="3843223" cy="365760"/>
-          </a:xfrm>
-          <a:prstGeom prst="rect">
-            <a:avLst/>
-          </a:prstGeom>
-          <a:noFill/>
-        </p:spPr>
-        <p:txBody>
-          <a:bodyPr wrap="square" anchor="t" lIns="0" rIns="0" tIns="0" bIns="0">
-            <a:spAutoFit/>
-          </a:bodyPr>
-          <a:lstStyle/>
-          <a:p>
-            <a:pPr algn="l">
-              <a:lnSpc>
-                <a:spcPct val="112000"/>
-              </a:lnSpc>
-              <a:spcBef>
-                <a:spcPts val="0"/>
-              </a:spcBef>
-              <a:spcAft>
-                <a:spcPts val="600"/>
-              </a:spcAft>
-            </a:pPr>
-            <a:r>
-              <a:rPr sz="1550" b="1">
-                <a:solidFill>
-                  <a:srgbClr val="1E3A8A"/>
-                </a:solidFill>
-                <a:latin typeface="Microsoft JhengHei"/>
-                <a:ea typeface="Microsoft JhengHei"/>
-                <a:cs typeface="Microsoft JhengHei"/>
-              </a:rPr>
-              <a:t>官方入口風格</a:t>
-            </a:r>
-          </a:p>
-        </p:txBody>
-      </p:sp>
-      <p:sp>
-        <p:nvSpPr>
-          <p:cNvPr id="10" name="TextBox 9"/>
-          <p:cNvSpPr txBox="1"/>
-          <p:nvPr/>
-        </p:nvSpPr>
-        <p:spPr>
-          <a:xfrm>
-            <a:off x="7708392" y="2587752"/>
-            <a:ext cx="3843223" cy="731520"/>
-          </a:xfrm>
-          <a:prstGeom prst="rect">
-            <a:avLst/>
-          </a:prstGeom>
-          <a:noFill/>
-        </p:spPr>
-        <p:txBody>
-          <a:bodyPr wrap="square" anchor="t" lIns="0" rIns="0" tIns="0" bIns="0">
-            <a:spAutoFit/>
-          </a:bodyPr>
-          <a:lstStyle/>
-          <a:p>
-            <a:pPr algn="l">
-              <a:lnSpc>
-                <a:spcPct val="116000"/>
-              </a:lnSpc>
-              <a:spcBef>
-                <a:spcPts val="0"/>
-              </a:spcBef>
-              <a:spcAft>
-                <a:spcPts val="600"/>
-              </a:spcAft>
-            </a:pPr>
-            <a:r>
-              <a:rPr sz="1250" b="0">
-                <a:solidFill>
-                  <a:srgbClr val="5A6B8C"/>
-                </a:solidFill>
-                <a:latin typeface="Microsoft JhengHei"/>
-                <a:ea typeface="Microsoft JhengHei"/>
-                <a:cs typeface="Microsoft JhengHei"/>
-              </a:rPr>
-              <a:t>乾淨版面、弱化技術術語;律師第一眼就知道在哪裡開始。</a:t>
-            </a:r>
-          </a:p>
-        </p:txBody>
-      </p:sp>
-      <p:sp>
-        <p:nvSpPr>
-          <p:cNvPr id="11" name="Oval 10"/>
-          <p:cNvSpPr/>
-          <p:nvPr/>
-        </p:nvSpPr>
-        <p:spPr>
-          <a:xfrm>
-            <a:off x="7251192" y="3218688"/>
-            <a:ext cx="310896" cy="310896"/>
-          </a:xfrm>
-          <a:prstGeom prst="ellipse">
-            <a:avLst/>
-          </a:prstGeom>
-          <a:solidFill>
-            <a:srgbClr val="F5B020"/>
-          </a:solidFill>
-          <a:ln>
-            <a:noFill/>
-          </a:ln>
-          <a:effectLst/>
-        </p:spPr>
-        <p:style>
-          <a:lnRef idx="1">
-            <a:schemeClr val="accent1"/>
-          </a:lnRef>
-          <a:fillRef idx="3">
-            <a:schemeClr val="accent1"/>
-          </a:fillRef>
-          <a:effectRef idx="2">
-            <a:schemeClr val="accent1"/>
-          </a:effectRef>
-          <a:fontRef idx="minor">
-            <a:schemeClr val="lt1"/>
-          </a:fontRef>
-        </p:style>
-        <p:txBody>
-          <a:bodyPr rtlCol="0" anchor="ctr" tIns="0" bIns="0"/>
-          <a:lstStyle/>
-          <a:p>
-            <a:pPr algn="ctr"/>
-            <a:r>
-              <a:rPr sz="1400" b="1">
-                <a:solidFill>
-                  <a:srgbClr val="FFFFFF"/>
-                </a:solidFill>
-                <a:latin typeface="Microsoft JhengHei"/>
-                <a:ea typeface="Microsoft JhengHei"/>
-                <a:cs typeface="Microsoft JhengHei"/>
-              </a:rPr>
-              <a:t>2</a:t>
-            </a:r>
-          </a:p>
-        </p:txBody>
-      </p:sp>
-      <p:sp>
-        <p:nvSpPr>
-          <p:cNvPr id="12" name="TextBox 11"/>
-          <p:cNvSpPr txBox="1"/>
-          <p:nvPr/>
-        </p:nvSpPr>
-        <p:spPr>
-          <a:xfrm>
-            <a:off x="7708392" y="3182112"/>
-            <a:ext cx="3843223" cy="365760"/>
-          </a:xfrm>
-          <a:prstGeom prst="rect">
-            <a:avLst/>
-          </a:prstGeom>
-          <a:noFill/>
-        </p:spPr>
-        <p:txBody>
-          <a:bodyPr wrap="square" anchor="t" lIns="0" rIns="0" tIns="0" bIns="0">
-            <a:spAutoFit/>
-          </a:bodyPr>
-          <a:lstStyle/>
-          <a:p>
-            <a:pPr algn="l">
-              <a:lnSpc>
-                <a:spcPct val="112000"/>
-              </a:lnSpc>
-              <a:spcBef>
-                <a:spcPts val="0"/>
-              </a:spcBef>
-              <a:spcAft>
-                <a:spcPts val="600"/>
-              </a:spcAft>
-            </a:pPr>
-            <a:r>
-              <a:rPr sz="1550" b="1">
-                <a:solidFill>
-                  <a:srgbClr val="1E3A8A"/>
-                </a:solidFill>
-                <a:latin typeface="Microsoft JhengHei"/>
-                <a:ea typeface="Microsoft JhengHei"/>
-                <a:cs typeface="Microsoft JhengHei"/>
-              </a:rPr>
-              <a:t>四種角色</a:t>
-            </a:r>
-          </a:p>
-        </p:txBody>
-      </p:sp>
-      <p:sp>
-        <p:nvSpPr>
-          <p:cNvPr id="13" name="TextBox 12"/>
-          <p:cNvSpPr txBox="1"/>
-          <p:nvPr/>
-        </p:nvSpPr>
-        <p:spPr>
-          <a:xfrm>
-            <a:off x="7708392" y="3520440"/>
-            <a:ext cx="3843223" cy="731520"/>
-          </a:xfrm>
-          <a:prstGeom prst="rect">
-            <a:avLst/>
-          </a:prstGeom>
-          <a:noFill/>
-        </p:spPr>
-        <p:txBody>
-          <a:bodyPr wrap="square" anchor="t" lIns="0" rIns="0" tIns="0" bIns="0">
-            <a:spAutoFit/>
-          </a:bodyPr>
-          <a:lstStyle/>
-          <a:p>
-            <a:pPr algn="l">
-              <a:lnSpc>
-                <a:spcPct val="116000"/>
-              </a:lnSpc>
-              <a:spcBef>
-                <a:spcPts val="0"/>
-              </a:spcBef>
-              <a:spcAft>
-                <a:spcPts val="600"/>
-              </a:spcAft>
-            </a:pPr>
-            <a:r>
-              <a:rPr sz="1250" b="0">
-                <a:solidFill>
-                  <a:srgbClr val="5A6B8C"/>
-                </a:solidFill>
-                <a:latin typeface="Microsoft JhengHei"/>
-                <a:ea typeface="Microsoft JhengHei"/>
-                <a:cs typeface="Microsoft JhengHei"/>
-              </a:rPr>
-              <a:t>律師 / 助理 / IT / 稽核 — 各自看到的功能與案件都不同。</a:t>
-            </a:r>
-          </a:p>
-        </p:txBody>
-      </p:sp>
-      <p:sp>
-        <p:nvSpPr>
-          <p:cNvPr id="14" name="Oval 13"/>
-          <p:cNvSpPr/>
-          <p:nvPr/>
-        </p:nvSpPr>
-        <p:spPr>
-          <a:xfrm>
-            <a:off x="7251192" y="4151376"/>
-            <a:ext cx="310896" cy="310896"/>
-          </a:xfrm>
-          <a:prstGeom prst="ellipse">
-            <a:avLst/>
-          </a:prstGeom>
-          <a:solidFill>
-            <a:srgbClr val="F5B020"/>
-          </a:solidFill>
-          <a:ln>
-            <a:noFill/>
-          </a:ln>
-          <a:effectLst/>
-        </p:spPr>
-        <p:style>
-          <a:lnRef idx="1">
-            <a:schemeClr val="accent1"/>
-          </a:lnRef>
-          <a:fillRef idx="3">
-            <a:schemeClr val="accent1"/>
-          </a:fillRef>
-          <a:effectRef idx="2">
-            <a:schemeClr val="accent1"/>
-          </a:effectRef>
-          <a:fontRef idx="minor">
-            <a:schemeClr val="lt1"/>
-          </a:fontRef>
-        </p:style>
-        <p:txBody>
-          <a:bodyPr rtlCol="0" anchor="ctr" tIns="0" bIns="0"/>
-          <a:lstStyle/>
-          <a:p>
-            <a:pPr algn="ctr"/>
-            <a:r>
-              <a:rPr sz="1400" b="1">
-                <a:solidFill>
-                  <a:srgbClr val="FFFFFF"/>
-                </a:solidFill>
-                <a:latin typeface="Microsoft JhengHei"/>
-                <a:ea typeface="Microsoft JhengHei"/>
-                <a:cs typeface="Microsoft JhengHei"/>
-              </a:rPr>
-              <a:t>3</a:t>
-            </a:r>
-          </a:p>
-        </p:txBody>
-      </p:sp>
-      <p:sp>
-        <p:nvSpPr>
-          <p:cNvPr id="15" name="TextBox 14"/>
-          <p:cNvSpPr txBox="1"/>
-          <p:nvPr/>
-        </p:nvSpPr>
-        <p:spPr>
-          <a:xfrm>
-            <a:off x="7708392" y="4114800"/>
-            <a:ext cx="3843223" cy="365760"/>
-          </a:xfrm>
-          <a:prstGeom prst="rect">
-            <a:avLst/>
-          </a:prstGeom>
-          <a:noFill/>
-        </p:spPr>
-        <p:txBody>
-          <a:bodyPr wrap="square" anchor="t" lIns="0" rIns="0" tIns="0" bIns="0">
-            <a:spAutoFit/>
-          </a:bodyPr>
-          <a:lstStyle/>
-          <a:p>
-            <a:pPr algn="l">
-              <a:lnSpc>
-                <a:spcPct val="112000"/>
-              </a:lnSpc>
-              <a:spcBef>
-                <a:spcPts val="0"/>
-              </a:spcBef>
-              <a:spcAft>
-                <a:spcPts val="600"/>
-              </a:spcAft>
-            </a:pPr>
-            <a:r>
-              <a:rPr sz="1550" b="1">
-                <a:solidFill>
-                  <a:srgbClr val="1E3A8A"/>
-                </a:solidFill>
-                <a:latin typeface="Microsoft JhengHei"/>
-                <a:ea typeface="Microsoft JhengHei"/>
-                <a:cs typeface="Microsoft JhengHei"/>
-              </a:rPr>
-              <a:t>案件級權限</a:t>
-            </a:r>
-          </a:p>
-        </p:txBody>
-      </p:sp>
-      <p:sp>
-        <p:nvSpPr>
-          <p:cNvPr id="16" name="TextBox 15"/>
-          <p:cNvSpPr txBox="1"/>
-          <p:nvPr/>
-        </p:nvSpPr>
-        <p:spPr>
-          <a:xfrm>
-            <a:off x="7708392" y="4453128"/>
-            <a:ext cx="3843223" cy="731520"/>
-          </a:xfrm>
-          <a:prstGeom prst="rect">
-            <a:avLst/>
-          </a:prstGeom>
-          <a:noFill/>
-        </p:spPr>
-        <p:txBody>
-          <a:bodyPr wrap="square" anchor="t" lIns="0" rIns="0" tIns="0" bIns="0">
-            <a:spAutoFit/>
-          </a:bodyPr>
-          <a:lstStyle/>
-          <a:p>
-            <a:pPr algn="l">
-              <a:lnSpc>
-                <a:spcPct val="116000"/>
-              </a:lnSpc>
-              <a:spcBef>
-                <a:spcPts val="0"/>
-              </a:spcBef>
-              <a:spcAft>
-                <a:spcPts val="600"/>
-              </a:spcAft>
-            </a:pPr>
-            <a:r>
-              <a:rPr sz="1250" b="0">
-                <a:solidFill>
-                  <a:srgbClr val="5A6B8C"/>
-                </a:solidFill>
-                <a:latin typeface="Microsoft JhengHei"/>
-                <a:ea typeface="Microsoft JhengHei"/>
-                <a:cs typeface="Microsoft JhengHei"/>
-              </a:rPr>
-              <a:t>登入身分決定可碰哪些案件,之後每一筆請求都重新檢查。</a:t>
-            </a:r>
-          </a:p>
-        </p:txBody>
-      </p:sp>
-      <p:sp>
-        <p:nvSpPr>
-          <p:cNvPr id="17" name="TextBox 16"/>
+          <p:cNvPr id="8" name="TextBox 7"/>
           <p:cNvSpPr txBox="1"/>
           <p:nvPr/>
         </p:nvSpPr>
@@ -16675,7 +16593,7 @@
       </p:sp>
       <p:sp>
         <p:nvSpPr>
-          <p:cNvPr id="18" name="TextBox 17"/>
+          <p:cNvPr id="9" name="TextBox 8"/>
           <p:cNvSpPr txBox="1"/>
           <p:nvPr/>
         </p:nvSpPr>
@@ -16868,7 +16786,7 @@
                 <a:ea typeface="Microsoft JhengHei"/>
                 <a:cs typeface="Microsoft JhengHei"/>
               </a:rPr>
-              <a:t>04 </a:t>
+              <a:t>03 </a:t>
             </a:r>
             <a:r>
               <a:rPr sz="1400" b="0">
@@ -16879,7 +16797,7 @@
                 <a:ea typeface="Microsoft JhengHei"/>
                 <a:cs typeface="Microsoft JhengHei"/>
               </a:rPr>
-              <a:t>· 產品畫面</a:t>
+              <a:t>· 系統怎麼運作</a:t>
             </a:r>
           </a:p>
         </p:txBody>
@@ -16926,7 +16844,7 @@
                 <a:ea typeface="Microsoft JhengHei"/>
                 <a:cs typeface="Microsoft JhengHei"/>
               </a:rPr>
-              <a:t>畫面 ②｜分析工作台(三欄)</a:t>
+              <a:t>四個「預設開啟、不可關閉」的信任設計</a:t>
             </a:r>
           </a:p>
         </p:txBody>
@@ -16966,53 +16884,69 @@
           </a:fontRef>
         </p:style>
       </p:cxnSp>
-      <p:pic>
-        <p:nvPicPr>
-          <p:cNvPr id="7" name="Picture 6" descr="analyze-empty-desktop-chromium-desktop.png"/>
-          <p:cNvPicPr>
-            <a:picLocks noChangeAspect="1"/>
-          </p:cNvPicPr>
-          <p:nvPr/>
-        </p:nvPicPr>
-        <p:blipFill>
-          <a:blip r:embed="rId2"/>
-          <a:stretch>
-            <a:fillRect/>
-          </a:stretch>
-        </p:blipFill>
-        <p:spPr>
-          <a:xfrm>
-            <a:off x="822960" y="2148840"/>
-            <a:ext cx="5925312" cy="3703320"/>
-          </a:xfrm>
-          <a:prstGeom prst="rect">
-            <a:avLst/>
-          </a:prstGeom>
-          <a:effectLst>
-            <a:outerShdw blurRad="90000" dist="38100" dir="5400000" rotWithShape="0">
-              <a:srgbClr val="1A2236">
-                <a:alpha val="26000"/>
-              </a:srgbClr>
-            </a:outerShdw>
-          </a:effectLst>
-        </p:spPr>
-      </p:pic>
-      <p:sp>
-        <p:nvSpPr>
-          <p:cNvPr id="8" name="Oval 7"/>
+      <p:sp>
+        <p:nvSpPr>
+          <p:cNvPr id="7" name="TextBox 6"/>
+          <p:cNvSpPr txBox="1"/>
+          <p:nvPr/>
+        </p:nvSpPr>
+        <p:spPr>
+          <a:xfrm>
+            <a:off x="8259775" y="182880"/>
+            <a:ext cx="3840480" cy="2377440"/>
+          </a:xfrm>
+          <a:prstGeom prst="rect">
+            <a:avLst/>
+          </a:prstGeom>
+          <a:noFill/>
+        </p:spPr>
+        <p:txBody>
+          <a:bodyPr wrap="square" anchor="t" lIns="0" rIns="0" tIns="0" bIns="0">
+            <a:spAutoFit/>
+          </a:bodyPr>
+          <a:lstStyle/>
+          <a:p>
+            <a:pPr algn="r">
+              <a:lnSpc>
+                <a:spcPct val="112000"/>
+              </a:lnSpc>
+              <a:spcBef>
+                <a:spcPts val="0"/>
+              </a:spcBef>
+              <a:spcAft>
+                <a:spcPts val="600"/>
+              </a:spcAft>
+            </a:pPr>
+            <a:r>
+              <a:rPr sz="15000" b="1">
+                <a:solidFill>
+                  <a:srgbClr val="EEF1F8"/>
+                </a:solidFill>
+                <a:latin typeface="Microsoft JhengHei"/>
+                <a:ea typeface="Microsoft JhengHei"/>
+                <a:cs typeface="Microsoft JhengHei"/>
+              </a:rPr>
+              <a:t>03</a:t>
+            </a:r>
+          </a:p>
+        </p:txBody>
+      </p:sp>
+      <p:sp>
+        <p:nvSpPr>
+          <p:cNvPr id="8" name="Rectangle 7"/>
           <p:cNvSpPr/>
           <p:nvPr/>
         </p:nvSpPr>
         <p:spPr>
           <a:xfrm>
-            <a:off x="7251192" y="2286000"/>
-            <a:ext cx="310896" cy="310896"/>
-          </a:xfrm>
-          <a:prstGeom prst="ellipse">
+            <a:off x="914400" y="2194560"/>
+            <a:ext cx="54864" cy="1463040"/>
+          </a:xfrm>
+          <a:prstGeom prst="rect">
             <a:avLst/>
           </a:prstGeom>
           <a:solidFill>
-            <a:srgbClr val="F5B020"/>
+            <a:srgbClr val="1E3A8A"/>
           </a:solidFill>
           <a:ln>
             <a:noFill/>
@@ -17034,21 +16968,10 @@
           </a:fontRef>
         </p:style>
         <p:txBody>
-          <a:bodyPr rtlCol="0" anchor="ctr" tIns="0" bIns="0"/>
+          <a:bodyPr rtlCol="0" anchor="ctr"/>
           <a:lstStyle/>
           <a:p>
             <a:pPr algn="ctr"/>
-            <a:r>
-              <a:rPr sz="1400" b="1">
-                <a:solidFill>
-                  <a:srgbClr val="FFFFFF"/>
-                </a:solidFill>
-                <a:latin typeface="Microsoft JhengHei"/>
-                <a:ea typeface="Microsoft JhengHei"/>
-                <a:cs typeface="Microsoft JhengHei"/>
-              </a:rPr>
-              <a:t>1</a:t>
-            </a:r>
           </a:p>
         </p:txBody>
       </p:sp>
@@ -17060,8 +16983,8 @@
         </p:nvSpPr>
         <p:spPr>
           <a:xfrm>
-            <a:off x="7708392" y="2249424"/>
-            <a:ext cx="3843223" cy="365760"/>
+            <a:off x="1170432" y="2148840"/>
+            <a:ext cx="4892040" cy="457200"/>
           </a:xfrm>
           <a:prstGeom prst="rect">
             <a:avLst/>
@@ -17086,7 +17009,7 @@
               </a:spcAft>
             </a:pPr>
             <a:r>
-              <a:rPr sz="1550" b="1">
+              <a:rPr sz="1850" b="1">
                 <a:solidFill>
                   <a:srgbClr val="1E3A8A"/>
                 </a:solidFill>
@@ -17094,7 +17017,7 @@
                 <a:ea typeface="Microsoft JhengHei"/>
                 <a:cs typeface="Microsoft JhengHei"/>
               </a:rPr>
-              <a:t>左欄輸入</a:t>
+              <a:t>可逆資料遮罩</a:t>
             </a:r>
           </a:p>
         </p:txBody>
@@ -17107,8 +17030,8 @@
         </p:nvSpPr>
         <p:spPr>
           <a:xfrm>
-            <a:off x="7708392" y="2587752"/>
-            <a:ext cx="3843223" cy="731520"/>
+            <a:off x="1170432" y="2624328"/>
+            <a:ext cx="4892040" cy="1143000"/>
           </a:xfrm>
           <a:prstGeom prst="rect">
             <a:avLst/>
@@ -17123,7 +17046,7 @@
           <a:p>
             <a:pPr algn="l">
               <a:lnSpc>
-                <a:spcPct val="116000"/>
+                <a:spcPct val="125000"/>
               </a:lnSpc>
               <a:spcBef>
                 <a:spcPts val="0"/>
@@ -17133,7 +17056,7 @@
               </a:spcAft>
             </a:pPr>
             <a:r>
-              <a:rPr sz="1250" b="0">
+              <a:rPr sz="1350" b="0">
                 <a:solidFill>
                   <a:srgbClr val="5A6B8C"/>
                 </a:solidFill>
@@ -17141,27 +17064,27 @@
                 <a:ea typeface="Microsoft JhengHei"/>
                 <a:cs typeface="Microsoft JhengHei"/>
               </a:rPr>
-              <a:t>案號 + 拖放 PDF / DOCX 或直接貼上 OA 全文。</a:t>
-            </a:r>
-          </a:p>
-        </p:txBody>
-      </p:sp>
-      <p:sp>
-        <p:nvSpPr>
-          <p:cNvPr id="11" name="Oval 10"/>
+              <a:t>送往模型前,當事人、案號、聯絡方式先替換成代碼;對照表只存在事務所機器,模型拿到的永遠是代碼。</a:t>
+            </a:r>
+          </a:p>
+        </p:txBody>
+      </p:sp>
+      <p:sp>
+        <p:nvSpPr>
+          <p:cNvPr id="11" name="Rectangle 10"/>
           <p:cNvSpPr/>
           <p:nvPr/>
         </p:nvSpPr>
         <p:spPr>
           <a:xfrm>
-            <a:off x="7251192" y="3218688"/>
-            <a:ext cx="310896" cy="310896"/>
-          </a:xfrm>
-          <a:prstGeom prst="ellipse">
+            <a:off x="6355080" y="2194560"/>
+            <a:ext cx="54864" cy="1463040"/>
+          </a:xfrm>
+          <a:prstGeom prst="rect">
             <a:avLst/>
           </a:prstGeom>
           <a:solidFill>
-            <a:srgbClr val="F5B020"/>
+            <a:srgbClr val="1E3A8A"/>
           </a:solidFill>
           <a:ln>
             <a:noFill/>
@@ -17183,21 +17106,10 @@
           </a:fontRef>
         </p:style>
         <p:txBody>
-          <a:bodyPr rtlCol="0" anchor="ctr" tIns="0" bIns="0"/>
+          <a:bodyPr rtlCol="0" anchor="ctr"/>
           <a:lstStyle/>
           <a:p>
             <a:pPr algn="ctr"/>
-            <a:r>
-              <a:rPr sz="1400" b="1">
-                <a:solidFill>
-                  <a:srgbClr val="FFFFFF"/>
-                </a:solidFill>
-                <a:latin typeface="Microsoft JhengHei"/>
-                <a:ea typeface="Microsoft JhengHei"/>
-                <a:cs typeface="Microsoft JhengHei"/>
-              </a:rPr>
-              <a:t>2</a:t>
-            </a:r>
           </a:p>
         </p:txBody>
       </p:sp>
@@ -17209,8 +17121,8 @@
         </p:nvSpPr>
         <p:spPr>
           <a:xfrm>
-            <a:off x="7708392" y="3182112"/>
-            <a:ext cx="3843223" cy="365760"/>
+            <a:off x="6611112" y="2148840"/>
+            <a:ext cx="4892040" cy="457200"/>
           </a:xfrm>
           <a:prstGeom prst="rect">
             <a:avLst/>
@@ -17235,7 +17147,7 @@
               </a:spcAft>
             </a:pPr>
             <a:r>
-              <a:rPr sz="1550" b="1">
+              <a:rPr sz="1850" b="1">
                 <a:solidFill>
                   <a:srgbClr val="1E3A8A"/>
                 </a:solidFill>
@@ -17243,7 +17155,7 @@
                 <a:ea typeface="Microsoft JhengHei"/>
                 <a:cs typeface="Microsoft JhengHei"/>
               </a:rPr>
-              <a:t>中右欄結果</a:t>
+              <a:t>引證驗證硬牆</a:t>
             </a:r>
           </a:p>
         </p:txBody>
@@ -17256,8 +17168,8 @@
         </p:nvSpPr>
         <p:spPr>
           <a:xfrm>
-            <a:off x="7708392" y="3520440"/>
-            <a:ext cx="3843223" cy="731520"/>
+            <a:off x="6611112" y="2624328"/>
+            <a:ext cx="4892040" cy="1143000"/>
           </a:xfrm>
           <a:prstGeom prst="rect">
             <a:avLst/>
@@ -17272,7 +17184,7 @@
           <a:p>
             <a:pPr algn="l">
               <a:lnSpc>
-                <a:spcPct val="116000"/>
+                <a:spcPct val="125000"/>
               </a:lnSpc>
               <a:spcBef>
                 <a:spcPts val="0"/>
@@ -17282,7 +17194,7 @@
               </a:spcAft>
             </a:pPr>
             <a:r>
-              <a:rPr sz="1250" b="0">
+              <a:rPr sz="1350" b="0">
                 <a:solidFill>
                   <a:srgbClr val="5A6B8C"/>
                 </a:solidFill>
@@ -17290,27 +17202,27 @@
                 <a:ea typeface="Microsoft JhengHei"/>
                 <a:cs typeface="Microsoft JhengHei"/>
               </a:rPr>
-              <a:t>分析後中欄出申復書草稿,右欄列審查官引證與檢索命中的前案。</a:t>
-            </a:r>
-          </a:p>
-        </p:txBody>
-      </p:sp>
-      <p:sp>
-        <p:nvSpPr>
-          <p:cNvPr id="14" name="Oval 13"/>
+              <a:t>模型生成後,系統逐一比對引用是否真的存在於檢索結果;捏造的引用直接剝除並在畫面標示。</a:t>
+            </a:r>
+          </a:p>
+        </p:txBody>
+      </p:sp>
+      <p:sp>
+        <p:nvSpPr>
+          <p:cNvPr id="14" name="Rectangle 13"/>
           <p:cNvSpPr/>
           <p:nvPr/>
         </p:nvSpPr>
         <p:spPr>
           <a:xfrm>
-            <a:off x="7251192" y="4151376"/>
-            <a:ext cx="310896" cy="310896"/>
-          </a:xfrm>
-          <a:prstGeom prst="ellipse">
+            <a:off x="914400" y="3977639"/>
+            <a:ext cx="54864" cy="1463040"/>
+          </a:xfrm>
+          <a:prstGeom prst="rect">
             <a:avLst/>
           </a:prstGeom>
           <a:solidFill>
-            <a:srgbClr val="F5B020"/>
+            <a:srgbClr val="1E3A8A"/>
           </a:solidFill>
           <a:ln>
             <a:noFill/>
@@ -17332,21 +17244,10 @@
           </a:fontRef>
         </p:style>
         <p:txBody>
-          <a:bodyPr rtlCol="0" anchor="ctr" tIns="0" bIns="0"/>
+          <a:bodyPr rtlCol="0" anchor="ctr"/>
           <a:lstStyle/>
           <a:p>
             <a:pPr algn="ctr"/>
-            <a:r>
-              <a:rPr sz="1400" b="1">
-                <a:solidFill>
-                  <a:srgbClr val="FFFFFF"/>
-                </a:solidFill>
-                <a:latin typeface="Microsoft JhengHei"/>
-                <a:ea typeface="Microsoft JhengHei"/>
-                <a:cs typeface="Microsoft JhengHei"/>
-              </a:rPr>
-              <a:t>3</a:t>
-            </a:r>
           </a:p>
         </p:txBody>
       </p:sp>
@@ -17358,8 +17259,8 @@
         </p:nvSpPr>
         <p:spPr>
           <a:xfrm>
-            <a:off x="7708392" y="4114800"/>
-            <a:ext cx="3843223" cy="365760"/>
+            <a:off x="1170432" y="3931920"/>
+            <a:ext cx="4892040" cy="457200"/>
           </a:xfrm>
           <a:prstGeom prst="rect">
             <a:avLst/>
@@ -17384,7 +17285,7 @@
               </a:spcAft>
             </a:pPr>
             <a:r>
-              <a:rPr sz="1550" b="1">
+              <a:rPr sz="1850" b="1">
                 <a:solidFill>
                   <a:srgbClr val="1E3A8A"/>
                 </a:solidFill>
@@ -17392,7 +17293,7 @@
                 <a:ea typeface="Microsoft JhengHei"/>
                 <a:cs typeface="Microsoft JhengHei"/>
               </a:rPr>
-              <a:t>安全狀態一眼可見</a:t>
+              <a:t>不可竄改稽核</a:t>
             </a:r>
           </a:p>
         </p:txBody>
@@ -17405,8 +17306,8 @@
         </p:nvSpPr>
         <p:spPr>
           <a:xfrm>
-            <a:off x="7708392" y="4453128"/>
-            <a:ext cx="3843223" cy="731520"/>
+            <a:off x="1170432" y="4407408"/>
+            <a:ext cx="4892040" cy="1143000"/>
           </a:xfrm>
           <a:prstGeom prst="rect">
             <a:avLst/>
@@ -17421,7 +17322,7 @@
           <a:p>
             <a:pPr algn="l">
               <a:lnSpc>
-                <a:spcPct val="116000"/>
+                <a:spcPct val="125000"/>
               </a:lnSpc>
               <a:spcBef>
                 <a:spcPts val="0"/>
@@ -17431,7 +17332,7 @@
               </a:spcAft>
             </a:pPr>
             <a:r>
-              <a:rPr sz="1250" b="0">
+              <a:rPr sz="1350" b="0">
                 <a:solidFill>
                   <a:srgbClr val="5A6B8C"/>
                 </a:solidFill>
@@ -17439,14 +17340,152 @@
                 <a:ea typeface="Microsoft JhengHei"/>
                 <a:cs typeface="Microsoft JhengHei"/>
               </a:rPr>
-              <a:t>頂部顯示「資料遮罩:開啟 / 資料保存於本地」;頁尾四燈顯示各服務健康狀態。</a:t>
-            </a:r>
-          </a:p>
-        </p:txBody>
-      </p:sp>
-      <p:sp>
-        <p:nvSpPr>
-          <p:cNvPr id="17" name="TextBox 16"/>
+              <a:t>每一筆請求寫入一列稽核紀錄,以雜湊鏈串接;任何竄改都會讓驗證亮紅燈,稽核員一鍵可驗。</a:t>
+            </a:r>
+          </a:p>
+        </p:txBody>
+      </p:sp>
+      <p:sp>
+        <p:nvSpPr>
+          <p:cNvPr id="17" name="Rectangle 16"/>
+          <p:cNvSpPr/>
+          <p:nvPr/>
+        </p:nvSpPr>
+        <p:spPr>
+          <a:xfrm>
+            <a:off x="6355080" y="3977639"/>
+            <a:ext cx="54864" cy="1463040"/>
+          </a:xfrm>
+          <a:prstGeom prst="rect">
+            <a:avLst/>
+          </a:prstGeom>
+          <a:solidFill>
+            <a:srgbClr val="1E3A8A"/>
+          </a:solidFill>
+          <a:ln>
+            <a:noFill/>
+          </a:ln>
+          <a:effectLst/>
+        </p:spPr>
+        <p:style>
+          <a:lnRef idx="1">
+            <a:schemeClr val="accent1"/>
+          </a:lnRef>
+          <a:fillRef idx="3">
+            <a:schemeClr val="accent1"/>
+          </a:fillRef>
+          <a:effectRef idx="2">
+            <a:schemeClr val="accent1"/>
+          </a:effectRef>
+          <a:fontRef idx="minor">
+            <a:schemeClr val="lt1"/>
+          </a:fontRef>
+        </p:style>
+        <p:txBody>
+          <a:bodyPr rtlCol="0" anchor="ctr"/>
+          <a:lstStyle/>
+          <a:p>
+            <a:pPr algn="ctr"/>
+          </a:p>
+        </p:txBody>
+      </p:sp>
+      <p:sp>
+        <p:nvSpPr>
+          <p:cNvPr id="18" name="TextBox 17"/>
+          <p:cNvSpPr txBox="1"/>
+          <p:nvPr/>
+        </p:nvSpPr>
+        <p:spPr>
+          <a:xfrm>
+            <a:off x="6611112" y="3931920"/>
+            <a:ext cx="4892040" cy="457200"/>
+          </a:xfrm>
+          <a:prstGeom prst="rect">
+            <a:avLst/>
+          </a:prstGeom>
+          <a:noFill/>
+        </p:spPr>
+        <p:txBody>
+          <a:bodyPr wrap="square" anchor="t" lIns="0" rIns="0" tIns="0" bIns="0">
+            <a:spAutoFit/>
+          </a:bodyPr>
+          <a:lstStyle/>
+          <a:p>
+            <a:pPr algn="l">
+              <a:lnSpc>
+                <a:spcPct val="112000"/>
+              </a:lnSpc>
+              <a:spcBef>
+                <a:spcPts val="0"/>
+              </a:spcBef>
+              <a:spcAft>
+                <a:spcPts val="600"/>
+              </a:spcAft>
+            </a:pPr>
+            <a:r>
+              <a:rPr sz="1850" b="1">
+                <a:solidFill>
+                  <a:srgbClr val="1E3A8A"/>
+                </a:solidFill>
+                <a:latin typeface="Microsoft JhengHei"/>
+                <a:ea typeface="Microsoft JhengHei"/>
+                <a:cs typeface="Microsoft JhengHei"/>
+              </a:rPr>
+              <a:t>機密強制地端</a:t>
+            </a:r>
+          </a:p>
+        </p:txBody>
+      </p:sp>
+      <p:sp>
+        <p:nvSpPr>
+          <p:cNvPr id="19" name="TextBox 18"/>
+          <p:cNvSpPr txBox="1"/>
+          <p:nvPr/>
+        </p:nvSpPr>
+        <p:spPr>
+          <a:xfrm>
+            <a:off x="6611112" y="4407408"/>
+            <a:ext cx="4892040" cy="1143000"/>
+          </a:xfrm>
+          <a:prstGeom prst="rect">
+            <a:avLst/>
+          </a:prstGeom>
+          <a:noFill/>
+        </p:spPr>
+        <p:txBody>
+          <a:bodyPr wrap="square" anchor="t" lIns="0" rIns="0" tIns="0" bIns="0">
+            <a:spAutoFit/>
+          </a:bodyPr>
+          <a:lstStyle/>
+          <a:p>
+            <a:pPr algn="l">
+              <a:lnSpc>
+                <a:spcPct val="125000"/>
+              </a:lnSpc>
+              <a:spcBef>
+                <a:spcPts val="0"/>
+              </a:spcBef>
+              <a:spcAft>
+                <a:spcPts val="600"/>
+              </a:spcAft>
+            </a:pPr>
+            <a:r>
+              <a:rPr sz="1350" b="0">
+                <a:solidFill>
+                  <a:srgbClr val="5A6B8C"/>
+                </a:solidFill>
+                <a:latin typeface="Microsoft JhengHei"/>
+                <a:ea typeface="Microsoft JhengHei"/>
+                <a:cs typeface="Microsoft JhengHei"/>
+              </a:rPr>
+              <a:t>標記為機密的案件,系統強制改走事務所內的本地模型;就算設定錯誤,程式層也會直接拒絕外送。</a:t>
+            </a:r>
+          </a:p>
+        </p:txBody>
+      </p:sp>
+      <p:sp>
+        <p:nvSpPr>
+          <p:cNvPr id="20" name="TextBox 19"/>
           <p:cNvSpPr txBox="1"/>
           <p:nvPr/>
         </p:nvSpPr>
@@ -17493,7 +17532,7 @@
       </p:sp>
       <p:sp>
         <p:nvSpPr>
-          <p:cNvPr id="18" name="TextBox 17"/>
+          <p:cNvPr id="21" name="TextBox 20"/>
           <p:cNvSpPr txBox="1"/>
           <p:nvPr/>
         </p:nvSpPr>
